--- a/regression_deck/Deck2_Simulated_Regression.pptx
+++ b/regression_deck/Deck2_Simulated_Regression.pptx
@@ -2836,7 +2836,7 @@
                 <a:ea typeface="Calibri" pitchFamily="34" charset="-122"/>
                 <a:cs typeface="Calibri" pitchFamily="34" charset="-120"/>
               </a:rPr>
-              <a:t>13 tumor heights — the perturbation peaks near the antenna plane and fades with distance</a:t>
+              <a:t>13 tumor heights — the perturbation peaks mid-phantom and fades with distance</a:t>
             </a:r>
             <a:endParaRPr lang="en-US" sz="1400" dirty="0"/>
           </a:p>
@@ -2968,7 +2968,7 @@
               <a:buChar char="•"/>
             </a:pPr>
             <a:r>
-              <a:rPr lang="en-US" sz="1250" dirty="0">
+              <a:rPr lang="en-US" sz="1200" dirty="0">
                 <a:solidFill>
                   <a:srgbClr val="1E293B"/>
                 </a:solidFill>
@@ -2978,7 +2978,7 @@
               </a:rPr>
               <a:t>ΔS = tumor − empty, averaged over frequency and all 16 S-parameters.</a:t>
             </a:r>
-            <a:endParaRPr lang="en-US" sz="1250" dirty="0"/>
+            <a:endParaRPr lang="en-US" sz="1200" dirty="0"/>
           </a:p>
           <a:p>
             <a:pPr marL="342900" indent="-342900">
@@ -2989,7 +2989,7 @@
               <a:buChar char="•"/>
             </a:pPr>
             <a:r>
-              <a:rPr lang="en-US" sz="1250" dirty="0">
+              <a:rPr lang="en-US" sz="1200" dirty="0">
                 <a:solidFill>
                   <a:srgbClr val="1E293B"/>
                 </a:solidFill>
@@ -2997,9 +2997,9 @@
                 <a:ea typeface="Calibri" pitchFamily="34" charset="-122"/>
                 <a:cs typeface="Calibri" pitchFamily="34" charset="-120"/>
               </a:rPr>
-              <a:t>Strongest at z ≈ 15–20 mm — where the tumor is closest to the antenna plane.</a:t>
-            </a:r>
-            <a:endParaRPr lang="en-US" sz="1250" dirty="0"/>
+              <a:t>Antenna patch/port plane sits at z = +3 mm; the measured tumor sat at z = +40 mm.</a:t>
+            </a:r>
+            <a:endParaRPr lang="en-US" sz="1200" dirty="0"/>
           </a:p>
           <a:p>
             <a:pPr marL="342900" indent="-342900">
@@ -3010,7 +3010,7 @@
               <a:buChar char="•"/>
             </a:pPr>
             <a:r>
-              <a:rPr lang="en-US" sz="1250" dirty="0">
+              <a:rPr lang="en-US" sz="1200" dirty="0">
                 <a:solidFill>
                   <a:srgbClr val="1E293B"/>
                 </a:solidFill>
@@ -3018,9 +3018,9 @@
                 <a:ea typeface="Calibri" pitchFamily="34" charset="-122"/>
                 <a:cs typeface="Calibri" pitchFamily="34" charset="-120"/>
               </a:rPr>
-              <a:t>Falls off smoothly both ways; the far/edge depths carry the least signal.</a:t>
-            </a:r>
-            <a:endParaRPr lang="en-US" sz="1250" dirty="0"/>
+              <a:t>Combined 4-antenna sensitivity peaks ~15 mm into the phantom — not at the patch.</a:t>
+            </a:r>
+            <a:endParaRPr lang="en-US" sz="1200" dirty="0"/>
           </a:p>
           <a:p>
             <a:pPr marL="342900" indent="-342900">
@@ -3031,7 +3031,7 @@
               <a:buChar char="•"/>
             </a:pPr>
             <a:r>
-              <a:rPr lang="en-US" sz="1250" dirty="0">
+              <a:rPr lang="en-US" sz="1200" dirty="0">
                 <a:solidFill>
                   <a:srgbClr val="1E293B"/>
                 </a:solidFill>
@@ -3039,9 +3039,9 @@
                 <a:ea typeface="Calibri" pitchFamily="34" charset="-122"/>
                 <a:cs typeface="Calibri" pitchFamily="34" charset="-120"/>
               </a:rPr>
-              <a:t>This is exactly why localization degrades toward the depth extremes.</a:t>
-            </a:r>
-            <a:endParaRPr lang="en-US" sz="1250" dirty="0"/>
+              <a:t>Falls off smoothly both ways; far depths carry the least signal → localization degrades there.</a:t>
+            </a:r>
+            <a:endParaRPr lang="en-US" sz="1200" dirty="0"/>
           </a:p>
         </p:txBody>
       </p:sp>

--- a/regression_deck/Deck2_Simulated_Regression.pptx
+++ b/regression_deck/Deck2_Simulated_Regression.pptx
@@ -2836,7 +2836,7 @@
                 <a:ea typeface="Calibri" pitchFamily="34" charset="-122"/>
                 <a:cs typeface="Calibri" pitchFamily="34" charset="-120"/>
               </a:rPr>
-              <a:t>13 tumor heights — the perturbation peaks mid-phantom and fades with distance</a:t>
+              <a:t>13 tumor heights — the perturbation peaks at the radiating patch and fades with distance</a:t>
             </a:r>
             <a:endParaRPr lang="en-US" sz="1400" dirty="0"/>
           </a:p>
@@ -2997,7 +2997,7 @@
                 <a:ea typeface="Calibri" pitchFamily="34" charset="-122"/>
                 <a:cs typeface="Calibri" pitchFamily="34" charset="-120"/>
               </a:rPr>
-              <a:t>Antenna patch/port plane sits at z = +3 mm; the measured tumor sat at z = +40 mm.</a:t>
+              <a:t>Port/feed is at z = +3 mm, but the radiating patch sits ~15–20 mm in (feed-line offset).</a:t>
             </a:r>
             <a:endParaRPr lang="en-US" sz="1200" dirty="0"/>
           </a:p>
@@ -3018,7 +3018,7 @@
                 <a:ea typeface="Calibri" pitchFamily="34" charset="-122"/>
                 <a:cs typeface="Calibri" pitchFamily="34" charset="-120"/>
               </a:rPr>
-              <a:t>Combined 4-antenna sensitivity peaks ~15 mm into the phantom — not at the patch.</a:t>
+              <a:t>ΔS peaks right at the patch (~15–20 mm) — where the tumor is nearest the radiator.</a:t>
             </a:r>
             <a:endParaRPr lang="en-US" sz="1200" dirty="0"/>
           </a:p>
@@ -3039,7 +3039,7 @@
                 <a:ea typeface="Calibri" pitchFamily="34" charset="-122"/>
                 <a:cs typeface="Calibri" pitchFamily="34" charset="-120"/>
               </a:rPr>
-              <a:t>Falls off smoothly both ways; far depths carry the least signal → localization degrades there.</a:t>
+              <a:t>Falls off both ways; far depths carry the least signal → localization degrades there. (Measured tumor sat at z = +40 mm.)</a:t>
             </a:r>
             <a:endParaRPr lang="en-US" sz="1200" dirty="0"/>
           </a:p>

--- a/regression_deck/Deck2_Simulated_Regression.pptx
+++ b/regression_deck/Deck2_Simulated_Regression.pptx
@@ -14,9 +14,10 @@
     <p:sldId id="262" r:id="rId8"/>
     <p:sldId id="263" r:id="rId9"/>
     <p:sldId id="264" r:id="rId10"/>
+    <p:sldId id="265" r:id="rId11"/>
   </p:sldIdLst>
   <p:notesMasterIdLst>
-    <p:notesMasterId r:id="rId11"/>
+    <p:notesMasterId r:id="rId12"/>
   </p:notesMasterIdLst>
   <p:sldSz cx="12188952" cy="6858000"/>
   <p:notesSz cx="6858000" cy="12188952"/>
@@ -534,6 +535,94 @@
             <a:fld id="{F7021451-1387-4CA6-816F-3879F97B5CBC}" type="slidenum">
               <a:rPr lang="en-US"/>
               <a:t>1</a:t>
+            </a:fld>
+            <a:endParaRPr lang="en-US"/>
+          </a:p>
+        </p:txBody>
+      </p:sp>
+    </p:spTree>
+    <p:extLst>
+      <p:ext uri="{BB962C8B-B14F-4D97-AF65-F5344CB8AC3E}">
+        <p14:creationId xmlns:p14="http://schemas.microsoft.com/office/powerpoint/2010/main" val="1024086991"/>
+      </p:ext>
+    </p:extLst>
+  </p:cSld>
+  <p:clrMapOvr>
+    <a:masterClrMapping/>
+  </p:clrMapOvr>
+</p:notes>
+</file>
+
+<file path=ppt/notesSlides/notesSlide10.xml><?xml version="1.0" encoding="utf-8"?>
+<p:notes xmlns:a="http://schemas.openxmlformats.org/drawingml/2006/main" xmlns:r="http://schemas.openxmlformats.org/officeDocument/2006/relationships" xmlns:p="http://schemas.openxmlformats.org/presentationml/2006/main">
+  <p:cSld>
+    <p:spTree>
+      <p:nvGrpSpPr>
+        <p:cNvPr id="1" name=""/>
+        <p:cNvGrpSpPr/>
+        <p:nvPr/>
+      </p:nvGrpSpPr>
+      <p:grpSpPr>
+        <a:xfrm>
+          <a:off x="0" y="0"/>
+          <a:ext cx="0" cy="0"/>
+          <a:chOff x="0" y="0"/>
+          <a:chExt cx="0" cy="0"/>
+        </a:xfrm>
+      </p:grpSpPr>
+      <p:sp>
+        <p:nvSpPr>
+          <p:cNvPr id="2" name="Slide Image Placeholder 1"/>
+          <p:cNvSpPr>
+            <a:spLocks noGrp="1" noRot="1" noChangeAspect="1"/>
+          </p:cNvSpPr>
+          <p:nvPr>
+            <p:ph type="sldImg"/>
+          </p:nvPr>
+        </p:nvSpPr>
+        <p:spPr/>
+      </p:sp>
+      <p:sp>
+        <p:nvSpPr>
+          <p:cNvPr id="3" name="Notes Placeholder 2"/>
+          <p:cNvSpPr>
+            <a:spLocks noGrp="1"/>
+          </p:cNvSpPr>
+          <p:nvPr>
+            <p:ph type="body" idx="1"/>
+          </p:nvPr>
+        </p:nvSpPr>
+        <p:spPr/>
+        <p:txBody>
+          <a:bodyPr/>
+          <a:lstStyle/>
+          <a:p>
+            <a:r>
+              <a:rPr lang="en-US" dirty="0"/>
+              <a:t/>
+            </a:r>
+            <a:endParaRPr lang="en-US" dirty="0"/>
+          </a:p>
+        </p:txBody>
+      </p:sp>
+      <p:sp>
+        <p:nvSpPr>
+          <p:cNvPr id="4" name="Slide Number Placeholder 3"/>
+          <p:cNvSpPr>
+            <a:spLocks noGrp="1"/>
+          </p:cNvSpPr>
+          <p:nvPr>
+            <p:ph type="sldNum" sz="quarter" idx="10"/>
+          </p:nvPr>
+        </p:nvSpPr>
+        <p:spPr/>
+        <p:txBody>
+          <a:bodyPr/>
+          <a:lstStyle/>
+          <a:p>
+            <a:fld id="{F7021451-1387-4CA6-816F-3879F97B5CBC}" type="slidenum">
+              <a:rPr lang="en-US"/>
+              <a:t>10</a:t>
             </a:fld>
             <a:endParaRPr lang="en-US"/>
           </a:p>
@@ -1569,7 +1658,7 @@
     <p:bg>
       <p:bgPr>
         <a:solidFill>
-          <a:srgbClr val="0E2233"/>
+          <a:srgbClr val="FDF8F6"/>
         </a:solidFill>
       </p:bgPr>
     </p:bg>
@@ -1589,14 +1678,54 @@
       </p:grpSpPr>
       <p:sp>
         <p:nvSpPr>
-          <p:cNvPr id="2" name="Text 0"/>
-          <p:cNvSpPr/>
-          <p:nvPr/>
-        </p:nvSpPr>
-        <p:spPr>
-          <a:xfrm>
-            <a:off x="822960" y="1874520"/>
-            <a:ext cx="10515600" cy="457200"/>
+          <p:cNvPr id="2" name="Shape 0"/>
+          <p:cNvSpPr/>
+          <p:nvPr/>
+        </p:nvSpPr>
+        <p:spPr>
+          <a:xfrm>
+            <a:off x="0" y="0"/>
+            <a:ext cx="12188952" cy="237744"/>
+          </a:xfrm>
+          <a:prstGeom prst="rect">
+            <a:avLst/>
+          </a:prstGeom>
+          <a:solidFill>
+            <a:srgbClr val="BE0000"/>
+          </a:solidFill>
+          <a:ln/>
+        </p:spPr>
+      </p:sp>
+      <p:sp>
+        <p:nvSpPr>
+          <p:cNvPr id="3" name="Shape 1"/>
+          <p:cNvSpPr/>
+          <p:nvPr/>
+        </p:nvSpPr>
+        <p:spPr>
+          <a:xfrm>
+            <a:off x="822960" y="1847088"/>
+            <a:ext cx="82296" cy="1371600"/>
+          </a:xfrm>
+          <a:prstGeom prst="rect">
+            <a:avLst/>
+          </a:prstGeom>
+          <a:solidFill>
+            <a:srgbClr val="BE0000"/>
+          </a:solidFill>
+          <a:ln/>
+        </p:spPr>
+      </p:sp>
+      <p:sp>
+        <p:nvSpPr>
+          <p:cNvPr id="4" name="Text 2"/>
+          <p:cNvSpPr/>
+          <p:nvPr/>
+        </p:nvSpPr>
+        <p:spPr>
+          <a:xfrm>
+            <a:off x="1097280" y="1847088"/>
+            <a:ext cx="10058400" cy="411480"/>
           </a:xfrm>
           <a:prstGeom prst="rect">
             <a:avLst/>
@@ -1614,13 +1743,13 @@
             <a:r>
               <a:rPr lang="en-US" sz="1500" b="1" spc="300" kern="0" dirty="0">
                 <a:solidFill>
-                  <a:srgbClr val="2CC4A3"/>
+                  <a:srgbClr val="BE0000"/>
                 </a:solidFill>
                 <a:latin typeface="Calibri" pitchFamily="34" charset="0"/>
                 <a:ea typeface="Calibri" pitchFamily="34" charset="-122"/>
                 <a:cs typeface="Calibri" pitchFamily="34" charset="-120"/>
               </a:rPr>
-              <a:t>PART 2 · SIMULATED DATA</a:t>
+              <a:t>PART 2 . SIMULATED DATA</a:t>
             </a:r>
             <a:endParaRPr lang="en-US" sz="1500" dirty="0"/>
           </a:p>
@@ -1628,14 +1757,14 @@
       </p:sp>
       <p:sp>
         <p:nvSpPr>
-          <p:cNvPr id="3" name="Text 1"/>
-          <p:cNvSpPr/>
-          <p:nvPr/>
-        </p:nvSpPr>
-        <p:spPr>
-          <a:xfrm>
-            <a:off x="822960" y="2377440"/>
-            <a:ext cx="10515600" cy="1005840"/>
+          <p:cNvPr id="5" name="Text 3"/>
+          <p:cNvSpPr/>
+          <p:nvPr/>
+        </p:nvSpPr>
+        <p:spPr>
+          <a:xfrm>
+            <a:off x="1097280" y="2286000"/>
+            <a:ext cx="10241280" cy="914400"/>
           </a:xfrm>
           <a:prstGeom prst="rect">
             <a:avLst/>
@@ -1651,9 +1780,9 @@
               <a:buNone/>
             </a:pPr>
             <a:r>
-              <a:rPr lang="en-US" sz="3800" b="1" dirty="0">
-                <a:solidFill>
-                  <a:srgbClr val="FFFFFF"/>
+              <a:rPr lang="en-US" sz="3600" b="1" dirty="0">
+                <a:solidFill>
+                  <a:srgbClr val="2A1618"/>
                 </a:solidFill>
                 <a:latin typeface="Cambria" pitchFamily="34" charset="0"/>
                 <a:ea typeface="Cambria" pitchFamily="34" charset="-122"/>
@@ -1661,20 +1790,20 @@
               </a:rPr>
               <a:t>3D (x, y, z) tumor localization in HFSS</a:t>
             </a:r>
-            <a:endParaRPr lang="en-US" sz="3800" dirty="0"/>
-          </a:p>
-        </p:txBody>
-      </p:sp>
-      <p:sp>
-        <p:nvSpPr>
-          <p:cNvPr id="4" name="Text 2"/>
-          <p:cNvSpPr/>
-          <p:nvPr/>
-        </p:nvSpPr>
-        <p:spPr>
-          <a:xfrm>
-            <a:off x="822960" y="3474720"/>
-            <a:ext cx="10424160" cy="640080"/>
+            <a:endParaRPr lang="en-US" sz="3600" dirty="0"/>
+          </a:p>
+        </p:txBody>
+      </p:sp>
+      <p:sp>
+        <p:nvSpPr>
+          <p:cNvPr id="6" name="Text 4"/>
+          <p:cNvSpPr/>
+          <p:nvPr/>
+        </p:nvSpPr>
+        <p:spPr>
+          <a:xfrm>
+            <a:off x="1097280" y="3310128"/>
+            <a:ext cx="10058400" cy="640080"/>
           </a:xfrm>
           <a:prstGeom prst="rect">
             <a:avLst/>
@@ -1692,13 +1821,13 @@
             <a:r>
               <a:rPr lang="en-US" sz="1550" dirty="0">
                 <a:solidFill>
-                  <a:srgbClr val="AECBD6"/>
+                  <a:srgbClr val="836A68"/>
                 </a:solidFill>
                 <a:latin typeface="Calibri" pitchFamily="34" charset="0"/>
                 <a:ea typeface="Calibri" pitchFamily="34" charset="-122"/>
                 <a:cs typeface="Calibri" pitchFamily="34" charset="-120"/>
               </a:rPr>
-              <a:t>A dense simulated tumor sweep — 91 positions × 13 depth planes — lets us resolve depth and measure exactly how much data the CNN needs</a:t>
+              <a:t>A dense simulated tumor sweep (91 positions x 13 depth planes) lets us resolve depth and measure how much data the CNN needs</a:t>
             </a:r>
             <a:endParaRPr lang="en-US" sz="1550" dirty="0"/>
           </a:p>
@@ -1706,13 +1835,13 @@
       </p:sp>
       <p:sp>
         <p:nvSpPr>
-          <p:cNvPr id="5" name="Text 3"/>
-          <p:cNvSpPr/>
-          <p:nvPr/>
-        </p:nvSpPr>
-        <p:spPr>
-          <a:xfrm>
-            <a:off x="822960" y="4526280"/>
+          <p:cNvPr id="7" name="Text 5"/>
+          <p:cNvSpPr/>
+          <p:nvPr/>
+        </p:nvSpPr>
+        <p:spPr>
+          <a:xfrm>
+            <a:off x="1097280" y="4526280"/>
             <a:ext cx="3383280" cy="640080"/>
           </a:xfrm>
           <a:prstGeom prst="rect">
@@ -1731,7 +1860,7 @@
             <a:r>
               <a:rPr lang="en-US" sz="2800" b="1" dirty="0">
                 <a:solidFill>
-                  <a:srgbClr val="2CC4A3"/>
+                  <a:srgbClr val="BE0000"/>
                 </a:solidFill>
                 <a:latin typeface="Cambria" pitchFamily="34" charset="0"/>
                 <a:ea typeface="Cambria" pitchFamily="34" charset="-122"/>
@@ -1745,14 +1874,14 @@
       </p:sp>
       <p:sp>
         <p:nvSpPr>
-          <p:cNvPr id="6" name="Text 4"/>
-          <p:cNvSpPr/>
-          <p:nvPr/>
-        </p:nvSpPr>
-        <p:spPr>
-          <a:xfrm>
-            <a:off x="822960" y="5138928"/>
-            <a:ext cx="3474720" cy="548640"/>
+          <p:cNvPr id="8" name="Text 6"/>
+          <p:cNvSpPr/>
+          <p:nvPr/>
+        </p:nvSpPr>
+        <p:spPr>
+          <a:xfrm>
+            <a:off x="1097280" y="5138928"/>
+            <a:ext cx="3520440" cy="548640"/>
           </a:xfrm>
           <a:prstGeom prst="rect">
             <a:avLst/>
@@ -1770,7 +1899,7 @@
             <a:r>
               <a:rPr lang="en-US" sz="1250" dirty="0">
                 <a:solidFill>
-                  <a:srgbClr val="AECBD6"/>
+                  <a:srgbClr val="836A68"/>
                 </a:solidFill>
                 <a:latin typeface="Calibri" pitchFamily="34" charset="0"/>
                 <a:ea typeface="Calibri" pitchFamily="34" charset="-122"/>
@@ -1784,13 +1913,13 @@
       </p:sp>
       <p:sp>
         <p:nvSpPr>
-          <p:cNvPr id="7" name="Text 5"/>
-          <p:cNvSpPr/>
-          <p:nvPr/>
-        </p:nvSpPr>
-        <p:spPr>
-          <a:xfrm>
-            <a:off x="4434840" y="4526280"/>
+          <p:cNvPr id="9" name="Text 7"/>
+          <p:cNvSpPr/>
+          <p:nvPr/>
+        </p:nvSpPr>
+        <p:spPr>
+          <a:xfrm>
+            <a:off x="4709160" y="4526280"/>
             <a:ext cx="3383280" cy="640080"/>
           </a:xfrm>
           <a:prstGeom prst="rect">
@@ -1809,7 +1938,7 @@
             <a:r>
               <a:rPr lang="en-US" sz="2800" b="1" dirty="0">
                 <a:solidFill>
-                  <a:srgbClr val="2CC4A3"/>
+                  <a:srgbClr val="BE0000"/>
                 </a:solidFill>
                 <a:latin typeface="Cambria" pitchFamily="34" charset="0"/>
                 <a:ea typeface="Cambria" pitchFamily="34" charset="-122"/>
@@ -1823,14 +1952,14 @@
       </p:sp>
       <p:sp>
         <p:nvSpPr>
-          <p:cNvPr id="8" name="Text 6"/>
-          <p:cNvSpPr/>
-          <p:nvPr/>
-        </p:nvSpPr>
-        <p:spPr>
-          <a:xfrm>
-            <a:off x="4434840" y="5138928"/>
-            <a:ext cx="3474720" cy="548640"/>
+          <p:cNvPr id="10" name="Text 8"/>
+          <p:cNvSpPr/>
+          <p:nvPr/>
+        </p:nvSpPr>
+        <p:spPr>
+          <a:xfrm>
+            <a:off x="4709160" y="5138928"/>
+            <a:ext cx="3520440" cy="548640"/>
           </a:xfrm>
           <a:prstGeom prst="rect">
             <a:avLst/>
@@ -1848,13 +1977,13 @@
             <a:r>
               <a:rPr lang="en-US" sz="1250" dirty="0">
                 <a:solidFill>
-                  <a:srgbClr val="AECBD6"/>
+                  <a:srgbClr val="836A68"/>
                 </a:solidFill>
                 <a:latin typeface="Calibri" pitchFamily="34" charset="0"/>
                 <a:ea typeface="Calibri" pitchFamily="34" charset="-122"/>
                 <a:cs typeface="Calibri" pitchFamily="34" charset="-120"/>
               </a:rPr>
-              <a:t>depth error — depth is not the weak axis</a:t>
+              <a:t>depth error, not the weak axis</a:t>
             </a:r>
             <a:endParaRPr lang="en-US" sz="1250" dirty="0"/>
           </a:p>
@@ -1862,13 +1991,13 @@
       </p:sp>
       <p:sp>
         <p:nvSpPr>
-          <p:cNvPr id="9" name="Text 7"/>
-          <p:cNvSpPr/>
-          <p:nvPr/>
-        </p:nvSpPr>
-        <p:spPr>
-          <a:xfrm>
-            <a:off x="8046720" y="4526280"/>
+          <p:cNvPr id="11" name="Text 9"/>
+          <p:cNvSpPr/>
+          <p:nvPr/>
+        </p:nvSpPr>
+        <p:spPr>
+          <a:xfrm>
+            <a:off x="8321040" y="4526280"/>
             <a:ext cx="3383280" cy="640080"/>
           </a:xfrm>
           <a:prstGeom prst="rect">
@@ -1887,7 +2016,7 @@
             <a:r>
               <a:rPr lang="en-US" sz="2800" b="1" dirty="0">
                 <a:solidFill>
-                  <a:srgbClr val="2CC4A3"/>
+                  <a:srgbClr val="BE0000"/>
                 </a:solidFill>
                 <a:latin typeface="Cambria" pitchFamily="34" charset="0"/>
                 <a:ea typeface="Cambria" pitchFamily="34" charset="-122"/>
@@ -1901,14 +2030,14 @@
       </p:sp>
       <p:sp>
         <p:nvSpPr>
-          <p:cNvPr id="10" name="Text 8"/>
-          <p:cNvSpPr/>
-          <p:nvPr/>
-        </p:nvSpPr>
-        <p:spPr>
-          <a:xfrm>
-            <a:off x="8046720" y="5138928"/>
-            <a:ext cx="3474720" cy="548640"/>
+          <p:cNvPr id="12" name="Text 10"/>
+          <p:cNvSpPr/>
+          <p:nvPr/>
+        </p:nvSpPr>
+        <p:spPr>
+          <a:xfrm>
+            <a:off x="8321040" y="5138928"/>
+            <a:ext cx="3520440" cy="548640"/>
           </a:xfrm>
           <a:prstGeom prst="rect">
             <a:avLst/>
@@ -1926,15 +2055,705 @@
             <a:r>
               <a:rPr lang="en-US" sz="1250" dirty="0">
                 <a:solidFill>
-                  <a:srgbClr val="AECBD6"/>
+                  <a:srgbClr val="836A68"/>
                 </a:solidFill>
                 <a:latin typeface="Calibri" pitchFamily="34" charset="0"/>
                 <a:ea typeface="Calibri" pitchFamily="34" charset="-122"/>
                 <a:cs typeface="Calibri" pitchFamily="34" charset="-120"/>
               </a:rPr>
-              <a:t>training positions the CNN needs</a:t>
+              <a:t>training positions needed</a:t>
             </a:r>
             <a:endParaRPr lang="en-US" sz="1250" dirty="0"/>
+          </a:p>
+        </p:txBody>
+      </p:sp>
+    </p:spTree>
+  </p:cSld>
+  <p:clrMapOvr>
+    <a:masterClrMapping/>
+  </p:clrMapOvr>
+</p:sld>
+</file>
+
+<file path=ppt/slides/slide10.xml><?xml version="1.0" encoding="utf-8"?>
+<p:sld xmlns:a="http://schemas.openxmlformats.org/drawingml/2006/main" xmlns:r="http://schemas.openxmlformats.org/officeDocument/2006/relationships" xmlns:p="http://schemas.openxmlformats.org/presentationml/2006/main">
+  <p:cSld name="Slide 10">
+    <p:bg>
+      <p:bgPr>
+        <a:solidFill>
+          <a:srgbClr val="FDF8F6"/>
+        </a:solidFill>
+      </p:bgPr>
+    </p:bg>
+    <p:spTree>
+      <p:nvGrpSpPr>
+        <p:cNvPr id="1" name=""/>
+        <p:cNvGrpSpPr/>
+        <p:nvPr/>
+      </p:nvGrpSpPr>
+      <p:grpSpPr>
+        <a:xfrm>
+          <a:off x="0" y="0"/>
+          <a:ext cx="0" cy="0"/>
+          <a:chOff x="0" y="0"/>
+          <a:chExt cx="0" cy="0"/>
+        </a:xfrm>
+      </p:grpSpPr>
+      <p:sp>
+        <p:nvSpPr>
+          <p:cNvPr id="2" name="Shape 0"/>
+          <p:cNvSpPr/>
+          <p:nvPr/>
+        </p:nvSpPr>
+        <p:spPr>
+          <a:xfrm>
+            <a:off x="0" y="0"/>
+            <a:ext cx="12188952" cy="237744"/>
+          </a:xfrm>
+          <a:prstGeom prst="rect">
+            <a:avLst/>
+          </a:prstGeom>
+          <a:solidFill>
+            <a:srgbClr val="BE0000"/>
+          </a:solidFill>
+          <a:ln/>
+        </p:spPr>
+      </p:sp>
+      <p:sp>
+        <p:nvSpPr>
+          <p:cNvPr id="3" name="Text 1"/>
+          <p:cNvSpPr/>
+          <p:nvPr/>
+        </p:nvSpPr>
+        <p:spPr>
+          <a:xfrm>
+            <a:off x="822960" y="640080"/>
+            <a:ext cx="10058400" cy="731520"/>
+          </a:xfrm>
+          <a:prstGeom prst="rect">
+            <a:avLst/>
+          </a:prstGeom>
+          <a:noFill/>
+          <a:ln/>
+        </p:spPr>
+        <p:txBody>
+          <a:bodyPr wrap="square" lIns="0" tIns="0" rIns="0" bIns="0" rtlCol="0" anchor="ctr"/>
+          <a:lstStyle/>
+          <a:p>
+            <a:pPr indent="0" marL="0">
+              <a:buNone/>
+            </a:pPr>
+            <a:r>
+              <a:rPr lang="en-US" sz="2800" b="1" dirty="0">
+                <a:solidFill>
+                  <a:srgbClr val="BE0000"/>
+                </a:solidFill>
+                <a:latin typeface="Cambria" pitchFamily="34" charset="0"/>
+                <a:ea typeface="Cambria" pitchFamily="34" charset="-122"/>
+                <a:cs typeface="Cambria" pitchFamily="34" charset="-120"/>
+              </a:rPr>
+              <a:t>Part 2, bottom line</a:t>
+            </a:r>
+            <a:endParaRPr lang="en-US" sz="2800" dirty="0"/>
+          </a:p>
+        </p:txBody>
+      </p:sp>
+      <p:sp>
+        <p:nvSpPr>
+          <p:cNvPr id="4" name="Shape 2"/>
+          <p:cNvSpPr/>
+          <p:nvPr/>
+        </p:nvSpPr>
+        <p:spPr>
+          <a:xfrm>
+            <a:off x="822960" y="1600200"/>
+            <a:ext cx="384048" cy="384048"/>
+          </a:xfrm>
+          <a:prstGeom prst="ellipse">
+            <a:avLst/>
+          </a:prstGeom>
+          <a:solidFill>
+            <a:srgbClr val="BE0000"/>
+          </a:solidFill>
+          <a:ln/>
+        </p:spPr>
+      </p:sp>
+      <p:sp>
+        <p:nvSpPr>
+          <p:cNvPr id="5" name="Text 3"/>
+          <p:cNvSpPr/>
+          <p:nvPr/>
+        </p:nvSpPr>
+        <p:spPr>
+          <a:xfrm>
+            <a:off x="822960" y="1600200"/>
+            <a:ext cx="384048" cy="384048"/>
+          </a:xfrm>
+          <a:prstGeom prst="rect">
+            <a:avLst/>
+          </a:prstGeom>
+          <a:noFill/>
+          <a:ln/>
+        </p:spPr>
+        <p:txBody>
+          <a:bodyPr wrap="square" lIns="0" tIns="0" rIns="0" bIns="0" rtlCol="0" anchor="ctr"/>
+          <a:lstStyle/>
+          <a:p>
+            <a:pPr algn="ctr" indent="0" marL="0">
+              <a:buNone/>
+            </a:pPr>
+            <a:r>
+              <a:rPr lang="en-US" sz="1500" b="1" dirty="0">
+                <a:solidFill>
+                  <a:srgbClr val="FFFFFF"/>
+                </a:solidFill>
+                <a:latin typeface="Cambria" pitchFamily="34" charset="0"/>
+                <a:ea typeface="Cambria" pitchFamily="34" charset="-122"/>
+                <a:cs typeface="Cambria" pitchFamily="34" charset="-120"/>
+              </a:rPr>
+              <a:t>1</a:t>
+            </a:r>
+            <a:endParaRPr lang="en-US" sz="1500" dirty="0"/>
+          </a:p>
+        </p:txBody>
+      </p:sp>
+      <p:sp>
+        <p:nvSpPr>
+          <p:cNvPr id="6" name="Text 4"/>
+          <p:cNvSpPr/>
+          <p:nvPr/>
+        </p:nvSpPr>
+        <p:spPr>
+          <a:xfrm>
+            <a:off x="1371600" y="1508760"/>
+            <a:ext cx="10241280" cy="868680"/>
+          </a:xfrm>
+          <a:prstGeom prst="rect">
+            <a:avLst/>
+          </a:prstGeom>
+          <a:noFill/>
+          <a:ln/>
+        </p:spPr>
+        <p:txBody>
+          <a:bodyPr wrap="square" lIns="0" tIns="0" rIns="0" bIns="0" rtlCol="0" anchor="ctr"/>
+          <a:lstStyle/>
+          <a:p>
+            <a:pPr indent="0" marL="0">
+              <a:buNone/>
+            </a:pPr>
+            <a:r>
+              <a:rPr lang="en-US" sz="1400" b="1" dirty="0">
+                <a:solidFill>
+                  <a:srgbClr val="2A1618"/>
+                </a:solidFill>
+                <a:latin typeface="Calibri" pitchFamily="34" charset="0"/>
+                <a:ea typeface="Calibri" pitchFamily="34" charset="-122"/>
+                <a:cs typeface="Calibri" pitchFamily="34" charset="-120"/>
+              </a:rPr>
+              <a:t>Full 3D localization works in sim:  </a:t>
+            </a:r>
+            <a:pPr indent="0" marL="0">
+              <a:buNone/>
+            </a:pPr>
+            <a:r>
+              <a:rPr lang="en-US" sz="1400" dirty="0">
+                <a:solidFill>
+                  <a:srgbClr val="836A68"/>
+                </a:solidFill>
+                <a:latin typeface="Calibri" pitchFamily="34" charset="0"/>
+                <a:ea typeface="Calibri" pitchFamily="34" charset="-122"/>
+                <a:cs typeface="Calibri" pitchFamily="34" charset="-120"/>
+              </a:rPr>
+              <a:t>3.9 mm lateral, 2.1 mm depth. The CNN resolves all three coordinates well below a grid step.</a:t>
+            </a:r>
+            <a:endParaRPr lang="en-US" sz="1400" dirty="0"/>
+          </a:p>
+        </p:txBody>
+      </p:sp>
+      <p:sp>
+        <p:nvSpPr>
+          <p:cNvPr id="7" name="Shape 5"/>
+          <p:cNvSpPr/>
+          <p:nvPr/>
+        </p:nvSpPr>
+        <p:spPr>
+          <a:xfrm>
+            <a:off x="822960" y="2569464"/>
+            <a:ext cx="384048" cy="384048"/>
+          </a:xfrm>
+          <a:prstGeom prst="ellipse">
+            <a:avLst/>
+          </a:prstGeom>
+          <a:solidFill>
+            <a:srgbClr val="BE0000"/>
+          </a:solidFill>
+          <a:ln/>
+        </p:spPr>
+      </p:sp>
+      <p:sp>
+        <p:nvSpPr>
+          <p:cNvPr id="8" name="Text 6"/>
+          <p:cNvSpPr/>
+          <p:nvPr/>
+        </p:nvSpPr>
+        <p:spPr>
+          <a:xfrm>
+            <a:off x="822960" y="2569464"/>
+            <a:ext cx="384048" cy="384048"/>
+          </a:xfrm>
+          <a:prstGeom prst="rect">
+            <a:avLst/>
+          </a:prstGeom>
+          <a:noFill/>
+          <a:ln/>
+        </p:spPr>
+        <p:txBody>
+          <a:bodyPr wrap="square" lIns="0" tIns="0" rIns="0" bIns="0" rtlCol="0" anchor="ctr"/>
+          <a:lstStyle/>
+          <a:p>
+            <a:pPr algn="ctr" indent="0" marL="0">
+              <a:buNone/>
+            </a:pPr>
+            <a:r>
+              <a:rPr lang="en-US" sz="1500" b="1" dirty="0">
+                <a:solidFill>
+                  <a:srgbClr val="FFFFFF"/>
+                </a:solidFill>
+                <a:latin typeface="Cambria" pitchFamily="34" charset="0"/>
+                <a:ea typeface="Cambria" pitchFamily="34" charset="-122"/>
+                <a:cs typeface="Cambria" pitchFamily="34" charset="-120"/>
+              </a:rPr>
+              <a:t>2</a:t>
+            </a:r>
+            <a:endParaRPr lang="en-US" sz="1500" dirty="0"/>
+          </a:p>
+        </p:txBody>
+      </p:sp>
+      <p:sp>
+        <p:nvSpPr>
+          <p:cNvPr id="9" name="Text 7"/>
+          <p:cNvSpPr/>
+          <p:nvPr/>
+        </p:nvSpPr>
+        <p:spPr>
+          <a:xfrm>
+            <a:off x="1371600" y="2478024"/>
+            <a:ext cx="10241280" cy="868680"/>
+          </a:xfrm>
+          <a:prstGeom prst="rect">
+            <a:avLst/>
+          </a:prstGeom>
+          <a:noFill/>
+          <a:ln/>
+        </p:spPr>
+        <p:txBody>
+          <a:bodyPr wrap="square" lIns="0" tIns="0" rIns="0" bIns="0" rtlCol="0" anchor="ctr"/>
+          <a:lstStyle/>
+          <a:p>
+            <a:pPr indent="0" marL="0">
+              <a:buNone/>
+            </a:pPr>
+            <a:r>
+              <a:rPr lang="en-US" sz="1400" b="1" dirty="0">
+                <a:solidFill>
+                  <a:srgbClr val="2A1618"/>
+                </a:solidFill>
+                <a:latin typeface="Calibri" pitchFamily="34" charset="0"/>
+                <a:ea typeface="Calibri" pitchFamily="34" charset="-122"/>
+                <a:cs typeface="Calibri" pitchFamily="34" charset="-120"/>
+              </a:rPr>
+              <a:t>Depth is a strong axis, not a weak one:  </a:t>
+            </a:r>
+            <a:pPr indent="0" marL="0">
+              <a:buNone/>
+            </a:pPr>
+            <a:r>
+              <a:rPr lang="en-US" sz="1400" dirty="0">
+                <a:solidFill>
+                  <a:srgbClr val="836A68"/>
+                </a:solidFill>
+                <a:latin typeface="Calibri" pitchFamily="34" charset="0"/>
+                <a:ea typeface="Calibri" pitchFamily="34" charset="-122"/>
+                <a:cs typeface="Calibri" pitchFamily="34" charset="-120"/>
+              </a:rPr>
+              <a:t>fine depth sampling and full-band frequency make z (~2 mm) actually beat the lateral floor.</a:t>
+            </a:r>
+            <a:endParaRPr lang="en-US" sz="1400" dirty="0"/>
+          </a:p>
+        </p:txBody>
+      </p:sp>
+      <p:sp>
+        <p:nvSpPr>
+          <p:cNvPr id="10" name="Shape 8"/>
+          <p:cNvSpPr/>
+          <p:nvPr/>
+        </p:nvSpPr>
+        <p:spPr>
+          <a:xfrm>
+            <a:off x="822960" y="3538728"/>
+            <a:ext cx="384048" cy="384048"/>
+          </a:xfrm>
+          <a:prstGeom prst="ellipse">
+            <a:avLst/>
+          </a:prstGeom>
+          <a:solidFill>
+            <a:srgbClr val="BE0000"/>
+          </a:solidFill>
+          <a:ln/>
+        </p:spPr>
+      </p:sp>
+      <p:sp>
+        <p:nvSpPr>
+          <p:cNvPr id="11" name="Text 9"/>
+          <p:cNvSpPr/>
+          <p:nvPr/>
+        </p:nvSpPr>
+        <p:spPr>
+          <a:xfrm>
+            <a:off x="822960" y="3538728"/>
+            <a:ext cx="384048" cy="384048"/>
+          </a:xfrm>
+          <a:prstGeom prst="rect">
+            <a:avLst/>
+          </a:prstGeom>
+          <a:noFill/>
+          <a:ln/>
+        </p:spPr>
+        <p:txBody>
+          <a:bodyPr wrap="square" lIns="0" tIns="0" rIns="0" bIns="0" rtlCol="0" anchor="ctr"/>
+          <a:lstStyle/>
+          <a:p>
+            <a:pPr algn="ctr" indent="0" marL="0">
+              <a:buNone/>
+            </a:pPr>
+            <a:r>
+              <a:rPr lang="en-US" sz="1500" b="1" dirty="0">
+                <a:solidFill>
+                  <a:srgbClr val="FFFFFF"/>
+                </a:solidFill>
+                <a:latin typeface="Cambria" pitchFamily="34" charset="0"/>
+                <a:ea typeface="Cambria" pitchFamily="34" charset="-122"/>
+                <a:cs typeface="Cambria" pitchFamily="34" charset="-120"/>
+              </a:rPr>
+              <a:t>3</a:t>
+            </a:r>
+            <a:endParaRPr lang="en-US" sz="1500" dirty="0"/>
+          </a:p>
+        </p:txBody>
+      </p:sp>
+      <p:sp>
+        <p:nvSpPr>
+          <p:cNvPr id="12" name="Text 10"/>
+          <p:cNvSpPr/>
+          <p:nvPr/>
+        </p:nvSpPr>
+        <p:spPr>
+          <a:xfrm>
+            <a:off x="1371600" y="3447288"/>
+            <a:ext cx="10241280" cy="868680"/>
+          </a:xfrm>
+          <a:prstGeom prst="rect">
+            <a:avLst/>
+          </a:prstGeom>
+          <a:noFill/>
+          <a:ln/>
+        </p:spPr>
+        <p:txBody>
+          <a:bodyPr wrap="square" lIns="0" tIns="0" rIns="0" bIns="0" rtlCol="0" anchor="ctr"/>
+          <a:lstStyle/>
+          <a:p>
+            <a:pPr indent="0" marL="0">
+              <a:buNone/>
+            </a:pPr>
+            <a:r>
+              <a:rPr lang="en-US" sz="1400" b="1" dirty="0">
+                <a:solidFill>
+                  <a:srgbClr val="2A1618"/>
+                </a:solidFill>
+                <a:latin typeface="Calibri" pitchFamily="34" charset="0"/>
+                <a:ea typeface="Calibri" pitchFamily="34" charset="-122"/>
+                <a:cs typeface="Calibri" pitchFamily="34" charset="-120"/>
+              </a:rPr>
+              <a:t>The CNN needs ~400 to 500 distinct positions:  </a:t>
+            </a:r>
+            <a:pPr indent="0" marL="0">
+              <a:buNone/>
+            </a:pPr>
+            <a:r>
+              <a:rPr lang="en-US" sz="1400" dirty="0">
+                <a:solidFill>
+                  <a:srgbClr val="836A68"/>
+                </a:solidFill>
+                <a:latin typeface="Calibri" pitchFamily="34" charset="0"/>
+                <a:ea typeface="Calibri" pitchFamily="34" charset="-122"/>
+                <a:cs typeface="Calibri" pitchFamily="34" charset="-120"/>
+              </a:rPr>
+              <a:t>below that it degrades fast; at one depth plane (82) it collapses to chance. A concrete data target.</a:t>
+            </a:r>
+            <a:endParaRPr lang="en-US" sz="1400" dirty="0"/>
+          </a:p>
+        </p:txBody>
+      </p:sp>
+      <p:sp>
+        <p:nvSpPr>
+          <p:cNvPr id="13" name="Shape 11"/>
+          <p:cNvSpPr/>
+          <p:nvPr/>
+        </p:nvSpPr>
+        <p:spPr>
+          <a:xfrm>
+            <a:off x="822960" y="4507992"/>
+            <a:ext cx="384048" cy="384048"/>
+          </a:xfrm>
+          <a:prstGeom prst="ellipse">
+            <a:avLst/>
+          </a:prstGeom>
+          <a:solidFill>
+            <a:srgbClr val="BE0000"/>
+          </a:solidFill>
+          <a:ln/>
+        </p:spPr>
+      </p:sp>
+      <p:sp>
+        <p:nvSpPr>
+          <p:cNvPr id="14" name="Text 12"/>
+          <p:cNvSpPr/>
+          <p:nvPr/>
+        </p:nvSpPr>
+        <p:spPr>
+          <a:xfrm>
+            <a:off x="822960" y="4507992"/>
+            <a:ext cx="384048" cy="384048"/>
+          </a:xfrm>
+          <a:prstGeom prst="rect">
+            <a:avLst/>
+          </a:prstGeom>
+          <a:noFill/>
+          <a:ln/>
+        </p:spPr>
+        <p:txBody>
+          <a:bodyPr wrap="square" lIns="0" tIns="0" rIns="0" bIns="0" rtlCol="0" anchor="ctr"/>
+          <a:lstStyle/>
+          <a:p>
+            <a:pPr algn="ctr" indent="0" marL="0">
+              <a:buNone/>
+            </a:pPr>
+            <a:r>
+              <a:rPr lang="en-US" sz="1500" b="1" dirty="0">
+                <a:solidFill>
+                  <a:srgbClr val="FFFFFF"/>
+                </a:solidFill>
+                <a:latin typeface="Cambria" pitchFamily="34" charset="0"/>
+                <a:ea typeface="Cambria" pitchFamily="34" charset="-122"/>
+                <a:cs typeface="Cambria" pitchFamily="34" charset="-120"/>
+              </a:rPr>
+              <a:t>4</a:t>
+            </a:r>
+            <a:endParaRPr lang="en-US" sz="1500" dirty="0"/>
+          </a:p>
+        </p:txBody>
+      </p:sp>
+      <p:sp>
+        <p:nvSpPr>
+          <p:cNvPr id="15" name="Text 13"/>
+          <p:cNvSpPr/>
+          <p:nvPr/>
+        </p:nvSpPr>
+        <p:spPr>
+          <a:xfrm>
+            <a:off x="1371600" y="4416552"/>
+            <a:ext cx="10241280" cy="868680"/>
+          </a:xfrm>
+          <a:prstGeom prst="rect">
+            <a:avLst/>
+          </a:prstGeom>
+          <a:noFill/>
+          <a:ln/>
+        </p:spPr>
+        <p:txBody>
+          <a:bodyPr wrap="square" lIns="0" tIns="0" rIns="0" bIns="0" rtlCol="0" anchor="ctr"/>
+          <a:lstStyle/>
+          <a:p>
+            <a:pPr indent="0" marL="0">
+              <a:buNone/>
+            </a:pPr>
+            <a:r>
+              <a:rPr lang="en-US" sz="1400" b="1" dirty="0">
+                <a:solidFill>
+                  <a:srgbClr val="2A1618"/>
+                </a:solidFill>
+                <a:latin typeface="Calibri" pitchFamily="34" charset="0"/>
+                <a:ea typeface="Calibri" pitchFamily="34" charset="-122"/>
+                <a:cs typeface="Calibri" pitchFamily="34" charset="-120"/>
+              </a:rPr>
+              <a:t>Depth generalizes across the sampled range:  </a:t>
+            </a:r>
+            <a:pPr indent="0" marL="0">
+              <a:buNone/>
+            </a:pPr>
+            <a:r>
+              <a:rPr lang="en-US" sz="1400" dirty="0">
+                <a:solidFill>
+                  <a:srgbClr val="836A68"/>
+                </a:solidFill>
+                <a:latin typeface="Calibri" pitchFamily="34" charset="0"/>
+                <a:ea typeface="Calibri" pitchFamily="34" charset="-122"/>
+                <a:cs typeface="Calibri" pitchFamily="34" charset="-120"/>
+              </a:rPr>
+              <a:t>unseen interior depths interpolate to ~1 to 3 mm; only the outer edge depths extrapolate and fail.</a:t>
+            </a:r>
+            <a:endParaRPr lang="en-US" sz="1400" dirty="0"/>
+          </a:p>
+        </p:txBody>
+      </p:sp>
+      <p:sp>
+        <p:nvSpPr>
+          <p:cNvPr id="16" name="Shape 14"/>
+          <p:cNvSpPr/>
+          <p:nvPr/>
+        </p:nvSpPr>
+        <p:spPr>
+          <a:xfrm>
+            <a:off x="822960" y="5477256"/>
+            <a:ext cx="384048" cy="384048"/>
+          </a:xfrm>
+          <a:prstGeom prst="ellipse">
+            <a:avLst/>
+          </a:prstGeom>
+          <a:solidFill>
+            <a:srgbClr val="BE0000"/>
+          </a:solidFill>
+          <a:ln/>
+        </p:spPr>
+      </p:sp>
+      <p:sp>
+        <p:nvSpPr>
+          <p:cNvPr id="17" name="Text 15"/>
+          <p:cNvSpPr/>
+          <p:nvPr/>
+        </p:nvSpPr>
+        <p:spPr>
+          <a:xfrm>
+            <a:off x="822960" y="5477256"/>
+            <a:ext cx="384048" cy="384048"/>
+          </a:xfrm>
+          <a:prstGeom prst="rect">
+            <a:avLst/>
+          </a:prstGeom>
+          <a:noFill/>
+          <a:ln/>
+        </p:spPr>
+        <p:txBody>
+          <a:bodyPr wrap="square" lIns="0" tIns="0" rIns="0" bIns="0" rtlCol="0" anchor="ctr"/>
+          <a:lstStyle/>
+          <a:p>
+            <a:pPr algn="ctr" indent="0" marL="0">
+              <a:buNone/>
+            </a:pPr>
+            <a:r>
+              <a:rPr lang="en-US" sz="1500" b="1" dirty="0">
+                <a:solidFill>
+                  <a:srgbClr val="FFFFFF"/>
+                </a:solidFill>
+                <a:latin typeface="Cambria" pitchFamily="34" charset="0"/>
+                <a:ea typeface="Cambria" pitchFamily="34" charset="-122"/>
+                <a:cs typeface="Cambria" pitchFamily="34" charset="-120"/>
+              </a:rPr>
+              <a:t>5</a:t>
+            </a:r>
+            <a:endParaRPr lang="en-US" sz="1500" dirty="0"/>
+          </a:p>
+        </p:txBody>
+      </p:sp>
+      <p:sp>
+        <p:nvSpPr>
+          <p:cNvPr id="18" name="Text 16"/>
+          <p:cNvSpPr/>
+          <p:nvPr/>
+        </p:nvSpPr>
+        <p:spPr>
+          <a:xfrm>
+            <a:off x="1371600" y="5385816"/>
+            <a:ext cx="10241280" cy="868680"/>
+          </a:xfrm>
+          <a:prstGeom prst="rect">
+            <a:avLst/>
+          </a:prstGeom>
+          <a:noFill/>
+          <a:ln/>
+        </p:spPr>
+        <p:txBody>
+          <a:bodyPr wrap="square" lIns="0" tIns="0" rIns="0" bIns="0" rtlCol="0" anchor="ctr"/>
+          <a:lstStyle/>
+          <a:p>
+            <a:pPr indent="0" marL="0">
+              <a:buNone/>
+            </a:pPr>
+            <a:r>
+              <a:rPr lang="en-US" sz="1400" b="1" dirty="0">
+                <a:solidFill>
+                  <a:srgbClr val="2A1618"/>
+                </a:solidFill>
+                <a:latin typeface="Calibri" pitchFamily="34" charset="0"/>
+                <a:ea typeface="Calibri" pitchFamily="34" charset="-122"/>
+                <a:cs typeface="Calibri" pitchFamily="34" charset="-120"/>
+              </a:rPr>
+              <a:t>Metal is about equal to dielectric in the noiseless sim:  </a:t>
+            </a:r>
+            <a:pPr indent="0" marL="0">
+              <a:buNone/>
+            </a:pPr>
+            <a:r>
+              <a:rPr lang="en-US" sz="1400" dirty="0">
+                <a:solidFill>
+                  <a:srgbClr val="836A68"/>
+                </a:solidFill>
+                <a:latin typeface="Calibri" pitchFamily="34" charset="0"/>
+                <a:ea typeface="Calibri" pitchFamily="34" charset="-122"/>
+                <a:cs typeface="Calibri" pitchFamily="34" charset="-120"/>
+              </a:rPr>
+              <a:t>a beet tumor localizes as well as metal, so realistic contrast is not the bottleneck here.</a:t>
+            </a:r>
+            <a:endParaRPr lang="en-US" sz="1400" dirty="0"/>
+          </a:p>
+        </p:txBody>
+      </p:sp>
+      <p:sp>
+        <p:nvSpPr>
+          <p:cNvPr id="19" name="Text 17"/>
+          <p:cNvSpPr/>
+          <p:nvPr/>
+        </p:nvSpPr>
+        <p:spPr>
+          <a:xfrm>
+            <a:off x="822960" y="6400800"/>
+            <a:ext cx="10515600" cy="320040"/>
+          </a:xfrm>
+          <a:prstGeom prst="rect">
+            <a:avLst/>
+          </a:prstGeom>
+          <a:noFill/>
+          <a:ln/>
+        </p:spPr>
+        <p:txBody>
+          <a:bodyPr wrap="square" lIns="0" tIns="0" rIns="0" bIns="0" rtlCol="0" anchor="ctr"/>
+          <a:lstStyle/>
+          <a:p>
+            <a:pPr indent="0" marL="0">
+              <a:buNone/>
+            </a:pPr>
+            <a:r>
+              <a:rPr lang="en-US" sz="1100" dirty="0">
+                <a:solidFill>
+                  <a:srgbClr val="BE0000"/>
+                </a:solidFill>
+                <a:latin typeface="Calibri" pitchFamily="34" charset="0"/>
+                <a:ea typeface="Calibri" pitchFamily="34" charset="-122"/>
+                <a:cs typeface="Calibri" pitchFamily="34" charset="-120"/>
+              </a:rPr>
+              <a:t>github.com/pmart1534/microwave-phantom-localization-cnn-mlp</a:t>
+            </a:r>
+            <a:endParaRPr lang="en-US" sz="1100" dirty="0"/>
           </a:p>
         </p:txBody>
       </p:sp>
@@ -1997,7 +2816,7 @@
             <a:r>
               <a:rPr lang="en-US" sz="2900" b="1" dirty="0">
                 <a:solidFill>
-                  <a:srgbClr val="1E293B"/>
+                  <a:srgbClr val="2A1618"/>
                 </a:solidFill>
                 <a:latin typeface="Cambria" pitchFamily="34" charset="0"/>
                 <a:ea typeface="Cambria" pitchFamily="34" charset="-122"/>
@@ -2036,13 +2855,13 @@
             <a:r>
               <a:rPr lang="en-US" sz="1400" b="1" dirty="0">
                 <a:solidFill>
-                  <a:srgbClr val="1C9AA8"/>
+                  <a:srgbClr val="BE0000"/>
                 </a:solidFill>
                 <a:latin typeface="Calibri" pitchFamily="34" charset="0"/>
                 <a:ea typeface="Calibri" pitchFamily="34" charset="-122"/>
                 <a:cs typeface="Calibri" pitchFamily="34" charset="-120"/>
               </a:rPr>
-              <a:t>HFSS full-wave model of the A3 antennas + phantom (SamMakin tumor sweep)</a:t>
+              <a:t>HFSS full-wave model of Sam's Medium antennas + the A3 phantom (SamMakin tumor sweep)</a:t>
             </a:r>
             <a:endParaRPr lang="en-US" sz="1400" dirty="0"/>
           </a:p>
@@ -2065,17 +2884,17 @@
             </a:avLst>
           </a:prstGeom>
           <a:solidFill>
-            <a:srgbClr val="F3F7FA"/>
+            <a:srgbClr val="FBF4F2"/>
           </a:solidFill>
           <a:ln w="12700">
             <a:solidFill>
-              <a:srgbClr val="D8E2EA"/>
+              <a:srgbClr val="E7D6D1"/>
             </a:solidFill>
             <a:prstDash val="solid"/>
           </a:ln>
           <a:effectLst>
             <a:outerShdw sx="100000" sy="100000" kx="0" ky="0" algn="bl" rotWithShape="0" blurRad="88900" dist="38100" dir="5400000">
-              <a:srgbClr val="5B6B7B">
+              <a:srgbClr val="7A5C5E">
                 <a:alpha val="18000"/>
               </a:srgbClr>
             </a:outerShdw>
@@ -2097,7 +2916,7 @@
             <a:avLst/>
           </a:prstGeom>
           <a:solidFill>
-            <a:srgbClr val="0B5D7A"/>
+            <a:srgbClr val="BE0000"/>
           </a:solidFill>
           <a:ln/>
         </p:spPr>
@@ -2168,7 +2987,7 @@
             <a:r>
               <a:rPr lang="en-US" sz="1700" b="1" dirty="0">
                 <a:solidFill>
-                  <a:srgbClr val="0B5D7A"/>
+                  <a:srgbClr val="BE0000"/>
                 </a:solidFill>
                 <a:latin typeface="Cambria" pitchFamily="34" charset="0"/>
                 <a:ea typeface="Cambria" pitchFamily="34" charset="-122"/>
@@ -2207,13 +3026,13 @@
             <a:r>
               <a:rPr lang="en-US" sz="1250" dirty="0">
                 <a:solidFill>
-                  <a:srgbClr val="1E293B"/>
+                  <a:srgbClr val="2A1618"/>
                 </a:solidFill>
                 <a:latin typeface="Calibri" pitchFamily="34" charset="0"/>
                 <a:ea typeface="Calibri" pitchFamily="34" charset="-122"/>
                 <a:cs typeface="Calibri" pitchFamily="34" charset="-120"/>
               </a:rPr>
-              <a:t>HFSS full-wave solve of the 4 'Sam' antennas around the A3 phantom in oil. Metal tumor moved through a 3-D grid; a dielectric (beet) tumor run identically for comparison.</a:t>
+              <a:t>HFSS full-wave solve of Sam's Medium antennas (the same 4-antenna array as the bench) around the A3 phantom in oil. A metal tumor is moved through a 3D grid; a dielectric (beet) tumor is run identically for comparison.</a:t>
             </a:r>
             <a:endParaRPr lang="en-US" sz="1250" dirty="0"/>
           </a:p>
@@ -2236,17 +3055,17 @@
             </a:avLst>
           </a:prstGeom>
           <a:solidFill>
-            <a:srgbClr val="F3F7FA"/>
+            <a:srgbClr val="FBF4F2"/>
           </a:solidFill>
           <a:ln w="12700">
             <a:solidFill>
-              <a:srgbClr val="D8E2EA"/>
+              <a:srgbClr val="E7D6D1"/>
             </a:solidFill>
             <a:prstDash val="solid"/>
           </a:ln>
           <a:effectLst>
             <a:outerShdw sx="100000" sy="100000" kx="0" ky="0" algn="bl" rotWithShape="0" blurRad="88900" dist="38100" dir="5400000">
-              <a:srgbClr val="5B6B7B">
+              <a:srgbClr val="7A5C5E">
                 <a:alpha val="18000"/>
               </a:srgbClr>
             </a:outerShdw>
@@ -2268,7 +3087,7 @@
             <a:avLst/>
           </a:prstGeom>
           <a:solidFill>
-            <a:srgbClr val="0B5D7A"/>
+            <a:srgbClr val="BE0000"/>
           </a:solidFill>
           <a:ln/>
         </p:spPr>
@@ -2339,7 +3158,7 @@
             <a:r>
               <a:rPr lang="en-US" sz="1700" b="1" dirty="0">
                 <a:solidFill>
-                  <a:srgbClr val="0B5D7A"/>
+                  <a:srgbClr val="BE0000"/>
                 </a:solidFill>
                 <a:latin typeface="Cambria" pitchFamily="34" charset="0"/>
                 <a:ea typeface="Cambria" pitchFamily="34" charset="-122"/>
@@ -2378,13 +3197,13 @@
             <a:r>
               <a:rPr lang="en-US" sz="1250" dirty="0">
                 <a:solidFill>
-                  <a:srgbClr val="1E293B"/>
+                  <a:srgbClr val="2A1618"/>
                 </a:solidFill>
                 <a:latin typeface="Calibri" pitchFamily="34" charset="0"/>
                 <a:ea typeface="Calibri" pitchFamily="34" charset="-122"/>
                 <a:cs typeface="Calibri" pitchFamily="34" charset="-120"/>
               </a:rPr>
-              <a:t>Uniform 10 mm (x,y) lattice, 91 positions, swept over 13 depth planes z = −15 … +45 mm (5 mm steps). 1074 tumor positions total (off-grid z = 3 mm excluded).</a:t>
+              <a:t>Uniform 10 mm (x,y) lattice, 91 positions, swept over 13 depth planes z = -15 to +45 mm (5 mm steps). 1074 tumor positions total (off-grid z = 3 mm excluded).</a:t>
             </a:r>
             <a:endParaRPr lang="en-US" sz="1250" dirty="0"/>
           </a:p>
@@ -2407,17 +3226,17 @@
             </a:avLst>
           </a:prstGeom>
           <a:solidFill>
-            <a:srgbClr val="F3F7FA"/>
+            <a:srgbClr val="FBF4F2"/>
           </a:solidFill>
           <a:ln w="12700">
             <a:solidFill>
-              <a:srgbClr val="D8E2EA"/>
+              <a:srgbClr val="E7D6D1"/>
             </a:solidFill>
             <a:prstDash val="solid"/>
           </a:ln>
           <a:effectLst>
             <a:outerShdw sx="100000" sy="100000" kx="0" ky="0" algn="bl" rotWithShape="0" blurRad="88900" dist="38100" dir="5400000">
-              <a:srgbClr val="5B6B7B">
+              <a:srgbClr val="7A5C5E">
                 <a:alpha val="18000"/>
               </a:srgbClr>
             </a:outerShdw>
@@ -2439,7 +3258,7 @@
             <a:avLst/>
           </a:prstGeom>
           <a:solidFill>
-            <a:srgbClr val="0B5D7A"/>
+            <a:srgbClr val="BE0000"/>
           </a:solidFill>
           <a:ln/>
         </p:spPr>
@@ -2510,7 +3329,7 @@
             <a:r>
               <a:rPr lang="en-US" sz="1700" b="1" dirty="0">
                 <a:solidFill>
-                  <a:srgbClr val="0B5D7A"/>
+                  <a:srgbClr val="BE0000"/>
                 </a:solidFill>
                 <a:latin typeface="Cambria" pitchFamily="34" charset="0"/>
                 <a:ea typeface="Cambria" pitchFamily="34" charset="-122"/>
@@ -2549,13 +3368,13 @@
             <a:r>
               <a:rPr lang="en-US" sz="1250" dirty="0">
                 <a:solidFill>
-                  <a:srgbClr val="1E293B"/>
+                  <a:srgbClr val="2A1618"/>
                 </a:solidFill>
                 <a:latin typeface="Calibri" pitchFamily="34" charset="0"/>
                 <a:ea typeface="Calibri" pitchFamily="34" charset="-122"/>
                 <a:cs typeface="Calibri" pitchFamily="34" charset="-120"/>
               </a:rPr>
-              <a:t>4-port S-matrix exported 2–8 GHz (3001 pts → resampled to 256). Input = differential ΔS = S(tumor) − S(empty), using each depth's own HFSS-batch empty baseline.</a:t>
+              <a:t>4-port S-matrix exported 2 to 8 GHz (3001 pts, resampled to 256). Input = differential dS = S(tumor) minus S(empty), using each depth's own HFSS-batch empty baseline.</a:t>
             </a:r>
             <a:endParaRPr lang="en-US" sz="1250" dirty="0"/>
           </a:p>
@@ -2578,17 +3397,17 @@
             </a:avLst>
           </a:prstGeom>
           <a:solidFill>
-            <a:srgbClr val="F3F7FA"/>
+            <a:srgbClr val="FBF4F2"/>
           </a:solidFill>
           <a:ln w="12700">
             <a:solidFill>
-              <a:srgbClr val="D8E2EA"/>
+              <a:srgbClr val="E7D6D1"/>
             </a:solidFill>
             <a:prstDash val="solid"/>
           </a:ln>
           <a:effectLst>
             <a:outerShdw sx="100000" sy="100000" kx="0" ky="0" algn="bl" rotWithShape="0" blurRad="88900" dist="38100" dir="5400000">
-              <a:srgbClr val="5B6B7B">
+              <a:srgbClr val="7A5C5E">
                 <a:alpha val="18000"/>
               </a:srgbClr>
             </a:outerShdw>
@@ -2610,7 +3429,7 @@
             <a:avLst/>
           </a:prstGeom>
           <a:solidFill>
-            <a:srgbClr val="0B5D7A"/>
+            <a:srgbClr val="BE0000"/>
           </a:solidFill>
           <a:ln/>
         </p:spPr>
@@ -2681,7 +3500,7 @@
             <a:r>
               <a:rPr lang="en-US" sz="1700" b="1" dirty="0">
                 <a:solidFill>
-                  <a:srgbClr val="0B5D7A"/>
+                  <a:srgbClr val="BE0000"/>
                 </a:solidFill>
                 <a:latin typeface="Cambria" pitchFamily="34" charset="0"/>
                 <a:ea typeface="Cambria" pitchFamily="34" charset="-122"/>
@@ -2720,13 +3539,13 @@
             <a:r>
               <a:rPr lang="en-US" sz="1250" dirty="0">
                 <a:solidFill>
-                  <a:srgbClr val="1E293B"/>
+                  <a:srgbClr val="2A1618"/>
                 </a:solidFill>
                 <a:latin typeface="Calibri" pitchFamily="34" charset="0"/>
                 <a:ea typeface="Calibri" pitchFamily="34" charset="-122"/>
                 <a:cs typeface="Calibri" pitchFamily="34" charset="-120"/>
               </a:rPr>
-              <a:t>Same conv trunk as the measured CNN, head → fc(3) for (x,y,z) in mm. 8-fold position cross-validation; lateral and depth error reported separately.</a:t>
+              <a:t>Same conv trunk as the measured CNN, head to fc(3) for (x,y,z) in mm. 8-fold position cross-validation; lateral and depth error reported separately.</a:t>
             </a:r>
             <a:endParaRPr lang="en-US" sz="1250" dirty="0"/>
           </a:p>
@@ -2791,13 +3610,13 @@
             <a:r>
               <a:rPr lang="en-US" sz="2900" b="1" dirty="0">
                 <a:solidFill>
-                  <a:srgbClr val="1E293B"/>
+                  <a:srgbClr val="2A1618"/>
                 </a:solidFill>
                 <a:latin typeface="Cambria" pitchFamily="34" charset="0"/>
                 <a:ea typeface="Cambria" pitchFamily="34" charset="-122"/>
                 <a:cs typeface="Cambria" pitchFamily="34" charset="-120"/>
               </a:rPr>
-              <a:t>Depth planes and the signal they carry</a:t>
+              <a:t>The simulated setup, in pictures</a:t>
             </a:r>
             <a:endParaRPr lang="en-US" sz="2900" dirty="0"/>
           </a:p>
@@ -2830,21 +3649,55 @@
             <a:r>
               <a:rPr lang="en-US" sz="1400" b="1" dirty="0">
                 <a:solidFill>
-                  <a:srgbClr val="1C9AA8"/>
+                  <a:srgbClr val="BE0000"/>
                 </a:solidFill>
                 <a:latin typeface="Calibri" pitchFamily="34" charset="0"/>
                 <a:ea typeface="Calibri" pitchFamily="34" charset="-122"/>
                 <a:cs typeface="Calibri" pitchFamily="34" charset="-120"/>
               </a:rPr>
-              <a:t>13 tumor heights — the perturbation peaks at the radiating patch and fades with distance</a:t>
+              <a:t>HFSS model of the antenna array, phantom and tumor</a:t>
             </a:r>
             <a:endParaRPr lang="en-US" sz="1400" dirty="0"/>
           </a:p>
         </p:txBody>
+      </p:sp>
+      <p:sp>
+        <p:nvSpPr>
+          <p:cNvPr id="4" name="Shape 2"/>
+          <p:cNvSpPr/>
+          <p:nvPr/>
+        </p:nvSpPr>
+        <p:spPr>
+          <a:xfrm>
+            <a:off x="960120" y="1645920"/>
+            <a:ext cx="4937760" cy="4069080"/>
+          </a:xfrm>
+          <a:prstGeom prst="roundRect">
+            <a:avLst>
+              <a:gd name="adj" fmla="val 2022"/>
+            </a:avLst>
+          </a:prstGeom>
+          <a:solidFill>
+            <a:srgbClr val="FBF4F2"/>
+          </a:solidFill>
+          <a:ln w="12700">
+            <a:solidFill>
+              <a:srgbClr val="E7D6D1"/>
+            </a:solidFill>
+            <a:prstDash val="solid"/>
+          </a:ln>
+          <a:effectLst>
+            <a:outerShdw sx="100000" sy="100000" kx="0" ky="0" algn="bl" rotWithShape="0" blurRad="88900" dist="38100" dir="5400000">
+              <a:srgbClr val="7A5C5E">
+                <a:alpha val="18000"/>
+              </a:srgbClr>
+            </a:outerShdw>
+          </a:effectLst>
+        </p:spPr>
       </p:sp>
       <p:pic>
         <p:nvPicPr>
-          <p:cNvPr id="4" name="Image 0" descr="sim_dS_vs_depth.png">    </p:cNvPr>
+          <p:cNvPr id="5" name="Image 0" descr="setup_photos/sim_model.png">    </p:cNvPr>
           <p:cNvPicPr>
             <a:picLocks noChangeAspect="1"/>
           </p:cNvPicPr>
@@ -2858,8 +3711,8 @@
         </p:blipFill>
         <p:spPr>
           <a:xfrm>
-            <a:off x="502920" y="1600200"/>
-            <a:ext cx="7315200" cy="4434840"/>
+            <a:off x="1051560" y="1737360"/>
+            <a:ext cx="4754880" cy="3566160"/>
           </a:xfrm>
           <a:prstGeom prst="rect">
             <a:avLst/>
@@ -2868,180 +3721,176 @@
       </p:pic>
       <p:sp>
         <p:nvSpPr>
-          <p:cNvPr id="5" name="Shape 2"/>
-          <p:cNvSpPr/>
-          <p:nvPr/>
-        </p:nvSpPr>
-        <p:spPr>
-          <a:xfrm>
-            <a:off x="8046720" y="1600200"/>
-            <a:ext cx="3611880" cy="4434840"/>
+          <p:cNvPr id="6" name="Text 3"/>
+          <p:cNvSpPr/>
+          <p:nvPr/>
+        </p:nvSpPr>
+        <p:spPr>
+          <a:xfrm>
+            <a:off x="960120" y="5321808"/>
+            <a:ext cx="4937760" cy="365760"/>
+          </a:xfrm>
+          <a:prstGeom prst="rect">
+            <a:avLst/>
+          </a:prstGeom>
+          <a:noFill/>
+          <a:ln/>
+        </p:spPr>
+        <p:txBody>
+          <a:bodyPr wrap="square" lIns="0" tIns="0" rIns="0" bIns="0" rtlCol="0" anchor="ctr"/>
+          <a:lstStyle/>
+          <a:p>
+            <a:pPr algn="ctr" indent="0" marL="0">
+              <a:buNone/>
+            </a:pPr>
+            <a:r>
+              <a:rPr lang="en-US" sz="1300" b="1" dirty="0">
+                <a:solidFill>
+                  <a:srgbClr val="2A1618"/>
+                </a:solidFill>
+                <a:latin typeface="Calibri" pitchFamily="34" charset="0"/>
+                <a:ea typeface="Calibri" pitchFamily="34" charset="-122"/>
+                <a:cs typeface="Calibri" pitchFamily="34" charset="-120"/>
+              </a:rPr>
+              <a:t>Full HFSS model</a:t>
+            </a:r>
+            <a:endParaRPr lang="en-US" sz="1300" dirty="0"/>
+          </a:p>
+        </p:txBody>
+      </p:sp>
+      <p:sp>
+        <p:nvSpPr>
+          <p:cNvPr id="7" name="Shape 4"/>
+          <p:cNvSpPr/>
+          <p:nvPr/>
+        </p:nvSpPr>
+        <p:spPr>
+          <a:xfrm>
+            <a:off x="6263640" y="1645920"/>
+            <a:ext cx="4937760" cy="4069080"/>
           </a:xfrm>
           <a:prstGeom prst="roundRect">
             <a:avLst>
-              <a:gd name="adj" fmla="val 2278"/>
+              <a:gd name="adj" fmla="val 2022"/>
             </a:avLst>
           </a:prstGeom>
           <a:solidFill>
-            <a:srgbClr val="F3F7FA"/>
+            <a:srgbClr val="FBF4F2"/>
           </a:solidFill>
           <a:ln w="12700">
             <a:solidFill>
-              <a:srgbClr val="D8E2EA"/>
+              <a:srgbClr val="E7D6D1"/>
             </a:solidFill>
             <a:prstDash val="solid"/>
           </a:ln>
           <a:effectLst>
             <a:outerShdw sx="100000" sy="100000" kx="0" ky="0" algn="bl" rotWithShape="0" blurRad="88900" dist="38100" dir="5400000">
-              <a:srgbClr val="5B6B7B">
+              <a:srgbClr val="7A5C5E">
                 <a:alpha val="18000"/>
               </a:srgbClr>
             </a:outerShdw>
           </a:effectLst>
         </p:spPr>
       </p:sp>
-      <p:sp>
-        <p:nvSpPr>
-          <p:cNvPr id="6" name="Text 3"/>
-          <p:cNvSpPr/>
-          <p:nvPr/>
-        </p:nvSpPr>
-        <p:spPr>
-          <a:xfrm>
-            <a:off x="8275320" y="1783080"/>
-            <a:ext cx="3200400" cy="365760"/>
-          </a:xfrm>
-          <a:prstGeom prst="rect">
-            <a:avLst/>
-          </a:prstGeom>
-          <a:noFill/>
-          <a:ln/>
-        </p:spPr>
-        <p:txBody>
-          <a:bodyPr wrap="square" lIns="0" tIns="0" rIns="0" bIns="0" rtlCol="0" anchor="ctr"/>
-          <a:lstStyle/>
-          <a:p>
-            <a:pPr indent="0" marL="0">
-              <a:buNone/>
-            </a:pPr>
-            <a:r>
-              <a:rPr lang="en-US" sz="1600" b="1" dirty="0">
-                <a:solidFill>
-                  <a:srgbClr val="0B5D7A"/>
-                </a:solidFill>
-                <a:latin typeface="Cambria" pitchFamily="34" charset="0"/>
-                <a:ea typeface="Cambria" pitchFamily="34" charset="-122"/>
-                <a:cs typeface="Cambria" pitchFamily="34" charset="-120"/>
-              </a:rPr>
-              <a:t>The physical driver</a:t>
-            </a:r>
-            <a:endParaRPr lang="en-US" sz="1600" dirty="0"/>
-          </a:p>
-        </p:txBody>
-      </p:sp>
-      <p:sp>
-        <p:nvSpPr>
-          <p:cNvPr id="7" name="Text 4"/>
-          <p:cNvSpPr/>
-          <p:nvPr/>
-        </p:nvSpPr>
-        <p:spPr>
-          <a:xfrm>
-            <a:off x="8275320" y="2286000"/>
-            <a:ext cx="3246120" cy="3657600"/>
-          </a:xfrm>
-          <a:prstGeom prst="rect">
-            <a:avLst/>
-          </a:prstGeom>
-          <a:noFill/>
-          <a:ln/>
-        </p:spPr>
-        <p:txBody>
-          <a:bodyPr wrap="square" lIns="0" tIns="0" rIns="0" bIns="0" rtlCol="0" anchor="t"/>
-          <a:lstStyle/>
-          <a:p>
-            <a:pPr marL="342900" indent="-342900">
-              <a:spcAft>
-                <a:spcPts val="800"/>
-              </a:spcAft>
-              <a:buSzPct val="100000"/>
-              <a:buChar char="•"/>
-            </a:pPr>
-            <a:r>
-              <a:rPr lang="en-US" sz="1200" dirty="0">
-                <a:solidFill>
-                  <a:srgbClr val="1E293B"/>
+      <p:pic>
+        <p:nvPicPr>
+          <p:cNvPr id="8" name="Image 1" descr="setup_photos/sim_closeup.png">    </p:cNvPr>
+          <p:cNvPicPr>
+            <a:picLocks noChangeAspect="1"/>
+          </p:cNvPicPr>
+          <p:nvPr/>
+        </p:nvPicPr>
+        <p:blipFill>
+          <a:blip r:embed="rId2"/>
+          <a:stretch>
+            <a:fillRect/>
+          </a:stretch>
+        </p:blipFill>
+        <p:spPr>
+          <a:xfrm>
+            <a:off x="6355080" y="1737360"/>
+            <a:ext cx="4754880" cy="3566160"/>
+          </a:xfrm>
+          <a:prstGeom prst="rect">
+            <a:avLst/>
+          </a:prstGeom>
+        </p:spPr>
+      </p:pic>
+      <p:sp>
+        <p:nvSpPr>
+          <p:cNvPr id="9" name="Text 5"/>
+          <p:cNvSpPr/>
+          <p:nvPr/>
+        </p:nvSpPr>
+        <p:spPr>
+          <a:xfrm>
+            <a:off x="6263640" y="5321808"/>
+            <a:ext cx="4937760" cy="365760"/>
+          </a:xfrm>
+          <a:prstGeom prst="rect">
+            <a:avLst/>
+          </a:prstGeom>
+          <a:noFill/>
+          <a:ln/>
+        </p:spPr>
+        <p:txBody>
+          <a:bodyPr wrap="square" lIns="0" tIns="0" rIns="0" bIns="0" rtlCol="0" anchor="ctr"/>
+          <a:lstStyle/>
+          <a:p>
+            <a:pPr algn="ctr" indent="0" marL="0">
+              <a:buNone/>
+            </a:pPr>
+            <a:r>
+              <a:rPr lang="en-US" sz="1300" b="1" dirty="0">
+                <a:solidFill>
+                  <a:srgbClr val="2A1618"/>
                 </a:solidFill>
                 <a:latin typeface="Calibri" pitchFamily="34" charset="0"/>
                 <a:ea typeface="Calibri" pitchFamily="34" charset="-122"/>
                 <a:cs typeface="Calibri" pitchFamily="34" charset="-120"/>
               </a:rPr>
-              <a:t>ΔS = tumor − empty, averaged over frequency and all 16 S-parameters.</a:t>
-            </a:r>
-            <a:endParaRPr lang="en-US" sz="1200" dirty="0"/>
-          </a:p>
-          <a:p>
-            <a:pPr marL="342900" indent="-342900">
-              <a:spcAft>
-                <a:spcPts val="800"/>
-              </a:spcAft>
-              <a:buSzPct val="100000"/>
-              <a:buChar char="•"/>
-            </a:pPr>
-            <a:r>
-              <a:rPr lang="en-US" sz="1200" dirty="0">
-                <a:solidFill>
-                  <a:srgbClr val="1E293B"/>
+              <a:t>Antennas + tumor closeup</a:t>
+            </a:r>
+            <a:endParaRPr lang="en-US" sz="1300" dirty="0"/>
+          </a:p>
+        </p:txBody>
+      </p:sp>
+      <p:sp>
+        <p:nvSpPr>
+          <p:cNvPr id="10" name="Text 6"/>
+          <p:cNvSpPr/>
+          <p:nvPr/>
+        </p:nvSpPr>
+        <p:spPr>
+          <a:xfrm>
+            <a:off x="548640" y="5532120"/>
+            <a:ext cx="11091672" cy="457200"/>
+          </a:xfrm>
+          <a:prstGeom prst="rect">
+            <a:avLst/>
+          </a:prstGeom>
+          <a:noFill/>
+          <a:ln/>
+        </p:spPr>
+        <p:txBody>
+          <a:bodyPr wrap="square" lIns="0" tIns="0" rIns="0" bIns="0" rtlCol="0" anchor="ctr"/>
+          <a:lstStyle/>
+          <a:p>
+            <a:pPr algn="ctr" indent="0" marL="0">
+              <a:buNone/>
+            </a:pPr>
+            <a:r>
+              <a:rPr lang="en-US" sz="1250" i="1" dirty="0">
+                <a:solidFill>
+                  <a:srgbClr val="836A68"/>
                 </a:solidFill>
                 <a:latin typeface="Calibri" pitchFamily="34" charset="0"/>
                 <a:ea typeface="Calibri" pitchFamily="34" charset="-122"/>
                 <a:cs typeface="Calibri" pitchFamily="34" charset="-120"/>
               </a:rPr>
-              <a:t>Port/feed is at z = +3 mm, but the radiating patch sits ~15–20 mm in (feed-line offset).</a:t>
-            </a:r>
-            <a:endParaRPr lang="en-US" sz="1200" dirty="0"/>
-          </a:p>
-          <a:p>
-            <a:pPr marL="342900" indent="-342900">
-              <a:spcAft>
-                <a:spcPts val="800"/>
-              </a:spcAft>
-              <a:buSzPct val="100000"/>
-              <a:buChar char="•"/>
-            </a:pPr>
-            <a:r>
-              <a:rPr lang="en-US" sz="1200" dirty="0">
-                <a:solidFill>
-                  <a:srgbClr val="1E293B"/>
-                </a:solidFill>
-                <a:latin typeface="Calibri" pitchFamily="34" charset="0"/>
-                <a:ea typeface="Calibri" pitchFamily="34" charset="-122"/>
-                <a:cs typeface="Calibri" pitchFamily="34" charset="-120"/>
-              </a:rPr>
-              <a:t>ΔS peaks right at the patch (~15–20 mm) — where the tumor is nearest the radiator.</a:t>
-            </a:r>
-            <a:endParaRPr lang="en-US" sz="1200" dirty="0"/>
-          </a:p>
-          <a:p>
-            <a:pPr marL="342900" indent="-342900">
-              <a:spcAft>
-                <a:spcPts val="800"/>
-              </a:spcAft>
-              <a:buSzPct val="100000"/>
-              <a:buChar char="•"/>
-            </a:pPr>
-            <a:r>
-              <a:rPr lang="en-US" sz="1200" dirty="0">
-                <a:solidFill>
-                  <a:srgbClr val="1E293B"/>
-                </a:solidFill>
-                <a:latin typeface="Calibri" pitchFamily="34" charset="0"/>
-                <a:ea typeface="Calibri" pitchFamily="34" charset="-122"/>
-                <a:cs typeface="Calibri" pitchFamily="34" charset="-120"/>
-              </a:rPr>
-              <a:t>Falls off both ways; far depths carry the least signal → localization degrades there. (Measured tumor sat at z = +40 mm.)</a:t>
-            </a:r>
-            <a:endParaRPr lang="en-US" sz="1200" dirty="0"/>
+              <a:t>Replace the placeholders in regression_deck/setup_photos/ (sim_model.*, sim_closeup.*) with real HFSS screenshots.</a:t>
+            </a:r>
+            <a:endParaRPr lang="en-US" sz="1250" dirty="0"/>
           </a:p>
         </p:txBody>
       </p:sp>
@@ -3104,13 +3953,13 @@
             <a:r>
               <a:rPr lang="en-US" sz="2900" b="1" dirty="0">
                 <a:solidFill>
-                  <a:srgbClr val="1E293B"/>
+                  <a:srgbClr val="2A1618"/>
                 </a:solidFill>
                 <a:latin typeface="Cambria" pitchFamily="34" charset="0"/>
                 <a:ea typeface="Cambria" pitchFamily="34" charset="-122"/>
                 <a:cs typeface="Cambria" pitchFamily="34" charset="-120"/>
               </a:rPr>
-              <a:t>The 3D localization network</a:t>
+              <a:t>Depth planes and the signal they carry</a:t>
             </a:r>
             <a:endParaRPr lang="en-US" sz="2900" dirty="0"/>
           </a:p>
@@ -3143,46 +3992,70 @@
             <a:r>
               <a:rPr lang="en-US" sz="1400" b="1" dirty="0">
                 <a:solidFill>
-                  <a:srgbClr val="1C9AA8"/>
+                  <a:srgbClr val="BE0000"/>
                 </a:solidFill>
                 <a:latin typeface="Calibri" pitchFamily="34" charset="0"/>
                 <a:ea typeface="Calibri" pitchFamily="34" charset="-122"/>
                 <a:cs typeface="Calibri" pitchFamily="34" charset="-120"/>
               </a:rPr>
-              <a:t>Same architecture as the measured CNN — one extra output for depth</a:t>
+              <a:t>13 tumor heights; the perturbation peaks at the radiating patch and fades with distance</a:t>
             </a:r>
             <a:endParaRPr lang="en-US" sz="1400" dirty="0"/>
           </a:p>
         </p:txBody>
       </p:sp>
-      <p:sp>
-        <p:nvSpPr>
-          <p:cNvPr id="4" name="Shape 2"/>
-          <p:cNvSpPr/>
-          <p:nvPr/>
-        </p:nvSpPr>
-        <p:spPr>
-          <a:xfrm>
-            <a:off x="548640" y="1600200"/>
-            <a:ext cx="11091672" cy="1024128"/>
+      <p:pic>
+        <p:nvPicPr>
+          <p:cNvPr id="4" name="Image 0" descr="sim_dS_vs_depth.png">    </p:cNvPr>
+          <p:cNvPicPr>
+            <a:picLocks noChangeAspect="1"/>
+          </p:cNvPicPr>
+          <p:nvPr/>
+        </p:nvPicPr>
+        <p:blipFill>
+          <a:blip r:embed="rId1"/>
+          <a:stretch>
+            <a:fillRect/>
+          </a:stretch>
+        </p:blipFill>
+        <p:spPr>
+          <a:xfrm>
+            <a:off x="411480" y="1783080"/>
+            <a:ext cx="7315200" cy="4032504"/>
+          </a:xfrm>
+          <a:prstGeom prst="rect">
+            <a:avLst/>
+          </a:prstGeom>
+        </p:spPr>
+      </p:pic>
+      <p:sp>
+        <p:nvSpPr>
+          <p:cNvPr id="5" name="Shape 2"/>
+          <p:cNvSpPr/>
+          <p:nvPr/>
+        </p:nvSpPr>
+        <p:spPr>
+          <a:xfrm>
+            <a:off x="7955280" y="1645920"/>
+            <a:ext cx="3703320" cy="4434840"/>
           </a:xfrm>
           <a:prstGeom prst="roundRect">
             <a:avLst>
-              <a:gd name="adj" fmla="val 8036"/>
+              <a:gd name="adj" fmla="val 2222"/>
             </a:avLst>
           </a:prstGeom>
           <a:solidFill>
-            <a:srgbClr val="F3F7FA"/>
+            <a:srgbClr val="FBF4F2"/>
           </a:solidFill>
           <a:ln w="12700">
             <a:solidFill>
-              <a:srgbClr val="D8E2EA"/>
+              <a:srgbClr val="E7D6D1"/>
             </a:solidFill>
             <a:prstDash val="solid"/>
           </a:ln>
           <a:effectLst>
             <a:outerShdw sx="100000" sy="100000" kx="0" ky="0" algn="bl" rotWithShape="0" blurRad="88900" dist="38100" dir="5400000">
-              <a:srgbClr val="5B6B7B">
+              <a:srgbClr val="7A5C5E">
                 <a:alpha val="18000"/>
               </a:srgbClr>
             </a:outerShdw>
@@ -3191,651 +4064,146 @@
       </p:sp>
       <p:sp>
         <p:nvSpPr>
-          <p:cNvPr id="5" name="Shape 3"/>
-          <p:cNvSpPr/>
-          <p:nvPr/>
-        </p:nvSpPr>
-        <p:spPr>
-          <a:xfrm>
-            <a:off x="777240" y="1856232"/>
-            <a:ext cx="512064" cy="512064"/>
-          </a:xfrm>
-          <a:prstGeom prst="ellipse">
-            <a:avLst/>
-          </a:prstGeom>
-          <a:solidFill>
-            <a:srgbClr val="1C9AA8"/>
-          </a:solidFill>
-          <a:ln/>
-        </p:spPr>
-      </p:sp>
-      <p:sp>
-        <p:nvSpPr>
-          <p:cNvPr id="6" name="Text 4"/>
-          <p:cNvSpPr/>
-          <p:nvPr/>
-        </p:nvSpPr>
-        <p:spPr>
-          <a:xfrm>
-            <a:off x="777240" y="1856232"/>
-            <a:ext cx="512064" cy="512064"/>
-          </a:xfrm>
-          <a:prstGeom prst="rect">
-            <a:avLst/>
-          </a:prstGeom>
-          <a:noFill/>
-          <a:ln/>
-        </p:spPr>
-        <p:txBody>
-          <a:bodyPr wrap="square" lIns="0" tIns="0" rIns="0" bIns="0" rtlCol="0" anchor="ctr"/>
-          <a:lstStyle/>
-          <a:p>
-            <a:pPr algn="ctr" indent="0" marL="0">
-              <a:buNone/>
-            </a:pPr>
-            <a:r>
-              <a:rPr lang="en-US" sz="2000" b="1" dirty="0">
-                <a:solidFill>
-                  <a:srgbClr val="FFFFFF"/>
+          <p:cNvPr id="6" name="Text 3"/>
+          <p:cNvSpPr/>
+          <p:nvPr/>
+        </p:nvSpPr>
+        <p:spPr>
+          <a:xfrm>
+            <a:off x="8183880" y="1828800"/>
+            <a:ext cx="3291840" cy="365760"/>
+          </a:xfrm>
+          <a:prstGeom prst="rect">
+            <a:avLst/>
+          </a:prstGeom>
+          <a:noFill/>
+          <a:ln/>
+        </p:spPr>
+        <p:txBody>
+          <a:bodyPr wrap="square" lIns="0" tIns="0" rIns="0" bIns="0" rtlCol="0" anchor="ctr"/>
+          <a:lstStyle/>
+          <a:p>
+            <a:pPr indent="0" marL="0">
+              <a:buNone/>
+            </a:pPr>
+            <a:r>
+              <a:rPr lang="en-US" sz="1600" b="1" dirty="0">
+                <a:solidFill>
+                  <a:srgbClr val="BE0000"/>
                 </a:solidFill>
                 <a:latin typeface="Cambria" pitchFamily="34" charset="0"/>
                 <a:ea typeface="Cambria" pitchFamily="34" charset="-122"/>
                 <a:cs typeface="Cambria" pitchFamily="34" charset="-120"/>
               </a:rPr>
-              <a:t>1</a:t>
-            </a:r>
-            <a:endParaRPr lang="en-US" sz="2000" dirty="0"/>
-          </a:p>
-        </p:txBody>
-      </p:sp>
-      <p:sp>
-        <p:nvSpPr>
-          <p:cNvPr id="7" name="Text 5"/>
-          <p:cNvSpPr/>
-          <p:nvPr/>
-        </p:nvSpPr>
-        <p:spPr>
-          <a:xfrm>
-            <a:off x="1508760" y="1746504"/>
-            <a:ext cx="2011680" cy="731520"/>
-          </a:xfrm>
-          <a:prstGeom prst="rect">
-            <a:avLst/>
-          </a:prstGeom>
-          <a:noFill/>
-          <a:ln/>
-        </p:spPr>
-        <p:txBody>
-          <a:bodyPr wrap="square" lIns="0" tIns="0" rIns="0" bIns="0" rtlCol="0" anchor="ctr"/>
-          <a:lstStyle/>
-          <a:p>
-            <a:pPr indent="0" marL="0">
-              <a:buNone/>
-            </a:pPr>
-            <a:r>
-              <a:rPr lang="en-US" sz="1700" b="1" dirty="0">
-                <a:solidFill>
-                  <a:srgbClr val="1C9AA8"/>
-                </a:solidFill>
-                <a:latin typeface="Cambria" pitchFamily="34" charset="0"/>
-                <a:ea typeface="Cambria" pitchFamily="34" charset="-122"/>
-                <a:cs typeface="Cambria" pitchFamily="34" charset="-120"/>
-              </a:rPr>
-              <a:t>Input</a:t>
-            </a:r>
-            <a:endParaRPr lang="en-US" sz="1700" dirty="0"/>
-          </a:p>
-        </p:txBody>
-      </p:sp>
-      <p:sp>
-        <p:nvSpPr>
-          <p:cNvPr id="8" name="Text 6"/>
-          <p:cNvSpPr/>
-          <p:nvPr/>
-        </p:nvSpPr>
-        <p:spPr>
-          <a:xfrm>
-            <a:off x="3611880" y="1655064"/>
-            <a:ext cx="7845552" cy="914400"/>
-          </a:xfrm>
-          <a:prstGeom prst="rect">
-            <a:avLst/>
-          </a:prstGeom>
-          <a:noFill/>
-          <a:ln/>
-        </p:spPr>
-        <p:txBody>
-          <a:bodyPr wrap="square" lIns="0" tIns="0" rIns="0" bIns="0" rtlCol="0" anchor="ctr"/>
-          <a:lstStyle/>
-          <a:p>
-            <a:pPr indent="0" marL="0">
-              <a:buNone/>
-            </a:pPr>
-            <a:r>
-              <a:rPr lang="en-US" sz="1250" dirty="0">
-                <a:solidFill>
-                  <a:srgbClr val="1E293B"/>
+              <a:t>The physical driver</a:t>
+            </a:r>
+            <a:endParaRPr lang="en-US" sz="1600" dirty="0"/>
+          </a:p>
+        </p:txBody>
+      </p:sp>
+      <p:sp>
+        <p:nvSpPr>
+          <p:cNvPr id="7" name="Text 4"/>
+          <p:cNvSpPr/>
+          <p:nvPr/>
+        </p:nvSpPr>
+        <p:spPr>
+          <a:xfrm>
+            <a:off x="8183880" y="2331720"/>
+            <a:ext cx="3291840" cy="3657600"/>
+          </a:xfrm>
+          <a:prstGeom prst="rect">
+            <a:avLst/>
+          </a:prstGeom>
+          <a:noFill/>
+          <a:ln/>
+        </p:spPr>
+        <p:txBody>
+          <a:bodyPr wrap="square" lIns="0" tIns="0" rIns="0" bIns="0" rtlCol="0" anchor="t"/>
+          <a:lstStyle/>
+          <a:p>
+            <a:pPr marL="342900" indent="-342900">
+              <a:spcAft>
+                <a:spcPts val="800"/>
+              </a:spcAft>
+              <a:buSzPct val="100000"/>
+              <a:buChar char="•"/>
+            </a:pPr>
+            <a:r>
+              <a:rPr lang="en-US" sz="1200" dirty="0">
+                <a:solidFill>
+                  <a:srgbClr val="2A1618"/>
                 </a:solidFill>
                 <a:latin typeface="Calibri" pitchFamily="34" charset="0"/>
                 <a:ea typeface="Calibri" pitchFamily="34" charset="-122"/>
                 <a:cs typeface="Calibri" pitchFamily="34" charset="-120"/>
               </a:rPr>
-              <a:t>ΔS as a 32×256 image (16 S-params × [mag, phase], 256 frequencies). Per-sample z-score normalization.</a:t>
-            </a:r>
-            <a:endParaRPr lang="en-US" sz="1250" dirty="0"/>
-          </a:p>
-        </p:txBody>
-      </p:sp>
-      <p:sp>
-        <p:nvSpPr>
-          <p:cNvPr id="9" name="Shape 7"/>
-          <p:cNvSpPr/>
-          <p:nvPr/>
-        </p:nvSpPr>
-        <p:spPr>
-          <a:xfrm>
-            <a:off x="548640" y="2770632"/>
-            <a:ext cx="11091672" cy="1024128"/>
-          </a:xfrm>
-          <a:prstGeom prst="roundRect">
-            <a:avLst>
-              <a:gd name="adj" fmla="val 8036"/>
-            </a:avLst>
-          </a:prstGeom>
-          <a:solidFill>
-            <a:srgbClr val="F3F7FA"/>
-          </a:solidFill>
-          <a:ln w="12700">
-            <a:solidFill>
-              <a:srgbClr val="D8E2EA"/>
-            </a:solidFill>
-            <a:prstDash val="solid"/>
-          </a:ln>
-          <a:effectLst>
-            <a:outerShdw sx="100000" sy="100000" kx="0" ky="0" algn="bl" rotWithShape="0" blurRad="88900" dist="38100" dir="5400000">
-              <a:srgbClr val="5B6B7B">
-                <a:alpha val="18000"/>
-              </a:srgbClr>
-            </a:outerShdw>
-          </a:effectLst>
-        </p:spPr>
-      </p:sp>
-      <p:sp>
-        <p:nvSpPr>
-          <p:cNvPr id="10" name="Shape 8"/>
-          <p:cNvSpPr/>
-          <p:nvPr/>
-        </p:nvSpPr>
-        <p:spPr>
-          <a:xfrm>
-            <a:off x="777240" y="3026664"/>
-            <a:ext cx="512064" cy="512064"/>
-          </a:xfrm>
-          <a:prstGeom prst="ellipse">
-            <a:avLst/>
-          </a:prstGeom>
-          <a:solidFill>
-            <a:srgbClr val="1C9AA8"/>
-          </a:solidFill>
-          <a:ln/>
-        </p:spPr>
-      </p:sp>
-      <p:sp>
-        <p:nvSpPr>
-          <p:cNvPr id="11" name="Text 9"/>
-          <p:cNvSpPr/>
-          <p:nvPr/>
-        </p:nvSpPr>
-        <p:spPr>
-          <a:xfrm>
-            <a:off x="777240" y="3026664"/>
-            <a:ext cx="512064" cy="512064"/>
-          </a:xfrm>
-          <a:prstGeom prst="rect">
-            <a:avLst/>
-          </a:prstGeom>
-          <a:noFill/>
-          <a:ln/>
-        </p:spPr>
-        <p:txBody>
-          <a:bodyPr wrap="square" lIns="0" tIns="0" rIns="0" bIns="0" rtlCol="0" anchor="ctr"/>
-          <a:lstStyle/>
-          <a:p>
-            <a:pPr algn="ctr" indent="0" marL="0">
-              <a:buNone/>
-            </a:pPr>
-            <a:r>
-              <a:rPr lang="en-US" sz="2000" b="1" dirty="0">
-                <a:solidFill>
-                  <a:srgbClr val="FFFFFF"/>
-                </a:solidFill>
-                <a:latin typeface="Cambria" pitchFamily="34" charset="0"/>
-                <a:ea typeface="Cambria" pitchFamily="34" charset="-122"/>
-                <a:cs typeface="Cambria" pitchFamily="34" charset="-120"/>
-              </a:rPr>
-              <a:t>2</a:t>
-            </a:r>
-            <a:endParaRPr lang="en-US" sz="2000" dirty="0"/>
-          </a:p>
-        </p:txBody>
-      </p:sp>
-      <p:sp>
-        <p:nvSpPr>
-          <p:cNvPr id="12" name="Text 10"/>
-          <p:cNvSpPr/>
-          <p:nvPr/>
-        </p:nvSpPr>
-        <p:spPr>
-          <a:xfrm>
-            <a:off x="1508760" y="2916936"/>
-            <a:ext cx="2011680" cy="731520"/>
-          </a:xfrm>
-          <a:prstGeom prst="rect">
-            <a:avLst/>
-          </a:prstGeom>
-          <a:noFill/>
-          <a:ln/>
-        </p:spPr>
-        <p:txBody>
-          <a:bodyPr wrap="square" lIns="0" tIns="0" rIns="0" bIns="0" rtlCol="0" anchor="ctr"/>
-          <a:lstStyle/>
-          <a:p>
-            <a:pPr indent="0" marL="0">
-              <a:buNone/>
-            </a:pPr>
-            <a:r>
-              <a:rPr lang="en-US" sz="1700" b="1" dirty="0">
-                <a:solidFill>
-                  <a:srgbClr val="1C9AA8"/>
-                </a:solidFill>
-                <a:latin typeface="Cambria" pitchFamily="34" charset="0"/>
-                <a:ea typeface="Cambria" pitchFamily="34" charset="-122"/>
-                <a:cs typeface="Cambria" pitchFamily="34" charset="-120"/>
-              </a:rPr>
-              <a:t>Trunk</a:t>
-            </a:r>
-            <a:endParaRPr lang="en-US" sz="1700" dirty="0"/>
-          </a:p>
-        </p:txBody>
-      </p:sp>
-      <p:sp>
-        <p:nvSpPr>
-          <p:cNvPr id="13" name="Text 11"/>
-          <p:cNvSpPr/>
-          <p:nvPr/>
-        </p:nvSpPr>
-        <p:spPr>
-          <a:xfrm>
-            <a:off x="3611880" y="2825496"/>
-            <a:ext cx="7845552" cy="914400"/>
-          </a:xfrm>
-          <a:prstGeom prst="rect">
-            <a:avLst/>
-          </a:prstGeom>
-          <a:noFill/>
-          <a:ln/>
-        </p:spPr>
-        <p:txBody>
-          <a:bodyPr wrap="square" lIns="0" tIns="0" rIns="0" bIns="0" rtlCol="0" anchor="ctr"/>
-          <a:lstStyle/>
-          <a:p>
-            <a:pPr indent="0" marL="0">
-              <a:buNone/>
-            </a:pPr>
-            <a:r>
-              <a:rPr lang="en-US" sz="1250" dirty="0">
-                <a:solidFill>
-                  <a:srgbClr val="1E293B"/>
+              <a:t>dS = tumor minus empty, averaged over frequency and all 16 S-parameters.</a:t>
+            </a:r>
+            <a:endParaRPr lang="en-US" sz="1200" dirty="0"/>
+          </a:p>
+          <a:p>
+            <a:pPr marL="342900" indent="-342900">
+              <a:spcAft>
+                <a:spcPts val="800"/>
+              </a:spcAft>
+              <a:buSzPct val="100000"/>
+              <a:buChar char="•"/>
+            </a:pPr>
+            <a:r>
+              <a:rPr lang="en-US" sz="1200" dirty="0">
+                <a:solidFill>
+                  <a:srgbClr val="2A1618"/>
                 </a:solidFill>
                 <a:latin typeface="Calibri" pitchFamily="34" charset="0"/>
                 <a:ea typeface="Calibri" pitchFamily="34" charset="-122"/>
                 <a:cs typeface="Calibri" pitchFamily="34" charset="-120"/>
               </a:rPr>
-              <a:t>2 conv blocks (32 filters each) + pooling + dropout — identical to the measured (x,y) CNN.</a:t>
-            </a:r>
-            <a:endParaRPr lang="en-US" sz="1250" dirty="0"/>
-          </a:p>
-        </p:txBody>
-      </p:sp>
-      <p:sp>
-        <p:nvSpPr>
-          <p:cNvPr id="14" name="Shape 12"/>
-          <p:cNvSpPr/>
-          <p:nvPr/>
-        </p:nvSpPr>
-        <p:spPr>
-          <a:xfrm>
-            <a:off x="548640" y="3941064"/>
-            <a:ext cx="11091672" cy="1024128"/>
-          </a:xfrm>
-          <a:prstGeom prst="roundRect">
-            <a:avLst>
-              <a:gd name="adj" fmla="val 8036"/>
-            </a:avLst>
-          </a:prstGeom>
-          <a:solidFill>
-            <a:srgbClr val="F3F7FA"/>
-          </a:solidFill>
-          <a:ln w="12700">
-            <a:solidFill>
-              <a:srgbClr val="D8E2EA"/>
-            </a:solidFill>
-            <a:prstDash val="solid"/>
-          </a:ln>
-          <a:effectLst>
-            <a:outerShdw sx="100000" sy="100000" kx="0" ky="0" algn="bl" rotWithShape="0" blurRad="88900" dist="38100" dir="5400000">
-              <a:srgbClr val="5B6B7B">
-                <a:alpha val="18000"/>
-              </a:srgbClr>
-            </a:outerShdw>
-          </a:effectLst>
-        </p:spPr>
-      </p:sp>
-      <p:sp>
-        <p:nvSpPr>
-          <p:cNvPr id="15" name="Shape 13"/>
-          <p:cNvSpPr/>
-          <p:nvPr/>
-        </p:nvSpPr>
-        <p:spPr>
-          <a:xfrm>
-            <a:off x="777240" y="4197096"/>
-            <a:ext cx="512064" cy="512064"/>
-          </a:xfrm>
-          <a:prstGeom prst="ellipse">
-            <a:avLst/>
-          </a:prstGeom>
-          <a:solidFill>
-            <a:srgbClr val="1C9AA8"/>
-          </a:solidFill>
-          <a:ln/>
-        </p:spPr>
-      </p:sp>
-      <p:sp>
-        <p:nvSpPr>
-          <p:cNvPr id="16" name="Text 14"/>
-          <p:cNvSpPr/>
-          <p:nvPr/>
-        </p:nvSpPr>
-        <p:spPr>
-          <a:xfrm>
-            <a:off x="777240" y="4197096"/>
-            <a:ext cx="512064" cy="512064"/>
-          </a:xfrm>
-          <a:prstGeom prst="rect">
-            <a:avLst/>
-          </a:prstGeom>
-          <a:noFill/>
-          <a:ln/>
-        </p:spPr>
-        <p:txBody>
-          <a:bodyPr wrap="square" lIns="0" tIns="0" rIns="0" bIns="0" rtlCol="0" anchor="ctr"/>
-          <a:lstStyle/>
-          <a:p>
-            <a:pPr algn="ctr" indent="0" marL="0">
-              <a:buNone/>
-            </a:pPr>
-            <a:r>
-              <a:rPr lang="en-US" sz="2000" b="1" dirty="0">
-                <a:solidFill>
-                  <a:srgbClr val="FFFFFF"/>
-                </a:solidFill>
-                <a:latin typeface="Cambria" pitchFamily="34" charset="0"/>
-                <a:ea typeface="Cambria" pitchFamily="34" charset="-122"/>
-                <a:cs typeface="Cambria" pitchFamily="34" charset="-120"/>
-              </a:rPr>
-              <a:t>3</a:t>
-            </a:r>
-            <a:endParaRPr lang="en-US" sz="2000" dirty="0"/>
-          </a:p>
-        </p:txBody>
-      </p:sp>
-      <p:sp>
-        <p:nvSpPr>
-          <p:cNvPr id="17" name="Text 15"/>
-          <p:cNvSpPr/>
-          <p:nvPr/>
-        </p:nvSpPr>
-        <p:spPr>
-          <a:xfrm>
-            <a:off x="1508760" y="4087368"/>
-            <a:ext cx="2011680" cy="731520"/>
-          </a:xfrm>
-          <a:prstGeom prst="rect">
-            <a:avLst/>
-          </a:prstGeom>
-          <a:noFill/>
-          <a:ln/>
-        </p:spPr>
-        <p:txBody>
-          <a:bodyPr wrap="square" lIns="0" tIns="0" rIns="0" bIns="0" rtlCol="0" anchor="ctr"/>
-          <a:lstStyle/>
-          <a:p>
-            <a:pPr indent="0" marL="0">
-              <a:buNone/>
-            </a:pPr>
-            <a:r>
-              <a:rPr lang="en-US" sz="1700" b="1" dirty="0">
-                <a:solidFill>
-                  <a:srgbClr val="1C9AA8"/>
-                </a:solidFill>
-                <a:latin typeface="Cambria" pitchFamily="34" charset="0"/>
-                <a:ea typeface="Cambria" pitchFamily="34" charset="-122"/>
-                <a:cs typeface="Cambria" pitchFamily="34" charset="-120"/>
-              </a:rPr>
-              <a:t>Head</a:t>
-            </a:r>
-            <a:endParaRPr lang="en-US" sz="1700" dirty="0"/>
-          </a:p>
-        </p:txBody>
-      </p:sp>
-      <p:sp>
-        <p:nvSpPr>
-          <p:cNvPr id="18" name="Text 16"/>
-          <p:cNvSpPr/>
-          <p:nvPr/>
-        </p:nvSpPr>
-        <p:spPr>
-          <a:xfrm>
-            <a:off x="3611880" y="3995928"/>
-            <a:ext cx="7845552" cy="914400"/>
-          </a:xfrm>
-          <a:prstGeom prst="rect">
-            <a:avLst/>
-          </a:prstGeom>
-          <a:noFill/>
-          <a:ln/>
-        </p:spPr>
-        <p:txBody>
-          <a:bodyPr wrap="square" lIns="0" tIns="0" rIns="0" bIns="0" rtlCol="0" anchor="ctr"/>
-          <a:lstStyle/>
-          <a:p>
-            <a:pPr indent="0" marL="0">
-              <a:buNone/>
-            </a:pPr>
-            <a:r>
-              <a:rPr lang="en-US" sz="1250" dirty="0">
-                <a:solidFill>
-                  <a:srgbClr val="1E293B"/>
+              <a:t>Port/feed is at z = +3 mm, but the radiating patch sits ~15 to 20 mm in (feed-line offset).</a:t>
+            </a:r>
+            <a:endParaRPr lang="en-US" sz="1200" dirty="0"/>
+          </a:p>
+          <a:p>
+            <a:pPr marL="342900" indent="-342900">
+              <a:spcAft>
+                <a:spcPts val="800"/>
+              </a:spcAft>
+              <a:buSzPct val="100000"/>
+              <a:buChar char="•"/>
+            </a:pPr>
+            <a:r>
+              <a:rPr lang="en-US" sz="1200" dirty="0">
+                <a:solidFill>
+                  <a:srgbClr val="2A1618"/>
                 </a:solidFill>
                 <a:latin typeface="Calibri" pitchFamily="34" charset="0"/>
                 <a:ea typeface="Calibri" pitchFamily="34" charset="-122"/>
                 <a:cs typeface="Calibri" pitchFamily="34" charset="-120"/>
               </a:rPr>
-              <a:t>fc(3) + regression → (x, y, z) in mm. Trained with an L2 coordinate loss, 60 epochs.</a:t>
-            </a:r>
-            <a:endParaRPr lang="en-US" sz="1250" dirty="0"/>
-          </a:p>
-        </p:txBody>
-      </p:sp>
-      <p:sp>
-        <p:nvSpPr>
-          <p:cNvPr id="19" name="Shape 17"/>
-          <p:cNvSpPr/>
-          <p:nvPr/>
-        </p:nvSpPr>
-        <p:spPr>
-          <a:xfrm>
-            <a:off x="548640" y="5111496"/>
-            <a:ext cx="11091672" cy="1024128"/>
-          </a:xfrm>
-          <a:prstGeom prst="roundRect">
-            <a:avLst>
-              <a:gd name="adj" fmla="val 8036"/>
-            </a:avLst>
-          </a:prstGeom>
-          <a:solidFill>
-            <a:srgbClr val="F3F7FA"/>
-          </a:solidFill>
-          <a:ln w="12700">
-            <a:solidFill>
-              <a:srgbClr val="D8E2EA"/>
-            </a:solidFill>
-            <a:prstDash val="solid"/>
-          </a:ln>
-          <a:effectLst>
-            <a:outerShdw sx="100000" sy="100000" kx="0" ky="0" algn="bl" rotWithShape="0" blurRad="88900" dist="38100" dir="5400000">
-              <a:srgbClr val="5B6B7B">
-                <a:alpha val="18000"/>
-              </a:srgbClr>
-            </a:outerShdw>
-          </a:effectLst>
-        </p:spPr>
-      </p:sp>
-      <p:sp>
-        <p:nvSpPr>
-          <p:cNvPr id="20" name="Shape 18"/>
-          <p:cNvSpPr/>
-          <p:nvPr/>
-        </p:nvSpPr>
-        <p:spPr>
-          <a:xfrm>
-            <a:off x="777240" y="5367528"/>
-            <a:ext cx="512064" cy="512064"/>
-          </a:xfrm>
-          <a:prstGeom prst="ellipse">
-            <a:avLst/>
-          </a:prstGeom>
-          <a:solidFill>
-            <a:srgbClr val="1C9AA8"/>
-          </a:solidFill>
-          <a:ln/>
-        </p:spPr>
-      </p:sp>
-      <p:sp>
-        <p:nvSpPr>
-          <p:cNvPr id="21" name="Text 19"/>
-          <p:cNvSpPr/>
-          <p:nvPr/>
-        </p:nvSpPr>
-        <p:spPr>
-          <a:xfrm>
-            <a:off x="777240" y="5367528"/>
-            <a:ext cx="512064" cy="512064"/>
-          </a:xfrm>
-          <a:prstGeom prst="rect">
-            <a:avLst/>
-          </a:prstGeom>
-          <a:noFill/>
-          <a:ln/>
-        </p:spPr>
-        <p:txBody>
-          <a:bodyPr wrap="square" lIns="0" tIns="0" rIns="0" bIns="0" rtlCol="0" anchor="ctr"/>
-          <a:lstStyle/>
-          <a:p>
-            <a:pPr algn="ctr" indent="0" marL="0">
-              <a:buNone/>
-            </a:pPr>
-            <a:r>
-              <a:rPr lang="en-US" sz="2000" b="1" dirty="0">
-                <a:solidFill>
-                  <a:srgbClr val="FFFFFF"/>
-                </a:solidFill>
-                <a:latin typeface="Cambria" pitchFamily="34" charset="0"/>
-                <a:ea typeface="Cambria" pitchFamily="34" charset="-122"/>
-                <a:cs typeface="Cambria" pitchFamily="34" charset="-120"/>
-              </a:rPr>
-              <a:t>4</a:t>
-            </a:r>
-            <a:endParaRPr lang="en-US" sz="2000" dirty="0"/>
-          </a:p>
-        </p:txBody>
-      </p:sp>
-      <p:sp>
-        <p:nvSpPr>
-          <p:cNvPr id="22" name="Text 20"/>
-          <p:cNvSpPr/>
-          <p:nvPr/>
-        </p:nvSpPr>
-        <p:spPr>
-          <a:xfrm>
-            <a:off x="1508760" y="5257800"/>
-            <a:ext cx="2011680" cy="731520"/>
-          </a:xfrm>
-          <a:prstGeom prst="rect">
-            <a:avLst/>
-          </a:prstGeom>
-          <a:noFill/>
-          <a:ln/>
-        </p:spPr>
-        <p:txBody>
-          <a:bodyPr wrap="square" lIns="0" tIns="0" rIns="0" bIns="0" rtlCol="0" anchor="ctr"/>
-          <a:lstStyle/>
-          <a:p>
-            <a:pPr indent="0" marL="0">
-              <a:buNone/>
-            </a:pPr>
-            <a:r>
-              <a:rPr lang="en-US" sz="1700" b="1" dirty="0">
-                <a:solidFill>
-                  <a:srgbClr val="1C9AA8"/>
-                </a:solidFill>
-                <a:latin typeface="Cambria" pitchFamily="34" charset="0"/>
-                <a:ea typeface="Cambria" pitchFamily="34" charset="-122"/>
-                <a:cs typeface="Cambria" pitchFamily="34" charset="-120"/>
-              </a:rPr>
-              <a:t>Evaluation</a:t>
-            </a:r>
-            <a:endParaRPr lang="en-US" sz="1700" dirty="0"/>
-          </a:p>
-        </p:txBody>
-      </p:sp>
-      <p:sp>
-        <p:nvSpPr>
-          <p:cNvPr id="23" name="Text 21"/>
-          <p:cNvSpPr/>
-          <p:nvPr/>
-        </p:nvSpPr>
-        <p:spPr>
-          <a:xfrm>
-            <a:off x="3611880" y="5166360"/>
-            <a:ext cx="7845552" cy="914400"/>
-          </a:xfrm>
-          <a:prstGeom prst="rect">
-            <a:avLst/>
-          </a:prstGeom>
-          <a:noFill/>
-          <a:ln/>
-        </p:spPr>
-        <p:txBody>
-          <a:bodyPr wrap="square" lIns="0" tIns="0" rIns="0" bIns="0" rtlCol="0" anchor="ctr"/>
-          <a:lstStyle/>
-          <a:p>
-            <a:pPr indent="0" marL="0">
-              <a:buNone/>
-            </a:pPr>
-            <a:r>
-              <a:rPr lang="en-US" sz="1250" dirty="0">
-                <a:solidFill>
-                  <a:srgbClr val="1E293B"/>
+              <a:t>dS peaks right at the patch (~15 to 20 mm), where the tumor is nearest the radiator.</a:t>
+            </a:r>
+            <a:endParaRPr lang="en-US" sz="1200" dirty="0"/>
+          </a:p>
+          <a:p>
+            <a:pPr marL="342900" indent="-342900">
+              <a:spcAft>
+                <a:spcPts val="800"/>
+              </a:spcAft>
+              <a:buSzPct val="100000"/>
+              <a:buChar char="•"/>
+            </a:pPr>
+            <a:r>
+              <a:rPr lang="en-US" sz="1200" dirty="0">
+                <a:solidFill>
+                  <a:srgbClr val="2A1618"/>
                 </a:solidFill>
                 <a:latin typeface="Calibri" pitchFamily="34" charset="0"/>
                 <a:ea typeface="Calibri" pitchFamily="34" charset="-122"/>
                 <a:cs typeface="Calibri" pitchFamily="34" charset="-120"/>
               </a:rPr>
-              <a:t>8-fold hold-out by POSITION (every position predicted once, out-of-fold). Lateral = √(Δx²+Δy²); depth = |Δz| — reported separately so one axis can't hide the other.</a:t>
-            </a:r>
-            <a:endParaRPr lang="en-US" sz="1250" dirty="0"/>
+              <a:t>Falls off both ways; far depths carry the least signal, so localization degrades there. (Measured tumor sat at z = +40 mm.)</a:t>
+            </a:r>
+            <a:endParaRPr lang="en-US" sz="1200" dirty="0"/>
           </a:p>
         </p:txBody>
       </p:sp>
@@ -3898,13 +4266,13 @@
             <a:r>
               <a:rPr lang="en-US" sz="2900" b="1" dirty="0">
                 <a:solidFill>
-                  <a:srgbClr val="1E293B"/>
+                  <a:srgbClr val="2A1618"/>
                 </a:solidFill>
                 <a:latin typeface="Cambria" pitchFamily="34" charset="0"/>
                 <a:ea typeface="Cambria" pitchFamily="34" charset="-122"/>
                 <a:cs typeface="Cambria" pitchFamily="34" charset="-120"/>
               </a:rPr>
-              <a:t>How much data does the CNN need?</a:t>
+              <a:t>The 3D localization network</a:t>
             </a:r>
             <a:endParaRPr lang="en-US" sz="2900" dirty="0"/>
           </a:p>
@@ -3937,70 +4305,46 @@
             <a:r>
               <a:rPr lang="en-US" sz="1400" b="1" dirty="0">
                 <a:solidFill>
-                  <a:srgbClr val="1C9AA8"/>
+                  <a:srgbClr val="BE0000"/>
                 </a:solidFill>
                 <a:latin typeface="Calibri" pitchFamily="34" charset="0"/>
                 <a:ea typeface="Calibri" pitchFamily="34" charset="-122"/>
                 <a:cs typeface="Calibri" pitchFamily="34" charset="-120"/>
               </a:rPr>
-              <a:t>Feed it more depth planes → more distinct positions, and watch the error fall</a:t>
+              <a:t>Same architecture as the measured CNN, with one extra output for depth</a:t>
             </a:r>
             <a:endParaRPr lang="en-US" sz="1400" dirty="0"/>
           </a:p>
         </p:txBody>
       </p:sp>
-      <p:pic>
-        <p:nvPicPr>
-          <p:cNvPr id="4" name="Image 0" descr="sim_depth_learning_curve.png">    </p:cNvPr>
-          <p:cNvPicPr>
-            <a:picLocks noChangeAspect="1"/>
-          </p:cNvPicPr>
-          <p:nvPr/>
-        </p:nvPicPr>
-        <p:blipFill>
-          <a:blip r:embed="rId1"/>
-          <a:stretch>
-            <a:fillRect/>
-          </a:stretch>
-        </p:blipFill>
-        <p:spPr>
-          <a:xfrm>
-            <a:off x="502920" y="1554480"/>
-            <a:ext cx="7223760" cy="4480560"/>
-          </a:xfrm>
-          <a:prstGeom prst="rect">
-            <a:avLst/>
-          </a:prstGeom>
-        </p:spPr>
-      </p:pic>
-      <p:sp>
-        <p:nvSpPr>
-          <p:cNvPr id="5" name="Shape 2"/>
-          <p:cNvSpPr/>
-          <p:nvPr/>
-        </p:nvSpPr>
-        <p:spPr>
-          <a:xfrm>
-            <a:off x="7955280" y="1554480"/>
-            <a:ext cx="3703320" cy="4480560"/>
+      <p:sp>
+        <p:nvSpPr>
+          <p:cNvPr id="4" name="Shape 2"/>
+          <p:cNvSpPr/>
+          <p:nvPr/>
+        </p:nvSpPr>
+        <p:spPr>
+          <a:xfrm>
+            <a:off x="548640" y="1600200"/>
+            <a:ext cx="11091672" cy="1024128"/>
           </a:xfrm>
           <a:prstGeom prst="roundRect">
             <a:avLst>
-              <a:gd name="adj" fmla="val 2222"/>
+              <a:gd name="adj" fmla="val 8036"/>
             </a:avLst>
           </a:prstGeom>
           <a:solidFill>
-            <a:srgbClr val="F3F7FA"/>
+            <a:srgbClr val="FBF4F2"/>
           </a:solidFill>
           <a:ln w="12700">
             <a:solidFill>
-              <a:srgbClr val="D8E2EA"/>
+              <a:srgbClr val="E7D6D1"/>
             </a:solidFill>
             <a:prstDash val="solid"/>
           </a:ln>
           <a:effectLst>
             <a:outerShdw sx="100000" sy="100000" kx="0" ky="0" algn="bl" rotWithShape="0" blurRad="88900" dist="38100" dir="5400000">
-              <a:srgbClr val="5B6B7B">
+              <a:srgbClr val="7A5C5E">
                 <a:alpha val="18000"/>
               </a:srgbClr>
             </a:outerShdw>
@@ -4009,165 +4353,649 @@
       </p:sp>
       <p:sp>
         <p:nvSpPr>
-          <p:cNvPr id="6" name="Text 3"/>
-          <p:cNvSpPr/>
-          <p:nvPr/>
-        </p:nvSpPr>
-        <p:spPr>
-          <a:xfrm>
-            <a:off x="8183880" y="1737360"/>
-            <a:ext cx="3291840" cy="365760"/>
-          </a:xfrm>
-          <a:prstGeom prst="rect">
-            <a:avLst/>
-          </a:prstGeom>
-          <a:noFill/>
-          <a:ln/>
-        </p:spPr>
-        <p:txBody>
-          <a:bodyPr wrap="square" lIns="0" tIns="0" rIns="0" bIns="0" rtlCol="0" anchor="ctr"/>
-          <a:lstStyle/>
-          <a:p>
-            <a:pPr indent="0" marL="0">
-              <a:buNone/>
-            </a:pPr>
-            <a:r>
-              <a:rPr lang="en-US" sz="1600" b="1" dirty="0">
-                <a:solidFill>
-                  <a:srgbClr val="0B5D7A"/>
+          <p:cNvPr id="5" name="Shape 3"/>
+          <p:cNvSpPr/>
+          <p:nvPr/>
+        </p:nvSpPr>
+        <p:spPr>
+          <a:xfrm>
+            <a:off x="777240" y="1856232"/>
+            <a:ext cx="512064" cy="512064"/>
+          </a:xfrm>
+          <a:prstGeom prst="ellipse">
+            <a:avLst/>
+          </a:prstGeom>
+          <a:solidFill>
+            <a:srgbClr val="BE0000"/>
+          </a:solidFill>
+          <a:ln/>
+        </p:spPr>
+      </p:sp>
+      <p:sp>
+        <p:nvSpPr>
+          <p:cNvPr id="6" name="Text 4"/>
+          <p:cNvSpPr/>
+          <p:nvPr/>
+        </p:nvSpPr>
+        <p:spPr>
+          <a:xfrm>
+            <a:off x="777240" y="1856232"/>
+            <a:ext cx="512064" cy="512064"/>
+          </a:xfrm>
+          <a:prstGeom prst="rect">
+            <a:avLst/>
+          </a:prstGeom>
+          <a:noFill/>
+          <a:ln/>
+        </p:spPr>
+        <p:txBody>
+          <a:bodyPr wrap="square" lIns="0" tIns="0" rIns="0" bIns="0" rtlCol="0" anchor="ctr"/>
+          <a:lstStyle/>
+          <a:p>
+            <a:pPr algn="ctr" indent="0" marL="0">
+              <a:buNone/>
+            </a:pPr>
+            <a:r>
+              <a:rPr lang="en-US" sz="2000" b="1" dirty="0">
+                <a:solidFill>
+                  <a:srgbClr val="FFFFFF"/>
                 </a:solidFill>
                 <a:latin typeface="Cambria" pitchFamily="34" charset="0"/>
                 <a:ea typeface="Cambria" pitchFamily="34" charset="-122"/>
                 <a:cs typeface="Cambria" pitchFamily="34" charset="-120"/>
               </a:rPr>
-              <a:t>The threshold</a:t>
-            </a:r>
-            <a:endParaRPr lang="en-US" sz="1600" dirty="0"/>
-          </a:p>
-        </p:txBody>
-      </p:sp>
-      <p:sp>
-        <p:nvSpPr>
-          <p:cNvPr id="7" name="Text 4"/>
-          <p:cNvSpPr/>
-          <p:nvPr/>
-        </p:nvSpPr>
-        <p:spPr>
-          <a:xfrm>
-            <a:off x="8183880" y="2240280"/>
-            <a:ext cx="3291840" cy="3657600"/>
-          </a:xfrm>
-          <a:prstGeom prst="rect">
-            <a:avLst/>
-          </a:prstGeom>
-          <a:noFill/>
-          <a:ln/>
-        </p:spPr>
-        <p:txBody>
-          <a:bodyPr wrap="square" lIns="0" tIns="0" rIns="0" bIns="0" rtlCol="0" anchor="t"/>
-          <a:lstStyle/>
-          <a:p>
-            <a:pPr marL="342900" indent="-342900">
-              <a:spcAft>
-                <a:spcPts val="800"/>
-              </a:spcAft>
-              <a:buSzPct val="100000"/>
-              <a:buChar char="•"/>
+              <a:t>1</a:t>
+            </a:r>
+            <a:endParaRPr lang="en-US" sz="2000" dirty="0"/>
+          </a:p>
+        </p:txBody>
+      </p:sp>
+      <p:sp>
+        <p:nvSpPr>
+          <p:cNvPr id="7" name="Text 5"/>
+          <p:cNvSpPr/>
+          <p:nvPr/>
+        </p:nvSpPr>
+        <p:spPr>
+          <a:xfrm>
+            <a:off x="1508760" y="1746504"/>
+            <a:ext cx="2011680" cy="731520"/>
+          </a:xfrm>
+          <a:prstGeom prst="rect">
+            <a:avLst/>
+          </a:prstGeom>
+          <a:noFill/>
+          <a:ln/>
+        </p:spPr>
+        <p:txBody>
+          <a:bodyPr wrap="square" lIns="0" tIns="0" rIns="0" bIns="0" rtlCol="0" anchor="ctr"/>
+          <a:lstStyle/>
+          <a:p>
+            <a:pPr indent="0" marL="0">
+              <a:buNone/>
+            </a:pPr>
+            <a:r>
+              <a:rPr lang="en-US" sz="1700" b="1" dirty="0">
+                <a:solidFill>
+                  <a:srgbClr val="BE0000"/>
+                </a:solidFill>
+                <a:latin typeface="Cambria" pitchFamily="34" charset="0"/>
+                <a:ea typeface="Cambria" pitchFamily="34" charset="-122"/>
+                <a:cs typeface="Cambria" pitchFamily="34" charset="-120"/>
+              </a:rPr>
+              <a:t>Input</a:t>
+            </a:r>
+            <a:endParaRPr lang="en-US" sz="1700" dirty="0"/>
+          </a:p>
+        </p:txBody>
+      </p:sp>
+      <p:sp>
+        <p:nvSpPr>
+          <p:cNvPr id="8" name="Text 6"/>
+          <p:cNvSpPr/>
+          <p:nvPr/>
+        </p:nvSpPr>
+        <p:spPr>
+          <a:xfrm>
+            <a:off x="3611880" y="1655064"/>
+            <a:ext cx="7845552" cy="914400"/>
+          </a:xfrm>
+          <a:prstGeom prst="rect">
+            <a:avLst/>
+          </a:prstGeom>
+          <a:noFill/>
+          <a:ln/>
+        </p:spPr>
+        <p:txBody>
+          <a:bodyPr wrap="square" lIns="0" tIns="0" rIns="0" bIns="0" rtlCol="0" anchor="ctr"/>
+          <a:lstStyle/>
+          <a:p>
+            <a:pPr indent="0" marL="0">
+              <a:buNone/>
             </a:pPr>
             <a:r>
               <a:rPr lang="en-US" sz="1250" dirty="0">
                 <a:solidFill>
-                  <a:srgbClr val="1E293B"/>
+                  <a:srgbClr val="2A1618"/>
                 </a:solidFill>
                 <a:latin typeface="Calibri" pitchFamily="34" charset="0"/>
                 <a:ea typeface="Calibri" pitchFamily="34" charset="-122"/>
                 <a:cs typeface="Calibri" pitchFamily="34" charset="-120"/>
               </a:rPr>
-              <a:t>1 depth (82 positions): 33 mm ≈ chance — the conv net can't train.</a:t>
+              <a:t>dS as a 32 x 256 image (16 S-params x [mag, phase], 256 frequencies). Per-sample z-score normalization.</a:t>
             </a:r>
             <a:endParaRPr lang="en-US" sz="1250" dirty="0"/>
           </a:p>
-          <a:p>
-            <a:pPr marL="342900" indent="-342900">
-              <a:spcAft>
-                <a:spcPts val="800"/>
-              </a:spcAft>
-              <a:buSzPct val="100000"/>
-              <a:buChar char="•"/>
+        </p:txBody>
+      </p:sp>
+      <p:sp>
+        <p:nvSpPr>
+          <p:cNvPr id="9" name="Shape 7"/>
+          <p:cNvSpPr/>
+          <p:nvPr/>
+        </p:nvSpPr>
+        <p:spPr>
+          <a:xfrm>
+            <a:off x="548640" y="2770632"/>
+            <a:ext cx="11091672" cy="1024128"/>
+          </a:xfrm>
+          <a:prstGeom prst="roundRect">
+            <a:avLst>
+              <a:gd name="adj" fmla="val 8036"/>
+            </a:avLst>
+          </a:prstGeom>
+          <a:solidFill>
+            <a:srgbClr val="FBF4F2"/>
+          </a:solidFill>
+          <a:ln w="12700">
+            <a:solidFill>
+              <a:srgbClr val="E7D6D1"/>
+            </a:solidFill>
+            <a:prstDash val="solid"/>
+          </a:ln>
+          <a:effectLst>
+            <a:outerShdw sx="100000" sy="100000" kx="0" ky="0" algn="bl" rotWithShape="0" blurRad="88900" dist="38100" dir="5400000">
+              <a:srgbClr val="7A5C5E">
+                <a:alpha val="18000"/>
+              </a:srgbClr>
+            </a:outerShdw>
+          </a:effectLst>
+        </p:spPr>
+      </p:sp>
+      <p:sp>
+        <p:nvSpPr>
+          <p:cNvPr id="10" name="Shape 8"/>
+          <p:cNvSpPr/>
+          <p:nvPr/>
+        </p:nvSpPr>
+        <p:spPr>
+          <a:xfrm>
+            <a:off x="777240" y="3026664"/>
+            <a:ext cx="512064" cy="512064"/>
+          </a:xfrm>
+          <a:prstGeom prst="ellipse">
+            <a:avLst/>
+          </a:prstGeom>
+          <a:solidFill>
+            <a:srgbClr val="BE0000"/>
+          </a:solidFill>
+          <a:ln/>
+        </p:spPr>
+      </p:sp>
+      <p:sp>
+        <p:nvSpPr>
+          <p:cNvPr id="11" name="Text 9"/>
+          <p:cNvSpPr/>
+          <p:nvPr/>
+        </p:nvSpPr>
+        <p:spPr>
+          <a:xfrm>
+            <a:off x="777240" y="3026664"/>
+            <a:ext cx="512064" cy="512064"/>
+          </a:xfrm>
+          <a:prstGeom prst="rect">
+            <a:avLst/>
+          </a:prstGeom>
+          <a:noFill/>
+          <a:ln/>
+        </p:spPr>
+        <p:txBody>
+          <a:bodyPr wrap="square" lIns="0" tIns="0" rIns="0" bIns="0" rtlCol="0" anchor="ctr"/>
+          <a:lstStyle/>
+          <a:p>
+            <a:pPr algn="ctr" indent="0" marL="0">
+              <a:buNone/>
+            </a:pPr>
+            <a:r>
+              <a:rPr lang="en-US" sz="2000" b="1" dirty="0">
+                <a:solidFill>
+                  <a:srgbClr val="FFFFFF"/>
+                </a:solidFill>
+                <a:latin typeface="Cambria" pitchFamily="34" charset="0"/>
+                <a:ea typeface="Cambria" pitchFamily="34" charset="-122"/>
+                <a:cs typeface="Cambria" pitchFamily="34" charset="-120"/>
+              </a:rPr>
+              <a:t>2</a:t>
+            </a:r>
+            <a:endParaRPr lang="en-US" sz="2000" dirty="0"/>
+          </a:p>
+        </p:txBody>
+      </p:sp>
+      <p:sp>
+        <p:nvSpPr>
+          <p:cNvPr id="12" name="Text 10"/>
+          <p:cNvSpPr/>
+          <p:nvPr/>
+        </p:nvSpPr>
+        <p:spPr>
+          <a:xfrm>
+            <a:off x="1508760" y="2916936"/>
+            <a:ext cx="2011680" cy="731520"/>
+          </a:xfrm>
+          <a:prstGeom prst="rect">
+            <a:avLst/>
+          </a:prstGeom>
+          <a:noFill/>
+          <a:ln/>
+        </p:spPr>
+        <p:txBody>
+          <a:bodyPr wrap="square" lIns="0" tIns="0" rIns="0" bIns="0" rtlCol="0" anchor="ctr"/>
+          <a:lstStyle/>
+          <a:p>
+            <a:pPr indent="0" marL="0">
+              <a:buNone/>
+            </a:pPr>
+            <a:r>
+              <a:rPr lang="en-US" sz="1700" b="1" dirty="0">
+                <a:solidFill>
+                  <a:srgbClr val="BE0000"/>
+                </a:solidFill>
+                <a:latin typeface="Cambria" pitchFamily="34" charset="0"/>
+                <a:ea typeface="Cambria" pitchFamily="34" charset="-122"/>
+                <a:cs typeface="Cambria" pitchFamily="34" charset="-120"/>
+              </a:rPr>
+              <a:t>Trunk</a:t>
+            </a:r>
+            <a:endParaRPr lang="en-US" sz="1700" dirty="0"/>
+          </a:p>
+        </p:txBody>
+      </p:sp>
+      <p:sp>
+        <p:nvSpPr>
+          <p:cNvPr id="13" name="Text 11"/>
+          <p:cNvSpPr/>
+          <p:nvPr/>
+        </p:nvSpPr>
+        <p:spPr>
+          <a:xfrm>
+            <a:off x="3611880" y="2825496"/>
+            <a:ext cx="7845552" cy="914400"/>
+          </a:xfrm>
+          <a:prstGeom prst="rect">
+            <a:avLst/>
+          </a:prstGeom>
+          <a:noFill/>
+          <a:ln/>
+        </p:spPr>
+        <p:txBody>
+          <a:bodyPr wrap="square" lIns="0" tIns="0" rIns="0" bIns="0" rtlCol="0" anchor="ctr"/>
+          <a:lstStyle/>
+          <a:p>
+            <a:pPr indent="0" marL="0">
+              <a:buNone/>
             </a:pPr>
             <a:r>
               <a:rPr lang="en-US" sz="1250" dirty="0">
                 <a:solidFill>
-                  <a:srgbClr val="1E293B"/>
+                  <a:srgbClr val="2A1618"/>
                 </a:solidFill>
                 <a:latin typeface="Calibri" pitchFamily="34" charset="0"/>
                 <a:ea typeface="Calibri" pitchFamily="34" charset="-122"/>
                 <a:cs typeface="Calibri" pitchFamily="34" charset="-120"/>
               </a:rPr>
-              <a:t>3 depths (245): 11 mm. 5 depths (410): 4.8 mm.</a:t>
+              <a:t>2 conv blocks (32 filters each) plus pooling and dropout, identical to the measured (x,y) CNN.</a:t>
             </a:r>
             <a:endParaRPr lang="en-US" sz="1250" dirty="0"/>
           </a:p>
-          <a:p>
-            <a:pPr marL="342900" indent="-342900">
-              <a:spcAft>
-                <a:spcPts val="800"/>
-              </a:spcAft>
-              <a:buSzPct val="100000"/>
-              <a:buChar char="•"/>
+        </p:txBody>
+      </p:sp>
+      <p:sp>
+        <p:nvSpPr>
+          <p:cNvPr id="14" name="Shape 12"/>
+          <p:cNvSpPr/>
+          <p:nvPr/>
+        </p:nvSpPr>
+        <p:spPr>
+          <a:xfrm>
+            <a:off x="548640" y="3941064"/>
+            <a:ext cx="11091672" cy="1024128"/>
+          </a:xfrm>
+          <a:prstGeom prst="roundRect">
+            <a:avLst>
+              <a:gd name="adj" fmla="val 8036"/>
+            </a:avLst>
+          </a:prstGeom>
+          <a:solidFill>
+            <a:srgbClr val="FBF4F2"/>
+          </a:solidFill>
+          <a:ln w="12700">
+            <a:solidFill>
+              <a:srgbClr val="E7D6D1"/>
+            </a:solidFill>
+            <a:prstDash val="solid"/>
+          </a:ln>
+          <a:effectLst>
+            <a:outerShdw sx="100000" sy="100000" kx="0" ky="0" algn="bl" rotWithShape="0" blurRad="88900" dist="38100" dir="5400000">
+              <a:srgbClr val="7A5C5E">
+                <a:alpha val="18000"/>
+              </a:srgbClr>
+            </a:outerShdw>
+          </a:effectLst>
+        </p:spPr>
+      </p:sp>
+      <p:sp>
+        <p:nvSpPr>
+          <p:cNvPr id="15" name="Shape 13"/>
+          <p:cNvSpPr/>
+          <p:nvPr/>
+        </p:nvSpPr>
+        <p:spPr>
+          <a:xfrm>
+            <a:off x="777240" y="4197096"/>
+            <a:ext cx="512064" cy="512064"/>
+          </a:xfrm>
+          <a:prstGeom prst="ellipse">
+            <a:avLst/>
+          </a:prstGeom>
+          <a:solidFill>
+            <a:srgbClr val="BE0000"/>
+          </a:solidFill>
+          <a:ln/>
+        </p:spPr>
+      </p:sp>
+      <p:sp>
+        <p:nvSpPr>
+          <p:cNvPr id="16" name="Text 14"/>
+          <p:cNvSpPr/>
+          <p:nvPr/>
+        </p:nvSpPr>
+        <p:spPr>
+          <a:xfrm>
+            <a:off x="777240" y="4197096"/>
+            <a:ext cx="512064" cy="512064"/>
+          </a:xfrm>
+          <a:prstGeom prst="rect">
+            <a:avLst/>
+          </a:prstGeom>
+          <a:noFill/>
+          <a:ln/>
+        </p:spPr>
+        <p:txBody>
+          <a:bodyPr wrap="square" lIns="0" tIns="0" rIns="0" bIns="0" rtlCol="0" anchor="ctr"/>
+          <a:lstStyle/>
+          <a:p>
+            <a:pPr algn="ctr" indent="0" marL="0">
+              <a:buNone/>
+            </a:pPr>
+            <a:r>
+              <a:rPr lang="en-US" sz="2000" b="1" dirty="0">
+                <a:solidFill>
+                  <a:srgbClr val="FFFFFF"/>
+                </a:solidFill>
+                <a:latin typeface="Cambria" pitchFamily="34" charset="0"/>
+                <a:ea typeface="Cambria" pitchFamily="34" charset="-122"/>
+                <a:cs typeface="Cambria" pitchFamily="34" charset="-120"/>
+              </a:rPr>
+              <a:t>3</a:t>
+            </a:r>
+            <a:endParaRPr lang="en-US" sz="2000" dirty="0"/>
+          </a:p>
+        </p:txBody>
+      </p:sp>
+      <p:sp>
+        <p:nvSpPr>
+          <p:cNvPr id="17" name="Text 15"/>
+          <p:cNvSpPr/>
+          <p:nvPr/>
+        </p:nvSpPr>
+        <p:spPr>
+          <a:xfrm>
+            <a:off x="1508760" y="4087368"/>
+            <a:ext cx="2011680" cy="731520"/>
+          </a:xfrm>
+          <a:prstGeom prst="rect">
+            <a:avLst/>
+          </a:prstGeom>
+          <a:noFill/>
+          <a:ln/>
+        </p:spPr>
+        <p:txBody>
+          <a:bodyPr wrap="square" lIns="0" tIns="0" rIns="0" bIns="0" rtlCol="0" anchor="ctr"/>
+          <a:lstStyle/>
+          <a:p>
+            <a:pPr indent="0" marL="0">
+              <a:buNone/>
+            </a:pPr>
+            <a:r>
+              <a:rPr lang="en-US" sz="1700" b="1" dirty="0">
+                <a:solidFill>
+                  <a:srgbClr val="BE0000"/>
+                </a:solidFill>
+                <a:latin typeface="Cambria" pitchFamily="34" charset="0"/>
+                <a:ea typeface="Cambria" pitchFamily="34" charset="-122"/>
+                <a:cs typeface="Cambria" pitchFamily="34" charset="-120"/>
+              </a:rPr>
+              <a:t>Head</a:t>
+            </a:r>
+            <a:endParaRPr lang="en-US" sz="1700" dirty="0"/>
+          </a:p>
+        </p:txBody>
+      </p:sp>
+      <p:sp>
+        <p:nvSpPr>
+          <p:cNvPr id="18" name="Text 16"/>
+          <p:cNvSpPr/>
+          <p:nvPr/>
+        </p:nvSpPr>
+        <p:spPr>
+          <a:xfrm>
+            <a:off x="3611880" y="3995928"/>
+            <a:ext cx="7845552" cy="914400"/>
+          </a:xfrm>
+          <a:prstGeom prst="rect">
+            <a:avLst/>
+          </a:prstGeom>
+          <a:noFill/>
+          <a:ln/>
+        </p:spPr>
+        <p:txBody>
+          <a:bodyPr wrap="square" lIns="0" tIns="0" rIns="0" bIns="0" rtlCol="0" anchor="ctr"/>
+          <a:lstStyle/>
+          <a:p>
+            <a:pPr indent="0" marL="0">
+              <a:buNone/>
             </a:pPr>
             <a:r>
               <a:rPr lang="en-US" sz="1250" dirty="0">
                 <a:solidFill>
-                  <a:srgbClr val="1E293B"/>
+                  <a:srgbClr val="2A1618"/>
                 </a:solidFill>
                 <a:latin typeface="Calibri" pitchFamily="34" charset="0"/>
                 <a:ea typeface="Calibri" pitchFamily="34" charset="-122"/>
                 <a:cs typeface="Calibri" pitchFamily="34" charset="-120"/>
               </a:rPr>
-              <a:t>Plateau ~3.8 mm from 7 depths (≈570) on.</a:t>
+              <a:t>fc(3) plus regression to (x, y, z) in mm. Trained with an L2 coordinate loss, 60 epochs.</a:t>
             </a:r>
             <a:endParaRPr lang="en-US" sz="1250" dirty="0"/>
           </a:p>
-          <a:p>
-            <a:pPr marL="342900" indent="-342900">
-              <a:spcAft>
-                <a:spcPts val="800"/>
-              </a:spcAft>
-              <a:buSzPct val="100000"/>
-              <a:buChar char="•"/>
+        </p:txBody>
+      </p:sp>
+      <p:sp>
+        <p:nvSpPr>
+          <p:cNvPr id="19" name="Shape 17"/>
+          <p:cNvSpPr/>
+          <p:nvPr/>
+        </p:nvSpPr>
+        <p:spPr>
+          <a:xfrm>
+            <a:off x="548640" y="5111496"/>
+            <a:ext cx="11091672" cy="1024128"/>
+          </a:xfrm>
+          <a:prstGeom prst="roundRect">
+            <a:avLst>
+              <a:gd name="adj" fmla="val 8036"/>
+            </a:avLst>
+          </a:prstGeom>
+          <a:solidFill>
+            <a:srgbClr val="FBF4F2"/>
+          </a:solidFill>
+          <a:ln w="12700">
+            <a:solidFill>
+              <a:srgbClr val="E7D6D1"/>
+            </a:solidFill>
+            <a:prstDash val="solid"/>
+          </a:ln>
+          <a:effectLst>
+            <a:outerShdw sx="100000" sy="100000" kx="0" ky="0" algn="bl" rotWithShape="0" blurRad="88900" dist="38100" dir="5400000">
+              <a:srgbClr val="7A5C5E">
+                <a:alpha val="18000"/>
+              </a:srgbClr>
+            </a:outerShdw>
+          </a:effectLst>
+        </p:spPr>
+      </p:sp>
+      <p:sp>
+        <p:nvSpPr>
+          <p:cNvPr id="20" name="Shape 18"/>
+          <p:cNvSpPr/>
+          <p:nvPr/>
+        </p:nvSpPr>
+        <p:spPr>
+          <a:xfrm>
+            <a:off x="777240" y="5367528"/>
+            <a:ext cx="512064" cy="512064"/>
+          </a:xfrm>
+          <a:prstGeom prst="ellipse">
+            <a:avLst/>
+          </a:prstGeom>
+          <a:solidFill>
+            <a:srgbClr val="BE0000"/>
+          </a:solidFill>
+          <a:ln/>
+        </p:spPr>
+      </p:sp>
+      <p:sp>
+        <p:nvSpPr>
+          <p:cNvPr id="21" name="Text 19"/>
+          <p:cNvSpPr/>
+          <p:nvPr/>
+        </p:nvSpPr>
+        <p:spPr>
+          <a:xfrm>
+            <a:off x="777240" y="5367528"/>
+            <a:ext cx="512064" cy="512064"/>
+          </a:xfrm>
+          <a:prstGeom prst="rect">
+            <a:avLst/>
+          </a:prstGeom>
+          <a:noFill/>
+          <a:ln/>
+        </p:spPr>
+        <p:txBody>
+          <a:bodyPr wrap="square" lIns="0" tIns="0" rIns="0" bIns="0" rtlCol="0" anchor="ctr"/>
+          <a:lstStyle/>
+          <a:p>
+            <a:pPr algn="ctr" indent="0" marL="0">
+              <a:buNone/>
+            </a:pPr>
+            <a:r>
+              <a:rPr lang="en-US" sz="2000" b="1" dirty="0">
+                <a:solidFill>
+                  <a:srgbClr val="FFFFFF"/>
+                </a:solidFill>
+                <a:latin typeface="Cambria" pitchFamily="34" charset="0"/>
+                <a:ea typeface="Cambria" pitchFamily="34" charset="-122"/>
+                <a:cs typeface="Cambria" pitchFamily="34" charset="-120"/>
+              </a:rPr>
+              <a:t>4</a:t>
+            </a:r>
+            <a:endParaRPr lang="en-US" sz="2000" dirty="0"/>
+          </a:p>
+        </p:txBody>
+      </p:sp>
+      <p:sp>
+        <p:nvSpPr>
+          <p:cNvPr id="22" name="Text 20"/>
+          <p:cNvSpPr/>
+          <p:nvPr/>
+        </p:nvSpPr>
+        <p:spPr>
+          <a:xfrm>
+            <a:off x="1508760" y="5257800"/>
+            <a:ext cx="2011680" cy="731520"/>
+          </a:xfrm>
+          <a:prstGeom prst="rect">
+            <a:avLst/>
+          </a:prstGeom>
+          <a:noFill/>
+          <a:ln/>
+        </p:spPr>
+        <p:txBody>
+          <a:bodyPr wrap="square" lIns="0" tIns="0" rIns="0" bIns="0" rtlCol="0" anchor="ctr"/>
+          <a:lstStyle/>
+          <a:p>
+            <a:pPr indent="0" marL="0">
+              <a:buNone/>
+            </a:pPr>
+            <a:r>
+              <a:rPr lang="en-US" sz="1700" b="1" dirty="0">
+                <a:solidFill>
+                  <a:srgbClr val="BE0000"/>
+                </a:solidFill>
+                <a:latin typeface="Cambria" pitchFamily="34" charset="0"/>
+                <a:ea typeface="Cambria" pitchFamily="34" charset="-122"/>
+                <a:cs typeface="Cambria" pitchFamily="34" charset="-120"/>
+              </a:rPr>
+              <a:t>Evaluation</a:t>
+            </a:r>
+            <a:endParaRPr lang="en-US" sz="1700" dirty="0"/>
+          </a:p>
+        </p:txBody>
+      </p:sp>
+      <p:sp>
+        <p:nvSpPr>
+          <p:cNvPr id="23" name="Text 21"/>
+          <p:cNvSpPr/>
+          <p:nvPr/>
+        </p:nvSpPr>
+        <p:spPr>
+          <a:xfrm>
+            <a:off x="3611880" y="5166360"/>
+            <a:ext cx="7845552" cy="914400"/>
+          </a:xfrm>
+          <a:prstGeom prst="rect">
+            <a:avLst/>
+          </a:prstGeom>
+          <a:noFill/>
+          <a:ln/>
+        </p:spPr>
+        <p:txBody>
+          <a:bodyPr wrap="square" lIns="0" tIns="0" rIns="0" bIns="0" rtlCol="0" anchor="ctr"/>
+          <a:lstStyle/>
+          <a:p>
+            <a:pPr indent="0" marL="0">
+              <a:buNone/>
             </a:pPr>
             <a:r>
               <a:rPr lang="en-US" sz="1250" dirty="0">
                 <a:solidFill>
-                  <a:srgbClr val="1E293B"/>
+                  <a:srgbClr val="2A1618"/>
                 </a:solidFill>
                 <a:latin typeface="Calibri" pitchFamily="34" charset="0"/>
                 <a:ea typeface="Calibri" pitchFamily="34" charset="-122"/>
                 <a:cs typeface="Calibri" pitchFamily="34" charset="-120"/>
               </a:rPr>
-              <a:t>So it needs ~400–500 DISTINCT positions to localize; below ~250 it's poor.</a:t>
-            </a:r>
-            <a:endParaRPr lang="en-US" sz="1250" dirty="0"/>
-          </a:p>
-          <a:p>
-            <a:pPr marL="342900" indent="-342900">
-              <a:spcAft>
-                <a:spcPts val="800"/>
-              </a:spcAft>
-              <a:buSzPct val="100000"/>
-              <a:buChar char="•"/>
-            </a:pPr>
-            <a:r>
-              <a:rPr lang="en-US" sz="1250" dirty="0">
-                <a:solidFill>
-                  <a:srgbClr val="1E293B"/>
-                </a:solidFill>
-                <a:latin typeface="Calibri" pitchFamily="34" charset="0"/>
-                <a:ea typeface="Calibri" pitchFamily="34" charset="-122"/>
-                <a:cs typeface="Calibri" pitchFamily="34" charset="-120"/>
-              </a:rPr>
-              <a:t>Distinct positions matter — not raw sample count (see Part 3).</a:t>
+              <a:t>8-fold hold-out by POSITION (every position predicted once, out-of-fold). Lateral = sqrt(dx^2+dy^2); depth = |dz|, reported separately so one axis cannot hide the other.</a:t>
             </a:r>
             <a:endParaRPr lang="en-US" sz="1250" dirty="0"/>
           </a:p>
@@ -4232,13 +5060,13 @@
             <a:r>
               <a:rPr lang="en-US" sz="2900" b="1" dirty="0">
                 <a:solidFill>
-                  <a:srgbClr val="1E293B"/>
+                  <a:srgbClr val="2A1618"/>
                 </a:solidFill>
                 <a:latin typeface="Cambria" pitchFamily="34" charset="0"/>
                 <a:ea typeface="Cambria" pitchFamily="34" charset="-122"/>
                 <a:cs typeface="Cambria" pitchFamily="34" charset="-120"/>
               </a:rPr>
-              <a:t>3D localization result (8-fold)</a:t>
+              <a:t>How much data does the CNN need?</a:t>
             </a:r>
             <a:endParaRPr lang="en-US" sz="2900" dirty="0"/>
           </a:p>
@@ -4271,46 +5099,70 @@
             <a:r>
               <a:rPr lang="en-US" sz="1400" b="1" dirty="0">
                 <a:solidFill>
-                  <a:srgbClr val="1C9AA8"/>
+                  <a:srgbClr val="BE0000"/>
                 </a:solidFill>
                 <a:latin typeface="Calibri" pitchFamily="34" charset="0"/>
                 <a:ea typeface="Calibri" pitchFamily="34" charset="-122"/>
                 <a:cs typeface="Calibri" pitchFamily="34" charset="-120"/>
               </a:rPr>
-              <a:t>Every position predicted from a model that never saw it — lateral and depth, separately</a:t>
+              <a:t>Train on more depth planes (more distinct positions) and watch the error fall</a:t>
             </a:r>
             <a:endParaRPr lang="en-US" sz="1400" dirty="0"/>
           </a:p>
         </p:txBody>
       </p:sp>
-      <p:sp>
-        <p:nvSpPr>
-          <p:cNvPr id="4" name="Shape 2"/>
-          <p:cNvSpPr/>
-          <p:nvPr/>
-        </p:nvSpPr>
-        <p:spPr>
-          <a:xfrm>
-            <a:off x="640080" y="1737360"/>
-            <a:ext cx="2514600" cy="1417320"/>
+      <p:pic>
+        <p:nvPicPr>
+          <p:cNvPr id="4" name="Image 0" descr="sim_depth_learning_curve.png">    </p:cNvPr>
+          <p:cNvPicPr>
+            <a:picLocks noChangeAspect="1"/>
+          </p:cNvPicPr>
+          <p:nvPr/>
+        </p:nvPicPr>
+        <p:blipFill>
+          <a:blip r:embed="rId1"/>
+          <a:stretch>
+            <a:fillRect/>
+          </a:stretch>
+        </p:blipFill>
+        <p:spPr>
+          <a:xfrm>
+            <a:off x="457200" y="1600200"/>
+            <a:ext cx="7223760" cy="4498848"/>
+          </a:xfrm>
+          <a:prstGeom prst="rect">
+            <a:avLst/>
+          </a:prstGeom>
+        </p:spPr>
+      </p:pic>
+      <p:sp>
+        <p:nvSpPr>
+          <p:cNvPr id="5" name="Shape 2"/>
+          <p:cNvSpPr/>
+          <p:nvPr/>
+        </p:nvSpPr>
+        <p:spPr>
+          <a:xfrm>
+            <a:off x="7863840" y="1600200"/>
+            <a:ext cx="3794760" cy="4498848"/>
           </a:xfrm>
           <a:prstGeom prst="roundRect">
             <a:avLst>
-              <a:gd name="adj" fmla="val 5806"/>
+              <a:gd name="adj" fmla="val 2169"/>
             </a:avLst>
           </a:prstGeom>
           <a:solidFill>
-            <a:srgbClr val="F3F7FA"/>
+            <a:srgbClr val="FBF4F2"/>
           </a:solidFill>
           <a:ln w="12700">
             <a:solidFill>
-              <a:srgbClr val="D8E2EA"/>
+              <a:srgbClr val="E7D6D1"/>
             </a:solidFill>
             <a:prstDash val="solid"/>
           </a:ln>
           <a:effectLst>
             <a:outerShdw sx="100000" sy="100000" kx="0" ky="0" algn="bl" rotWithShape="0" blurRad="88900" dist="38100" dir="5400000">
-              <a:srgbClr val="5B6B7B">
+              <a:srgbClr val="7A5C5E">
                 <a:alpha val="18000"/>
               </a:srgbClr>
             </a:outerShdw>
@@ -4319,569 +5171,53 @@
       </p:sp>
       <p:sp>
         <p:nvSpPr>
-          <p:cNvPr id="5" name="Text 3"/>
-          <p:cNvSpPr/>
-          <p:nvPr/>
-        </p:nvSpPr>
-        <p:spPr>
-          <a:xfrm>
-            <a:off x="640080" y="1901952"/>
-            <a:ext cx="2514600" cy="640080"/>
-          </a:xfrm>
-          <a:prstGeom prst="rect">
-            <a:avLst/>
-          </a:prstGeom>
-          <a:noFill/>
-          <a:ln/>
-        </p:spPr>
-        <p:txBody>
-          <a:bodyPr wrap="square" lIns="0" tIns="0" rIns="0" bIns="0" rtlCol="0" anchor="ctr"/>
-          <a:lstStyle/>
-          <a:p>
-            <a:pPr algn="ctr" indent="0" marL="0">
-              <a:buNone/>
-            </a:pPr>
-            <a:r>
-              <a:rPr lang="en-US" sz="3000" b="1" dirty="0">
-                <a:solidFill>
-                  <a:srgbClr val="0B5D7A"/>
+          <p:cNvPr id="6" name="Text 3"/>
+          <p:cNvSpPr/>
+          <p:nvPr/>
+        </p:nvSpPr>
+        <p:spPr>
+          <a:xfrm>
+            <a:off x="8092440" y="1783080"/>
+            <a:ext cx="3383280" cy="365760"/>
+          </a:xfrm>
+          <a:prstGeom prst="rect">
+            <a:avLst/>
+          </a:prstGeom>
+          <a:noFill/>
+          <a:ln/>
+        </p:spPr>
+        <p:txBody>
+          <a:bodyPr wrap="square" lIns="0" tIns="0" rIns="0" bIns="0" rtlCol="0" anchor="ctr"/>
+          <a:lstStyle/>
+          <a:p>
+            <a:pPr indent="0" marL="0">
+              <a:buNone/>
+            </a:pPr>
+            <a:r>
+              <a:rPr lang="en-US" sz="1600" b="1" dirty="0">
+                <a:solidFill>
+                  <a:srgbClr val="BE0000"/>
                 </a:solidFill>
                 <a:latin typeface="Cambria" pitchFamily="34" charset="0"/>
                 <a:ea typeface="Cambria" pitchFamily="34" charset="-122"/>
                 <a:cs typeface="Cambria" pitchFamily="34" charset="-120"/>
               </a:rPr>
-              <a:t>3.9 mm</a:t>
-            </a:r>
-            <a:endParaRPr lang="en-US" sz="3000" dirty="0"/>
-          </a:p>
-        </p:txBody>
-      </p:sp>
-      <p:sp>
-        <p:nvSpPr>
-          <p:cNvPr id="6" name="Text 4"/>
-          <p:cNvSpPr/>
-          <p:nvPr/>
-        </p:nvSpPr>
-        <p:spPr>
-          <a:xfrm>
-            <a:off x="731520" y="2606040"/>
-            <a:ext cx="2331720" cy="457200"/>
-          </a:xfrm>
-          <a:prstGeom prst="rect">
-            <a:avLst/>
-          </a:prstGeom>
-          <a:noFill/>
-          <a:ln/>
-        </p:spPr>
-        <p:txBody>
-          <a:bodyPr wrap="square" lIns="0" tIns="0" rIns="0" bIns="0" rtlCol="0" anchor="ctr"/>
-          <a:lstStyle/>
-          <a:p>
-            <a:pPr algn="ctr" indent="0" marL="0">
-              <a:buNone/>
-            </a:pPr>
-            <a:r>
-              <a:rPr lang="en-US" sz="1250" dirty="0">
-                <a:solidFill>
-                  <a:srgbClr val="5B6B7B"/>
-                </a:solidFill>
-                <a:latin typeface="Calibri" pitchFamily="34" charset="0"/>
-                <a:ea typeface="Calibri" pitchFamily="34" charset="-122"/>
-                <a:cs typeface="Calibri" pitchFamily="34" charset="-120"/>
-              </a:rPr>
-              <a:t>lateral (xy) median</a:t>
-            </a:r>
-            <a:endParaRPr lang="en-US" sz="1250" dirty="0"/>
-          </a:p>
-          <a:p>
-            <a:pPr algn="ctr" indent="0" marL="0">
-              <a:buNone/>
-            </a:pPr>
-            <a:r>
-              <a:rPr lang="en-US" sz="1250" dirty="0">
-                <a:solidFill>
-                  <a:srgbClr val="5B6B7B"/>
-                </a:solidFill>
-                <a:latin typeface="Calibri" pitchFamily="34" charset="0"/>
-                <a:ea typeface="Calibri" pitchFamily="34" charset="-122"/>
-                <a:cs typeface="Calibri" pitchFamily="34" charset="-120"/>
-              </a:rPr>
-              <a:t>vs 36.5 mm chance</a:t>
-            </a:r>
-            <a:endParaRPr lang="en-US" sz="1250" dirty="0"/>
-          </a:p>
-        </p:txBody>
-      </p:sp>
-      <p:sp>
-        <p:nvSpPr>
-          <p:cNvPr id="7" name="Shape 5"/>
-          <p:cNvSpPr/>
-          <p:nvPr/>
-        </p:nvSpPr>
-        <p:spPr>
-          <a:xfrm>
-            <a:off x="3337560" y="1737360"/>
-            <a:ext cx="2514600" cy="1417320"/>
-          </a:xfrm>
-          <a:prstGeom prst="roundRect">
-            <a:avLst>
-              <a:gd name="adj" fmla="val 5806"/>
-            </a:avLst>
-          </a:prstGeom>
-          <a:solidFill>
-            <a:srgbClr val="F3F7FA"/>
-          </a:solidFill>
-          <a:ln w="12700">
-            <a:solidFill>
-              <a:srgbClr val="D8E2EA"/>
-            </a:solidFill>
-            <a:prstDash val="solid"/>
-          </a:ln>
-          <a:effectLst>
-            <a:outerShdw sx="100000" sy="100000" kx="0" ky="0" algn="bl" rotWithShape="0" blurRad="88900" dist="38100" dir="5400000">
-              <a:srgbClr val="5B6B7B">
-                <a:alpha val="18000"/>
-              </a:srgbClr>
-            </a:outerShdw>
-          </a:effectLst>
-        </p:spPr>
-      </p:sp>
-      <p:sp>
-        <p:nvSpPr>
-          <p:cNvPr id="8" name="Text 6"/>
-          <p:cNvSpPr/>
-          <p:nvPr/>
-        </p:nvSpPr>
-        <p:spPr>
-          <a:xfrm>
-            <a:off x="3337560" y="1901952"/>
-            <a:ext cx="2514600" cy="640080"/>
-          </a:xfrm>
-          <a:prstGeom prst="rect">
-            <a:avLst/>
-          </a:prstGeom>
-          <a:noFill/>
-          <a:ln/>
-        </p:spPr>
-        <p:txBody>
-          <a:bodyPr wrap="square" lIns="0" tIns="0" rIns="0" bIns="0" rtlCol="0" anchor="ctr"/>
-          <a:lstStyle/>
-          <a:p>
-            <a:pPr algn="ctr" indent="0" marL="0">
-              <a:buNone/>
-            </a:pPr>
-            <a:r>
-              <a:rPr lang="en-US" sz="3000" b="1" dirty="0">
-                <a:solidFill>
-                  <a:srgbClr val="1C9AA8"/>
-                </a:solidFill>
-                <a:latin typeface="Cambria" pitchFamily="34" charset="0"/>
-                <a:ea typeface="Cambria" pitchFamily="34" charset="-122"/>
-                <a:cs typeface="Cambria" pitchFamily="34" charset="-120"/>
-              </a:rPr>
-              <a:t>2.1 mm</a:t>
-            </a:r>
-            <a:endParaRPr lang="en-US" sz="3000" dirty="0"/>
-          </a:p>
-        </p:txBody>
-      </p:sp>
-      <p:sp>
-        <p:nvSpPr>
-          <p:cNvPr id="9" name="Text 7"/>
-          <p:cNvSpPr/>
-          <p:nvPr/>
-        </p:nvSpPr>
-        <p:spPr>
-          <a:xfrm>
-            <a:off x="3429000" y="2606040"/>
-            <a:ext cx="2331720" cy="457200"/>
-          </a:xfrm>
-          <a:prstGeom prst="rect">
-            <a:avLst/>
-          </a:prstGeom>
-          <a:noFill/>
-          <a:ln/>
-        </p:spPr>
-        <p:txBody>
-          <a:bodyPr wrap="square" lIns="0" tIns="0" rIns="0" bIns="0" rtlCol="0" anchor="ctr"/>
-          <a:lstStyle/>
-          <a:p>
-            <a:pPr algn="ctr" indent="0" marL="0">
-              <a:buNone/>
-            </a:pPr>
-            <a:r>
-              <a:rPr lang="en-US" sz="1250" dirty="0">
-                <a:solidFill>
-                  <a:srgbClr val="5B6B7B"/>
-                </a:solidFill>
-                <a:latin typeface="Calibri" pitchFamily="34" charset="0"/>
-                <a:ea typeface="Calibri" pitchFamily="34" charset="-122"/>
-                <a:cs typeface="Calibri" pitchFamily="34" charset="-120"/>
-              </a:rPr>
-              <a:t>depth (z) median</a:t>
-            </a:r>
-            <a:endParaRPr lang="en-US" sz="1250" dirty="0"/>
-          </a:p>
-          <a:p>
-            <a:pPr algn="ctr" indent="0" marL="0">
-              <a:buNone/>
-            </a:pPr>
-            <a:r>
-              <a:rPr lang="en-US" sz="1250" dirty="0">
-                <a:solidFill>
-                  <a:srgbClr val="5B6B7B"/>
-                </a:solidFill>
-                <a:latin typeface="Calibri" pitchFamily="34" charset="0"/>
-                <a:ea typeface="Calibri" pitchFamily="34" charset="-122"/>
-                <a:cs typeface="Calibri" pitchFamily="34" charset="-120"/>
-              </a:rPr>
-              <a:t>vs 16.3 mm chance</a:t>
-            </a:r>
-            <a:endParaRPr lang="en-US" sz="1250" dirty="0"/>
-          </a:p>
-        </p:txBody>
-      </p:sp>
-      <p:sp>
-        <p:nvSpPr>
-          <p:cNvPr id="10" name="Shape 8"/>
-          <p:cNvSpPr/>
-          <p:nvPr/>
-        </p:nvSpPr>
-        <p:spPr>
-          <a:xfrm>
-            <a:off x="6035040" y="1737360"/>
-            <a:ext cx="2514600" cy="1417320"/>
-          </a:xfrm>
-          <a:prstGeom prst="roundRect">
-            <a:avLst>
-              <a:gd name="adj" fmla="val 5806"/>
-            </a:avLst>
-          </a:prstGeom>
-          <a:solidFill>
-            <a:srgbClr val="F3F7FA"/>
-          </a:solidFill>
-          <a:ln w="12700">
-            <a:solidFill>
-              <a:srgbClr val="D8E2EA"/>
-            </a:solidFill>
-            <a:prstDash val="solid"/>
-          </a:ln>
-          <a:effectLst>
-            <a:outerShdw sx="100000" sy="100000" kx="0" ky="0" algn="bl" rotWithShape="0" blurRad="88900" dist="38100" dir="5400000">
-              <a:srgbClr val="5B6B7B">
-                <a:alpha val="18000"/>
-              </a:srgbClr>
-            </a:outerShdw>
-          </a:effectLst>
-        </p:spPr>
-      </p:sp>
-      <p:sp>
-        <p:nvSpPr>
-          <p:cNvPr id="11" name="Text 9"/>
-          <p:cNvSpPr/>
-          <p:nvPr/>
-        </p:nvSpPr>
-        <p:spPr>
-          <a:xfrm>
-            <a:off x="6035040" y="1901952"/>
-            <a:ext cx="2514600" cy="640080"/>
-          </a:xfrm>
-          <a:prstGeom prst="rect">
-            <a:avLst/>
-          </a:prstGeom>
-          <a:noFill/>
-          <a:ln/>
-        </p:spPr>
-        <p:txBody>
-          <a:bodyPr wrap="square" lIns="0" tIns="0" rIns="0" bIns="0" rtlCol="0" anchor="ctr"/>
-          <a:lstStyle/>
-          <a:p>
-            <a:pPr algn="ctr" indent="0" marL="0">
-              <a:buNone/>
-            </a:pPr>
-            <a:r>
-              <a:rPr lang="en-US" sz="3000" b="1" dirty="0">
-                <a:solidFill>
-                  <a:srgbClr val="2CC4A3"/>
-                </a:solidFill>
-                <a:latin typeface="Cambria" pitchFamily="34" charset="0"/>
-                <a:ea typeface="Cambria" pitchFamily="34" charset="-122"/>
-                <a:cs typeface="Cambria" pitchFamily="34" charset="-120"/>
-              </a:rPr>
-              <a:t>93 %</a:t>
-            </a:r>
-            <a:endParaRPr lang="en-US" sz="3000" dirty="0"/>
-          </a:p>
-        </p:txBody>
-      </p:sp>
-      <p:sp>
-        <p:nvSpPr>
-          <p:cNvPr id="12" name="Text 10"/>
-          <p:cNvSpPr/>
-          <p:nvPr/>
-        </p:nvSpPr>
-        <p:spPr>
-          <a:xfrm>
-            <a:off x="6126480" y="2606040"/>
-            <a:ext cx="2331720" cy="457200"/>
-          </a:xfrm>
-          <a:prstGeom prst="rect">
-            <a:avLst/>
-          </a:prstGeom>
-          <a:noFill/>
-          <a:ln/>
-        </p:spPr>
-        <p:txBody>
-          <a:bodyPr wrap="square" lIns="0" tIns="0" rIns="0" bIns="0" rtlCol="0" anchor="ctr"/>
-          <a:lstStyle/>
-          <a:p>
-            <a:pPr algn="ctr" indent="0" marL="0">
-              <a:buNone/>
-            </a:pPr>
-            <a:r>
-              <a:rPr lang="en-US" sz="1250" dirty="0">
-                <a:solidFill>
-                  <a:srgbClr val="5B6B7B"/>
-                </a:solidFill>
-                <a:latin typeface="Calibri" pitchFamily="34" charset="0"/>
-                <a:ea typeface="Calibri" pitchFamily="34" charset="-122"/>
-                <a:cs typeface="Calibri" pitchFamily="34" charset="-120"/>
-              </a:rPr>
-              <a:t>of positions within</a:t>
-            </a:r>
-            <a:endParaRPr lang="en-US" sz="1250" dirty="0"/>
-          </a:p>
-          <a:p>
-            <a:pPr algn="ctr" indent="0" marL="0">
-              <a:buNone/>
-            </a:pPr>
-            <a:r>
-              <a:rPr lang="en-US" sz="1250" dirty="0">
-                <a:solidFill>
-                  <a:srgbClr val="5B6B7B"/>
-                </a:solidFill>
-                <a:latin typeface="Calibri" pitchFamily="34" charset="0"/>
-                <a:ea typeface="Calibri" pitchFamily="34" charset="-122"/>
-                <a:cs typeface="Calibri" pitchFamily="34" charset="-120"/>
-              </a:rPr>
-              <a:t>10 mm laterally</a:t>
-            </a:r>
-            <a:endParaRPr lang="en-US" sz="1250" dirty="0"/>
-          </a:p>
-        </p:txBody>
-      </p:sp>
-      <p:sp>
-        <p:nvSpPr>
-          <p:cNvPr id="13" name="Shape 11"/>
-          <p:cNvSpPr/>
-          <p:nvPr/>
-        </p:nvSpPr>
-        <p:spPr>
-          <a:xfrm>
-            <a:off x="8732520" y="1737360"/>
-            <a:ext cx="2514600" cy="1417320"/>
-          </a:xfrm>
-          <a:prstGeom prst="roundRect">
-            <a:avLst>
-              <a:gd name="adj" fmla="val 5806"/>
-            </a:avLst>
-          </a:prstGeom>
-          <a:solidFill>
-            <a:srgbClr val="F3F7FA"/>
-          </a:solidFill>
-          <a:ln w="12700">
-            <a:solidFill>
-              <a:srgbClr val="D8E2EA"/>
-            </a:solidFill>
-            <a:prstDash val="solid"/>
-          </a:ln>
-          <a:effectLst>
-            <a:outerShdw sx="100000" sy="100000" kx="0" ky="0" algn="bl" rotWithShape="0" blurRad="88900" dist="38100" dir="5400000">
-              <a:srgbClr val="5B6B7B">
-                <a:alpha val="18000"/>
-              </a:srgbClr>
-            </a:outerShdw>
-          </a:effectLst>
-        </p:spPr>
-      </p:sp>
-      <p:sp>
-        <p:nvSpPr>
-          <p:cNvPr id="14" name="Text 12"/>
-          <p:cNvSpPr/>
-          <p:nvPr/>
-        </p:nvSpPr>
-        <p:spPr>
-          <a:xfrm>
-            <a:off x="8732520" y="1901952"/>
-            <a:ext cx="2514600" cy="640080"/>
-          </a:xfrm>
-          <a:prstGeom prst="rect">
-            <a:avLst/>
-          </a:prstGeom>
-          <a:noFill/>
-          <a:ln/>
-        </p:spPr>
-        <p:txBody>
-          <a:bodyPr wrap="square" lIns="0" tIns="0" rIns="0" bIns="0" rtlCol="0" anchor="ctr"/>
-          <a:lstStyle/>
-          <a:p>
-            <a:pPr algn="ctr" indent="0" marL="0">
-              <a:buNone/>
-            </a:pPr>
-            <a:r>
-              <a:rPr lang="en-US" sz="3000" b="1" dirty="0">
-                <a:solidFill>
-                  <a:srgbClr val="E0A100"/>
-                </a:solidFill>
-                <a:latin typeface="Cambria" pitchFamily="34" charset="0"/>
-                <a:ea typeface="Cambria" pitchFamily="34" charset="-122"/>
-                <a:cs typeface="Cambria" pitchFamily="34" charset="-120"/>
-              </a:rPr>
-              <a:t>3.6 / 2.1</a:t>
-            </a:r>
-            <a:endParaRPr lang="en-US" sz="3000" dirty="0"/>
-          </a:p>
-        </p:txBody>
-      </p:sp>
-      <p:sp>
-        <p:nvSpPr>
-          <p:cNvPr id="15" name="Text 13"/>
-          <p:cNvSpPr/>
-          <p:nvPr/>
-        </p:nvSpPr>
-        <p:spPr>
-          <a:xfrm>
-            <a:off x="8823960" y="2606040"/>
-            <a:ext cx="2331720" cy="457200"/>
-          </a:xfrm>
-          <a:prstGeom prst="rect">
-            <a:avLst/>
-          </a:prstGeom>
-          <a:noFill/>
-          <a:ln/>
-        </p:spPr>
-        <p:txBody>
-          <a:bodyPr wrap="square" lIns="0" tIns="0" rIns="0" bIns="0" rtlCol="0" anchor="ctr"/>
-          <a:lstStyle/>
-          <a:p>
-            <a:pPr algn="ctr" indent="0" marL="0">
-              <a:buNone/>
-            </a:pPr>
-            <a:r>
-              <a:rPr lang="en-US" sz="1250" dirty="0">
-                <a:solidFill>
-                  <a:srgbClr val="5B6B7B"/>
-                </a:solidFill>
-                <a:latin typeface="Calibri" pitchFamily="34" charset="0"/>
-                <a:ea typeface="Calibri" pitchFamily="34" charset="-122"/>
-                <a:cs typeface="Calibri" pitchFamily="34" charset="-120"/>
-              </a:rPr>
-              <a:t>beet (dielectric)</a:t>
-            </a:r>
-            <a:endParaRPr lang="en-US" sz="1250" dirty="0"/>
-          </a:p>
-          <a:p>
-            <a:pPr algn="ctr" indent="0" marL="0">
-              <a:buNone/>
-            </a:pPr>
-            <a:r>
-              <a:rPr lang="en-US" sz="1250" dirty="0">
-                <a:solidFill>
-                  <a:srgbClr val="5B6B7B"/>
-                </a:solidFill>
-                <a:latin typeface="Calibri" pitchFamily="34" charset="0"/>
-                <a:ea typeface="Calibri" pitchFamily="34" charset="-122"/>
-                <a:cs typeface="Calibri" pitchFamily="34" charset="-120"/>
-              </a:rPr>
-              <a:t>xy / z — same as metal</a:t>
-            </a:r>
-            <a:endParaRPr lang="en-US" sz="1250" dirty="0"/>
-          </a:p>
-        </p:txBody>
-      </p:sp>
-      <p:sp>
-        <p:nvSpPr>
-          <p:cNvPr id="16" name="Shape 14"/>
-          <p:cNvSpPr/>
-          <p:nvPr/>
-        </p:nvSpPr>
-        <p:spPr>
-          <a:xfrm>
-            <a:off x="640080" y="3429000"/>
-            <a:ext cx="10607040" cy="2697480"/>
-          </a:xfrm>
-          <a:prstGeom prst="roundRect">
-            <a:avLst>
-              <a:gd name="adj" fmla="val 3051"/>
-            </a:avLst>
-          </a:prstGeom>
-          <a:solidFill>
-            <a:srgbClr val="F3F7FA"/>
-          </a:solidFill>
-          <a:ln w="12700">
-            <a:solidFill>
-              <a:srgbClr val="D8E2EA"/>
-            </a:solidFill>
-            <a:prstDash val="solid"/>
-          </a:ln>
-          <a:effectLst>
-            <a:outerShdw sx="100000" sy="100000" kx="0" ky="0" algn="bl" rotWithShape="0" blurRad="88900" dist="38100" dir="5400000">
-              <a:srgbClr val="5B6B7B">
-                <a:alpha val="18000"/>
-              </a:srgbClr>
-            </a:outerShdw>
-          </a:effectLst>
-        </p:spPr>
-      </p:sp>
-      <p:sp>
-        <p:nvSpPr>
-          <p:cNvPr id="17" name="Text 15"/>
-          <p:cNvSpPr/>
-          <p:nvPr/>
-        </p:nvSpPr>
-        <p:spPr>
-          <a:xfrm>
-            <a:off x="914400" y="3611880"/>
-            <a:ext cx="9144000" cy="365760"/>
-          </a:xfrm>
-          <a:prstGeom prst="rect">
-            <a:avLst/>
-          </a:prstGeom>
-          <a:noFill/>
-          <a:ln/>
-        </p:spPr>
-        <p:txBody>
-          <a:bodyPr wrap="square" lIns="0" tIns="0" rIns="0" bIns="0" rtlCol="0" anchor="ctr"/>
-          <a:lstStyle/>
-          <a:p>
-            <a:pPr indent="0" marL="0">
-              <a:buNone/>
-            </a:pPr>
-            <a:r>
-              <a:rPr lang="en-US" sz="1700" b="1" dirty="0">
-                <a:solidFill>
-                  <a:srgbClr val="0B5D7A"/>
-                </a:solidFill>
-                <a:latin typeface="Cambria" pitchFamily="34" charset="0"/>
-                <a:ea typeface="Cambria" pitchFamily="34" charset="-122"/>
-                <a:cs typeface="Cambria" pitchFamily="34" charset="-120"/>
-              </a:rPr>
-              <a:t>What this establishes</a:t>
-            </a:r>
-            <a:endParaRPr lang="en-US" sz="1700" dirty="0"/>
-          </a:p>
-        </p:txBody>
-      </p:sp>
-      <p:sp>
-        <p:nvSpPr>
-          <p:cNvPr id="18" name="Text 16"/>
-          <p:cNvSpPr/>
-          <p:nvPr/>
-        </p:nvSpPr>
-        <p:spPr>
-          <a:xfrm>
-            <a:off x="914400" y="4114800"/>
-            <a:ext cx="10332720" cy="1920240"/>
+              <a:t>The threshold</a:t>
+            </a:r>
+            <a:endParaRPr lang="en-US" sz="1600" dirty="0"/>
+          </a:p>
+        </p:txBody>
+      </p:sp>
+      <p:sp>
+        <p:nvSpPr>
+          <p:cNvPr id="7" name="Text 4"/>
+          <p:cNvSpPr/>
+          <p:nvPr/>
+        </p:nvSpPr>
+        <p:spPr>
+          <a:xfrm>
+            <a:off x="8092440" y="2286000"/>
+            <a:ext cx="3383280" cy="3657600"/>
           </a:xfrm>
           <a:prstGeom prst="rect">
             <a:avLst/>
@@ -4901,17 +5237,17 @@
               <a:buChar char="•"/>
             </a:pPr>
             <a:r>
-              <a:rPr lang="en-US" sz="1350" dirty="0">
-                <a:solidFill>
-                  <a:srgbClr val="1E293B"/>
+              <a:rPr lang="en-US" sz="1200" dirty="0">
+                <a:solidFill>
+                  <a:srgbClr val="2A1618"/>
                 </a:solidFill>
                 <a:latin typeface="Calibri" pitchFamily="34" charset="0"/>
                 <a:ea typeface="Calibri" pitchFamily="34" charset="-122"/>
                 <a:cs typeface="Calibri" pitchFamily="34" charset="-120"/>
               </a:rPr>
-              <a:t>Depth is NOT the weak axis — with fine depth sampling and full-band frequency, z resolves to ~2 mm, better than the lateral k-NN floor.</a:t>
-            </a:r>
-            <a:endParaRPr lang="en-US" sz="1350" dirty="0"/>
+              <a:t>1 depth plane (82 positions): 33 mm, about chance. The conv net cannot train.</a:t>
+            </a:r>
+            <a:endParaRPr lang="en-US" sz="1200" dirty="0"/>
           </a:p>
           <a:p>
             <a:pPr marL="342900" indent="-342900">
@@ -4922,17 +5258,17 @@
               <a:buChar char="•"/>
             </a:pPr>
             <a:r>
-              <a:rPr lang="en-US" sz="1350" dirty="0">
-                <a:solidFill>
-                  <a:srgbClr val="1E293B"/>
+              <a:rPr lang="en-US" sz="1200" dirty="0">
+                <a:solidFill>
+                  <a:srgbClr val="2A1618"/>
                 </a:solidFill>
                 <a:latin typeface="Calibri" pitchFamily="34" charset="0"/>
                 <a:ea typeface="Calibri" pitchFamily="34" charset="-122"/>
                 <a:cs typeface="Calibri" pitchFamily="34" charset="-120"/>
               </a:rPr>
-              <a:t>A dielectric (beet) tumor localizes identically to metal (3.6 / 2.1 mm) — in the noiseless sim the ~19 % weaker contrast costs nothing.</a:t>
-            </a:r>
-            <a:endParaRPr lang="en-US" sz="1350" dirty="0"/>
+              <a:t>3 planes (245): 11 mm. 5 planes (410): 4.8 mm.</a:t>
+            </a:r>
+            <a:endParaRPr lang="en-US" sz="1200" dirty="0"/>
           </a:p>
           <a:p>
             <a:pPr marL="342900" indent="-342900">
@@ -4943,17 +5279,59 @@
               <a:buChar char="•"/>
             </a:pPr>
             <a:r>
-              <a:rPr lang="en-US" sz="1350" dirty="0">
-                <a:solidFill>
-                  <a:srgbClr val="1E293B"/>
+              <a:rPr lang="en-US" sz="1200" dirty="0">
+                <a:solidFill>
+                  <a:srgbClr val="2A1618"/>
                 </a:solidFill>
                 <a:latin typeface="Calibri" pitchFamily="34" charset="0"/>
                 <a:ea typeface="Calibri" pitchFamily="34" charset="-122"/>
                 <a:cs typeface="Calibri" pitchFamily="34" charset="-120"/>
               </a:rPr>
-              <a:t>Chance is 36 mm laterally / 16 mm in depth, so the model is ~10× better than guessing the centre on both axes.</a:t>
-            </a:r>
-            <a:endParaRPr lang="en-US" sz="1350" dirty="0"/>
+              <a:t>Plateau ~3.8 mm from 7 planes (about 570) on.</a:t>
+            </a:r>
+            <a:endParaRPr lang="en-US" sz="1200" dirty="0"/>
+          </a:p>
+          <a:p>
+            <a:pPr marL="342900" indent="-342900">
+              <a:spcAft>
+                <a:spcPts val="800"/>
+              </a:spcAft>
+              <a:buSzPct val="100000"/>
+              <a:buChar char="•"/>
+            </a:pPr>
+            <a:r>
+              <a:rPr lang="en-US" sz="1200" dirty="0">
+                <a:solidFill>
+                  <a:srgbClr val="2A1618"/>
+                </a:solidFill>
+                <a:latin typeface="Calibri" pitchFamily="34" charset="0"/>
+                <a:ea typeface="Calibri" pitchFamily="34" charset="-122"/>
+                <a:cs typeface="Calibri" pitchFamily="34" charset="-120"/>
+              </a:rPr>
+              <a:t>So it needs ~400 to 500 DISTINCT positions to localize; below ~250 it is poor.</a:t>
+            </a:r>
+            <a:endParaRPr lang="en-US" sz="1200" dirty="0"/>
+          </a:p>
+          <a:p>
+            <a:pPr marL="342900" indent="-342900">
+              <a:spcAft>
+                <a:spcPts val="800"/>
+              </a:spcAft>
+              <a:buSzPct val="100000"/>
+              <a:buChar char="•"/>
+            </a:pPr>
+            <a:r>
+              <a:rPr lang="en-US" sz="1200" dirty="0">
+                <a:solidFill>
+                  <a:srgbClr val="2A1618"/>
+                </a:solidFill>
+                <a:latin typeface="Calibri" pitchFamily="34" charset="0"/>
+                <a:ea typeface="Calibri" pitchFamily="34" charset="-122"/>
+                <a:cs typeface="Calibri" pitchFamily="34" charset="-120"/>
+              </a:rPr>
+              <a:t>Distinct positions matter, not raw sample count (see Part 3).</a:t>
+            </a:r>
+            <a:endParaRPr lang="en-US" sz="1200" dirty="0"/>
           </a:p>
         </p:txBody>
       </p:sp>
@@ -5016,13 +5394,13 @@
             <a:r>
               <a:rPr lang="en-US" sz="2900" b="1" dirty="0">
                 <a:solidFill>
-                  <a:srgbClr val="1E293B"/>
+                  <a:srgbClr val="2A1618"/>
                 </a:solidFill>
                 <a:latin typeface="Cambria" pitchFamily="34" charset="0"/>
                 <a:ea typeface="Cambria" pitchFamily="34" charset="-122"/>
                 <a:cs typeface="Cambria" pitchFamily="34" charset="-120"/>
               </a:rPr>
-              <a:t>Predicting an unseen depth plane</a:t>
+              <a:t>3D localization result (8-fold)</a:t>
             </a:r>
             <a:endParaRPr lang="en-US" sz="2900" dirty="0"/>
           </a:p>
@@ -5055,70 +5433,46 @@
             <a:r>
               <a:rPr lang="en-US" sz="1400" b="1" dirty="0">
                 <a:solidFill>
-                  <a:srgbClr val="1C9AA8"/>
+                  <a:srgbClr val="BE0000"/>
                 </a:solidFill>
                 <a:latin typeface="Calibri" pitchFamily="34" charset="0"/>
                 <a:ea typeface="Calibri" pitchFamily="34" charset="-122"/>
                 <a:cs typeface="Calibri" pitchFamily="34" charset="-120"/>
               </a:rPr>
-              <a:t>Leave one whole depth out — interior depths interpolate; only the range edges fail</a:t>
+              <a:t>Every position predicted from a model that never saw it, lateral and depth separately</a:t>
             </a:r>
             <a:endParaRPr lang="en-US" sz="1400" dirty="0"/>
           </a:p>
         </p:txBody>
       </p:sp>
-      <p:pic>
-        <p:nvPicPr>
-          <p:cNvPr id="4" name="Image 0" descr="sim_depth_lopo.png">    </p:cNvPr>
-          <p:cNvPicPr>
-            <a:picLocks noChangeAspect="1"/>
-          </p:cNvPicPr>
-          <p:nvPr/>
-        </p:nvPicPr>
-        <p:blipFill>
-          <a:blip r:embed="rId1"/>
-          <a:stretch>
-            <a:fillRect/>
-          </a:stretch>
-        </p:blipFill>
-        <p:spPr>
-          <a:xfrm>
-            <a:off x="365760" y="1600200"/>
-            <a:ext cx="8595360" cy="3566160"/>
-          </a:xfrm>
-          <a:prstGeom prst="rect">
-            <a:avLst/>
-          </a:prstGeom>
-        </p:spPr>
-      </p:pic>
-      <p:sp>
-        <p:nvSpPr>
-          <p:cNvPr id="5" name="Shape 2"/>
-          <p:cNvSpPr/>
-          <p:nvPr/>
-        </p:nvSpPr>
-        <p:spPr>
-          <a:xfrm>
-            <a:off x="9098280" y="1600200"/>
-            <a:ext cx="2651760" cy="3566160"/>
+      <p:sp>
+        <p:nvSpPr>
+          <p:cNvPr id="4" name="Shape 2"/>
+          <p:cNvSpPr/>
+          <p:nvPr/>
+        </p:nvSpPr>
+        <p:spPr>
+          <a:xfrm>
+            <a:off x="640080" y="1737360"/>
+            <a:ext cx="2514600" cy="1417320"/>
           </a:xfrm>
           <a:prstGeom prst="roundRect">
             <a:avLst>
-              <a:gd name="adj" fmla="val 3103"/>
+              <a:gd name="adj" fmla="val 5806"/>
             </a:avLst>
           </a:prstGeom>
           <a:solidFill>
-            <a:srgbClr val="F3F7FA"/>
+            <a:srgbClr val="FBF4F2"/>
           </a:solidFill>
           <a:ln w="12700">
             <a:solidFill>
-              <a:srgbClr val="D8E2EA"/>
+              <a:srgbClr val="E7D6D1"/>
             </a:solidFill>
             <a:prstDash val="solid"/>
           </a:ln>
           <a:effectLst>
             <a:outerShdw sx="100000" sy="100000" kx="0" ky="0" algn="bl" rotWithShape="0" blurRad="88900" dist="38100" dir="5400000">
-              <a:srgbClr val="5B6B7B">
+              <a:srgbClr val="7A5C5E">
                 <a:alpha val="18000"/>
               </a:srgbClr>
             </a:outerShdw>
@@ -5127,53 +5481,569 @@
       </p:sp>
       <p:sp>
         <p:nvSpPr>
-          <p:cNvPr id="6" name="Text 3"/>
-          <p:cNvSpPr/>
-          <p:nvPr/>
-        </p:nvSpPr>
-        <p:spPr>
-          <a:xfrm>
-            <a:off x="9281160" y="1737360"/>
-            <a:ext cx="2377440" cy="548640"/>
-          </a:xfrm>
-          <a:prstGeom prst="rect">
-            <a:avLst/>
-          </a:prstGeom>
-          <a:noFill/>
-          <a:ln/>
-        </p:spPr>
-        <p:txBody>
-          <a:bodyPr wrap="square" lIns="0" tIns="0" rIns="0" bIns="0" rtlCol="0" anchor="ctr"/>
-          <a:lstStyle/>
-          <a:p>
-            <a:pPr indent="0" marL="0">
-              <a:buNone/>
-            </a:pPr>
-            <a:r>
-              <a:rPr lang="en-US" sz="1400" b="1" dirty="0">
-                <a:solidFill>
-                  <a:srgbClr val="0B5D7A"/>
+          <p:cNvPr id="5" name="Text 3"/>
+          <p:cNvSpPr/>
+          <p:nvPr/>
+        </p:nvSpPr>
+        <p:spPr>
+          <a:xfrm>
+            <a:off x="640080" y="1901952"/>
+            <a:ext cx="2514600" cy="640080"/>
+          </a:xfrm>
+          <a:prstGeom prst="rect">
+            <a:avLst/>
+          </a:prstGeom>
+          <a:noFill/>
+          <a:ln/>
+        </p:spPr>
+        <p:txBody>
+          <a:bodyPr wrap="square" lIns="0" tIns="0" rIns="0" bIns="0" rtlCol="0" anchor="ctr"/>
+          <a:lstStyle/>
+          <a:p>
+            <a:pPr algn="ctr" indent="0" marL="0">
+              <a:buNone/>
+            </a:pPr>
+            <a:r>
+              <a:rPr lang="en-US" sz="3000" b="1" dirty="0">
+                <a:solidFill>
+                  <a:srgbClr val="BE0000"/>
                 </a:solidFill>
                 <a:latin typeface="Cambria" pitchFamily="34" charset="0"/>
                 <a:ea typeface="Cambria" pitchFamily="34" charset="-122"/>
                 <a:cs typeface="Cambria" pitchFamily="34" charset="-120"/>
               </a:rPr>
-              <a:t>Range-bound, not model-bound</a:t>
-            </a:r>
-            <a:endParaRPr lang="en-US" sz="1400" dirty="0"/>
-          </a:p>
-        </p:txBody>
-      </p:sp>
-      <p:sp>
-        <p:nvSpPr>
-          <p:cNvPr id="7" name="Text 4"/>
-          <p:cNvSpPr/>
-          <p:nvPr/>
-        </p:nvSpPr>
-        <p:spPr>
-          <a:xfrm>
-            <a:off x="9281160" y="2377440"/>
-            <a:ext cx="2377440" cy="2743200"/>
+              <a:t>3.9 mm</a:t>
+            </a:r>
+            <a:endParaRPr lang="en-US" sz="3000" dirty="0"/>
+          </a:p>
+        </p:txBody>
+      </p:sp>
+      <p:sp>
+        <p:nvSpPr>
+          <p:cNvPr id="6" name="Text 4"/>
+          <p:cNvSpPr/>
+          <p:nvPr/>
+        </p:nvSpPr>
+        <p:spPr>
+          <a:xfrm>
+            <a:off x="731520" y="2606040"/>
+            <a:ext cx="2331720" cy="457200"/>
+          </a:xfrm>
+          <a:prstGeom prst="rect">
+            <a:avLst/>
+          </a:prstGeom>
+          <a:noFill/>
+          <a:ln/>
+        </p:spPr>
+        <p:txBody>
+          <a:bodyPr wrap="square" lIns="0" tIns="0" rIns="0" bIns="0" rtlCol="0" anchor="ctr"/>
+          <a:lstStyle/>
+          <a:p>
+            <a:pPr algn="ctr" indent="0" marL="0">
+              <a:buNone/>
+            </a:pPr>
+            <a:r>
+              <a:rPr lang="en-US" sz="1250" dirty="0">
+                <a:solidFill>
+                  <a:srgbClr val="836A68"/>
+                </a:solidFill>
+                <a:latin typeface="Calibri" pitchFamily="34" charset="0"/>
+                <a:ea typeface="Calibri" pitchFamily="34" charset="-122"/>
+                <a:cs typeface="Calibri" pitchFamily="34" charset="-120"/>
+              </a:rPr>
+              <a:t>lateral (xy) median</a:t>
+            </a:r>
+            <a:endParaRPr lang="en-US" sz="1250" dirty="0"/>
+          </a:p>
+          <a:p>
+            <a:pPr algn="ctr" indent="0" marL="0">
+              <a:buNone/>
+            </a:pPr>
+            <a:r>
+              <a:rPr lang="en-US" sz="1250" dirty="0">
+                <a:solidFill>
+                  <a:srgbClr val="836A68"/>
+                </a:solidFill>
+                <a:latin typeface="Calibri" pitchFamily="34" charset="0"/>
+                <a:ea typeface="Calibri" pitchFamily="34" charset="-122"/>
+                <a:cs typeface="Calibri" pitchFamily="34" charset="-120"/>
+              </a:rPr>
+              <a:t>vs 36.5 mm chance</a:t>
+            </a:r>
+            <a:endParaRPr lang="en-US" sz="1250" dirty="0"/>
+          </a:p>
+        </p:txBody>
+      </p:sp>
+      <p:sp>
+        <p:nvSpPr>
+          <p:cNvPr id="7" name="Shape 5"/>
+          <p:cNvSpPr/>
+          <p:nvPr/>
+        </p:nvSpPr>
+        <p:spPr>
+          <a:xfrm>
+            <a:off x="3337560" y="1737360"/>
+            <a:ext cx="2514600" cy="1417320"/>
+          </a:xfrm>
+          <a:prstGeom prst="roundRect">
+            <a:avLst>
+              <a:gd name="adj" fmla="val 5806"/>
+            </a:avLst>
+          </a:prstGeom>
+          <a:solidFill>
+            <a:srgbClr val="FBF4F2"/>
+          </a:solidFill>
+          <a:ln w="12700">
+            <a:solidFill>
+              <a:srgbClr val="E7D6D1"/>
+            </a:solidFill>
+            <a:prstDash val="solid"/>
+          </a:ln>
+          <a:effectLst>
+            <a:outerShdw sx="100000" sy="100000" kx="0" ky="0" algn="bl" rotWithShape="0" blurRad="88900" dist="38100" dir="5400000">
+              <a:srgbClr val="7A5C5E">
+                <a:alpha val="18000"/>
+              </a:srgbClr>
+            </a:outerShdw>
+          </a:effectLst>
+        </p:spPr>
+      </p:sp>
+      <p:sp>
+        <p:nvSpPr>
+          <p:cNvPr id="8" name="Text 6"/>
+          <p:cNvSpPr/>
+          <p:nvPr/>
+        </p:nvSpPr>
+        <p:spPr>
+          <a:xfrm>
+            <a:off x="3337560" y="1901952"/>
+            <a:ext cx="2514600" cy="640080"/>
+          </a:xfrm>
+          <a:prstGeom prst="rect">
+            <a:avLst/>
+          </a:prstGeom>
+          <a:noFill/>
+          <a:ln/>
+        </p:spPr>
+        <p:txBody>
+          <a:bodyPr wrap="square" lIns="0" tIns="0" rIns="0" bIns="0" rtlCol="0" anchor="ctr"/>
+          <a:lstStyle/>
+          <a:p>
+            <a:pPr algn="ctr" indent="0" marL="0">
+              <a:buNone/>
+            </a:pPr>
+            <a:r>
+              <a:rPr lang="en-US" sz="3000" b="1" dirty="0">
+                <a:solidFill>
+                  <a:srgbClr val="C0564A"/>
+                </a:solidFill>
+                <a:latin typeface="Cambria" pitchFamily="34" charset="0"/>
+                <a:ea typeface="Cambria" pitchFamily="34" charset="-122"/>
+                <a:cs typeface="Cambria" pitchFamily="34" charset="-120"/>
+              </a:rPr>
+              <a:t>2.1 mm</a:t>
+            </a:r>
+            <a:endParaRPr lang="en-US" sz="3000" dirty="0"/>
+          </a:p>
+        </p:txBody>
+      </p:sp>
+      <p:sp>
+        <p:nvSpPr>
+          <p:cNvPr id="9" name="Text 7"/>
+          <p:cNvSpPr/>
+          <p:nvPr/>
+        </p:nvSpPr>
+        <p:spPr>
+          <a:xfrm>
+            <a:off x="3429000" y="2606040"/>
+            <a:ext cx="2331720" cy="457200"/>
+          </a:xfrm>
+          <a:prstGeom prst="rect">
+            <a:avLst/>
+          </a:prstGeom>
+          <a:noFill/>
+          <a:ln/>
+        </p:spPr>
+        <p:txBody>
+          <a:bodyPr wrap="square" lIns="0" tIns="0" rIns="0" bIns="0" rtlCol="0" anchor="ctr"/>
+          <a:lstStyle/>
+          <a:p>
+            <a:pPr algn="ctr" indent="0" marL="0">
+              <a:buNone/>
+            </a:pPr>
+            <a:r>
+              <a:rPr lang="en-US" sz="1250" dirty="0">
+                <a:solidFill>
+                  <a:srgbClr val="836A68"/>
+                </a:solidFill>
+                <a:latin typeface="Calibri" pitchFamily="34" charset="0"/>
+                <a:ea typeface="Calibri" pitchFamily="34" charset="-122"/>
+                <a:cs typeface="Calibri" pitchFamily="34" charset="-120"/>
+              </a:rPr>
+              <a:t>depth (z) median</a:t>
+            </a:r>
+            <a:endParaRPr lang="en-US" sz="1250" dirty="0"/>
+          </a:p>
+          <a:p>
+            <a:pPr algn="ctr" indent="0" marL="0">
+              <a:buNone/>
+            </a:pPr>
+            <a:r>
+              <a:rPr lang="en-US" sz="1250" dirty="0">
+                <a:solidFill>
+                  <a:srgbClr val="836A68"/>
+                </a:solidFill>
+                <a:latin typeface="Calibri" pitchFamily="34" charset="0"/>
+                <a:ea typeface="Calibri" pitchFamily="34" charset="-122"/>
+                <a:cs typeface="Calibri" pitchFamily="34" charset="-120"/>
+              </a:rPr>
+              <a:t>vs 16.3 mm chance</a:t>
+            </a:r>
+            <a:endParaRPr lang="en-US" sz="1250" dirty="0"/>
+          </a:p>
+        </p:txBody>
+      </p:sp>
+      <p:sp>
+        <p:nvSpPr>
+          <p:cNvPr id="10" name="Shape 8"/>
+          <p:cNvSpPr/>
+          <p:nvPr/>
+        </p:nvSpPr>
+        <p:spPr>
+          <a:xfrm>
+            <a:off x="6035040" y="1737360"/>
+            <a:ext cx="2514600" cy="1417320"/>
+          </a:xfrm>
+          <a:prstGeom prst="roundRect">
+            <a:avLst>
+              <a:gd name="adj" fmla="val 5806"/>
+            </a:avLst>
+          </a:prstGeom>
+          <a:solidFill>
+            <a:srgbClr val="FBF4F2"/>
+          </a:solidFill>
+          <a:ln w="12700">
+            <a:solidFill>
+              <a:srgbClr val="E7D6D1"/>
+            </a:solidFill>
+            <a:prstDash val="solid"/>
+          </a:ln>
+          <a:effectLst>
+            <a:outerShdw sx="100000" sy="100000" kx="0" ky="0" algn="bl" rotWithShape="0" blurRad="88900" dist="38100" dir="5400000">
+              <a:srgbClr val="7A5C5E">
+                <a:alpha val="18000"/>
+              </a:srgbClr>
+            </a:outerShdw>
+          </a:effectLst>
+        </p:spPr>
+      </p:sp>
+      <p:sp>
+        <p:nvSpPr>
+          <p:cNvPr id="11" name="Text 9"/>
+          <p:cNvSpPr/>
+          <p:nvPr/>
+        </p:nvSpPr>
+        <p:spPr>
+          <a:xfrm>
+            <a:off x="6035040" y="1901952"/>
+            <a:ext cx="2514600" cy="640080"/>
+          </a:xfrm>
+          <a:prstGeom prst="rect">
+            <a:avLst/>
+          </a:prstGeom>
+          <a:noFill/>
+          <a:ln/>
+        </p:spPr>
+        <p:txBody>
+          <a:bodyPr wrap="square" lIns="0" tIns="0" rIns="0" bIns="0" rtlCol="0" anchor="ctr"/>
+          <a:lstStyle/>
+          <a:p>
+            <a:pPr algn="ctr" indent="0" marL="0">
+              <a:buNone/>
+            </a:pPr>
+            <a:r>
+              <a:rPr lang="en-US" sz="3000" b="1" dirty="0">
+                <a:solidFill>
+                  <a:srgbClr val="8E1010"/>
+                </a:solidFill>
+                <a:latin typeface="Cambria" pitchFamily="34" charset="0"/>
+                <a:ea typeface="Cambria" pitchFamily="34" charset="-122"/>
+                <a:cs typeface="Cambria" pitchFamily="34" charset="-120"/>
+              </a:rPr>
+              <a:t>93 %</a:t>
+            </a:r>
+            <a:endParaRPr lang="en-US" sz="3000" dirty="0"/>
+          </a:p>
+        </p:txBody>
+      </p:sp>
+      <p:sp>
+        <p:nvSpPr>
+          <p:cNvPr id="12" name="Text 10"/>
+          <p:cNvSpPr/>
+          <p:nvPr/>
+        </p:nvSpPr>
+        <p:spPr>
+          <a:xfrm>
+            <a:off x="6126480" y="2606040"/>
+            <a:ext cx="2331720" cy="457200"/>
+          </a:xfrm>
+          <a:prstGeom prst="rect">
+            <a:avLst/>
+          </a:prstGeom>
+          <a:noFill/>
+          <a:ln/>
+        </p:spPr>
+        <p:txBody>
+          <a:bodyPr wrap="square" lIns="0" tIns="0" rIns="0" bIns="0" rtlCol="0" anchor="ctr"/>
+          <a:lstStyle/>
+          <a:p>
+            <a:pPr algn="ctr" indent="0" marL="0">
+              <a:buNone/>
+            </a:pPr>
+            <a:r>
+              <a:rPr lang="en-US" sz="1250" dirty="0">
+                <a:solidFill>
+                  <a:srgbClr val="836A68"/>
+                </a:solidFill>
+                <a:latin typeface="Calibri" pitchFamily="34" charset="0"/>
+                <a:ea typeface="Calibri" pitchFamily="34" charset="-122"/>
+                <a:cs typeface="Calibri" pitchFamily="34" charset="-120"/>
+              </a:rPr>
+              <a:t>of positions within</a:t>
+            </a:r>
+            <a:endParaRPr lang="en-US" sz="1250" dirty="0"/>
+          </a:p>
+          <a:p>
+            <a:pPr algn="ctr" indent="0" marL="0">
+              <a:buNone/>
+            </a:pPr>
+            <a:r>
+              <a:rPr lang="en-US" sz="1250" dirty="0">
+                <a:solidFill>
+                  <a:srgbClr val="836A68"/>
+                </a:solidFill>
+                <a:latin typeface="Calibri" pitchFamily="34" charset="0"/>
+                <a:ea typeface="Calibri" pitchFamily="34" charset="-122"/>
+                <a:cs typeface="Calibri" pitchFamily="34" charset="-120"/>
+              </a:rPr>
+              <a:t>10 mm laterally</a:t>
+            </a:r>
+            <a:endParaRPr lang="en-US" sz="1250" dirty="0"/>
+          </a:p>
+        </p:txBody>
+      </p:sp>
+      <p:sp>
+        <p:nvSpPr>
+          <p:cNvPr id="13" name="Shape 11"/>
+          <p:cNvSpPr/>
+          <p:nvPr/>
+        </p:nvSpPr>
+        <p:spPr>
+          <a:xfrm>
+            <a:off x="8732520" y="1737360"/>
+            <a:ext cx="2514600" cy="1417320"/>
+          </a:xfrm>
+          <a:prstGeom prst="roundRect">
+            <a:avLst>
+              <a:gd name="adj" fmla="val 5806"/>
+            </a:avLst>
+          </a:prstGeom>
+          <a:solidFill>
+            <a:srgbClr val="FBF4F2"/>
+          </a:solidFill>
+          <a:ln w="12700">
+            <a:solidFill>
+              <a:srgbClr val="E7D6D1"/>
+            </a:solidFill>
+            <a:prstDash val="solid"/>
+          </a:ln>
+          <a:effectLst>
+            <a:outerShdw sx="100000" sy="100000" kx="0" ky="0" algn="bl" rotWithShape="0" blurRad="88900" dist="38100" dir="5400000">
+              <a:srgbClr val="7A5C5E">
+                <a:alpha val="18000"/>
+              </a:srgbClr>
+            </a:outerShdw>
+          </a:effectLst>
+        </p:spPr>
+      </p:sp>
+      <p:sp>
+        <p:nvSpPr>
+          <p:cNvPr id="14" name="Text 12"/>
+          <p:cNvSpPr/>
+          <p:nvPr/>
+        </p:nvSpPr>
+        <p:spPr>
+          <a:xfrm>
+            <a:off x="8732520" y="1901952"/>
+            <a:ext cx="2514600" cy="640080"/>
+          </a:xfrm>
+          <a:prstGeom prst="rect">
+            <a:avLst/>
+          </a:prstGeom>
+          <a:noFill/>
+          <a:ln/>
+        </p:spPr>
+        <p:txBody>
+          <a:bodyPr wrap="square" lIns="0" tIns="0" rIns="0" bIns="0" rtlCol="0" anchor="ctr"/>
+          <a:lstStyle/>
+          <a:p>
+            <a:pPr algn="ctr" indent="0" marL="0">
+              <a:buNone/>
+            </a:pPr>
+            <a:r>
+              <a:rPr lang="en-US" sz="3000" b="1" dirty="0">
+                <a:solidFill>
+                  <a:srgbClr val="C8890B"/>
+                </a:solidFill>
+                <a:latin typeface="Cambria" pitchFamily="34" charset="0"/>
+                <a:ea typeface="Cambria" pitchFamily="34" charset="-122"/>
+                <a:cs typeface="Cambria" pitchFamily="34" charset="-120"/>
+              </a:rPr>
+              <a:t>3.6 / 2.1</a:t>
+            </a:r>
+            <a:endParaRPr lang="en-US" sz="3000" dirty="0"/>
+          </a:p>
+        </p:txBody>
+      </p:sp>
+      <p:sp>
+        <p:nvSpPr>
+          <p:cNvPr id="15" name="Text 13"/>
+          <p:cNvSpPr/>
+          <p:nvPr/>
+        </p:nvSpPr>
+        <p:spPr>
+          <a:xfrm>
+            <a:off x="8823960" y="2606040"/>
+            <a:ext cx="2331720" cy="457200"/>
+          </a:xfrm>
+          <a:prstGeom prst="rect">
+            <a:avLst/>
+          </a:prstGeom>
+          <a:noFill/>
+          <a:ln/>
+        </p:spPr>
+        <p:txBody>
+          <a:bodyPr wrap="square" lIns="0" tIns="0" rIns="0" bIns="0" rtlCol="0" anchor="ctr"/>
+          <a:lstStyle/>
+          <a:p>
+            <a:pPr algn="ctr" indent="0" marL="0">
+              <a:buNone/>
+            </a:pPr>
+            <a:r>
+              <a:rPr lang="en-US" sz="1250" dirty="0">
+                <a:solidFill>
+                  <a:srgbClr val="836A68"/>
+                </a:solidFill>
+                <a:latin typeface="Calibri" pitchFamily="34" charset="0"/>
+                <a:ea typeface="Calibri" pitchFamily="34" charset="-122"/>
+                <a:cs typeface="Calibri" pitchFamily="34" charset="-120"/>
+              </a:rPr>
+              <a:t>beet (dielectric)</a:t>
+            </a:r>
+            <a:endParaRPr lang="en-US" sz="1250" dirty="0"/>
+          </a:p>
+          <a:p>
+            <a:pPr algn="ctr" indent="0" marL="0">
+              <a:buNone/>
+            </a:pPr>
+            <a:r>
+              <a:rPr lang="en-US" sz="1250" dirty="0">
+                <a:solidFill>
+                  <a:srgbClr val="836A68"/>
+                </a:solidFill>
+                <a:latin typeface="Calibri" pitchFamily="34" charset="0"/>
+                <a:ea typeface="Calibri" pitchFamily="34" charset="-122"/>
+                <a:cs typeface="Calibri" pitchFamily="34" charset="-120"/>
+              </a:rPr>
+              <a:t>xy / z, same as metal</a:t>
+            </a:r>
+            <a:endParaRPr lang="en-US" sz="1250" dirty="0"/>
+          </a:p>
+        </p:txBody>
+      </p:sp>
+      <p:sp>
+        <p:nvSpPr>
+          <p:cNvPr id="16" name="Shape 14"/>
+          <p:cNvSpPr/>
+          <p:nvPr/>
+        </p:nvSpPr>
+        <p:spPr>
+          <a:xfrm>
+            <a:off x="640080" y="3429000"/>
+            <a:ext cx="10607040" cy="2697480"/>
+          </a:xfrm>
+          <a:prstGeom prst="roundRect">
+            <a:avLst>
+              <a:gd name="adj" fmla="val 3051"/>
+            </a:avLst>
+          </a:prstGeom>
+          <a:solidFill>
+            <a:srgbClr val="FBF4F2"/>
+          </a:solidFill>
+          <a:ln w="12700">
+            <a:solidFill>
+              <a:srgbClr val="E7D6D1"/>
+            </a:solidFill>
+            <a:prstDash val="solid"/>
+          </a:ln>
+          <a:effectLst>
+            <a:outerShdw sx="100000" sy="100000" kx="0" ky="0" algn="bl" rotWithShape="0" blurRad="88900" dist="38100" dir="5400000">
+              <a:srgbClr val="7A5C5E">
+                <a:alpha val="18000"/>
+              </a:srgbClr>
+            </a:outerShdw>
+          </a:effectLst>
+        </p:spPr>
+      </p:sp>
+      <p:sp>
+        <p:nvSpPr>
+          <p:cNvPr id="17" name="Text 15"/>
+          <p:cNvSpPr/>
+          <p:nvPr/>
+        </p:nvSpPr>
+        <p:spPr>
+          <a:xfrm>
+            <a:off x="914400" y="3611880"/>
+            <a:ext cx="9144000" cy="365760"/>
+          </a:xfrm>
+          <a:prstGeom prst="rect">
+            <a:avLst/>
+          </a:prstGeom>
+          <a:noFill/>
+          <a:ln/>
+        </p:spPr>
+        <p:txBody>
+          <a:bodyPr wrap="square" lIns="0" tIns="0" rIns="0" bIns="0" rtlCol="0" anchor="ctr"/>
+          <a:lstStyle/>
+          <a:p>
+            <a:pPr indent="0" marL="0">
+              <a:buNone/>
+            </a:pPr>
+            <a:r>
+              <a:rPr lang="en-US" sz="1700" b="1" dirty="0">
+                <a:solidFill>
+                  <a:srgbClr val="BE0000"/>
+                </a:solidFill>
+                <a:latin typeface="Cambria" pitchFamily="34" charset="0"/>
+                <a:ea typeface="Cambria" pitchFamily="34" charset="-122"/>
+                <a:cs typeface="Cambria" pitchFamily="34" charset="-120"/>
+              </a:rPr>
+              <a:t>What this establishes</a:t>
+            </a:r>
+            <a:endParaRPr lang="en-US" sz="1700" dirty="0"/>
+          </a:p>
+        </p:txBody>
+      </p:sp>
+      <p:sp>
+        <p:nvSpPr>
+          <p:cNvPr id="18" name="Text 16"/>
+          <p:cNvSpPr/>
+          <p:nvPr/>
+        </p:nvSpPr>
+        <p:spPr>
+          <a:xfrm>
+            <a:off x="914400" y="4114800"/>
+            <a:ext cx="10332720" cy="1920240"/>
           </a:xfrm>
           <a:prstGeom prst="rect">
             <a:avLst/>
@@ -5193,17 +6063,17 @@
               <a:buChar char="•"/>
             </a:pPr>
             <a:r>
-              <a:rPr lang="en-US" sz="1150" dirty="0">
-                <a:solidFill>
-                  <a:srgbClr val="1E293B"/>
+              <a:rPr lang="en-US" sz="1350" dirty="0">
+                <a:solidFill>
+                  <a:srgbClr val="2A1618"/>
                 </a:solidFill>
                 <a:latin typeface="Calibri" pitchFamily="34" charset="0"/>
                 <a:ea typeface="Calibri" pitchFamily="34" charset="-122"/>
                 <a:cs typeface="Calibri" pitchFamily="34" charset="-120"/>
               </a:rPr>
-              <a:t>Interior unseen depths: ~1–3 mm — a continuous learned depth map.</a:t>
-            </a:r>
-            <a:endParaRPr lang="en-US" sz="1150" dirty="0"/>
+              <a:t>Depth is NOT the weak axis. With fine depth sampling and full-band frequency, z resolves to ~2 mm, better than the lateral k-NN floor.</a:t>
+            </a:r>
+            <a:endParaRPr lang="en-US" sz="1350" dirty="0"/>
           </a:p>
           <a:p>
             <a:pPr marL="342900" indent="-342900">
@@ -5214,17 +6084,17 @@
               <a:buChar char="•"/>
             </a:pPr>
             <a:r>
-              <a:rPr lang="en-US" sz="1150" dirty="0">
-                <a:solidFill>
-                  <a:srgbClr val="1E293B"/>
+              <a:rPr lang="en-US" sz="1350" dirty="0">
+                <a:solidFill>
+                  <a:srgbClr val="2A1618"/>
                 </a:solidFill>
                 <a:latin typeface="Calibri" pitchFamily="34" charset="0"/>
                 <a:ea typeface="Calibri" pitchFamily="34" charset="-122"/>
                 <a:cs typeface="Calibri" pitchFamily="34" charset="-120"/>
               </a:rPr>
-              <a:t>Only the two extremes (−15 / +45) blow up — pure extrapolation.</a:t>
-            </a:r>
-            <a:endParaRPr lang="en-US" sz="1150" dirty="0"/>
+              <a:t>A dielectric (beet) tumor localizes identically to metal (3.6 / 2.1 mm). In the noiseless sim the ~19 percent weaker contrast costs nothing.</a:t>
+            </a:r>
+            <a:endParaRPr lang="en-US" sz="1350" dirty="0"/>
           </a:p>
           <a:p>
             <a:pPr marL="342900" indent="-342900">
@@ -5235,54 +6105,15 @@
               <a:buChar char="•"/>
             </a:pPr>
             <a:r>
-              <a:rPr lang="en-US" sz="1150" dirty="0">
-                <a:solidFill>
-                  <a:srgbClr val="1E293B"/>
+              <a:rPr lang="en-US" sz="1350" dirty="0">
+                <a:solidFill>
+                  <a:srgbClr val="2A1618"/>
                 </a:solidFill>
                 <a:latin typeface="Calibri" pitchFamily="34" charset="0"/>
                 <a:ea typeface="Calibri" pitchFamily="34" charset="-122"/>
                 <a:cs typeface="Calibri" pitchFamily="34" charset="-120"/>
               </a:rPr>
-              <a:t>Extending the sweep turned the OLD edges into good interior points.</a:t>
-            </a:r>
-            <a:endParaRPr lang="en-US" sz="1150" dirty="0"/>
-          </a:p>
-        </p:txBody>
-      </p:sp>
-      <p:sp>
-        <p:nvSpPr>
-          <p:cNvPr id="8" name="Text 5"/>
-          <p:cNvSpPr/>
-          <p:nvPr/>
-        </p:nvSpPr>
-        <p:spPr>
-          <a:xfrm>
-            <a:off x="548640" y="6172200"/>
-            <a:ext cx="11091672" cy="457200"/>
-          </a:xfrm>
-          <a:prstGeom prst="rect">
-            <a:avLst/>
-          </a:prstGeom>
-          <a:noFill/>
-          <a:ln/>
-        </p:spPr>
-        <p:txBody>
-          <a:bodyPr wrap="square" lIns="0" tIns="0" rIns="0" bIns="0" rtlCol="0" anchor="ctr"/>
-          <a:lstStyle/>
-          <a:p>
-            <a:pPr algn="ctr" indent="0" marL="0">
-              <a:buNone/>
-            </a:pPr>
-            <a:r>
-              <a:rPr lang="en-US" sz="1350" i="1" dirty="0">
-                <a:solidFill>
-                  <a:srgbClr val="5B6B7B"/>
-                </a:solidFill>
-                <a:latin typeface="Calibri" pitchFamily="34" charset="0"/>
-                <a:ea typeface="Calibri" pitchFamily="34" charset="-122"/>
-                <a:cs typeface="Calibri" pitchFamily="34" charset="-120"/>
-              </a:rPr>
-              <a:t>Usable depth is bounded by the sampling range, not the model — sample wider and the good region grows.</a:t>
+              <a:t>Chance is 36 mm laterally / 16 mm in depth, so the model is about 10x better than guessing the centre on both axes.</a:t>
             </a:r>
             <a:endParaRPr lang="en-US" sz="1350" dirty="0"/>
           </a:p>
@@ -5347,13 +6178,13 @@
             <a:r>
               <a:rPr lang="en-US" sz="2900" b="1" dirty="0">
                 <a:solidFill>
-                  <a:srgbClr val="1E293B"/>
+                  <a:srgbClr val="2A1618"/>
                 </a:solidFill>
                 <a:latin typeface="Cambria" pitchFamily="34" charset="0"/>
                 <a:ea typeface="Cambria" pitchFamily="34" charset="-122"/>
                 <a:cs typeface="Cambria" pitchFamily="34" charset="-120"/>
               </a:rPr>
-              <a:t>Predicted vs. actual, by depth</a:t>
+              <a:t>Predicting an unseen depth plane</a:t>
             </a:r>
             <a:endParaRPr lang="en-US" sz="2900" dirty="0"/>
           </a:p>
@@ -5386,55 +6217,21 @@
             <a:r>
               <a:rPr lang="en-US" sz="1400" b="1" dirty="0">
                 <a:solidFill>
-                  <a:srgbClr val="1C9AA8"/>
+                  <a:srgbClr val="BE0000"/>
                 </a:solidFill>
                 <a:latin typeface="Calibri" pitchFamily="34" charset="0"/>
                 <a:ea typeface="Calibri" pitchFamily="34" charset="-122"/>
                 <a:cs typeface="Calibri" pitchFamily="34" charset="-120"/>
               </a:rPr>
-              <a:t>Arrows = lateral error · marker color = depth error · red-ring = grid-edge position</a:t>
+              <a:t>Leave one whole depth out; interior depths interpolate, only the outer edge depths fail</a:t>
             </a:r>
             <a:endParaRPr lang="en-US" sz="1400" dirty="0"/>
           </a:p>
         </p:txBody>
-      </p:sp>
-      <p:sp>
-        <p:nvSpPr>
-          <p:cNvPr id="4" name="Shape 2"/>
-          <p:cNvSpPr/>
-          <p:nvPr/>
-        </p:nvSpPr>
-        <p:spPr>
-          <a:xfrm>
-            <a:off x="310896" y="1581912"/>
-            <a:ext cx="3794760" cy="3977640"/>
-          </a:xfrm>
-          <a:prstGeom prst="roundRect">
-            <a:avLst>
-              <a:gd name="adj" fmla="val 2169"/>
-            </a:avLst>
-          </a:prstGeom>
-          <a:solidFill>
-            <a:srgbClr val="F3F7FA"/>
-          </a:solidFill>
-          <a:ln w="12700">
-            <a:solidFill>
-              <a:srgbClr val="D8E2EA"/>
-            </a:solidFill>
-            <a:prstDash val="solid"/>
-          </a:ln>
-          <a:effectLst>
-            <a:outerShdw sx="100000" sy="100000" kx="0" ky="0" algn="bl" rotWithShape="0" blurRad="88900" dist="38100" dir="5400000">
-              <a:srgbClr val="5B6B7B">
-                <a:alpha val="18000"/>
-              </a:srgbClr>
-            </a:outerShdw>
-          </a:effectLst>
-        </p:spPr>
       </p:sp>
       <p:pic>
         <p:nvPicPr>
-          <p:cNvPr id="5" name="Image 0" descr="sim_depth_examples/sim_depthplot_zp15_n25.png">    </p:cNvPr>
+          <p:cNvPr id="4" name="Image 0" descr="sim_depth_lopo.png">    </p:cNvPr>
           <p:cNvPicPr>
             <a:picLocks noChangeAspect="1"/>
           </p:cNvPicPr>
@@ -5448,8 +6245,8 @@
         </p:blipFill>
         <p:spPr>
           <a:xfrm>
-            <a:off x="402336" y="1691640"/>
-            <a:ext cx="3611880" cy="3429000"/>
+            <a:off x="365760" y="1600200"/>
+            <a:ext cx="8595360" cy="3566160"/>
           </a:xfrm>
           <a:prstGeom prst="rect">
             <a:avLst/>
@@ -5458,273 +6255,198 @@
       </p:pic>
       <p:sp>
         <p:nvSpPr>
-          <p:cNvPr id="6" name="Text 3"/>
-          <p:cNvSpPr/>
-          <p:nvPr/>
-        </p:nvSpPr>
-        <p:spPr>
-          <a:xfrm>
-            <a:off x="310896" y="5120640"/>
-            <a:ext cx="3794760" cy="329184"/>
-          </a:xfrm>
-          <a:prstGeom prst="rect">
-            <a:avLst/>
-          </a:prstGeom>
-          <a:noFill/>
-          <a:ln/>
-        </p:spPr>
-        <p:txBody>
-          <a:bodyPr wrap="square" lIns="0" tIns="0" rIns="0" bIns="0" rtlCol="0" anchor="ctr"/>
-          <a:lstStyle/>
-          <a:p>
-            <a:pPr algn="ctr" indent="0" marL="0">
-              <a:buNone/>
-            </a:pPr>
-            <a:r>
-              <a:rPr lang="en-US" sz="1300" b="1" dirty="0">
-                <a:solidFill>
-                  <a:srgbClr val="1C9AA8"/>
-                </a:solidFill>
-                <a:latin typeface="Calibri" pitchFamily="34" charset="0"/>
-                <a:ea typeface="Calibri" pitchFamily="34" charset="-122"/>
-                <a:cs typeface="Calibri" pitchFamily="34" charset="-120"/>
-              </a:rPr>
-              <a:t>z = +15 mm  (peak signal)</a:t>
-            </a:r>
-            <a:endParaRPr lang="en-US" sz="1300" dirty="0"/>
-          </a:p>
-        </p:txBody>
-      </p:sp>
-      <p:sp>
-        <p:nvSpPr>
-          <p:cNvPr id="7" name="Shape 4"/>
-          <p:cNvSpPr/>
-          <p:nvPr/>
-        </p:nvSpPr>
-        <p:spPr>
-          <a:xfrm>
-            <a:off x="4197096" y="1581912"/>
-            <a:ext cx="3794760" cy="3977640"/>
+          <p:cNvPr id="5" name="Shape 2"/>
+          <p:cNvSpPr/>
+          <p:nvPr/>
+        </p:nvSpPr>
+        <p:spPr>
+          <a:xfrm>
+            <a:off x="9098280" y="1600200"/>
+            <a:ext cx="2651760" cy="3566160"/>
           </a:xfrm>
           <a:prstGeom prst="roundRect">
             <a:avLst>
-              <a:gd name="adj" fmla="val 2169"/>
+              <a:gd name="adj" fmla="val 3103"/>
             </a:avLst>
           </a:prstGeom>
           <a:solidFill>
-            <a:srgbClr val="F3F7FA"/>
+            <a:srgbClr val="FBF4F2"/>
           </a:solidFill>
           <a:ln w="12700">
             <a:solidFill>
-              <a:srgbClr val="D8E2EA"/>
+              <a:srgbClr val="E7D6D1"/>
             </a:solidFill>
             <a:prstDash val="solid"/>
           </a:ln>
           <a:effectLst>
             <a:outerShdw sx="100000" sy="100000" kx="0" ky="0" algn="bl" rotWithShape="0" blurRad="88900" dist="38100" dir="5400000">
-              <a:srgbClr val="5B6B7B">
+              <a:srgbClr val="7A5C5E">
                 <a:alpha val="18000"/>
               </a:srgbClr>
             </a:outerShdw>
           </a:effectLst>
         </p:spPr>
       </p:sp>
-      <p:pic>
-        <p:nvPicPr>
-          <p:cNvPr id="8" name="Image 1" descr="sim_depth_examples/sim_depthplot_zp30_n25.png">    </p:cNvPr>
-          <p:cNvPicPr>
-            <a:picLocks noChangeAspect="1"/>
-          </p:cNvPicPr>
-          <p:nvPr/>
-        </p:nvPicPr>
-        <p:blipFill>
-          <a:blip r:embed="rId2"/>
-          <a:stretch>
-            <a:fillRect/>
-          </a:stretch>
-        </p:blipFill>
-        <p:spPr>
-          <a:xfrm>
-            <a:off x="4288536" y="1691640"/>
-            <a:ext cx="3611880" cy="3429000"/>
-          </a:xfrm>
-          <a:prstGeom prst="rect">
-            <a:avLst/>
-          </a:prstGeom>
-        </p:spPr>
-      </p:pic>
-      <p:sp>
-        <p:nvSpPr>
-          <p:cNvPr id="9" name="Text 5"/>
-          <p:cNvSpPr/>
-          <p:nvPr/>
-        </p:nvSpPr>
-        <p:spPr>
-          <a:xfrm>
-            <a:off x="4197096" y="5120640"/>
-            <a:ext cx="3794760" cy="329184"/>
-          </a:xfrm>
-          <a:prstGeom prst="rect">
-            <a:avLst/>
-          </a:prstGeom>
-          <a:noFill/>
-          <a:ln/>
-        </p:spPr>
-        <p:txBody>
-          <a:bodyPr wrap="square" lIns="0" tIns="0" rIns="0" bIns="0" rtlCol="0" anchor="ctr"/>
-          <a:lstStyle/>
-          <a:p>
-            <a:pPr algn="ctr" indent="0" marL="0">
-              <a:buNone/>
-            </a:pPr>
-            <a:r>
-              <a:rPr lang="en-US" sz="1300" b="1" dirty="0">
-                <a:solidFill>
-                  <a:srgbClr val="1C9AA8"/>
+      <p:sp>
+        <p:nvSpPr>
+          <p:cNvPr id="6" name="Text 3"/>
+          <p:cNvSpPr/>
+          <p:nvPr/>
+        </p:nvSpPr>
+        <p:spPr>
+          <a:xfrm>
+            <a:off x="9281160" y="1737360"/>
+            <a:ext cx="2377440" cy="548640"/>
+          </a:xfrm>
+          <a:prstGeom prst="rect">
+            <a:avLst/>
+          </a:prstGeom>
+          <a:noFill/>
+          <a:ln/>
+        </p:spPr>
+        <p:txBody>
+          <a:bodyPr wrap="square" lIns="0" tIns="0" rIns="0" bIns="0" rtlCol="0" anchor="ctr"/>
+          <a:lstStyle/>
+          <a:p>
+            <a:pPr indent="0" marL="0">
+              <a:buNone/>
+            </a:pPr>
+            <a:r>
+              <a:rPr lang="en-US" sz="1400" b="1" dirty="0">
+                <a:solidFill>
+                  <a:srgbClr val="BE0000"/>
+                </a:solidFill>
+                <a:latin typeface="Cambria" pitchFamily="34" charset="0"/>
+                <a:ea typeface="Cambria" pitchFamily="34" charset="-122"/>
+                <a:cs typeface="Cambria" pitchFamily="34" charset="-120"/>
+              </a:rPr>
+              <a:t>Range-bound, not model-bound</a:t>
+            </a:r>
+            <a:endParaRPr lang="en-US" sz="1400" dirty="0"/>
+          </a:p>
+        </p:txBody>
+      </p:sp>
+      <p:sp>
+        <p:nvSpPr>
+          <p:cNvPr id="7" name="Text 4"/>
+          <p:cNvSpPr/>
+          <p:nvPr/>
+        </p:nvSpPr>
+        <p:spPr>
+          <a:xfrm>
+            <a:off x="9281160" y="2377440"/>
+            <a:ext cx="2377440" cy="2743200"/>
+          </a:xfrm>
+          <a:prstGeom prst="rect">
+            <a:avLst/>
+          </a:prstGeom>
+          <a:noFill/>
+          <a:ln/>
+        </p:spPr>
+        <p:txBody>
+          <a:bodyPr wrap="square" lIns="0" tIns="0" rIns="0" bIns="0" rtlCol="0" anchor="t"/>
+          <a:lstStyle/>
+          <a:p>
+            <a:pPr marL="342900" indent="-342900">
+              <a:spcAft>
+                <a:spcPts val="800"/>
+              </a:spcAft>
+              <a:buSzPct val="100000"/>
+              <a:buChar char="•"/>
+            </a:pPr>
+            <a:r>
+              <a:rPr lang="en-US" sz="1150" dirty="0">
+                <a:solidFill>
+                  <a:srgbClr val="2A1618"/>
                 </a:solidFill>
                 <a:latin typeface="Calibri" pitchFamily="34" charset="0"/>
                 <a:ea typeface="Calibri" pitchFamily="34" charset="-122"/>
                 <a:cs typeface="Calibri" pitchFamily="34" charset="-120"/>
               </a:rPr>
-              <a:t>z = +30 mm  (interior)</a:t>
-            </a:r>
-            <a:endParaRPr lang="en-US" sz="1300" dirty="0"/>
-          </a:p>
-        </p:txBody>
-      </p:sp>
-      <p:sp>
-        <p:nvSpPr>
-          <p:cNvPr id="10" name="Shape 6"/>
-          <p:cNvSpPr/>
-          <p:nvPr/>
-        </p:nvSpPr>
-        <p:spPr>
-          <a:xfrm>
-            <a:off x="8083296" y="1581912"/>
-            <a:ext cx="3794760" cy="3977640"/>
-          </a:xfrm>
-          <a:prstGeom prst="roundRect">
-            <a:avLst>
-              <a:gd name="adj" fmla="val 2169"/>
-            </a:avLst>
-          </a:prstGeom>
-          <a:solidFill>
-            <a:srgbClr val="F3F7FA"/>
-          </a:solidFill>
-          <a:ln w="12700">
-            <a:solidFill>
-              <a:srgbClr val="D8E2EA"/>
-            </a:solidFill>
-            <a:prstDash val="solid"/>
-          </a:ln>
-          <a:effectLst>
-            <a:outerShdw sx="100000" sy="100000" kx="0" ky="0" algn="bl" rotWithShape="0" blurRad="88900" dist="38100" dir="5400000">
-              <a:srgbClr val="5B6B7B">
-                <a:alpha val="18000"/>
-              </a:srgbClr>
-            </a:outerShdw>
-          </a:effectLst>
-        </p:spPr>
-      </p:sp>
-      <p:pic>
-        <p:nvPicPr>
-          <p:cNvPr id="11" name="Image 2" descr="sim_depth_examples/sim_depthplot_zp45_n25.png">    </p:cNvPr>
-          <p:cNvPicPr>
-            <a:picLocks noChangeAspect="1"/>
-          </p:cNvPicPr>
-          <p:nvPr/>
-        </p:nvPicPr>
-        <p:blipFill>
-          <a:blip r:embed="rId3"/>
-          <a:stretch>
-            <a:fillRect/>
-          </a:stretch>
-        </p:blipFill>
-        <p:spPr>
-          <a:xfrm>
-            <a:off x="8174736" y="1691640"/>
-            <a:ext cx="3611880" cy="3429000"/>
-          </a:xfrm>
-          <a:prstGeom prst="rect">
-            <a:avLst/>
-          </a:prstGeom>
-        </p:spPr>
-      </p:pic>
-      <p:sp>
-        <p:nvSpPr>
-          <p:cNvPr id="12" name="Text 7"/>
-          <p:cNvSpPr/>
-          <p:nvPr/>
-        </p:nvSpPr>
-        <p:spPr>
-          <a:xfrm>
-            <a:off x="8083296" y="5120640"/>
-            <a:ext cx="3794760" cy="329184"/>
-          </a:xfrm>
-          <a:prstGeom prst="rect">
-            <a:avLst/>
-          </a:prstGeom>
-          <a:noFill/>
-          <a:ln/>
-        </p:spPr>
-        <p:txBody>
-          <a:bodyPr wrap="square" lIns="0" tIns="0" rIns="0" bIns="0" rtlCol="0" anchor="ctr"/>
-          <a:lstStyle/>
-          <a:p>
-            <a:pPr algn="ctr" indent="0" marL="0">
-              <a:buNone/>
-            </a:pPr>
-            <a:r>
-              <a:rPr lang="en-US" sz="1300" b="1" dirty="0">
-                <a:solidFill>
-                  <a:srgbClr val="1C9AA8"/>
+              <a:t>Interior unseen depths: ~1 to 3 mm, a continuous learned depth map.</a:t>
+            </a:r>
+            <a:endParaRPr lang="en-US" sz="1150" dirty="0"/>
+          </a:p>
+          <a:p>
+            <a:pPr marL="342900" indent="-342900">
+              <a:spcAft>
+                <a:spcPts val="800"/>
+              </a:spcAft>
+              <a:buSzPct val="100000"/>
+              <a:buChar char="•"/>
+            </a:pPr>
+            <a:r>
+              <a:rPr lang="en-US" sz="1150" dirty="0">
+                <a:solidFill>
+                  <a:srgbClr val="2A1618"/>
                 </a:solidFill>
                 <a:latin typeface="Calibri" pitchFamily="34" charset="0"/>
                 <a:ea typeface="Calibri" pitchFamily="34" charset="-122"/>
                 <a:cs typeface="Calibri" pitchFamily="34" charset="-120"/>
               </a:rPr>
-              <a:t>z = +45 mm  (range edge)</a:t>
-            </a:r>
-            <a:endParaRPr lang="en-US" sz="1300" dirty="0"/>
-          </a:p>
-        </p:txBody>
-      </p:sp>
-      <p:sp>
-        <p:nvSpPr>
-          <p:cNvPr id="13" name="Text 8"/>
-          <p:cNvSpPr/>
-          <p:nvPr/>
-        </p:nvSpPr>
-        <p:spPr>
-          <a:xfrm>
-            <a:off x="548640" y="6126480"/>
-            <a:ext cx="11091672" cy="457200"/>
-          </a:xfrm>
-          <a:prstGeom prst="rect">
-            <a:avLst/>
-          </a:prstGeom>
-          <a:noFill/>
-          <a:ln/>
-        </p:spPr>
-        <p:txBody>
-          <a:bodyPr wrap="square" lIns="0" tIns="0" rIns="0" bIns="0" rtlCol="0" anchor="ctr"/>
-          <a:lstStyle/>
-          <a:p>
-            <a:pPr algn="ctr" indent="0" marL="0">
-              <a:buNone/>
-            </a:pPr>
-            <a:r>
-              <a:rPr lang="en-US" sz="1300" i="1" dirty="0">
-                <a:solidFill>
-                  <a:srgbClr val="5B6B7B"/>
+              <a:t>Only the two outer edge depths (-15 / +45) blow up, pure extrapolation.</a:t>
+            </a:r>
+            <a:endParaRPr lang="en-US" sz="1150" dirty="0"/>
+          </a:p>
+          <a:p>
+            <a:pPr marL="342900" indent="-342900">
+              <a:spcAft>
+                <a:spcPts val="800"/>
+              </a:spcAft>
+              <a:buSzPct val="100000"/>
+              <a:buChar char="•"/>
+            </a:pPr>
+            <a:r>
+              <a:rPr lang="en-US" sz="1150" dirty="0">
+                <a:solidFill>
+                  <a:srgbClr val="2A1618"/>
                 </a:solidFill>
                 <a:latin typeface="Calibri" pitchFamily="34" charset="0"/>
                 <a:ea typeface="Calibri" pitchFamily="34" charset="-122"/>
                 <a:cs typeface="Calibri" pitchFamily="34" charset="-120"/>
               </a:rPr>
-              <a:t>Interior depths (z=+15/+30) predict tightly; the +45 mm range edge shows the extrapolation blow-up in both lateral arrows and depth color.</a:t>
-            </a:r>
-            <a:endParaRPr lang="en-US" sz="1300" dirty="0"/>
+              <a:t>Extending the sweep turned the OLD outer edges into good interior points.</a:t>
+            </a:r>
+            <a:endParaRPr lang="en-US" sz="1150" dirty="0"/>
+          </a:p>
+        </p:txBody>
+      </p:sp>
+      <p:sp>
+        <p:nvSpPr>
+          <p:cNvPr id="8" name="Text 5"/>
+          <p:cNvSpPr/>
+          <p:nvPr/>
+        </p:nvSpPr>
+        <p:spPr>
+          <a:xfrm>
+            <a:off x="548640" y="6172200"/>
+            <a:ext cx="11091672" cy="457200"/>
+          </a:xfrm>
+          <a:prstGeom prst="rect">
+            <a:avLst/>
+          </a:prstGeom>
+          <a:noFill/>
+          <a:ln/>
+        </p:spPr>
+        <p:txBody>
+          <a:bodyPr wrap="square" lIns="0" tIns="0" rIns="0" bIns="0" rtlCol="0" anchor="ctr"/>
+          <a:lstStyle/>
+          <a:p>
+            <a:pPr algn="ctr" indent="0" marL="0">
+              <a:buNone/>
+            </a:pPr>
+            <a:r>
+              <a:rPr lang="en-US" sz="1350" i="1" dirty="0">
+                <a:solidFill>
+                  <a:srgbClr val="836A68"/>
+                </a:solidFill>
+                <a:latin typeface="Calibri" pitchFamily="34" charset="0"/>
+                <a:ea typeface="Calibri" pitchFamily="34" charset="-122"/>
+                <a:cs typeface="Calibri" pitchFamily="34" charset="-120"/>
+              </a:rPr>
+              <a:t>Usable depth is bounded by the sampling range, not the model. Sample wider and the good region grows.</a:t>
+            </a:r>
+            <a:endParaRPr lang="en-US" sz="1350" dirty="0"/>
           </a:p>
         </p:txBody>
       </p:sp>
@@ -5742,7 +6464,7 @@
     <p:bg>
       <p:bgPr>
         <a:solidFill>
-          <a:srgbClr val="0E2233"/>
+          <a:srgbClr val="FFFFFF"/>
         </a:solidFill>
       </p:bgPr>
     </p:bg>
@@ -5768,8 +6490,8 @@
         </p:nvSpPr>
         <p:spPr>
           <a:xfrm>
-            <a:off x="822960" y="685800"/>
-            <a:ext cx="10058400" cy="731520"/>
+            <a:off x="548640" y="384048"/>
+            <a:ext cx="11091672" cy="640080"/>
           </a:xfrm>
           <a:prstGeom prst="rect">
             <a:avLst/>
@@ -5785,89 +6507,30 @@
               <a:buNone/>
             </a:pPr>
             <a:r>
-              <a:rPr lang="en-US" sz="2800" b="1" dirty="0">
-                <a:solidFill>
-                  <a:srgbClr val="FFFFFF"/>
+              <a:rPr lang="en-US" sz="2900" b="1" dirty="0">
+                <a:solidFill>
+                  <a:srgbClr val="2A1618"/>
                 </a:solidFill>
                 <a:latin typeface="Cambria" pitchFamily="34" charset="0"/>
                 <a:ea typeface="Cambria" pitchFamily="34" charset="-122"/>
                 <a:cs typeface="Cambria" pitchFamily="34" charset="-120"/>
               </a:rPr>
-              <a:t>Part 2 — bottom line</a:t>
-            </a:r>
-            <a:endParaRPr lang="en-US" sz="2800" dirty="0"/>
-          </a:p>
-        </p:txBody>
-      </p:sp>
-      <p:sp>
-        <p:nvSpPr>
-          <p:cNvPr id="3" name="Shape 1"/>
-          <p:cNvSpPr/>
-          <p:nvPr/>
-        </p:nvSpPr>
-        <p:spPr>
-          <a:xfrm>
-            <a:off x="822960" y="1600200"/>
-            <a:ext cx="384048" cy="384048"/>
-          </a:xfrm>
-          <a:prstGeom prst="ellipse">
-            <a:avLst/>
-          </a:prstGeom>
-          <a:solidFill>
-            <a:srgbClr val="2CC4A3"/>
-          </a:solidFill>
-          <a:ln/>
-        </p:spPr>
-      </p:sp>
-      <p:sp>
-        <p:nvSpPr>
-          <p:cNvPr id="4" name="Text 2"/>
-          <p:cNvSpPr/>
-          <p:nvPr/>
-        </p:nvSpPr>
-        <p:spPr>
-          <a:xfrm>
-            <a:off x="822960" y="1600200"/>
-            <a:ext cx="384048" cy="384048"/>
-          </a:xfrm>
-          <a:prstGeom prst="rect">
-            <a:avLst/>
-          </a:prstGeom>
-          <a:noFill/>
-          <a:ln/>
-        </p:spPr>
-        <p:txBody>
-          <a:bodyPr wrap="square" lIns="0" tIns="0" rIns="0" bIns="0" rtlCol="0" anchor="ctr"/>
-          <a:lstStyle/>
-          <a:p>
-            <a:pPr algn="ctr" indent="0" marL="0">
-              <a:buNone/>
-            </a:pPr>
-            <a:r>
-              <a:rPr lang="en-US" sz="1500" b="1" dirty="0">
-                <a:solidFill>
-                  <a:srgbClr val="0E2233"/>
-                </a:solidFill>
-                <a:latin typeface="Cambria" pitchFamily="34" charset="0"/>
-                <a:ea typeface="Cambria" pitchFamily="34" charset="-122"/>
-                <a:cs typeface="Cambria" pitchFamily="34" charset="-120"/>
-              </a:rPr>
-              <a:t>1</a:t>
-            </a:r>
-            <a:endParaRPr lang="en-US" sz="1500" dirty="0"/>
-          </a:p>
-        </p:txBody>
-      </p:sp>
-      <p:sp>
-        <p:nvSpPr>
-          <p:cNvPr id="5" name="Text 3"/>
-          <p:cNvSpPr/>
-          <p:nvPr/>
-        </p:nvSpPr>
-        <p:spPr>
-          <a:xfrm>
-            <a:off x="1371600" y="1508760"/>
-            <a:ext cx="10241280" cy="868680"/>
+              <a:t>Predicted vs. actual, by depth</a:t>
+            </a:r>
+            <a:endParaRPr lang="en-US" sz="2900" dirty="0"/>
+          </a:p>
+        </p:txBody>
+      </p:sp>
+      <p:sp>
+        <p:nvSpPr>
+          <p:cNvPr id="3" name="Text 1"/>
+          <p:cNvSpPr/>
+          <p:nvPr/>
+        </p:nvSpPr>
+        <p:spPr>
+          <a:xfrm>
+            <a:off x="548640" y="1033272"/>
+            <a:ext cx="11091672" cy="365760"/>
           </a:xfrm>
           <a:prstGeom prst="rect">
             <a:avLst/>
@@ -5885,62 +6548,183 @@
             <a:r>
               <a:rPr lang="en-US" sz="1400" b="1" dirty="0">
                 <a:solidFill>
-                  <a:srgbClr val="FFFFFF"/>
+                  <a:srgbClr val="BE0000"/>
                 </a:solidFill>
                 <a:latin typeface="Calibri" pitchFamily="34" charset="0"/>
                 <a:ea typeface="Calibri" pitchFamily="34" charset="-122"/>
                 <a:cs typeface="Calibri" pitchFamily="34" charset="-120"/>
               </a:rPr>
-              <a:t>Full 3D localization works in sim  —  </a:t>
-            </a:r>
-            <a:pPr indent="0" marL="0">
-              <a:buNone/>
-            </a:pPr>
-            <a:r>
-              <a:rPr lang="en-US" sz="1400" dirty="0">
-                <a:solidFill>
-                  <a:srgbClr val="AECBD6"/>
+              <a:t>Arrows = lateral error, marker color = depth error, red ring = grid-edge position</a:t>
+            </a:r>
+            <a:endParaRPr lang="en-US" sz="1400" dirty="0"/>
+          </a:p>
+        </p:txBody>
+      </p:sp>
+      <p:sp>
+        <p:nvSpPr>
+          <p:cNvPr id="4" name="Shape 2"/>
+          <p:cNvSpPr/>
+          <p:nvPr/>
+        </p:nvSpPr>
+        <p:spPr>
+          <a:xfrm>
+            <a:off x="310896" y="1581912"/>
+            <a:ext cx="3794760" cy="3977640"/>
+          </a:xfrm>
+          <a:prstGeom prst="roundRect">
+            <a:avLst>
+              <a:gd name="adj" fmla="val 2169"/>
+            </a:avLst>
+          </a:prstGeom>
+          <a:solidFill>
+            <a:srgbClr val="FBF4F2"/>
+          </a:solidFill>
+          <a:ln w="12700">
+            <a:solidFill>
+              <a:srgbClr val="E7D6D1"/>
+            </a:solidFill>
+            <a:prstDash val="solid"/>
+          </a:ln>
+          <a:effectLst>
+            <a:outerShdw sx="100000" sy="100000" kx="0" ky="0" algn="bl" rotWithShape="0" blurRad="88900" dist="38100" dir="5400000">
+              <a:srgbClr val="7A5C5E">
+                <a:alpha val="18000"/>
+              </a:srgbClr>
+            </a:outerShdw>
+          </a:effectLst>
+        </p:spPr>
+      </p:sp>
+      <p:pic>
+        <p:nvPicPr>
+          <p:cNvPr id="5" name="Image 0" descr="sim_depth_examples/sim_depthplot_zp15_n25.png">    </p:cNvPr>
+          <p:cNvPicPr>
+            <a:picLocks noChangeAspect="1"/>
+          </p:cNvPicPr>
+          <p:nvPr/>
+        </p:nvPicPr>
+        <p:blipFill>
+          <a:blip r:embed="rId1"/>
+          <a:stretch>
+            <a:fillRect/>
+          </a:stretch>
+        </p:blipFill>
+        <p:spPr>
+          <a:xfrm>
+            <a:off x="402336" y="1691640"/>
+            <a:ext cx="3611880" cy="3429000"/>
+          </a:xfrm>
+          <a:prstGeom prst="rect">
+            <a:avLst/>
+          </a:prstGeom>
+        </p:spPr>
+      </p:pic>
+      <p:sp>
+        <p:nvSpPr>
+          <p:cNvPr id="6" name="Text 3"/>
+          <p:cNvSpPr/>
+          <p:nvPr/>
+        </p:nvSpPr>
+        <p:spPr>
+          <a:xfrm>
+            <a:off x="310896" y="5120640"/>
+            <a:ext cx="3794760" cy="329184"/>
+          </a:xfrm>
+          <a:prstGeom prst="rect">
+            <a:avLst/>
+          </a:prstGeom>
+          <a:noFill/>
+          <a:ln/>
+        </p:spPr>
+        <p:txBody>
+          <a:bodyPr wrap="square" lIns="0" tIns="0" rIns="0" bIns="0" rtlCol="0" anchor="ctr"/>
+          <a:lstStyle/>
+          <a:p>
+            <a:pPr algn="ctr" indent="0" marL="0">
+              <a:buNone/>
+            </a:pPr>
+            <a:r>
+              <a:rPr lang="en-US" sz="1300" b="1" dirty="0">
+                <a:solidFill>
+                  <a:srgbClr val="BE0000"/>
                 </a:solidFill>
                 <a:latin typeface="Calibri" pitchFamily="34" charset="0"/>
                 <a:ea typeface="Calibri" pitchFamily="34" charset="-122"/>
                 <a:cs typeface="Calibri" pitchFamily="34" charset="-120"/>
               </a:rPr>
-              <a:t>3.9 mm lateral, 2.1 mm depth — the CNN resolves all three coordinates well below a grid step.</a:t>
-            </a:r>
-            <a:endParaRPr lang="en-US" sz="1400" dirty="0"/>
-          </a:p>
-        </p:txBody>
-      </p:sp>
-      <p:sp>
-        <p:nvSpPr>
-          <p:cNvPr id="6" name="Shape 4"/>
-          <p:cNvSpPr/>
-          <p:nvPr/>
-        </p:nvSpPr>
-        <p:spPr>
-          <a:xfrm>
-            <a:off x="822960" y="2569464"/>
-            <a:ext cx="384048" cy="384048"/>
-          </a:xfrm>
-          <a:prstGeom prst="ellipse">
-            <a:avLst/>
+              <a:t>z = +15 mm  (peak signal)</a:t>
+            </a:r>
+            <a:endParaRPr lang="en-US" sz="1300" dirty="0"/>
+          </a:p>
+        </p:txBody>
+      </p:sp>
+      <p:sp>
+        <p:nvSpPr>
+          <p:cNvPr id="7" name="Shape 4"/>
+          <p:cNvSpPr/>
+          <p:nvPr/>
+        </p:nvSpPr>
+        <p:spPr>
+          <a:xfrm>
+            <a:off x="4197096" y="1581912"/>
+            <a:ext cx="3794760" cy="3977640"/>
+          </a:xfrm>
+          <a:prstGeom prst="roundRect">
+            <a:avLst>
+              <a:gd name="adj" fmla="val 2169"/>
+            </a:avLst>
           </a:prstGeom>
           <a:solidFill>
-            <a:srgbClr val="2CC4A3"/>
+            <a:srgbClr val="FBF4F2"/>
           </a:solidFill>
-          <a:ln/>
-        </p:spPr>
-      </p:sp>
-      <p:sp>
-        <p:nvSpPr>
-          <p:cNvPr id="7" name="Text 5"/>
-          <p:cNvSpPr/>
-          <p:nvPr/>
-        </p:nvSpPr>
-        <p:spPr>
-          <a:xfrm>
-            <a:off x="822960" y="2569464"/>
-            <a:ext cx="384048" cy="384048"/>
+          <a:ln w="12700">
+            <a:solidFill>
+              <a:srgbClr val="E7D6D1"/>
+            </a:solidFill>
+            <a:prstDash val="solid"/>
+          </a:ln>
+          <a:effectLst>
+            <a:outerShdw sx="100000" sy="100000" kx="0" ky="0" algn="bl" rotWithShape="0" blurRad="88900" dist="38100" dir="5400000">
+              <a:srgbClr val="7A5C5E">
+                <a:alpha val="18000"/>
+              </a:srgbClr>
+            </a:outerShdw>
+          </a:effectLst>
+        </p:spPr>
+      </p:sp>
+      <p:pic>
+        <p:nvPicPr>
+          <p:cNvPr id="8" name="Image 1" descr="sim_depth_examples/sim_depthplot_zp30_n25.png">    </p:cNvPr>
+          <p:cNvPicPr>
+            <a:picLocks noChangeAspect="1"/>
+          </p:cNvPicPr>
+          <p:nvPr/>
+        </p:nvPicPr>
+        <p:blipFill>
+          <a:blip r:embed="rId2"/>
+          <a:stretch>
+            <a:fillRect/>
+          </a:stretch>
+        </p:blipFill>
+        <p:spPr>
+          <a:xfrm>
+            <a:off x="4288536" y="1691640"/>
+            <a:ext cx="3611880" cy="3429000"/>
+          </a:xfrm>
+          <a:prstGeom prst="rect">
+            <a:avLst/>
+          </a:prstGeom>
+        </p:spPr>
+      </p:pic>
+      <p:sp>
+        <p:nvSpPr>
+          <p:cNvPr id="9" name="Text 5"/>
+          <p:cNvSpPr/>
+          <p:nvPr/>
+        </p:nvSpPr>
+        <p:spPr>
+          <a:xfrm>
+            <a:off x="4197096" y="5120640"/>
+            <a:ext cx="3794760" cy="329184"/>
           </a:xfrm>
           <a:prstGeom prst="rect">
             <a:avLst/>
@@ -5956,103 +6740,127 @@
               <a:buNone/>
             </a:pPr>
             <a:r>
-              <a:rPr lang="en-US" sz="1500" b="1" dirty="0">
-                <a:solidFill>
-                  <a:srgbClr val="0E2233"/>
-                </a:solidFill>
-                <a:latin typeface="Cambria" pitchFamily="34" charset="0"/>
-                <a:ea typeface="Cambria" pitchFamily="34" charset="-122"/>
-                <a:cs typeface="Cambria" pitchFamily="34" charset="-120"/>
-              </a:rPr>
-              <a:t>2</a:t>
-            </a:r>
-            <a:endParaRPr lang="en-US" sz="1500" dirty="0"/>
-          </a:p>
-        </p:txBody>
-      </p:sp>
-      <p:sp>
-        <p:nvSpPr>
-          <p:cNvPr id="8" name="Text 6"/>
-          <p:cNvSpPr/>
-          <p:nvPr/>
-        </p:nvSpPr>
-        <p:spPr>
-          <a:xfrm>
-            <a:off x="1371600" y="2478024"/>
-            <a:ext cx="10241280" cy="868680"/>
-          </a:xfrm>
-          <a:prstGeom prst="rect">
-            <a:avLst/>
-          </a:prstGeom>
-          <a:noFill/>
-          <a:ln/>
-        </p:spPr>
-        <p:txBody>
-          <a:bodyPr wrap="square" lIns="0" tIns="0" rIns="0" bIns="0" rtlCol="0" anchor="ctr"/>
-          <a:lstStyle/>
-          <a:p>
-            <a:pPr indent="0" marL="0">
-              <a:buNone/>
-            </a:pPr>
-            <a:r>
-              <a:rPr lang="en-US" sz="1400" b="1" dirty="0">
-                <a:solidFill>
-                  <a:srgbClr val="FFFFFF"/>
+              <a:rPr lang="en-US" sz="1300" b="1" dirty="0">
+                <a:solidFill>
+                  <a:srgbClr val="BE0000"/>
                 </a:solidFill>
                 <a:latin typeface="Calibri" pitchFamily="34" charset="0"/>
                 <a:ea typeface="Calibri" pitchFamily="34" charset="-122"/>
                 <a:cs typeface="Calibri" pitchFamily="34" charset="-120"/>
               </a:rPr>
-              <a:t>Depth is a strong axis, not a weak one  —  </a:t>
-            </a:r>
-            <a:pPr indent="0" marL="0">
-              <a:buNone/>
-            </a:pPr>
-            <a:r>
-              <a:rPr lang="en-US" sz="1400" dirty="0">
-                <a:solidFill>
-                  <a:srgbClr val="AECBD6"/>
+              <a:t>z = +30 mm  (interior)</a:t>
+            </a:r>
+            <a:endParaRPr lang="en-US" sz="1300" dirty="0"/>
+          </a:p>
+        </p:txBody>
+      </p:sp>
+      <p:sp>
+        <p:nvSpPr>
+          <p:cNvPr id="10" name="Shape 6"/>
+          <p:cNvSpPr/>
+          <p:nvPr/>
+        </p:nvSpPr>
+        <p:spPr>
+          <a:xfrm>
+            <a:off x="8083296" y="1581912"/>
+            <a:ext cx="3794760" cy="3977640"/>
+          </a:xfrm>
+          <a:prstGeom prst="roundRect">
+            <a:avLst>
+              <a:gd name="adj" fmla="val 2169"/>
+            </a:avLst>
+          </a:prstGeom>
+          <a:solidFill>
+            <a:srgbClr val="FBF4F2"/>
+          </a:solidFill>
+          <a:ln w="12700">
+            <a:solidFill>
+              <a:srgbClr val="E7D6D1"/>
+            </a:solidFill>
+            <a:prstDash val="solid"/>
+          </a:ln>
+          <a:effectLst>
+            <a:outerShdw sx="100000" sy="100000" kx="0" ky="0" algn="bl" rotWithShape="0" blurRad="88900" dist="38100" dir="5400000">
+              <a:srgbClr val="7A5C5E">
+                <a:alpha val="18000"/>
+              </a:srgbClr>
+            </a:outerShdw>
+          </a:effectLst>
+        </p:spPr>
+      </p:sp>
+      <p:pic>
+        <p:nvPicPr>
+          <p:cNvPr id="11" name="Image 2" descr="sim_depth_examples/sim_depthplot_zp45_n25.png">    </p:cNvPr>
+          <p:cNvPicPr>
+            <a:picLocks noChangeAspect="1"/>
+          </p:cNvPicPr>
+          <p:nvPr/>
+        </p:nvPicPr>
+        <p:blipFill>
+          <a:blip r:embed="rId3"/>
+          <a:stretch>
+            <a:fillRect/>
+          </a:stretch>
+        </p:blipFill>
+        <p:spPr>
+          <a:xfrm>
+            <a:off x="8174736" y="1691640"/>
+            <a:ext cx="3611880" cy="3429000"/>
+          </a:xfrm>
+          <a:prstGeom prst="rect">
+            <a:avLst/>
+          </a:prstGeom>
+        </p:spPr>
+      </p:pic>
+      <p:sp>
+        <p:nvSpPr>
+          <p:cNvPr id="12" name="Text 7"/>
+          <p:cNvSpPr/>
+          <p:nvPr/>
+        </p:nvSpPr>
+        <p:spPr>
+          <a:xfrm>
+            <a:off x="8083296" y="5120640"/>
+            <a:ext cx="3794760" cy="329184"/>
+          </a:xfrm>
+          <a:prstGeom prst="rect">
+            <a:avLst/>
+          </a:prstGeom>
+          <a:noFill/>
+          <a:ln/>
+        </p:spPr>
+        <p:txBody>
+          <a:bodyPr wrap="square" lIns="0" tIns="0" rIns="0" bIns="0" rtlCol="0" anchor="ctr"/>
+          <a:lstStyle/>
+          <a:p>
+            <a:pPr algn="ctr" indent="0" marL="0">
+              <a:buNone/>
+            </a:pPr>
+            <a:r>
+              <a:rPr lang="en-US" sz="1300" b="1" dirty="0">
+                <a:solidFill>
+                  <a:srgbClr val="BE0000"/>
                 </a:solidFill>
                 <a:latin typeface="Calibri" pitchFamily="34" charset="0"/>
                 <a:ea typeface="Calibri" pitchFamily="34" charset="-122"/>
                 <a:cs typeface="Calibri" pitchFamily="34" charset="-120"/>
               </a:rPr>
-              <a:t>fine depth sampling + full-band frequency make z (~2 mm) actually beat the lateral floor.</a:t>
-            </a:r>
-            <a:endParaRPr lang="en-US" sz="1400" dirty="0"/>
-          </a:p>
-        </p:txBody>
-      </p:sp>
-      <p:sp>
-        <p:nvSpPr>
-          <p:cNvPr id="9" name="Shape 7"/>
-          <p:cNvSpPr/>
-          <p:nvPr/>
-        </p:nvSpPr>
-        <p:spPr>
-          <a:xfrm>
-            <a:off x="822960" y="3538728"/>
-            <a:ext cx="384048" cy="384048"/>
-          </a:xfrm>
-          <a:prstGeom prst="ellipse">
-            <a:avLst/>
-          </a:prstGeom>
-          <a:solidFill>
-            <a:srgbClr val="2CC4A3"/>
-          </a:solidFill>
-          <a:ln/>
-        </p:spPr>
-      </p:sp>
-      <p:sp>
-        <p:nvSpPr>
-          <p:cNvPr id="10" name="Text 8"/>
-          <p:cNvSpPr/>
-          <p:nvPr/>
-        </p:nvSpPr>
-        <p:spPr>
-          <a:xfrm>
-            <a:off x="822960" y="3538728"/>
-            <a:ext cx="384048" cy="384048"/>
+              <a:t>z = +45 mm  (outer edge)</a:t>
+            </a:r>
+            <a:endParaRPr lang="en-US" sz="1300" dirty="0"/>
+          </a:p>
+        </p:txBody>
+      </p:sp>
+      <p:sp>
+        <p:nvSpPr>
+          <p:cNvPr id="13" name="Text 8"/>
+          <p:cNvSpPr/>
+          <p:nvPr/>
+        </p:nvSpPr>
+        <p:spPr>
+          <a:xfrm>
+            <a:off x="548640" y="6126480"/>
+            <a:ext cx="11091672" cy="457200"/>
           </a:xfrm>
           <a:prstGeom prst="rect">
             <a:avLst/>
@@ -6068,333 +6876,17 @@
               <a:buNone/>
             </a:pPr>
             <a:r>
-              <a:rPr lang="en-US" sz="1500" b="1" dirty="0">
-                <a:solidFill>
-                  <a:srgbClr val="0E2233"/>
-                </a:solidFill>
-                <a:latin typeface="Cambria" pitchFamily="34" charset="0"/>
-                <a:ea typeface="Cambria" pitchFamily="34" charset="-122"/>
-                <a:cs typeface="Cambria" pitchFamily="34" charset="-120"/>
-              </a:rPr>
-              <a:t>3</a:t>
-            </a:r>
-            <a:endParaRPr lang="en-US" sz="1500" dirty="0"/>
-          </a:p>
-        </p:txBody>
-      </p:sp>
-      <p:sp>
-        <p:nvSpPr>
-          <p:cNvPr id="11" name="Text 9"/>
-          <p:cNvSpPr/>
-          <p:nvPr/>
-        </p:nvSpPr>
-        <p:spPr>
-          <a:xfrm>
-            <a:off x="1371600" y="3447288"/>
-            <a:ext cx="10241280" cy="868680"/>
-          </a:xfrm>
-          <a:prstGeom prst="rect">
-            <a:avLst/>
-          </a:prstGeom>
-          <a:noFill/>
-          <a:ln/>
-        </p:spPr>
-        <p:txBody>
-          <a:bodyPr wrap="square" lIns="0" tIns="0" rIns="0" bIns="0" rtlCol="0" anchor="ctr"/>
-          <a:lstStyle/>
-          <a:p>
-            <a:pPr indent="0" marL="0">
-              <a:buNone/>
-            </a:pPr>
-            <a:r>
-              <a:rPr lang="en-US" sz="1400" b="1" dirty="0">
-                <a:solidFill>
-                  <a:srgbClr val="FFFFFF"/>
+              <a:rPr lang="en-US" sz="1300" i="1" dirty="0">
+                <a:solidFill>
+                  <a:srgbClr val="836A68"/>
                 </a:solidFill>
                 <a:latin typeface="Calibri" pitchFamily="34" charset="0"/>
                 <a:ea typeface="Calibri" pitchFamily="34" charset="-122"/>
                 <a:cs typeface="Calibri" pitchFamily="34" charset="-120"/>
               </a:rPr>
-              <a:t>The CNN needs ~400–500 distinct positions  —  </a:t>
-            </a:r>
-            <a:pPr indent="0" marL="0">
-              <a:buNone/>
-            </a:pPr>
-            <a:r>
-              <a:rPr lang="en-US" sz="1400" dirty="0">
-                <a:solidFill>
-                  <a:srgbClr val="AECBD6"/>
-                </a:solidFill>
-                <a:latin typeface="Calibri" pitchFamily="34" charset="0"/>
-                <a:ea typeface="Calibri" pitchFamily="34" charset="-122"/>
-                <a:cs typeface="Calibri" pitchFamily="34" charset="-120"/>
-              </a:rPr>
-              <a:t>below that it degrades fast; at one depth plane (82) it collapses to chance — a concrete data target.</a:t>
-            </a:r>
-            <a:endParaRPr lang="en-US" sz="1400" dirty="0"/>
-          </a:p>
-        </p:txBody>
-      </p:sp>
-      <p:sp>
-        <p:nvSpPr>
-          <p:cNvPr id="12" name="Shape 10"/>
-          <p:cNvSpPr/>
-          <p:nvPr/>
-        </p:nvSpPr>
-        <p:spPr>
-          <a:xfrm>
-            <a:off x="822960" y="4507992"/>
-            <a:ext cx="384048" cy="384048"/>
-          </a:xfrm>
-          <a:prstGeom prst="ellipse">
-            <a:avLst/>
-          </a:prstGeom>
-          <a:solidFill>
-            <a:srgbClr val="2CC4A3"/>
-          </a:solidFill>
-          <a:ln/>
-        </p:spPr>
-      </p:sp>
-      <p:sp>
-        <p:nvSpPr>
-          <p:cNvPr id="13" name="Text 11"/>
-          <p:cNvSpPr/>
-          <p:nvPr/>
-        </p:nvSpPr>
-        <p:spPr>
-          <a:xfrm>
-            <a:off x="822960" y="4507992"/>
-            <a:ext cx="384048" cy="384048"/>
-          </a:xfrm>
-          <a:prstGeom prst="rect">
-            <a:avLst/>
-          </a:prstGeom>
-          <a:noFill/>
-          <a:ln/>
-        </p:spPr>
-        <p:txBody>
-          <a:bodyPr wrap="square" lIns="0" tIns="0" rIns="0" bIns="0" rtlCol="0" anchor="ctr"/>
-          <a:lstStyle/>
-          <a:p>
-            <a:pPr algn="ctr" indent="0" marL="0">
-              <a:buNone/>
-            </a:pPr>
-            <a:r>
-              <a:rPr lang="en-US" sz="1500" b="1" dirty="0">
-                <a:solidFill>
-                  <a:srgbClr val="0E2233"/>
-                </a:solidFill>
-                <a:latin typeface="Cambria" pitchFamily="34" charset="0"/>
-                <a:ea typeface="Cambria" pitchFamily="34" charset="-122"/>
-                <a:cs typeface="Cambria" pitchFamily="34" charset="-120"/>
-              </a:rPr>
-              <a:t>4</a:t>
-            </a:r>
-            <a:endParaRPr lang="en-US" sz="1500" dirty="0"/>
-          </a:p>
-        </p:txBody>
-      </p:sp>
-      <p:sp>
-        <p:nvSpPr>
-          <p:cNvPr id="14" name="Text 12"/>
-          <p:cNvSpPr/>
-          <p:nvPr/>
-        </p:nvSpPr>
-        <p:spPr>
-          <a:xfrm>
-            <a:off x="1371600" y="4416552"/>
-            <a:ext cx="10241280" cy="868680"/>
-          </a:xfrm>
-          <a:prstGeom prst="rect">
-            <a:avLst/>
-          </a:prstGeom>
-          <a:noFill/>
-          <a:ln/>
-        </p:spPr>
-        <p:txBody>
-          <a:bodyPr wrap="square" lIns="0" tIns="0" rIns="0" bIns="0" rtlCol="0" anchor="ctr"/>
-          <a:lstStyle/>
-          <a:p>
-            <a:pPr indent="0" marL="0">
-              <a:buNone/>
-            </a:pPr>
-            <a:r>
-              <a:rPr lang="en-US" sz="1400" b="1" dirty="0">
-                <a:solidFill>
-                  <a:srgbClr val="FFFFFF"/>
-                </a:solidFill>
-                <a:latin typeface="Calibri" pitchFamily="34" charset="0"/>
-                <a:ea typeface="Calibri" pitchFamily="34" charset="-122"/>
-                <a:cs typeface="Calibri" pitchFamily="34" charset="-120"/>
-              </a:rPr>
-              <a:t>Depth generalizes across the sampled range  —  </a:t>
-            </a:r>
-            <a:pPr indent="0" marL="0">
-              <a:buNone/>
-            </a:pPr>
-            <a:r>
-              <a:rPr lang="en-US" sz="1400" dirty="0">
-                <a:solidFill>
-                  <a:srgbClr val="AECBD6"/>
-                </a:solidFill>
-                <a:latin typeface="Calibri" pitchFamily="34" charset="0"/>
-                <a:ea typeface="Calibri" pitchFamily="34" charset="-122"/>
-                <a:cs typeface="Calibri" pitchFamily="34" charset="-120"/>
-              </a:rPr>
-              <a:t>unseen interior depths interpolate to ~1–3 mm; only the range extremes extrapolate and fail.</a:t>
-            </a:r>
-            <a:endParaRPr lang="en-US" sz="1400" dirty="0"/>
-          </a:p>
-        </p:txBody>
-      </p:sp>
-      <p:sp>
-        <p:nvSpPr>
-          <p:cNvPr id="15" name="Shape 13"/>
-          <p:cNvSpPr/>
-          <p:nvPr/>
-        </p:nvSpPr>
-        <p:spPr>
-          <a:xfrm>
-            <a:off x="822960" y="5477256"/>
-            <a:ext cx="384048" cy="384048"/>
-          </a:xfrm>
-          <a:prstGeom prst="ellipse">
-            <a:avLst/>
-          </a:prstGeom>
-          <a:solidFill>
-            <a:srgbClr val="2CC4A3"/>
-          </a:solidFill>
-          <a:ln/>
-        </p:spPr>
-      </p:sp>
-      <p:sp>
-        <p:nvSpPr>
-          <p:cNvPr id="16" name="Text 14"/>
-          <p:cNvSpPr/>
-          <p:nvPr/>
-        </p:nvSpPr>
-        <p:spPr>
-          <a:xfrm>
-            <a:off x="822960" y="5477256"/>
-            <a:ext cx="384048" cy="384048"/>
-          </a:xfrm>
-          <a:prstGeom prst="rect">
-            <a:avLst/>
-          </a:prstGeom>
-          <a:noFill/>
-          <a:ln/>
-        </p:spPr>
-        <p:txBody>
-          <a:bodyPr wrap="square" lIns="0" tIns="0" rIns="0" bIns="0" rtlCol="0" anchor="ctr"/>
-          <a:lstStyle/>
-          <a:p>
-            <a:pPr algn="ctr" indent="0" marL="0">
-              <a:buNone/>
-            </a:pPr>
-            <a:r>
-              <a:rPr lang="en-US" sz="1500" b="1" dirty="0">
-                <a:solidFill>
-                  <a:srgbClr val="0E2233"/>
-                </a:solidFill>
-                <a:latin typeface="Cambria" pitchFamily="34" charset="0"/>
-                <a:ea typeface="Cambria" pitchFamily="34" charset="-122"/>
-                <a:cs typeface="Cambria" pitchFamily="34" charset="-120"/>
-              </a:rPr>
-              <a:t>5</a:t>
-            </a:r>
-            <a:endParaRPr lang="en-US" sz="1500" dirty="0"/>
-          </a:p>
-        </p:txBody>
-      </p:sp>
-      <p:sp>
-        <p:nvSpPr>
-          <p:cNvPr id="17" name="Text 15"/>
-          <p:cNvSpPr/>
-          <p:nvPr/>
-        </p:nvSpPr>
-        <p:spPr>
-          <a:xfrm>
-            <a:off x="1371600" y="5385816"/>
-            <a:ext cx="10241280" cy="868680"/>
-          </a:xfrm>
-          <a:prstGeom prst="rect">
-            <a:avLst/>
-          </a:prstGeom>
-          <a:noFill/>
-          <a:ln/>
-        </p:spPr>
-        <p:txBody>
-          <a:bodyPr wrap="square" lIns="0" tIns="0" rIns="0" bIns="0" rtlCol="0" anchor="ctr"/>
-          <a:lstStyle/>
-          <a:p>
-            <a:pPr indent="0" marL="0">
-              <a:buNone/>
-            </a:pPr>
-            <a:r>
-              <a:rPr lang="en-US" sz="1400" b="1" dirty="0">
-                <a:solidFill>
-                  <a:srgbClr val="FFFFFF"/>
-                </a:solidFill>
-                <a:latin typeface="Calibri" pitchFamily="34" charset="0"/>
-                <a:ea typeface="Calibri" pitchFamily="34" charset="-122"/>
-                <a:cs typeface="Calibri" pitchFamily="34" charset="-120"/>
-              </a:rPr>
-              <a:t>Metal ≈ dielectric in the noiseless sim  —  </a:t>
-            </a:r>
-            <a:pPr indent="0" marL="0">
-              <a:buNone/>
-            </a:pPr>
-            <a:r>
-              <a:rPr lang="en-US" sz="1400" dirty="0">
-                <a:solidFill>
-                  <a:srgbClr val="AECBD6"/>
-                </a:solidFill>
-                <a:latin typeface="Calibri" pitchFamily="34" charset="0"/>
-                <a:ea typeface="Calibri" pitchFamily="34" charset="-122"/>
-                <a:cs typeface="Calibri" pitchFamily="34" charset="-120"/>
-              </a:rPr>
-              <a:t>a beet tumor localizes as well as metal — realistic contrast is not the bottleneck here.</a:t>
-            </a:r>
-            <a:endParaRPr lang="en-US" sz="1400" dirty="0"/>
-          </a:p>
-        </p:txBody>
-      </p:sp>
-      <p:sp>
-        <p:nvSpPr>
-          <p:cNvPr id="18" name="Text 16"/>
-          <p:cNvSpPr/>
-          <p:nvPr/>
-        </p:nvSpPr>
-        <p:spPr>
-          <a:xfrm>
-            <a:off x="822960" y="6400800"/>
-            <a:ext cx="10515600" cy="320040"/>
-          </a:xfrm>
-          <a:prstGeom prst="rect">
-            <a:avLst/>
-          </a:prstGeom>
-          <a:noFill/>
-          <a:ln/>
-        </p:spPr>
-        <p:txBody>
-          <a:bodyPr wrap="square" lIns="0" tIns="0" rIns="0" bIns="0" rtlCol="0" anchor="ctr"/>
-          <a:lstStyle/>
-          <a:p>
-            <a:pPr indent="0" marL="0">
-              <a:buNone/>
-            </a:pPr>
-            <a:r>
-              <a:rPr lang="en-US" sz="1100" dirty="0">
-                <a:solidFill>
-                  <a:srgbClr val="1C9AA8"/>
-                </a:solidFill>
-                <a:latin typeface="Calibri" pitchFamily="34" charset="0"/>
-                <a:ea typeface="Calibri" pitchFamily="34" charset="-122"/>
-                <a:cs typeface="Calibri" pitchFamily="34" charset="-120"/>
-              </a:rPr>
-              <a:t>github.com/pmart1534/microwave-phantom-localization-cnn-mlp</a:t>
-            </a:r>
-            <a:endParaRPr lang="en-US" sz="1100" dirty="0"/>
+              <a:t>Interior depths (z=+15/+30) predict tightly; the +45 mm outer edge shows the extrapolation blow-up in both lateral arrows and depth color.</a:t>
+            </a:r>
+            <a:endParaRPr lang="en-US" sz="1300" dirty="0"/>
           </a:p>
         </p:txBody>
       </p:sp>

--- a/regression_deck/Deck2_Simulated_Regression.pptx
+++ b/regression_deck/Deck2_Simulated_Regression.pptx
@@ -15,9 +15,10 @@
     <p:sldId id="263" r:id="rId9"/>
     <p:sldId id="264" r:id="rId10"/>
     <p:sldId id="265" r:id="rId11"/>
+    <p:sldId id="266" r:id="rId12"/>
   </p:sldIdLst>
   <p:notesMasterIdLst>
-    <p:notesMasterId r:id="rId12"/>
+    <p:notesMasterId r:id="rId13"/>
   </p:notesMasterIdLst>
   <p:sldSz cx="12188952" cy="6858000"/>
   <p:notesSz cx="6858000" cy="12188952"/>
@@ -623,6 +624,94 @@
             <a:fld id="{F7021451-1387-4CA6-816F-3879F97B5CBC}" type="slidenum">
               <a:rPr lang="en-US"/>
               <a:t>10</a:t>
+            </a:fld>
+            <a:endParaRPr lang="en-US"/>
+          </a:p>
+        </p:txBody>
+      </p:sp>
+    </p:spTree>
+    <p:extLst>
+      <p:ext uri="{BB962C8B-B14F-4D97-AF65-F5344CB8AC3E}">
+        <p14:creationId xmlns:p14="http://schemas.microsoft.com/office/powerpoint/2010/main" val="1024086991"/>
+      </p:ext>
+    </p:extLst>
+  </p:cSld>
+  <p:clrMapOvr>
+    <a:masterClrMapping/>
+  </p:clrMapOvr>
+</p:notes>
+</file>
+
+<file path=ppt/notesSlides/notesSlide11.xml><?xml version="1.0" encoding="utf-8"?>
+<p:notes xmlns:a="http://schemas.openxmlformats.org/drawingml/2006/main" xmlns:r="http://schemas.openxmlformats.org/officeDocument/2006/relationships" xmlns:p="http://schemas.openxmlformats.org/presentationml/2006/main">
+  <p:cSld>
+    <p:spTree>
+      <p:nvGrpSpPr>
+        <p:cNvPr id="1" name=""/>
+        <p:cNvGrpSpPr/>
+        <p:nvPr/>
+      </p:nvGrpSpPr>
+      <p:grpSpPr>
+        <a:xfrm>
+          <a:off x="0" y="0"/>
+          <a:ext cx="0" cy="0"/>
+          <a:chOff x="0" y="0"/>
+          <a:chExt cx="0" cy="0"/>
+        </a:xfrm>
+      </p:grpSpPr>
+      <p:sp>
+        <p:nvSpPr>
+          <p:cNvPr id="2" name="Slide Image Placeholder 1"/>
+          <p:cNvSpPr>
+            <a:spLocks noGrp="1" noRot="1" noChangeAspect="1"/>
+          </p:cNvSpPr>
+          <p:nvPr>
+            <p:ph type="sldImg"/>
+          </p:nvPr>
+        </p:nvSpPr>
+        <p:spPr/>
+      </p:sp>
+      <p:sp>
+        <p:nvSpPr>
+          <p:cNvPr id="3" name="Notes Placeholder 2"/>
+          <p:cNvSpPr>
+            <a:spLocks noGrp="1"/>
+          </p:cNvSpPr>
+          <p:nvPr>
+            <p:ph type="body" idx="1"/>
+          </p:nvPr>
+        </p:nvSpPr>
+        <p:spPr/>
+        <p:txBody>
+          <a:bodyPr/>
+          <a:lstStyle/>
+          <a:p>
+            <a:r>
+              <a:rPr lang="en-US" dirty="0"/>
+              <a:t/>
+            </a:r>
+            <a:endParaRPr lang="en-US" dirty="0"/>
+          </a:p>
+        </p:txBody>
+      </p:sp>
+      <p:sp>
+        <p:nvSpPr>
+          <p:cNvPr id="4" name="Slide Number Placeholder 3"/>
+          <p:cNvSpPr>
+            <a:spLocks noGrp="1"/>
+          </p:cNvSpPr>
+          <p:nvPr>
+            <p:ph type="sldNum" sz="quarter" idx="10"/>
+          </p:nvPr>
+        </p:nvSpPr>
+        <p:spPr/>
+        <p:txBody>
+          <a:bodyPr/>
+          <a:lstStyle/>
+          <a:p>
+            <a:fld id="{F7021451-1387-4CA6-816F-3879F97B5CBC}" type="slidenum">
+              <a:rPr lang="en-US"/>
+              <a:t>11</a:t>
             </a:fld>
             <a:endParaRPr lang="en-US"/>
           </a:p>
@@ -2081,6 +2170,446 @@
     <p:bg>
       <p:bgPr>
         <a:solidFill>
+          <a:srgbClr val="FFFFFF"/>
+        </a:solidFill>
+      </p:bgPr>
+    </p:bg>
+    <p:spTree>
+      <p:nvGrpSpPr>
+        <p:cNvPr id="1" name=""/>
+        <p:cNvGrpSpPr/>
+        <p:nvPr/>
+      </p:nvGrpSpPr>
+      <p:grpSpPr>
+        <a:xfrm>
+          <a:off x="0" y="0"/>
+          <a:ext cx="0" cy="0"/>
+          <a:chOff x="0" y="0"/>
+          <a:chExt cx="0" cy="0"/>
+        </a:xfrm>
+      </p:grpSpPr>
+      <p:sp>
+        <p:nvSpPr>
+          <p:cNvPr id="2" name="Text 0"/>
+          <p:cNvSpPr/>
+          <p:nvPr/>
+        </p:nvSpPr>
+        <p:spPr>
+          <a:xfrm>
+            <a:off x="548640" y="384048"/>
+            <a:ext cx="11091672" cy="640080"/>
+          </a:xfrm>
+          <a:prstGeom prst="rect">
+            <a:avLst/>
+          </a:prstGeom>
+          <a:noFill/>
+          <a:ln/>
+        </p:spPr>
+        <p:txBody>
+          <a:bodyPr wrap="square" lIns="0" tIns="0" rIns="0" bIns="0" rtlCol="0" anchor="ctr"/>
+          <a:lstStyle/>
+          <a:p>
+            <a:pPr indent="0" marL="0">
+              <a:buNone/>
+            </a:pPr>
+            <a:r>
+              <a:rPr lang="en-US" sz="2900" b="1" dirty="0">
+                <a:solidFill>
+                  <a:srgbClr val="2A1618"/>
+                </a:solidFill>
+                <a:latin typeface="Cambria" pitchFamily="34" charset="0"/>
+                <a:ea typeface="Cambria" pitchFamily="34" charset="-122"/>
+                <a:cs typeface="Cambria" pitchFamily="34" charset="-120"/>
+              </a:rPr>
+              <a:t>Predicted vs. actual, by depth</a:t>
+            </a:r>
+            <a:endParaRPr lang="en-US" sz="2900" dirty="0"/>
+          </a:p>
+        </p:txBody>
+      </p:sp>
+      <p:sp>
+        <p:nvSpPr>
+          <p:cNvPr id="3" name="Text 1"/>
+          <p:cNvSpPr/>
+          <p:nvPr/>
+        </p:nvSpPr>
+        <p:spPr>
+          <a:xfrm>
+            <a:off x="548640" y="1033272"/>
+            <a:ext cx="11091672" cy="365760"/>
+          </a:xfrm>
+          <a:prstGeom prst="rect">
+            <a:avLst/>
+          </a:prstGeom>
+          <a:noFill/>
+          <a:ln/>
+        </p:spPr>
+        <p:txBody>
+          <a:bodyPr wrap="square" lIns="0" tIns="0" rIns="0" bIns="0" rtlCol="0" anchor="ctr"/>
+          <a:lstStyle/>
+          <a:p>
+            <a:pPr indent="0" marL="0">
+              <a:buNone/>
+            </a:pPr>
+            <a:r>
+              <a:rPr lang="en-US" sz="1400" b="1" dirty="0">
+                <a:solidFill>
+                  <a:srgbClr val="BE0000"/>
+                </a:solidFill>
+                <a:latin typeface="Calibri" pitchFamily="34" charset="0"/>
+                <a:ea typeface="Calibri" pitchFamily="34" charset="-122"/>
+                <a:cs typeface="Calibri" pitchFamily="34" charset="-120"/>
+              </a:rPr>
+              <a:t>Arrows = lateral error, marker color = depth error, red ring = grid-edge position</a:t>
+            </a:r>
+            <a:endParaRPr lang="en-US" sz="1400" dirty="0"/>
+          </a:p>
+        </p:txBody>
+      </p:sp>
+      <p:sp>
+        <p:nvSpPr>
+          <p:cNvPr id="4" name="Shape 2"/>
+          <p:cNvSpPr/>
+          <p:nvPr/>
+        </p:nvSpPr>
+        <p:spPr>
+          <a:xfrm>
+            <a:off x="310896" y="1581912"/>
+            <a:ext cx="3794760" cy="3977640"/>
+          </a:xfrm>
+          <a:prstGeom prst="roundRect">
+            <a:avLst>
+              <a:gd name="adj" fmla="val 2169"/>
+            </a:avLst>
+          </a:prstGeom>
+          <a:solidFill>
+            <a:srgbClr val="FBF4F2"/>
+          </a:solidFill>
+          <a:ln w="12700">
+            <a:solidFill>
+              <a:srgbClr val="E7D6D1"/>
+            </a:solidFill>
+            <a:prstDash val="solid"/>
+          </a:ln>
+          <a:effectLst>
+            <a:outerShdw sx="100000" sy="100000" kx="0" ky="0" algn="bl" rotWithShape="0" blurRad="88900" dist="38100" dir="5400000">
+              <a:srgbClr val="7A5C5E">
+                <a:alpha val="18000"/>
+              </a:srgbClr>
+            </a:outerShdw>
+          </a:effectLst>
+        </p:spPr>
+      </p:sp>
+      <p:pic>
+        <p:nvPicPr>
+          <p:cNvPr id="5" name="Image 0" descr="sim_depth_examples/sim_depthplot_zp15_n25.png">    </p:cNvPr>
+          <p:cNvPicPr>
+            <a:picLocks noChangeAspect="1"/>
+          </p:cNvPicPr>
+          <p:nvPr/>
+        </p:nvPicPr>
+        <p:blipFill>
+          <a:blip r:embed="rId1"/>
+          <a:stretch>
+            <a:fillRect/>
+          </a:stretch>
+        </p:blipFill>
+        <p:spPr>
+          <a:xfrm>
+            <a:off x="402336" y="1691640"/>
+            <a:ext cx="3611880" cy="3429000"/>
+          </a:xfrm>
+          <a:prstGeom prst="rect">
+            <a:avLst/>
+          </a:prstGeom>
+        </p:spPr>
+      </p:pic>
+      <p:sp>
+        <p:nvSpPr>
+          <p:cNvPr id="6" name="Text 3"/>
+          <p:cNvSpPr/>
+          <p:nvPr/>
+        </p:nvSpPr>
+        <p:spPr>
+          <a:xfrm>
+            <a:off x="310896" y="5120640"/>
+            <a:ext cx="3794760" cy="329184"/>
+          </a:xfrm>
+          <a:prstGeom prst="rect">
+            <a:avLst/>
+          </a:prstGeom>
+          <a:noFill/>
+          <a:ln/>
+        </p:spPr>
+        <p:txBody>
+          <a:bodyPr wrap="square" lIns="0" tIns="0" rIns="0" bIns="0" rtlCol="0" anchor="ctr"/>
+          <a:lstStyle/>
+          <a:p>
+            <a:pPr algn="ctr" indent="0" marL="0">
+              <a:buNone/>
+            </a:pPr>
+            <a:r>
+              <a:rPr lang="en-US" sz="1300" b="1" dirty="0">
+                <a:solidFill>
+                  <a:srgbClr val="BE0000"/>
+                </a:solidFill>
+                <a:latin typeface="Calibri" pitchFamily="34" charset="0"/>
+                <a:ea typeface="Calibri" pitchFamily="34" charset="-122"/>
+                <a:cs typeface="Calibri" pitchFamily="34" charset="-120"/>
+              </a:rPr>
+              <a:t>z = +15 mm  (peak signal)</a:t>
+            </a:r>
+            <a:endParaRPr lang="en-US" sz="1300" dirty="0"/>
+          </a:p>
+        </p:txBody>
+      </p:sp>
+      <p:sp>
+        <p:nvSpPr>
+          <p:cNvPr id="7" name="Shape 4"/>
+          <p:cNvSpPr/>
+          <p:nvPr/>
+        </p:nvSpPr>
+        <p:spPr>
+          <a:xfrm>
+            <a:off x="4197096" y="1581912"/>
+            <a:ext cx="3794760" cy="3977640"/>
+          </a:xfrm>
+          <a:prstGeom prst="roundRect">
+            <a:avLst>
+              <a:gd name="adj" fmla="val 2169"/>
+            </a:avLst>
+          </a:prstGeom>
+          <a:solidFill>
+            <a:srgbClr val="FBF4F2"/>
+          </a:solidFill>
+          <a:ln w="12700">
+            <a:solidFill>
+              <a:srgbClr val="E7D6D1"/>
+            </a:solidFill>
+            <a:prstDash val="solid"/>
+          </a:ln>
+          <a:effectLst>
+            <a:outerShdw sx="100000" sy="100000" kx="0" ky="0" algn="bl" rotWithShape="0" blurRad="88900" dist="38100" dir="5400000">
+              <a:srgbClr val="7A5C5E">
+                <a:alpha val="18000"/>
+              </a:srgbClr>
+            </a:outerShdw>
+          </a:effectLst>
+        </p:spPr>
+      </p:sp>
+      <p:pic>
+        <p:nvPicPr>
+          <p:cNvPr id="8" name="Image 1" descr="sim_depth_examples/sim_depthplot_zp30_n25.png">    </p:cNvPr>
+          <p:cNvPicPr>
+            <a:picLocks noChangeAspect="1"/>
+          </p:cNvPicPr>
+          <p:nvPr/>
+        </p:nvPicPr>
+        <p:blipFill>
+          <a:blip r:embed="rId2"/>
+          <a:stretch>
+            <a:fillRect/>
+          </a:stretch>
+        </p:blipFill>
+        <p:spPr>
+          <a:xfrm>
+            <a:off x="4288536" y="1691640"/>
+            <a:ext cx="3611880" cy="3429000"/>
+          </a:xfrm>
+          <a:prstGeom prst="rect">
+            <a:avLst/>
+          </a:prstGeom>
+        </p:spPr>
+      </p:pic>
+      <p:sp>
+        <p:nvSpPr>
+          <p:cNvPr id="9" name="Text 5"/>
+          <p:cNvSpPr/>
+          <p:nvPr/>
+        </p:nvSpPr>
+        <p:spPr>
+          <a:xfrm>
+            <a:off x="4197096" y="5120640"/>
+            <a:ext cx="3794760" cy="329184"/>
+          </a:xfrm>
+          <a:prstGeom prst="rect">
+            <a:avLst/>
+          </a:prstGeom>
+          <a:noFill/>
+          <a:ln/>
+        </p:spPr>
+        <p:txBody>
+          <a:bodyPr wrap="square" lIns="0" tIns="0" rIns="0" bIns="0" rtlCol="0" anchor="ctr"/>
+          <a:lstStyle/>
+          <a:p>
+            <a:pPr algn="ctr" indent="0" marL="0">
+              <a:buNone/>
+            </a:pPr>
+            <a:r>
+              <a:rPr lang="en-US" sz="1300" b="1" dirty="0">
+                <a:solidFill>
+                  <a:srgbClr val="BE0000"/>
+                </a:solidFill>
+                <a:latin typeface="Calibri" pitchFamily="34" charset="0"/>
+                <a:ea typeface="Calibri" pitchFamily="34" charset="-122"/>
+                <a:cs typeface="Calibri" pitchFamily="34" charset="-120"/>
+              </a:rPr>
+              <a:t>z = +30 mm  (interior)</a:t>
+            </a:r>
+            <a:endParaRPr lang="en-US" sz="1300" dirty="0"/>
+          </a:p>
+        </p:txBody>
+      </p:sp>
+      <p:sp>
+        <p:nvSpPr>
+          <p:cNvPr id="10" name="Shape 6"/>
+          <p:cNvSpPr/>
+          <p:nvPr/>
+        </p:nvSpPr>
+        <p:spPr>
+          <a:xfrm>
+            <a:off x="8083296" y="1581912"/>
+            <a:ext cx="3794760" cy="3977640"/>
+          </a:xfrm>
+          <a:prstGeom prst="roundRect">
+            <a:avLst>
+              <a:gd name="adj" fmla="val 2169"/>
+            </a:avLst>
+          </a:prstGeom>
+          <a:solidFill>
+            <a:srgbClr val="FBF4F2"/>
+          </a:solidFill>
+          <a:ln w="12700">
+            <a:solidFill>
+              <a:srgbClr val="E7D6D1"/>
+            </a:solidFill>
+            <a:prstDash val="solid"/>
+          </a:ln>
+          <a:effectLst>
+            <a:outerShdw sx="100000" sy="100000" kx="0" ky="0" algn="bl" rotWithShape="0" blurRad="88900" dist="38100" dir="5400000">
+              <a:srgbClr val="7A5C5E">
+                <a:alpha val="18000"/>
+              </a:srgbClr>
+            </a:outerShdw>
+          </a:effectLst>
+        </p:spPr>
+      </p:sp>
+      <p:pic>
+        <p:nvPicPr>
+          <p:cNvPr id="11" name="Image 2" descr="sim_depth_examples/sim_depthplot_zp45_n25.png">    </p:cNvPr>
+          <p:cNvPicPr>
+            <a:picLocks noChangeAspect="1"/>
+          </p:cNvPicPr>
+          <p:nvPr/>
+        </p:nvPicPr>
+        <p:blipFill>
+          <a:blip r:embed="rId3"/>
+          <a:stretch>
+            <a:fillRect/>
+          </a:stretch>
+        </p:blipFill>
+        <p:spPr>
+          <a:xfrm>
+            <a:off x="8174736" y="1691640"/>
+            <a:ext cx="3611880" cy="3429000"/>
+          </a:xfrm>
+          <a:prstGeom prst="rect">
+            <a:avLst/>
+          </a:prstGeom>
+        </p:spPr>
+      </p:pic>
+      <p:sp>
+        <p:nvSpPr>
+          <p:cNvPr id="12" name="Text 7"/>
+          <p:cNvSpPr/>
+          <p:nvPr/>
+        </p:nvSpPr>
+        <p:spPr>
+          <a:xfrm>
+            <a:off x="8083296" y="5120640"/>
+            <a:ext cx="3794760" cy="329184"/>
+          </a:xfrm>
+          <a:prstGeom prst="rect">
+            <a:avLst/>
+          </a:prstGeom>
+          <a:noFill/>
+          <a:ln/>
+        </p:spPr>
+        <p:txBody>
+          <a:bodyPr wrap="square" lIns="0" tIns="0" rIns="0" bIns="0" rtlCol="0" anchor="ctr"/>
+          <a:lstStyle/>
+          <a:p>
+            <a:pPr algn="ctr" indent="0" marL="0">
+              <a:buNone/>
+            </a:pPr>
+            <a:r>
+              <a:rPr lang="en-US" sz="1300" b="1" dirty="0">
+                <a:solidFill>
+                  <a:srgbClr val="BE0000"/>
+                </a:solidFill>
+                <a:latin typeface="Calibri" pitchFamily="34" charset="0"/>
+                <a:ea typeface="Calibri" pitchFamily="34" charset="-122"/>
+                <a:cs typeface="Calibri" pitchFamily="34" charset="-120"/>
+              </a:rPr>
+              <a:t>z = +45 mm  (outer edge)</a:t>
+            </a:r>
+            <a:endParaRPr lang="en-US" sz="1300" dirty="0"/>
+          </a:p>
+        </p:txBody>
+      </p:sp>
+      <p:sp>
+        <p:nvSpPr>
+          <p:cNvPr id="13" name="Text 8"/>
+          <p:cNvSpPr/>
+          <p:nvPr/>
+        </p:nvSpPr>
+        <p:spPr>
+          <a:xfrm>
+            <a:off x="548640" y="6126480"/>
+            <a:ext cx="11091672" cy="457200"/>
+          </a:xfrm>
+          <a:prstGeom prst="rect">
+            <a:avLst/>
+          </a:prstGeom>
+          <a:noFill/>
+          <a:ln/>
+        </p:spPr>
+        <p:txBody>
+          <a:bodyPr wrap="square" lIns="0" tIns="0" rIns="0" bIns="0" rtlCol="0" anchor="ctr"/>
+          <a:lstStyle/>
+          <a:p>
+            <a:pPr algn="ctr" indent="0" marL="0">
+              <a:buNone/>
+            </a:pPr>
+            <a:r>
+              <a:rPr lang="en-US" sz="1300" i="1" dirty="0">
+                <a:solidFill>
+                  <a:srgbClr val="836A68"/>
+                </a:solidFill>
+                <a:latin typeface="Calibri" pitchFamily="34" charset="0"/>
+                <a:ea typeface="Calibri" pitchFamily="34" charset="-122"/>
+                <a:cs typeface="Calibri" pitchFamily="34" charset="-120"/>
+              </a:rPr>
+              <a:t>Interior depths (z=+15/+30) predict tightly; the +45 mm outer edge shows the extrapolation blow-up in both lateral arrows and depth color.</a:t>
+            </a:r>
+            <a:endParaRPr lang="en-US" sz="1300" dirty="0"/>
+          </a:p>
+        </p:txBody>
+      </p:sp>
+    </p:spTree>
+  </p:cSld>
+  <p:clrMapOvr>
+    <a:masterClrMapping/>
+  </p:clrMapOvr>
+</p:sld>
+</file>
+
+<file path=ppt/slides/slide11.xml><?xml version="1.0" encoding="utf-8"?>
+<p:sld xmlns:a="http://schemas.openxmlformats.org/drawingml/2006/main" xmlns:r="http://schemas.openxmlformats.org/officeDocument/2006/relationships" xmlns:p="http://schemas.openxmlformats.org/presentationml/2006/main">
+  <p:cSld name="Slide 11">
+    <p:bg>
+      <p:bgPr>
+        <a:solidFill>
           <a:srgbClr val="FDF8F6"/>
         </a:solidFill>
       </p:bgPr>
@@ -4272,7 +4801,7 @@
                 <a:ea typeface="Cambria" pitchFamily="34" charset="-122"/>
                 <a:cs typeface="Cambria" pitchFamily="34" charset="-120"/>
               </a:rPr>
-              <a:t>The 3D localization network</a:t>
+              <a:t>The bench sees the same depth shape</a:t>
             </a:r>
             <a:endParaRPr lang="en-US" sz="2900" dirty="0"/>
           </a:p>
@@ -4311,26 +4840,50 @@
                 <a:ea typeface="Calibri" pitchFamily="34" charset="-122"/>
                 <a:cs typeface="Calibri" pitchFamily="34" charset="-120"/>
               </a:rPr>
-              <a:t>Same architecture as the measured CNN, with one extra output for depth</a:t>
+              <a:t>Measured tumor perturbation across 4 heights, independent of the simulation</a:t>
             </a:r>
             <a:endParaRPr lang="en-US" sz="1400" dirty="0"/>
           </a:p>
         </p:txBody>
       </p:sp>
-      <p:sp>
-        <p:nvSpPr>
-          <p:cNvPr id="4" name="Shape 2"/>
-          <p:cNvSpPr/>
-          <p:nvPr/>
-        </p:nvSpPr>
-        <p:spPr>
-          <a:xfrm>
-            <a:off x="548640" y="1600200"/>
-            <a:ext cx="11091672" cy="1024128"/>
+      <p:pic>
+        <p:nvPicPr>
+          <p:cNvPr id="4" name="Image 0" descr="measured_dS_vs_depth.png">    </p:cNvPr>
+          <p:cNvPicPr>
+            <a:picLocks noChangeAspect="1"/>
+          </p:cNvPicPr>
+          <p:nvPr/>
+        </p:nvPicPr>
+        <p:blipFill>
+          <a:blip r:embed="rId1"/>
+          <a:stretch>
+            <a:fillRect/>
+          </a:stretch>
+        </p:blipFill>
+        <p:spPr>
+          <a:xfrm>
+            <a:off x="411480" y="1783080"/>
+            <a:ext cx="7315200" cy="4297680"/>
+          </a:xfrm>
+          <a:prstGeom prst="rect">
+            <a:avLst/>
+          </a:prstGeom>
+        </p:spPr>
+      </p:pic>
+      <p:sp>
+        <p:nvSpPr>
+          <p:cNvPr id="5" name="Shape 2"/>
+          <p:cNvSpPr/>
+          <p:nvPr/>
+        </p:nvSpPr>
+        <p:spPr>
+          <a:xfrm>
+            <a:off x="7955280" y="1645920"/>
+            <a:ext cx="3703320" cy="4434840"/>
           </a:xfrm>
           <a:prstGeom prst="roundRect">
             <a:avLst>
-              <a:gd name="adj" fmla="val 8036"/>
+              <a:gd name="adj" fmla="val 2222"/>
             </a:avLst>
           </a:prstGeom>
           <a:solidFill>
@@ -4353,128 +4906,73 @@
       </p:sp>
       <p:sp>
         <p:nvSpPr>
-          <p:cNvPr id="5" name="Shape 3"/>
-          <p:cNvSpPr/>
-          <p:nvPr/>
-        </p:nvSpPr>
-        <p:spPr>
-          <a:xfrm>
-            <a:off x="777240" y="1856232"/>
-            <a:ext cx="512064" cy="512064"/>
-          </a:xfrm>
-          <a:prstGeom prst="ellipse">
-            <a:avLst/>
-          </a:prstGeom>
-          <a:solidFill>
-            <a:srgbClr val="BE0000"/>
-          </a:solidFill>
-          <a:ln/>
-        </p:spPr>
-      </p:sp>
-      <p:sp>
-        <p:nvSpPr>
-          <p:cNvPr id="6" name="Text 4"/>
-          <p:cNvSpPr/>
-          <p:nvPr/>
-        </p:nvSpPr>
-        <p:spPr>
-          <a:xfrm>
-            <a:off x="777240" y="1856232"/>
-            <a:ext cx="512064" cy="512064"/>
-          </a:xfrm>
-          <a:prstGeom prst="rect">
-            <a:avLst/>
-          </a:prstGeom>
-          <a:noFill/>
-          <a:ln/>
-        </p:spPr>
-        <p:txBody>
-          <a:bodyPr wrap="square" lIns="0" tIns="0" rIns="0" bIns="0" rtlCol="0" anchor="ctr"/>
-          <a:lstStyle/>
-          <a:p>
-            <a:pPr algn="ctr" indent="0" marL="0">
-              <a:buNone/>
-            </a:pPr>
-            <a:r>
-              <a:rPr lang="en-US" sz="2000" b="1" dirty="0">
-                <a:solidFill>
-                  <a:srgbClr val="FFFFFF"/>
+          <p:cNvPr id="6" name="Text 3"/>
+          <p:cNvSpPr/>
+          <p:nvPr/>
+        </p:nvSpPr>
+        <p:spPr>
+          <a:xfrm>
+            <a:off x="8183880" y="1828800"/>
+            <a:ext cx="3291840" cy="365760"/>
+          </a:xfrm>
+          <a:prstGeom prst="rect">
+            <a:avLst/>
+          </a:prstGeom>
+          <a:noFill/>
+          <a:ln/>
+        </p:spPr>
+        <p:txBody>
+          <a:bodyPr wrap="square" lIns="0" tIns="0" rIns="0" bIns="0" rtlCol="0" anchor="ctr"/>
+          <a:lstStyle/>
+          <a:p>
+            <a:pPr indent="0" marL="0">
+              <a:buNone/>
+            </a:pPr>
+            <a:r>
+              <a:rPr lang="en-US" sz="1600" b="1" dirty="0">
+                <a:solidFill>
+                  <a:srgbClr val="BE0000"/>
                 </a:solidFill>
                 <a:latin typeface="Cambria" pitchFamily="34" charset="0"/>
                 <a:ea typeface="Cambria" pitchFamily="34" charset="-122"/>
                 <a:cs typeface="Cambria" pitchFamily="34" charset="-120"/>
               </a:rPr>
-              <a:t>1</a:t>
-            </a:r>
-            <a:endParaRPr lang="en-US" sz="2000" dirty="0"/>
-          </a:p>
-        </p:txBody>
-      </p:sp>
-      <p:sp>
-        <p:nvSpPr>
-          <p:cNvPr id="7" name="Text 5"/>
-          <p:cNvSpPr/>
-          <p:nvPr/>
-        </p:nvSpPr>
-        <p:spPr>
-          <a:xfrm>
-            <a:off x="1508760" y="1746504"/>
-            <a:ext cx="2011680" cy="731520"/>
-          </a:xfrm>
-          <a:prstGeom prst="rect">
-            <a:avLst/>
-          </a:prstGeom>
-          <a:noFill/>
-          <a:ln/>
-        </p:spPr>
-        <p:txBody>
-          <a:bodyPr wrap="square" lIns="0" tIns="0" rIns="0" bIns="0" rtlCol="0" anchor="ctr"/>
-          <a:lstStyle/>
-          <a:p>
-            <a:pPr indent="0" marL="0">
-              <a:buNone/>
-            </a:pPr>
-            <a:r>
-              <a:rPr lang="en-US" sz="1700" b="1" dirty="0">
-                <a:solidFill>
-                  <a:srgbClr val="BE0000"/>
-                </a:solidFill>
-                <a:latin typeface="Cambria" pitchFamily="34" charset="0"/>
-                <a:ea typeface="Cambria" pitchFamily="34" charset="-122"/>
-                <a:cs typeface="Cambria" pitchFamily="34" charset="-120"/>
-              </a:rPr>
-              <a:t>Input</a:t>
-            </a:r>
-            <a:endParaRPr lang="en-US" sz="1700" dirty="0"/>
-          </a:p>
-        </p:txBody>
-      </p:sp>
-      <p:sp>
-        <p:nvSpPr>
-          <p:cNvPr id="8" name="Text 6"/>
-          <p:cNvSpPr/>
-          <p:nvPr/>
-        </p:nvSpPr>
-        <p:spPr>
-          <a:xfrm>
-            <a:off x="3611880" y="1655064"/>
-            <a:ext cx="7845552" cy="914400"/>
-          </a:xfrm>
-          <a:prstGeom prst="rect">
-            <a:avLst/>
-          </a:prstGeom>
-          <a:noFill/>
-          <a:ln/>
-        </p:spPr>
-        <p:txBody>
-          <a:bodyPr wrap="square" lIns="0" tIns="0" rIns="0" bIns="0" rtlCol="0" anchor="ctr"/>
-          <a:lstStyle/>
-          <a:p>
-            <a:pPr indent="0" marL="0">
-              <a:buNone/>
-            </a:pPr>
-            <a:r>
-              <a:rPr lang="en-US" sz="1250" dirty="0">
+              <a:t>Same story on the bench</a:t>
+            </a:r>
+            <a:endParaRPr lang="en-US" sz="1600" dirty="0"/>
+          </a:p>
+        </p:txBody>
+      </p:sp>
+      <p:sp>
+        <p:nvSpPr>
+          <p:cNvPr id="7" name="Text 4"/>
+          <p:cNvSpPr/>
+          <p:nvPr/>
+        </p:nvSpPr>
+        <p:spPr>
+          <a:xfrm>
+            <a:off x="8183880" y="2331720"/>
+            <a:ext cx="3291840" cy="3657600"/>
+          </a:xfrm>
+          <a:prstGeom prst="rect">
+            <a:avLst/>
+          </a:prstGeom>
+          <a:noFill/>
+          <a:ln/>
+        </p:spPr>
+        <p:txBody>
+          <a:bodyPr wrap="square" lIns="0" tIns="0" rIns="0" bIns="0" rtlCol="0" anchor="t"/>
+          <a:lstStyle/>
+          <a:p>
+            <a:pPr marL="342900" indent="-342900">
+              <a:spcAft>
+                <a:spcPts val="800"/>
+              </a:spcAft>
+              <a:buSzPct val="100000"/>
+              <a:buChar char="•"/>
+            </a:pPr>
+            <a:r>
+              <a:rPr lang="en-US" sz="1200" dirty="0">
                 <a:solidFill>
                   <a:srgbClr val="2A1618"/>
                 </a:solidFill>
@@ -4482,170 +4980,20 @@
                 <a:ea typeface="Calibri" pitchFamily="34" charset="-122"/>
                 <a:cs typeface="Calibri" pitchFamily="34" charset="-120"/>
               </a:rPr>
-              <a:t>dS as a 32 x 256 image (16 S-params x [mag, phase], 256 frequencies). Per-sample z-score normalization.</a:t>
-            </a:r>
-            <a:endParaRPr lang="en-US" sz="1250" dirty="0"/>
-          </a:p>
-        </p:txBody>
-      </p:sp>
-      <p:sp>
-        <p:nvSpPr>
-          <p:cNvPr id="9" name="Shape 7"/>
-          <p:cNvSpPr/>
-          <p:nvPr/>
-        </p:nvSpPr>
-        <p:spPr>
-          <a:xfrm>
-            <a:off x="548640" y="2770632"/>
-            <a:ext cx="11091672" cy="1024128"/>
-          </a:xfrm>
-          <a:prstGeom prst="roundRect">
-            <a:avLst>
-              <a:gd name="adj" fmla="val 8036"/>
-            </a:avLst>
-          </a:prstGeom>
-          <a:solidFill>
-            <a:srgbClr val="FBF4F2"/>
-          </a:solidFill>
-          <a:ln w="12700">
-            <a:solidFill>
-              <a:srgbClr val="E7D6D1"/>
-            </a:solidFill>
-            <a:prstDash val="solid"/>
-          </a:ln>
-          <a:effectLst>
-            <a:outerShdw sx="100000" sy="100000" kx="0" ky="0" algn="bl" rotWithShape="0" blurRad="88900" dist="38100" dir="5400000">
-              <a:srgbClr val="7A5C5E">
-                <a:alpha val="18000"/>
-              </a:srgbClr>
-            </a:outerShdw>
-          </a:effectLst>
-        </p:spPr>
-      </p:sp>
-      <p:sp>
-        <p:nvSpPr>
-          <p:cNvPr id="10" name="Shape 8"/>
-          <p:cNvSpPr/>
-          <p:nvPr/>
-        </p:nvSpPr>
-        <p:spPr>
-          <a:xfrm>
-            <a:off x="777240" y="3026664"/>
-            <a:ext cx="512064" cy="512064"/>
-          </a:xfrm>
-          <a:prstGeom prst="ellipse">
-            <a:avLst/>
-          </a:prstGeom>
-          <a:solidFill>
-            <a:srgbClr val="BE0000"/>
-          </a:solidFill>
-          <a:ln/>
-        </p:spPr>
-      </p:sp>
-      <p:sp>
-        <p:nvSpPr>
-          <p:cNvPr id="11" name="Text 9"/>
-          <p:cNvSpPr/>
-          <p:nvPr/>
-        </p:nvSpPr>
-        <p:spPr>
-          <a:xfrm>
-            <a:off x="777240" y="3026664"/>
-            <a:ext cx="512064" cy="512064"/>
-          </a:xfrm>
-          <a:prstGeom prst="rect">
-            <a:avLst/>
-          </a:prstGeom>
-          <a:noFill/>
-          <a:ln/>
-        </p:spPr>
-        <p:txBody>
-          <a:bodyPr wrap="square" lIns="0" tIns="0" rIns="0" bIns="0" rtlCol="0" anchor="ctr"/>
-          <a:lstStyle/>
-          <a:p>
-            <a:pPr algn="ctr" indent="0" marL="0">
-              <a:buNone/>
-            </a:pPr>
-            <a:r>
-              <a:rPr lang="en-US" sz="2000" b="1" dirty="0">
-                <a:solidFill>
-                  <a:srgbClr val="FFFFFF"/>
-                </a:solidFill>
-                <a:latin typeface="Cambria" pitchFamily="34" charset="0"/>
-                <a:ea typeface="Cambria" pitchFamily="34" charset="-122"/>
-                <a:cs typeface="Cambria" pitchFamily="34" charset="-120"/>
-              </a:rPr>
-              <a:t>2</a:t>
-            </a:r>
-            <a:endParaRPr lang="en-US" sz="2000" dirty="0"/>
-          </a:p>
-        </p:txBody>
-      </p:sp>
-      <p:sp>
-        <p:nvSpPr>
-          <p:cNvPr id="12" name="Text 10"/>
-          <p:cNvSpPr/>
-          <p:nvPr/>
-        </p:nvSpPr>
-        <p:spPr>
-          <a:xfrm>
-            <a:off x="1508760" y="2916936"/>
-            <a:ext cx="2011680" cy="731520"/>
-          </a:xfrm>
-          <a:prstGeom prst="rect">
-            <a:avLst/>
-          </a:prstGeom>
-          <a:noFill/>
-          <a:ln/>
-        </p:spPr>
-        <p:txBody>
-          <a:bodyPr wrap="square" lIns="0" tIns="0" rIns="0" bIns="0" rtlCol="0" anchor="ctr"/>
-          <a:lstStyle/>
-          <a:p>
-            <a:pPr indent="0" marL="0">
-              <a:buNone/>
-            </a:pPr>
-            <a:r>
-              <a:rPr lang="en-US" sz="1700" b="1" dirty="0">
-                <a:solidFill>
-                  <a:srgbClr val="BE0000"/>
-                </a:solidFill>
-                <a:latin typeface="Cambria" pitchFamily="34" charset="0"/>
-                <a:ea typeface="Cambria" pitchFamily="34" charset="-122"/>
-                <a:cs typeface="Cambria" pitchFamily="34" charset="-120"/>
-              </a:rPr>
-              <a:t>Trunk</a:t>
-            </a:r>
-            <a:endParaRPr lang="en-US" sz="1700" dirty="0"/>
-          </a:p>
-        </p:txBody>
-      </p:sp>
-      <p:sp>
-        <p:nvSpPr>
-          <p:cNvPr id="13" name="Text 11"/>
-          <p:cNvSpPr/>
-          <p:nvPr/>
-        </p:nvSpPr>
-        <p:spPr>
-          <a:xfrm>
-            <a:off x="3611880" y="2825496"/>
-            <a:ext cx="7845552" cy="914400"/>
-          </a:xfrm>
-          <a:prstGeom prst="rect">
-            <a:avLst/>
-          </a:prstGeom>
-          <a:noFill/>
-          <a:ln/>
-        </p:spPr>
-        <p:txBody>
-          <a:bodyPr wrap="square" lIns="0" tIns="0" rIns="0" bIns="0" rtlCol="0" anchor="ctr"/>
-          <a:lstStyle/>
-          <a:p>
-            <a:pPr indent="0" marL="0">
-              <a:buNone/>
-            </a:pPr>
-            <a:r>
-              <a:rPr lang="en-US" sz="1250" dirty="0">
+              <a:t>4 measured tumor heights (July10), a full 51-position grid at each.</a:t>
+            </a:r>
+            <a:endParaRPr lang="en-US" sz="1200" dirty="0"/>
+          </a:p>
+          <a:p>
+            <a:pPr marL="342900" indent="-342900">
+              <a:spcAft>
+                <a:spcPts val="800"/>
+              </a:spcAft>
+              <a:buSzPct val="100000"/>
+              <a:buChar char="•"/>
+            </a:pPr>
+            <a:r>
+              <a:rPr lang="en-US" sz="1200" dirty="0">
                 <a:solidFill>
                   <a:srgbClr val="2A1618"/>
                 </a:solidFill>
@@ -4653,170 +5001,20 @@
                 <a:ea typeface="Calibri" pitchFamily="34" charset="-122"/>
                 <a:cs typeface="Calibri" pitchFamily="34" charset="-120"/>
               </a:rPr>
-              <a:t>2 conv blocks (32 filters each) plus pooling and dropout, identical to the measured (x,y) CNN.</a:t>
-            </a:r>
-            <a:endParaRPr lang="en-US" sz="1250" dirty="0"/>
-          </a:p>
-        </p:txBody>
-      </p:sp>
-      <p:sp>
-        <p:nvSpPr>
-          <p:cNvPr id="14" name="Shape 12"/>
-          <p:cNvSpPr/>
-          <p:nvPr/>
-        </p:nvSpPr>
-        <p:spPr>
-          <a:xfrm>
-            <a:off x="548640" y="3941064"/>
-            <a:ext cx="11091672" cy="1024128"/>
-          </a:xfrm>
-          <a:prstGeom prst="roundRect">
-            <a:avLst>
-              <a:gd name="adj" fmla="val 8036"/>
-            </a:avLst>
-          </a:prstGeom>
-          <a:solidFill>
-            <a:srgbClr val="FBF4F2"/>
-          </a:solidFill>
-          <a:ln w="12700">
-            <a:solidFill>
-              <a:srgbClr val="E7D6D1"/>
-            </a:solidFill>
-            <a:prstDash val="solid"/>
-          </a:ln>
-          <a:effectLst>
-            <a:outerShdw sx="100000" sy="100000" kx="0" ky="0" algn="bl" rotWithShape="0" blurRad="88900" dist="38100" dir="5400000">
-              <a:srgbClr val="7A5C5E">
-                <a:alpha val="18000"/>
-              </a:srgbClr>
-            </a:outerShdw>
-          </a:effectLst>
-        </p:spPr>
-      </p:sp>
-      <p:sp>
-        <p:nvSpPr>
-          <p:cNvPr id="15" name="Shape 13"/>
-          <p:cNvSpPr/>
-          <p:nvPr/>
-        </p:nvSpPr>
-        <p:spPr>
-          <a:xfrm>
-            <a:off x="777240" y="4197096"/>
-            <a:ext cx="512064" cy="512064"/>
-          </a:xfrm>
-          <a:prstGeom prst="ellipse">
-            <a:avLst/>
-          </a:prstGeom>
-          <a:solidFill>
-            <a:srgbClr val="BE0000"/>
-          </a:solidFill>
-          <a:ln/>
-        </p:spPr>
-      </p:sp>
-      <p:sp>
-        <p:nvSpPr>
-          <p:cNvPr id="16" name="Text 14"/>
-          <p:cNvSpPr/>
-          <p:nvPr/>
-        </p:nvSpPr>
-        <p:spPr>
-          <a:xfrm>
-            <a:off x="777240" y="4197096"/>
-            <a:ext cx="512064" cy="512064"/>
-          </a:xfrm>
-          <a:prstGeom prst="rect">
-            <a:avLst/>
-          </a:prstGeom>
-          <a:noFill/>
-          <a:ln/>
-        </p:spPr>
-        <p:txBody>
-          <a:bodyPr wrap="square" lIns="0" tIns="0" rIns="0" bIns="0" rtlCol="0" anchor="ctr"/>
-          <a:lstStyle/>
-          <a:p>
-            <a:pPr algn="ctr" indent="0" marL="0">
-              <a:buNone/>
-            </a:pPr>
-            <a:r>
-              <a:rPr lang="en-US" sz="2000" b="1" dirty="0">
-                <a:solidFill>
-                  <a:srgbClr val="FFFFFF"/>
-                </a:solidFill>
-                <a:latin typeface="Cambria" pitchFamily="34" charset="0"/>
-                <a:ea typeface="Cambria" pitchFamily="34" charset="-122"/>
-                <a:cs typeface="Cambria" pitchFamily="34" charset="-120"/>
-              </a:rPr>
-              <a:t>3</a:t>
-            </a:r>
-            <a:endParaRPr lang="en-US" sz="2000" dirty="0"/>
-          </a:p>
-        </p:txBody>
-      </p:sp>
-      <p:sp>
-        <p:nvSpPr>
-          <p:cNvPr id="17" name="Text 15"/>
-          <p:cNvSpPr/>
-          <p:nvPr/>
-        </p:nvSpPr>
-        <p:spPr>
-          <a:xfrm>
-            <a:off x="1508760" y="4087368"/>
-            <a:ext cx="2011680" cy="731520"/>
-          </a:xfrm>
-          <a:prstGeom prst="rect">
-            <a:avLst/>
-          </a:prstGeom>
-          <a:noFill/>
-          <a:ln/>
-        </p:spPr>
-        <p:txBody>
-          <a:bodyPr wrap="square" lIns="0" tIns="0" rIns="0" bIns="0" rtlCol="0" anchor="ctr"/>
-          <a:lstStyle/>
-          <a:p>
-            <a:pPr indent="0" marL="0">
-              <a:buNone/>
-            </a:pPr>
-            <a:r>
-              <a:rPr lang="en-US" sz="1700" b="1" dirty="0">
-                <a:solidFill>
-                  <a:srgbClr val="BE0000"/>
-                </a:solidFill>
-                <a:latin typeface="Cambria" pitchFamily="34" charset="0"/>
-                <a:ea typeface="Cambria" pitchFamily="34" charset="-122"/>
-                <a:cs typeface="Cambria" pitchFamily="34" charset="-120"/>
-              </a:rPr>
-              <a:t>Head</a:t>
-            </a:r>
-            <a:endParaRPr lang="en-US" sz="1700" dirty="0"/>
-          </a:p>
-        </p:txBody>
-      </p:sp>
-      <p:sp>
-        <p:nvSpPr>
-          <p:cNvPr id="18" name="Text 16"/>
-          <p:cNvSpPr/>
-          <p:nvPr/>
-        </p:nvSpPr>
-        <p:spPr>
-          <a:xfrm>
-            <a:off x="3611880" y="3995928"/>
-            <a:ext cx="7845552" cy="914400"/>
-          </a:xfrm>
-          <a:prstGeom prst="rect">
-            <a:avLst/>
-          </a:prstGeom>
-          <a:noFill/>
-          <a:ln/>
-        </p:spPr>
-        <p:txBody>
-          <a:bodyPr wrap="square" lIns="0" tIns="0" rIns="0" bIns="0" rtlCol="0" anchor="ctr"/>
-          <a:lstStyle/>
-          <a:p>
-            <a:pPr indent="0" marL="0">
-              <a:buNone/>
-            </a:pPr>
-            <a:r>
-              <a:rPr lang="en-US" sz="1250" dirty="0">
+              <a:t>Mean |dS| peaks at +15 mm, right at the radiating patch, exactly like the sim.</a:t>
+            </a:r>
+            <a:endParaRPr lang="en-US" sz="1200" dirty="0"/>
+          </a:p>
+          <a:p>
+            <a:pPr marL="342900" indent="-342900">
+              <a:spcAft>
+                <a:spcPts val="800"/>
+              </a:spcAft>
+              <a:buSzPct val="100000"/>
+              <a:buChar char="•"/>
+            </a:pPr>
+            <a:r>
+              <a:rPr lang="en-US" sz="1200" dirty="0">
                 <a:solidFill>
                   <a:srgbClr val="2A1618"/>
                 </a:solidFill>
@@ -4824,170 +5022,20 @@
                 <a:ea typeface="Calibri" pitchFamily="34" charset="-122"/>
                 <a:cs typeface="Calibri" pitchFamily="34" charset="-120"/>
               </a:rPr>
-              <a:t>fc(3) plus regression to (x, y, z) in mm. Trained with an L2 coordinate loss, 60 epochs.</a:t>
-            </a:r>
-            <a:endParaRPr lang="en-US" sz="1250" dirty="0"/>
-          </a:p>
-        </p:txBody>
-      </p:sp>
-      <p:sp>
-        <p:nvSpPr>
-          <p:cNvPr id="19" name="Shape 17"/>
-          <p:cNvSpPr/>
-          <p:nvPr/>
-        </p:nvSpPr>
-        <p:spPr>
-          <a:xfrm>
-            <a:off x="548640" y="5111496"/>
-            <a:ext cx="11091672" cy="1024128"/>
-          </a:xfrm>
-          <a:prstGeom prst="roundRect">
-            <a:avLst>
-              <a:gd name="adj" fmla="val 8036"/>
-            </a:avLst>
-          </a:prstGeom>
-          <a:solidFill>
-            <a:srgbClr val="FBF4F2"/>
-          </a:solidFill>
-          <a:ln w="12700">
-            <a:solidFill>
-              <a:srgbClr val="E7D6D1"/>
-            </a:solidFill>
-            <a:prstDash val="solid"/>
-          </a:ln>
-          <a:effectLst>
-            <a:outerShdw sx="100000" sy="100000" kx="0" ky="0" algn="bl" rotWithShape="0" blurRad="88900" dist="38100" dir="5400000">
-              <a:srgbClr val="7A5C5E">
-                <a:alpha val="18000"/>
-              </a:srgbClr>
-            </a:outerShdw>
-          </a:effectLst>
-        </p:spPr>
-      </p:sp>
-      <p:sp>
-        <p:nvSpPr>
-          <p:cNvPr id="20" name="Shape 18"/>
-          <p:cNvSpPr/>
-          <p:nvPr/>
-        </p:nvSpPr>
-        <p:spPr>
-          <a:xfrm>
-            <a:off x="777240" y="5367528"/>
-            <a:ext cx="512064" cy="512064"/>
-          </a:xfrm>
-          <a:prstGeom prst="ellipse">
-            <a:avLst/>
-          </a:prstGeom>
-          <a:solidFill>
-            <a:srgbClr val="BE0000"/>
-          </a:solidFill>
-          <a:ln/>
-        </p:spPr>
-      </p:sp>
-      <p:sp>
-        <p:nvSpPr>
-          <p:cNvPr id="21" name="Text 19"/>
-          <p:cNvSpPr/>
-          <p:nvPr/>
-        </p:nvSpPr>
-        <p:spPr>
-          <a:xfrm>
-            <a:off x="777240" y="5367528"/>
-            <a:ext cx="512064" cy="512064"/>
-          </a:xfrm>
-          <a:prstGeom prst="rect">
-            <a:avLst/>
-          </a:prstGeom>
-          <a:noFill/>
-          <a:ln/>
-        </p:spPr>
-        <p:txBody>
-          <a:bodyPr wrap="square" lIns="0" tIns="0" rIns="0" bIns="0" rtlCol="0" anchor="ctr"/>
-          <a:lstStyle/>
-          <a:p>
-            <a:pPr algn="ctr" indent="0" marL="0">
-              <a:buNone/>
-            </a:pPr>
-            <a:r>
-              <a:rPr lang="en-US" sz="2000" b="1" dirty="0">
-                <a:solidFill>
-                  <a:srgbClr val="FFFFFF"/>
-                </a:solidFill>
-                <a:latin typeface="Cambria" pitchFamily="34" charset="0"/>
-                <a:ea typeface="Cambria" pitchFamily="34" charset="-122"/>
-                <a:cs typeface="Cambria" pitchFamily="34" charset="-120"/>
-              </a:rPr>
-              <a:t>4</a:t>
-            </a:r>
-            <a:endParaRPr lang="en-US" sz="2000" dirty="0"/>
-          </a:p>
-        </p:txBody>
-      </p:sp>
-      <p:sp>
-        <p:nvSpPr>
-          <p:cNvPr id="22" name="Text 20"/>
-          <p:cNvSpPr/>
-          <p:nvPr/>
-        </p:nvSpPr>
-        <p:spPr>
-          <a:xfrm>
-            <a:off x="1508760" y="5257800"/>
-            <a:ext cx="2011680" cy="731520"/>
-          </a:xfrm>
-          <a:prstGeom prst="rect">
-            <a:avLst/>
-          </a:prstGeom>
-          <a:noFill/>
-          <a:ln/>
-        </p:spPr>
-        <p:txBody>
-          <a:bodyPr wrap="square" lIns="0" tIns="0" rIns="0" bIns="0" rtlCol="0" anchor="ctr"/>
-          <a:lstStyle/>
-          <a:p>
-            <a:pPr indent="0" marL="0">
-              <a:buNone/>
-            </a:pPr>
-            <a:r>
-              <a:rPr lang="en-US" sz="1700" b="1" dirty="0">
-                <a:solidFill>
-                  <a:srgbClr val="BE0000"/>
-                </a:solidFill>
-                <a:latin typeface="Cambria" pitchFamily="34" charset="0"/>
-                <a:ea typeface="Cambria" pitchFamily="34" charset="-122"/>
-                <a:cs typeface="Cambria" pitchFamily="34" charset="-120"/>
-              </a:rPr>
-              <a:t>Evaluation</a:t>
-            </a:r>
-            <a:endParaRPr lang="en-US" sz="1700" dirty="0"/>
-          </a:p>
-        </p:txBody>
-      </p:sp>
-      <p:sp>
-        <p:nvSpPr>
-          <p:cNvPr id="23" name="Text 21"/>
-          <p:cNvSpPr/>
-          <p:nvPr/>
-        </p:nvSpPr>
-        <p:spPr>
-          <a:xfrm>
-            <a:off x="3611880" y="5166360"/>
-            <a:ext cx="7845552" cy="914400"/>
-          </a:xfrm>
-          <a:prstGeom prst="rect">
-            <a:avLst/>
-          </a:prstGeom>
-          <a:noFill/>
-          <a:ln/>
-        </p:spPr>
-        <p:txBody>
-          <a:bodyPr wrap="square" lIns="0" tIns="0" rIns="0" bIns="0" rtlCol="0" anchor="ctr"/>
-          <a:lstStyle/>
-          <a:p>
-            <a:pPr indent="0" marL="0">
-              <a:buNone/>
-            </a:pPr>
-            <a:r>
-              <a:rPr lang="en-US" sz="1250" dirty="0">
+              <a:t>Falls off both ways; the bench and the simulation agree on where the signal lives.</a:t>
+            </a:r>
+            <a:endParaRPr lang="en-US" sz="1200" dirty="0"/>
+          </a:p>
+          <a:p>
+            <a:pPr marL="342900" indent="-342900">
+              <a:spcAft>
+                <a:spcPts val="800"/>
+              </a:spcAft>
+              <a:buSzPct val="100000"/>
+              <a:buChar char="•"/>
+            </a:pPr>
+            <a:r>
+              <a:rPr lang="en-US" sz="1200" dirty="0">
                 <a:solidFill>
                   <a:srgbClr val="2A1618"/>
                 </a:solidFill>
@@ -4995,9 +5043,9 @@
                 <a:ea typeface="Calibri" pitchFamily="34" charset="-122"/>
                 <a:cs typeface="Calibri" pitchFamily="34" charset="-120"/>
               </a:rPr>
-              <a:t>8-fold hold-out by POSITION (every position predicted once, out-of-fold). Lateral = sqrt(dx^2+dy^2); depth = |dz|, reported separately so one axis cannot hide the other.</a:t>
-            </a:r>
-            <a:endParaRPr lang="en-US" sz="1250" dirty="0"/>
+              <a:t>Depths are port-relative; the +25 mm session was mislabeled '2.5 cm below' in the README.</a:t>
+            </a:r>
+            <a:endParaRPr lang="en-US" sz="1200" dirty="0"/>
           </a:p>
         </p:txBody>
       </p:sp>
@@ -5066,7 +5114,7 @@
                 <a:ea typeface="Cambria" pitchFamily="34" charset="-122"/>
                 <a:cs typeface="Cambria" pitchFamily="34" charset="-120"/>
               </a:rPr>
-              <a:t>How much data does the CNN need?</a:t>
+              <a:t>The 3D localization network</a:t>
             </a:r>
             <a:endParaRPr lang="en-US" sz="2900" dirty="0"/>
           </a:p>
@@ -5105,50 +5153,26 @@
                 <a:ea typeface="Calibri" pitchFamily="34" charset="-122"/>
                 <a:cs typeface="Calibri" pitchFamily="34" charset="-120"/>
               </a:rPr>
-              <a:t>Train on more depth planes (more distinct positions) and watch the error fall</a:t>
+              <a:t>Same architecture as the measured CNN, with one extra output for depth</a:t>
             </a:r>
             <a:endParaRPr lang="en-US" sz="1400" dirty="0"/>
           </a:p>
         </p:txBody>
       </p:sp>
-      <p:pic>
-        <p:nvPicPr>
-          <p:cNvPr id="4" name="Image 0" descr="sim_depth_learning_curve.png">    </p:cNvPr>
-          <p:cNvPicPr>
-            <a:picLocks noChangeAspect="1"/>
-          </p:cNvPicPr>
-          <p:nvPr/>
-        </p:nvPicPr>
-        <p:blipFill>
-          <a:blip r:embed="rId1"/>
-          <a:stretch>
-            <a:fillRect/>
-          </a:stretch>
-        </p:blipFill>
-        <p:spPr>
-          <a:xfrm>
-            <a:off x="457200" y="1600200"/>
-            <a:ext cx="7223760" cy="4498848"/>
-          </a:xfrm>
-          <a:prstGeom prst="rect">
-            <a:avLst/>
-          </a:prstGeom>
-        </p:spPr>
-      </p:pic>
-      <p:sp>
-        <p:nvSpPr>
-          <p:cNvPr id="5" name="Shape 2"/>
-          <p:cNvSpPr/>
-          <p:nvPr/>
-        </p:nvSpPr>
-        <p:spPr>
-          <a:xfrm>
-            <a:off x="7863840" y="1600200"/>
-            <a:ext cx="3794760" cy="4498848"/>
+      <p:sp>
+        <p:nvSpPr>
+          <p:cNvPr id="4" name="Shape 2"/>
+          <p:cNvSpPr/>
+          <p:nvPr/>
+        </p:nvSpPr>
+        <p:spPr>
+          <a:xfrm>
+            <a:off x="548640" y="1600200"/>
+            <a:ext cx="11091672" cy="1024128"/>
           </a:xfrm>
           <a:prstGeom prst="roundRect">
             <a:avLst>
-              <a:gd name="adj" fmla="val 2169"/>
+              <a:gd name="adj" fmla="val 8036"/>
             </a:avLst>
           </a:prstGeom>
           <a:solidFill>
@@ -5171,73 +5195,128 @@
       </p:sp>
       <p:sp>
         <p:nvSpPr>
-          <p:cNvPr id="6" name="Text 3"/>
-          <p:cNvSpPr/>
-          <p:nvPr/>
-        </p:nvSpPr>
-        <p:spPr>
-          <a:xfrm>
-            <a:off x="8092440" y="1783080"/>
-            <a:ext cx="3383280" cy="365760"/>
-          </a:xfrm>
-          <a:prstGeom prst="rect">
-            <a:avLst/>
-          </a:prstGeom>
-          <a:noFill/>
-          <a:ln/>
-        </p:spPr>
-        <p:txBody>
-          <a:bodyPr wrap="square" lIns="0" tIns="0" rIns="0" bIns="0" rtlCol="0" anchor="ctr"/>
-          <a:lstStyle/>
-          <a:p>
-            <a:pPr indent="0" marL="0">
-              <a:buNone/>
-            </a:pPr>
-            <a:r>
-              <a:rPr lang="en-US" sz="1600" b="1" dirty="0">
-                <a:solidFill>
-                  <a:srgbClr val="BE0000"/>
+          <p:cNvPr id="5" name="Shape 3"/>
+          <p:cNvSpPr/>
+          <p:nvPr/>
+        </p:nvSpPr>
+        <p:spPr>
+          <a:xfrm>
+            <a:off x="777240" y="1856232"/>
+            <a:ext cx="512064" cy="512064"/>
+          </a:xfrm>
+          <a:prstGeom prst="ellipse">
+            <a:avLst/>
+          </a:prstGeom>
+          <a:solidFill>
+            <a:srgbClr val="BE0000"/>
+          </a:solidFill>
+          <a:ln/>
+        </p:spPr>
+      </p:sp>
+      <p:sp>
+        <p:nvSpPr>
+          <p:cNvPr id="6" name="Text 4"/>
+          <p:cNvSpPr/>
+          <p:nvPr/>
+        </p:nvSpPr>
+        <p:spPr>
+          <a:xfrm>
+            <a:off x="777240" y="1856232"/>
+            <a:ext cx="512064" cy="512064"/>
+          </a:xfrm>
+          <a:prstGeom prst="rect">
+            <a:avLst/>
+          </a:prstGeom>
+          <a:noFill/>
+          <a:ln/>
+        </p:spPr>
+        <p:txBody>
+          <a:bodyPr wrap="square" lIns="0" tIns="0" rIns="0" bIns="0" rtlCol="0" anchor="ctr"/>
+          <a:lstStyle/>
+          <a:p>
+            <a:pPr algn="ctr" indent="0" marL="0">
+              <a:buNone/>
+            </a:pPr>
+            <a:r>
+              <a:rPr lang="en-US" sz="2000" b="1" dirty="0">
+                <a:solidFill>
+                  <a:srgbClr val="FFFFFF"/>
                 </a:solidFill>
                 <a:latin typeface="Cambria" pitchFamily="34" charset="0"/>
                 <a:ea typeface="Cambria" pitchFamily="34" charset="-122"/>
                 <a:cs typeface="Cambria" pitchFamily="34" charset="-120"/>
               </a:rPr>
-              <a:t>The threshold</a:t>
-            </a:r>
-            <a:endParaRPr lang="en-US" sz="1600" dirty="0"/>
-          </a:p>
-        </p:txBody>
-      </p:sp>
-      <p:sp>
-        <p:nvSpPr>
-          <p:cNvPr id="7" name="Text 4"/>
-          <p:cNvSpPr/>
-          <p:nvPr/>
-        </p:nvSpPr>
-        <p:spPr>
-          <a:xfrm>
-            <a:off x="8092440" y="2286000"/>
-            <a:ext cx="3383280" cy="3657600"/>
-          </a:xfrm>
-          <a:prstGeom prst="rect">
-            <a:avLst/>
-          </a:prstGeom>
-          <a:noFill/>
-          <a:ln/>
-        </p:spPr>
-        <p:txBody>
-          <a:bodyPr wrap="square" lIns="0" tIns="0" rIns="0" bIns="0" rtlCol="0" anchor="t"/>
-          <a:lstStyle/>
-          <a:p>
-            <a:pPr marL="342900" indent="-342900">
-              <a:spcAft>
-                <a:spcPts val="800"/>
-              </a:spcAft>
-              <a:buSzPct val="100000"/>
-              <a:buChar char="•"/>
-            </a:pPr>
-            <a:r>
-              <a:rPr lang="en-US" sz="1200" dirty="0">
+              <a:t>1</a:t>
+            </a:r>
+            <a:endParaRPr lang="en-US" sz="2000" dirty="0"/>
+          </a:p>
+        </p:txBody>
+      </p:sp>
+      <p:sp>
+        <p:nvSpPr>
+          <p:cNvPr id="7" name="Text 5"/>
+          <p:cNvSpPr/>
+          <p:nvPr/>
+        </p:nvSpPr>
+        <p:spPr>
+          <a:xfrm>
+            <a:off x="1508760" y="1746504"/>
+            <a:ext cx="2011680" cy="731520"/>
+          </a:xfrm>
+          <a:prstGeom prst="rect">
+            <a:avLst/>
+          </a:prstGeom>
+          <a:noFill/>
+          <a:ln/>
+        </p:spPr>
+        <p:txBody>
+          <a:bodyPr wrap="square" lIns="0" tIns="0" rIns="0" bIns="0" rtlCol="0" anchor="ctr"/>
+          <a:lstStyle/>
+          <a:p>
+            <a:pPr indent="0" marL="0">
+              <a:buNone/>
+            </a:pPr>
+            <a:r>
+              <a:rPr lang="en-US" sz="1700" b="1" dirty="0">
+                <a:solidFill>
+                  <a:srgbClr val="BE0000"/>
+                </a:solidFill>
+                <a:latin typeface="Cambria" pitchFamily="34" charset="0"/>
+                <a:ea typeface="Cambria" pitchFamily="34" charset="-122"/>
+                <a:cs typeface="Cambria" pitchFamily="34" charset="-120"/>
+              </a:rPr>
+              <a:t>Input</a:t>
+            </a:r>
+            <a:endParaRPr lang="en-US" sz="1700" dirty="0"/>
+          </a:p>
+        </p:txBody>
+      </p:sp>
+      <p:sp>
+        <p:nvSpPr>
+          <p:cNvPr id="8" name="Text 6"/>
+          <p:cNvSpPr/>
+          <p:nvPr/>
+        </p:nvSpPr>
+        <p:spPr>
+          <a:xfrm>
+            <a:off x="3611880" y="1655064"/>
+            <a:ext cx="7845552" cy="914400"/>
+          </a:xfrm>
+          <a:prstGeom prst="rect">
+            <a:avLst/>
+          </a:prstGeom>
+          <a:noFill/>
+          <a:ln/>
+        </p:spPr>
+        <p:txBody>
+          <a:bodyPr wrap="square" lIns="0" tIns="0" rIns="0" bIns="0" rtlCol="0" anchor="ctr"/>
+          <a:lstStyle/>
+          <a:p>
+            <a:pPr indent="0" marL="0">
+              <a:buNone/>
+            </a:pPr>
+            <a:r>
+              <a:rPr lang="en-US" sz="1250" dirty="0">
                 <a:solidFill>
                   <a:srgbClr val="2A1618"/>
                 </a:solidFill>
@@ -5245,20 +5324,170 @@
                 <a:ea typeface="Calibri" pitchFamily="34" charset="-122"/>
                 <a:cs typeface="Calibri" pitchFamily="34" charset="-120"/>
               </a:rPr>
-              <a:t>1 depth plane (82 positions): 33 mm, about chance. The conv net cannot train.</a:t>
-            </a:r>
-            <a:endParaRPr lang="en-US" sz="1200" dirty="0"/>
-          </a:p>
-          <a:p>
-            <a:pPr marL="342900" indent="-342900">
-              <a:spcAft>
-                <a:spcPts val="800"/>
-              </a:spcAft>
-              <a:buSzPct val="100000"/>
-              <a:buChar char="•"/>
-            </a:pPr>
-            <a:r>
-              <a:rPr lang="en-US" sz="1200" dirty="0">
+              <a:t>dS as a 32 x 256 image (16 S-params x [mag, phase], 256 frequencies). Per-sample z-score normalization.</a:t>
+            </a:r>
+            <a:endParaRPr lang="en-US" sz="1250" dirty="0"/>
+          </a:p>
+        </p:txBody>
+      </p:sp>
+      <p:sp>
+        <p:nvSpPr>
+          <p:cNvPr id="9" name="Shape 7"/>
+          <p:cNvSpPr/>
+          <p:nvPr/>
+        </p:nvSpPr>
+        <p:spPr>
+          <a:xfrm>
+            <a:off x="548640" y="2770632"/>
+            <a:ext cx="11091672" cy="1024128"/>
+          </a:xfrm>
+          <a:prstGeom prst="roundRect">
+            <a:avLst>
+              <a:gd name="adj" fmla="val 8036"/>
+            </a:avLst>
+          </a:prstGeom>
+          <a:solidFill>
+            <a:srgbClr val="FBF4F2"/>
+          </a:solidFill>
+          <a:ln w="12700">
+            <a:solidFill>
+              <a:srgbClr val="E7D6D1"/>
+            </a:solidFill>
+            <a:prstDash val="solid"/>
+          </a:ln>
+          <a:effectLst>
+            <a:outerShdw sx="100000" sy="100000" kx="0" ky="0" algn="bl" rotWithShape="0" blurRad="88900" dist="38100" dir="5400000">
+              <a:srgbClr val="7A5C5E">
+                <a:alpha val="18000"/>
+              </a:srgbClr>
+            </a:outerShdw>
+          </a:effectLst>
+        </p:spPr>
+      </p:sp>
+      <p:sp>
+        <p:nvSpPr>
+          <p:cNvPr id="10" name="Shape 8"/>
+          <p:cNvSpPr/>
+          <p:nvPr/>
+        </p:nvSpPr>
+        <p:spPr>
+          <a:xfrm>
+            <a:off x="777240" y="3026664"/>
+            <a:ext cx="512064" cy="512064"/>
+          </a:xfrm>
+          <a:prstGeom prst="ellipse">
+            <a:avLst/>
+          </a:prstGeom>
+          <a:solidFill>
+            <a:srgbClr val="BE0000"/>
+          </a:solidFill>
+          <a:ln/>
+        </p:spPr>
+      </p:sp>
+      <p:sp>
+        <p:nvSpPr>
+          <p:cNvPr id="11" name="Text 9"/>
+          <p:cNvSpPr/>
+          <p:nvPr/>
+        </p:nvSpPr>
+        <p:spPr>
+          <a:xfrm>
+            <a:off x="777240" y="3026664"/>
+            <a:ext cx="512064" cy="512064"/>
+          </a:xfrm>
+          <a:prstGeom prst="rect">
+            <a:avLst/>
+          </a:prstGeom>
+          <a:noFill/>
+          <a:ln/>
+        </p:spPr>
+        <p:txBody>
+          <a:bodyPr wrap="square" lIns="0" tIns="0" rIns="0" bIns="0" rtlCol="0" anchor="ctr"/>
+          <a:lstStyle/>
+          <a:p>
+            <a:pPr algn="ctr" indent="0" marL="0">
+              <a:buNone/>
+            </a:pPr>
+            <a:r>
+              <a:rPr lang="en-US" sz="2000" b="1" dirty="0">
+                <a:solidFill>
+                  <a:srgbClr val="FFFFFF"/>
+                </a:solidFill>
+                <a:latin typeface="Cambria" pitchFamily="34" charset="0"/>
+                <a:ea typeface="Cambria" pitchFamily="34" charset="-122"/>
+                <a:cs typeface="Cambria" pitchFamily="34" charset="-120"/>
+              </a:rPr>
+              <a:t>2</a:t>
+            </a:r>
+            <a:endParaRPr lang="en-US" sz="2000" dirty="0"/>
+          </a:p>
+        </p:txBody>
+      </p:sp>
+      <p:sp>
+        <p:nvSpPr>
+          <p:cNvPr id="12" name="Text 10"/>
+          <p:cNvSpPr/>
+          <p:nvPr/>
+        </p:nvSpPr>
+        <p:spPr>
+          <a:xfrm>
+            <a:off x="1508760" y="2916936"/>
+            <a:ext cx="2011680" cy="731520"/>
+          </a:xfrm>
+          <a:prstGeom prst="rect">
+            <a:avLst/>
+          </a:prstGeom>
+          <a:noFill/>
+          <a:ln/>
+        </p:spPr>
+        <p:txBody>
+          <a:bodyPr wrap="square" lIns="0" tIns="0" rIns="0" bIns="0" rtlCol="0" anchor="ctr"/>
+          <a:lstStyle/>
+          <a:p>
+            <a:pPr indent="0" marL="0">
+              <a:buNone/>
+            </a:pPr>
+            <a:r>
+              <a:rPr lang="en-US" sz="1700" b="1" dirty="0">
+                <a:solidFill>
+                  <a:srgbClr val="BE0000"/>
+                </a:solidFill>
+                <a:latin typeface="Cambria" pitchFamily="34" charset="0"/>
+                <a:ea typeface="Cambria" pitchFamily="34" charset="-122"/>
+                <a:cs typeface="Cambria" pitchFamily="34" charset="-120"/>
+              </a:rPr>
+              <a:t>Trunk</a:t>
+            </a:r>
+            <a:endParaRPr lang="en-US" sz="1700" dirty="0"/>
+          </a:p>
+        </p:txBody>
+      </p:sp>
+      <p:sp>
+        <p:nvSpPr>
+          <p:cNvPr id="13" name="Text 11"/>
+          <p:cNvSpPr/>
+          <p:nvPr/>
+        </p:nvSpPr>
+        <p:spPr>
+          <a:xfrm>
+            <a:off x="3611880" y="2825496"/>
+            <a:ext cx="7845552" cy="914400"/>
+          </a:xfrm>
+          <a:prstGeom prst="rect">
+            <a:avLst/>
+          </a:prstGeom>
+          <a:noFill/>
+          <a:ln/>
+        </p:spPr>
+        <p:txBody>
+          <a:bodyPr wrap="square" lIns="0" tIns="0" rIns="0" bIns="0" rtlCol="0" anchor="ctr"/>
+          <a:lstStyle/>
+          <a:p>
+            <a:pPr indent="0" marL="0">
+              <a:buNone/>
+            </a:pPr>
+            <a:r>
+              <a:rPr lang="en-US" sz="1250" dirty="0">
                 <a:solidFill>
                   <a:srgbClr val="2A1618"/>
                 </a:solidFill>
@@ -5266,20 +5495,170 @@
                 <a:ea typeface="Calibri" pitchFamily="34" charset="-122"/>
                 <a:cs typeface="Calibri" pitchFamily="34" charset="-120"/>
               </a:rPr>
-              <a:t>3 planes (245): 11 mm. 5 planes (410): 4.8 mm.</a:t>
-            </a:r>
-            <a:endParaRPr lang="en-US" sz="1200" dirty="0"/>
-          </a:p>
-          <a:p>
-            <a:pPr marL="342900" indent="-342900">
-              <a:spcAft>
-                <a:spcPts val="800"/>
-              </a:spcAft>
-              <a:buSzPct val="100000"/>
-              <a:buChar char="•"/>
-            </a:pPr>
-            <a:r>
-              <a:rPr lang="en-US" sz="1200" dirty="0">
+              <a:t>2 conv blocks (32 filters each) plus pooling and dropout, identical to the measured (x,y) CNN.</a:t>
+            </a:r>
+            <a:endParaRPr lang="en-US" sz="1250" dirty="0"/>
+          </a:p>
+        </p:txBody>
+      </p:sp>
+      <p:sp>
+        <p:nvSpPr>
+          <p:cNvPr id="14" name="Shape 12"/>
+          <p:cNvSpPr/>
+          <p:nvPr/>
+        </p:nvSpPr>
+        <p:spPr>
+          <a:xfrm>
+            <a:off x="548640" y="3941064"/>
+            <a:ext cx="11091672" cy="1024128"/>
+          </a:xfrm>
+          <a:prstGeom prst="roundRect">
+            <a:avLst>
+              <a:gd name="adj" fmla="val 8036"/>
+            </a:avLst>
+          </a:prstGeom>
+          <a:solidFill>
+            <a:srgbClr val="FBF4F2"/>
+          </a:solidFill>
+          <a:ln w="12700">
+            <a:solidFill>
+              <a:srgbClr val="E7D6D1"/>
+            </a:solidFill>
+            <a:prstDash val="solid"/>
+          </a:ln>
+          <a:effectLst>
+            <a:outerShdw sx="100000" sy="100000" kx="0" ky="0" algn="bl" rotWithShape="0" blurRad="88900" dist="38100" dir="5400000">
+              <a:srgbClr val="7A5C5E">
+                <a:alpha val="18000"/>
+              </a:srgbClr>
+            </a:outerShdw>
+          </a:effectLst>
+        </p:spPr>
+      </p:sp>
+      <p:sp>
+        <p:nvSpPr>
+          <p:cNvPr id="15" name="Shape 13"/>
+          <p:cNvSpPr/>
+          <p:nvPr/>
+        </p:nvSpPr>
+        <p:spPr>
+          <a:xfrm>
+            <a:off x="777240" y="4197096"/>
+            <a:ext cx="512064" cy="512064"/>
+          </a:xfrm>
+          <a:prstGeom prst="ellipse">
+            <a:avLst/>
+          </a:prstGeom>
+          <a:solidFill>
+            <a:srgbClr val="BE0000"/>
+          </a:solidFill>
+          <a:ln/>
+        </p:spPr>
+      </p:sp>
+      <p:sp>
+        <p:nvSpPr>
+          <p:cNvPr id="16" name="Text 14"/>
+          <p:cNvSpPr/>
+          <p:nvPr/>
+        </p:nvSpPr>
+        <p:spPr>
+          <a:xfrm>
+            <a:off x="777240" y="4197096"/>
+            <a:ext cx="512064" cy="512064"/>
+          </a:xfrm>
+          <a:prstGeom prst="rect">
+            <a:avLst/>
+          </a:prstGeom>
+          <a:noFill/>
+          <a:ln/>
+        </p:spPr>
+        <p:txBody>
+          <a:bodyPr wrap="square" lIns="0" tIns="0" rIns="0" bIns="0" rtlCol="0" anchor="ctr"/>
+          <a:lstStyle/>
+          <a:p>
+            <a:pPr algn="ctr" indent="0" marL="0">
+              <a:buNone/>
+            </a:pPr>
+            <a:r>
+              <a:rPr lang="en-US" sz="2000" b="1" dirty="0">
+                <a:solidFill>
+                  <a:srgbClr val="FFFFFF"/>
+                </a:solidFill>
+                <a:latin typeface="Cambria" pitchFamily="34" charset="0"/>
+                <a:ea typeface="Cambria" pitchFamily="34" charset="-122"/>
+                <a:cs typeface="Cambria" pitchFamily="34" charset="-120"/>
+              </a:rPr>
+              <a:t>3</a:t>
+            </a:r>
+            <a:endParaRPr lang="en-US" sz="2000" dirty="0"/>
+          </a:p>
+        </p:txBody>
+      </p:sp>
+      <p:sp>
+        <p:nvSpPr>
+          <p:cNvPr id="17" name="Text 15"/>
+          <p:cNvSpPr/>
+          <p:nvPr/>
+        </p:nvSpPr>
+        <p:spPr>
+          <a:xfrm>
+            <a:off x="1508760" y="4087368"/>
+            <a:ext cx="2011680" cy="731520"/>
+          </a:xfrm>
+          <a:prstGeom prst="rect">
+            <a:avLst/>
+          </a:prstGeom>
+          <a:noFill/>
+          <a:ln/>
+        </p:spPr>
+        <p:txBody>
+          <a:bodyPr wrap="square" lIns="0" tIns="0" rIns="0" bIns="0" rtlCol="0" anchor="ctr"/>
+          <a:lstStyle/>
+          <a:p>
+            <a:pPr indent="0" marL="0">
+              <a:buNone/>
+            </a:pPr>
+            <a:r>
+              <a:rPr lang="en-US" sz="1700" b="1" dirty="0">
+                <a:solidFill>
+                  <a:srgbClr val="BE0000"/>
+                </a:solidFill>
+                <a:latin typeface="Cambria" pitchFamily="34" charset="0"/>
+                <a:ea typeface="Cambria" pitchFamily="34" charset="-122"/>
+                <a:cs typeface="Cambria" pitchFamily="34" charset="-120"/>
+              </a:rPr>
+              <a:t>Head</a:t>
+            </a:r>
+            <a:endParaRPr lang="en-US" sz="1700" dirty="0"/>
+          </a:p>
+        </p:txBody>
+      </p:sp>
+      <p:sp>
+        <p:nvSpPr>
+          <p:cNvPr id="18" name="Text 16"/>
+          <p:cNvSpPr/>
+          <p:nvPr/>
+        </p:nvSpPr>
+        <p:spPr>
+          <a:xfrm>
+            <a:off x="3611880" y="3995928"/>
+            <a:ext cx="7845552" cy="914400"/>
+          </a:xfrm>
+          <a:prstGeom prst="rect">
+            <a:avLst/>
+          </a:prstGeom>
+          <a:noFill/>
+          <a:ln/>
+        </p:spPr>
+        <p:txBody>
+          <a:bodyPr wrap="square" lIns="0" tIns="0" rIns="0" bIns="0" rtlCol="0" anchor="ctr"/>
+          <a:lstStyle/>
+          <a:p>
+            <a:pPr indent="0" marL="0">
+              <a:buNone/>
+            </a:pPr>
+            <a:r>
+              <a:rPr lang="en-US" sz="1250" dirty="0">
                 <a:solidFill>
                   <a:srgbClr val="2A1618"/>
                 </a:solidFill>
@@ -5287,20 +5666,170 @@
                 <a:ea typeface="Calibri" pitchFamily="34" charset="-122"/>
                 <a:cs typeface="Calibri" pitchFamily="34" charset="-120"/>
               </a:rPr>
-              <a:t>Plateau ~3.8 mm from 7 planes (about 570) on.</a:t>
-            </a:r>
-            <a:endParaRPr lang="en-US" sz="1200" dirty="0"/>
-          </a:p>
-          <a:p>
-            <a:pPr marL="342900" indent="-342900">
-              <a:spcAft>
-                <a:spcPts val="800"/>
-              </a:spcAft>
-              <a:buSzPct val="100000"/>
-              <a:buChar char="•"/>
-            </a:pPr>
-            <a:r>
-              <a:rPr lang="en-US" sz="1200" dirty="0">
+              <a:t>fc(3) plus regression to (x, y, z) in mm. Trained with an L2 coordinate loss, 60 epochs.</a:t>
+            </a:r>
+            <a:endParaRPr lang="en-US" sz="1250" dirty="0"/>
+          </a:p>
+        </p:txBody>
+      </p:sp>
+      <p:sp>
+        <p:nvSpPr>
+          <p:cNvPr id="19" name="Shape 17"/>
+          <p:cNvSpPr/>
+          <p:nvPr/>
+        </p:nvSpPr>
+        <p:spPr>
+          <a:xfrm>
+            <a:off x="548640" y="5111496"/>
+            <a:ext cx="11091672" cy="1024128"/>
+          </a:xfrm>
+          <a:prstGeom prst="roundRect">
+            <a:avLst>
+              <a:gd name="adj" fmla="val 8036"/>
+            </a:avLst>
+          </a:prstGeom>
+          <a:solidFill>
+            <a:srgbClr val="FBF4F2"/>
+          </a:solidFill>
+          <a:ln w="12700">
+            <a:solidFill>
+              <a:srgbClr val="E7D6D1"/>
+            </a:solidFill>
+            <a:prstDash val="solid"/>
+          </a:ln>
+          <a:effectLst>
+            <a:outerShdw sx="100000" sy="100000" kx="0" ky="0" algn="bl" rotWithShape="0" blurRad="88900" dist="38100" dir="5400000">
+              <a:srgbClr val="7A5C5E">
+                <a:alpha val="18000"/>
+              </a:srgbClr>
+            </a:outerShdw>
+          </a:effectLst>
+        </p:spPr>
+      </p:sp>
+      <p:sp>
+        <p:nvSpPr>
+          <p:cNvPr id="20" name="Shape 18"/>
+          <p:cNvSpPr/>
+          <p:nvPr/>
+        </p:nvSpPr>
+        <p:spPr>
+          <a:xfrm>
+            <a:off x="777240" y="5367528"/>
+            <a:ext cx="512064" cy="512064"/>
+          </a:xfrm>
+          <a:prstGeom prst="ellipse">
+            <a:avLst/>
+          </a:prstGeom>
+          <a:solidFill>
+            <a:srgbClr val="BE0000"/>
+          </a:solidFill>
+          <a:ln/>
+        </p:spPr>
+      </p:sp>
+      <p:sp>
+        <p:nvSpPr>
+          <p:cNvPr id="21" name="Text 19"/>
+          <p:cNvSpPr/>
+          <p:nvPr/>
+        </p:nvSpPr>
+        <p:spPr>
+          <a:xfrm>
+            <a:off x="777240" y="5367528"/>
+            <a:ext cx="512064" cy="512064"/>
+          </a:xfrm>
+          <a:prstGeom prst="rect">
+            <a:avLst/>
+          </a:prstGeom>
+          <a:noFill/>
+          <a:ln/>
+        </p:spPr>
+        <p:txBody>
+          <a:bodyPr wrap="square" lIns="0" tIns="0" rIns="0" bIns="0" rtlCol="0" anchor="ctr"/>
+          <a:lstStyle/>
+          <a:p>
+            <a:pPr algn="ctr" indent="0" marL="0">
+              <a:buNone/>
+            </a:pPr>
+            <a:r>
+              <a:rPr lang="en-US" sz="2000" b="1" dirty="0">
+                <a:solidFill>
+                  <a:srgbClr val="FFFFFF"/>
+                </a:solidFill>
+                <a:latin typeface="Cambria" pitchFamily="34" charset="0"/>
+                <a:ea typeface="Cambria" pitchFamily="34" charset="-122"/>
+                <a:cs typeface="Cambria" pitchFamily="34" charset="-120"/>
+              </a:rPr>
+              <a:t>4</a:t>
+            </a:r>
+            <a:endParaRPr lang="en-US" sz="2000" dirty="0"/>
+          </a:p>
+        </p:txBody>
+      </p:sp>
+      <p:sp>
+        <p:nvSpPr>
+          <p:cNvPr id="22" name="Text 20"/>
+          <p:cNvSpPr/>
+          <p:nvPr/>
+        </p:nvSpPr>
+        <p:spPr>
+          <a:xfrm>
+            <a:off x="1508760" y="5257800"/>
+            <a:ext cx="2011680" cy="731520"/>
+          </a:xfrm>
+          <a:prstGeom prst="rect">
+            <a:avLst/>
+          </a:prstGeom>
+          <a:noFill/>
+          <a:ln/>
+        </p:spPr>
+        <p:txBody>
+          <a:bodyPr wrap="square" lIns="0" tIns="0" rIns="0" bIns="0" rtlCol="0" anchor="ctr"/>
+          <a:lstStyle/>
+          <a:p>
+            <a:pPr indent="0" marL="0">
+              <a:buNone/>
+            </a:pPr>
+            <a:r>
+              <a:rPr lang="en-US" sz="1700" b="1" dirty="0">
+                <a:solidFill>
+                  <a:srgbClr val="BE0000"/>
+                </a:solidFill>
+                <a:latin typeface="Cambria" pitchFamily="34" charset="0"/>
+                <a:ea typeface="Cambria" pitchFamily="34" charset="-122"/>
+                <a:cs typeface="Cambria" pitchFamily="34" charset="-120"/>
+              </a:rPr>
+              <a:t>Evaluation</a:t>
+            </a:r>
+            <a:endParaRPr lang="en-US" sz="1700" dirty="0"/>
+          </a:p>
+        </p:txBody>
+      </p:sp>
+      <p:sp>
+        <p:nvSpPr>
+          <p:cNvPr id="23" name="Text 21"/>
+          <p:cNvSpPr/>
+          <p:nvPr/>
+        </p:nvSpPr>
+        <p:spPr>
+          <a:xfrm>
+            <a:off x="3611880" y="5166360"/>
+            <a:ext cx="7845552" cy="914400"/>
+          </a:xfrm>
+          <a:prstGeom prst="rect">
+            <a:avLst/>
+          </a:prstGeom>
+          <a:noFill/>
+          <a:ln/>
+        </p:spPr>
+        <p:txBody>
+          <a:bodyPr wrap="square" lIns="0" tIns="0" rIns="0" bIns="0" rtlCol="0" anchor="ctr"/>
+          <a:lstStyle/>
+          <a:p>
+            <a:pPr indent="0" marL="0">
+              <a:buNone/>
+            </a:pPr>
+            <a:r>
+              <a:rPr lang="en-US" sz="1250" dirty="0">
                 <a:solidFill>
                   <a:srgbClr val="2A1618"/>
                 </a:solidFill>
@@ -5308,30 +5837,9 @@
                 <a:ea typeface="Calibri" pitchFamily="34" charset="-122"/>
                 <a:cs typeface="Calibri" pitchFamily="34" charset="-120"/>
               </a:rPr>
-              <a:t>So it needs ~400 to 500 DISTINCT positions to localize; below ~250 it is poor.</a:t>
-            </a:r>
-            <a:endParaRPr lang="en-US" sz="1200" dirty="0"/>
-          </a:p>
-          <a:p>
-            <a:pPr marL="342900" indent="-342900">
-              <a:spcAft>
-                <a:spcPts val="800"/>
-              </a:spcAft>
-              <a:buSzPct val="100000"/>
-              <a:buChar char="•"/>
-            </a:pPr>
-            <a:r>
-              <a:rPr lang="en-US" sz="1200" dirty="0">
-                <a:solidFill>
-                  <a:srgbClr val="2A1618"/>
-                </a:solidFill>
-                <a:latin typeface="Calibri" pitchFamily="34" charset="0"/>
-                <a:ea typeface="Calibri" pitchFamily="34" charset="-122"/>
-                <a:cs typeface="Calibri" pitchFamily="34" charset="-120"/>
-              </a:rPr>
-              <a:t>Distinct positions matter, not raw sample count (see Part 3).</a:t>
-            </a:r>
-            <a:endParaRPr lang="en-US" sz="1200" dirty="0"/>
+              <a:t>8-fold hold-out by POSITION (every position predicted once, out-of-fold). Lateral = sqrt(dx^2+dy^2); depth = |dz|, reported separately so one axis cannot hide the other.</a:t>
+            </a:r>
+            <a:endParaRPr lang="en-US" sz="1250" dirty="0"/>
           </a:p>
         </p:txBody>
       </p:sp>
@@ -5400,7 +5908,7 @@
                 <a:ea typeface="Cambria" pitchFamily="34" charset="-122"/>
                 <a:cs typeface="Cambria" pitchFamily="34" charset="-120"/>
               </a:rPr>
-              <a:t>3D localization result (8-fold)</a:t>
+              <a:t>How much data does the CNN need?</a:t>
             </a:r>
             <a:endParaRPr lang="en-US" sz="2900" dirty="0"/>
           </a:p>
@@ -5439,26 +5947,50 @@
                 <a:ea typeface="Calibri" pitchFamily="34" charset="-122"/>
                 <a:cs typeface="Calibri" pitchFamily="34" charset="-120"/>
               </a:rPr>
-              <a:t>Every position predicted from a model that never saw it, lateral and depth separately</a:t>
+              <a:t>Train on more depth planes (more distinct positions) and watch the error fall</a:t>
             </a:r>
             <a:endParaRPr lang="en-US" sz="1400" dirty="0"/>
           </a:p>
         </p:txBody>
       </p:sp>
-      <p:sp>
-        <p:nvSpPr>
-          <p:cNvPr id="4" name="Shape 2"/>
-          <p:cNvSpPr/>
-          <p:nvPr/>
-        </p:nvSpPr>
-        <p:spPr>
-          <a:xfrm>
-            <a:off x="640080" y="1737360"/>
-            <a:ext cx="2514600" cy="1417320"/>
+      <p:pic>
+        <p:nvPicPr>
+          <p:cNvPr id="4" name="Image 0" descr="sim_depth_learning_curve.png">    </p:cNvPr>
+          <p:cNvPicPr>
+            <a:picLocks noChangeAspect="1"/>
+          </p:cNvPicPr>
+          <p:nvPr/>
+        </p:nvPicPr>
+        <p:blipFill>
+          <a:blip r:embed="rId1"/>
+          <a:stretch>
+            <a:fillRect/>
+          </a:stretch>
+        </p:blipFill>
+        <p:spPr>
+          <a:xfrm>
+            <a:off x="457200" y="1600200"/>
+            <a:ext cx="7223760" cy="4498848"/>
+          </a:xfrm>
+          <a:prstGeom prst="rect">
+            <a:avLst/>
+          </a:prstGeom>
+        </p:spPr>
+      </p:pic>
+      <p:sp>
+        <p:nvSpPr>
+          <p:cNvPr id="5" name="Shape 2"/>
+          <p:cNvSpPr/>
+          <p:nvPr/>
+        </p:nvSpPr>
+        <p:spPr>
+          <a:xfrm>
+            <a:off x="7863840" y="1600200"/>
+            <a:ext cx="3794760" cy="4498848"/>
           </a:xfrm>
           <a:prstGeom prst="roundRect">
             <a:avLst>
-              <a:gd name="adj" fmla="val 5806"/>
+              <a:gd name="adj" fmla="val 2169"/>
             </a:avLst>
           </a:prstGeom>
           <a:solidFill>
@@ -5481,30 +6013,30 @@
       </p:sp>
       <p:sp>
         <p:nvSpPr>
-          <p:cNvPr id="5" name="Text 3"/>
-          <p:cNvSpPr/>
-          <p:nvPr/>
-        </p:nvSpPr>
-        <p:spPr>
-          <a:xfrm>
-            <a:off x="640080" y="1901952"/>
-            <a:ext cx="2514600" cy="640080"/>
-          </a:xfrm>
-          <a:prstGeom prst="rect">
-            <a:avLst/>
-          </a:prstGeom>
-          <a:noFill/>
-          <a:ln/>
-        </p:spPr>
-        <p:txBody>
-          <a:bodyPr wrap="square" lIns="0" tIns="0" rIns="0" bIns="0" rtlCol="0" anchor="ctr"/>
-          <a:lstStyle/>
-          <a:p>
-            <a:pPr algn="ctr" indent="0" marL="0">
-              <a:buNone/>
-            </a:pPr>
-            <a:r>
-              <a:rPr lang="en-US" sz="3000" b="1" dirty="0">
+          <p:cNvPr id="6" name="Text 3"/>
+          <p:cNvSpPr/>
+          <p:nvPr/>
+        </p:nvSpPr>
+        <p:spPr>
+          <a:xfrm>
+            <a:off x="8092440" y="1783080"/>
+            <a:ext cx="3383280" cy="365760"/>
+          </a:xfrm>
+          <a:prstGeom prst="rect">
+            <a:avLst/>
+          </a:prstGeom>
+          <a:noFill/>
+          <a:ln/>
+        </p:spPr>
+        <p:txBody>
+          <a:bodyPr wrap="square" lIns="0" tIns="0" rIns="0" bIns="0" rtlCol="0" anchor="ctr"/>
+          <a:lstStyle/>
+          <a:p>
+            <a:pPr indent="0" marL="0">
+              <a:buNone/>
+            </a:pPr>
+            <a:r>
+              <a:rPr lang="en-US" sz="1600" b="1" dirty="0">
                 <a:solidFill>
                   <a:srgbClr val="BE0000"/>
                 </a:solidFill>
@@ -5512,538 +6044,22 @@
                 <a:ea typeface="Cambria" pitchFamily="34" charset="-122"/>
                 <a:cs typeface="Cambria" pitchFamily="34" charset="-120"/>
               </a:rPr>
-              <a:t>3.9 mm</a:t>
-            </a:r>
-            <a:endParaRPr lang="en-US" sz="3000" dirty="0"/>
-          </a:p>
-        </p:txBody>
-      </p:sp>
-      <p:sp>
-        <p:nvSpPr>
-          <p:cNvPr id="6" name="Text 4"/>
-          <p:cNvSpPr/>
-          <p:nvPr/>
-        </p:nvSpPr>
-        <p:spPr>
-          <a:xfrm>
-            <a:off x="731520" y="2606040"/>
-            <a:ext cx="2331720" cy="457200"/>
-          </a:xfrm>
-          <a:prstGeom prst="rect">
-            <a:avLst/>
-          </a:prstGeom>
-          <a:noFill/>
-          <a:ln/>
-        </p:spPr>
-        <p:txBody>
-          <a:bodyPr wrap="square" lIns="0" tIns="0" rIns="0" bIns="0" rtlCol="0" anchor="ctr"/>
-          <a:lstStyle/>
-          <a:p>
-            <a:pPr algn="ctr" indent="0" marL="0">
-              <a:buNone/>
-            </a:pPr>
-            <a:r>
-              <a:rPr lang="en-US" sz="1250" dirty="0">
-                <a:solidFill>
-                  <a:srgbClr val="836A68"/>
-                </a:solidFill>
-                <a:latin typeface="Calibri" pitchFamily="34" charset="0"/>
-                <a:ea typeface="Calibri" pitchFamily="34" charset="-122"/>
-                <a:cs typeface="Calibri" pitchFamily="34" charset="-120"/>
-              </a:rPr>
-              <a:t>lateral (xy) median</a:t>
-            </a:r>
-            <a:endParaRPr lang="en-US" sz="1250" dirty="0"/>
-          </a:p>
-          <a:p>
-            <a:pPr algn="ctr" indent="0" marL="0">
-              <a:buNone/>
-            </a:pPr>
-            <a:r>
-              <a:rPr lang="en-US" sz="1250" dirty="0">
-                <a:solidFill>
-                  <a:srgbClr val="836A68"/>
-                </a:solidFill>
-                <a:latin typeface="Calibri" pitchFamily="34" charset="0"/>
-                <a:ea typeface="Calibri" pitchFamily="34" charset="-122"/>
-                <a:cs typeface="Calibri" pitchFamily="34" charset="-120"/>
-              </a:rPr>
-              <a:t>vs 36.5 mm chance</a:t>
-            </a:r>
-            <a:endParaRPr lang="en-US" sz="1250" dirty="0"/>
-          </a:p>
-        </p:txBody>
-      </p:sp>
-      <p:sp>
-        <p:nvSpPr>
-          <p:cNvPr id="7" name="Shape 5"/>
-          <p:cNvSpPr/>
-          <p:nvPr/>
-        </p:nvSpPr>
-        <p:spPr>
-          <a:xfrm>
-            <a:off x="3337560" y="1737360"/>
-            <a:ext cx="2514600" cy="1417320"/>
-          </a:xfrm>
-          <a:prstGeom prst="roundRect">
-            <a:avLst>
-              <a:gd name="adj" fmla="val 5806"/>
-            </a:avLst>
-          </a:prstGeom>
-          <a:solidFill>
-            <a:srgbClr val="FBF4F2"/>
-          </a:solidFill>
-          <a:ln w="12700">
-            <a:solidFill>
-              <a:srgbClr val="E7D6D1"/>
-            </a:solidFill>
-            <a:prstDash val="solid"/>
-          </a:ln>
-          <a:effectLst>
-            <a:outerShdw sx="100000" sy="100000" kx="0" ky="0" algn="bl" rotWithShape="0" blurRad="88900" dist="38100" dir="5400000">
-              <a:srgbClr val="7A5C5E">
-                <a:alpha val="18000"/>
-              </a:srgbClr>
-            </a:outerShdw>
-          </a:effectLst>
-        </p:spPr>
-      </p:sp>
-      <p:sp>
-        <p:nvSpPr>
-          <p:cNvPr id="8" name="Text 6"/>
-          <p:cNvSpPr/>
-          <p:nvPr/>
-        </p:nvSpPr>
-        <p:spPr>
-          <a:xfrm>
-            <a:off x="3337560" y="1901952"/>
-            <a:ext cx="2514600" cy="640080"/>
-          </a:xfrm>
-          <a:prstGeom prst="rect">
-            <a:avLst/>
-          </a:prstGeom>
-          <a:noFill/>
-          <a:ln/>
-        </p:spPr>
-        <p:txBody>
-          <a:bodyPr wrap="square" lIns="0" tIns="0" rIns="0" bIns="0" rtlCol="0" anchor="ctr"/>
-          <a:lstStyle/>
-          <a:p>
-            <a:pPr algn="ctr" indent="0" marL="0">
-              <a:buNone/>
-            </a:pPr>
-            <a:r>
-              <a:rPr lang="en-US" sz="3000" b="1" dirty="0">
-                <a:solidFill>
-                  <a:srgbClr val="C0564A"/>
-                </a:solidFill>
-                <a:latin typeface="Cambria" pitchFamily="34" charset="0"/>
-                <a:ea typeface="Cambria" pitchFamily="34" charset="-122"/>
-                <a:cs typeface="Cambria" pitchFamily="34" charset="-120"/>
-              </a:rPr>
-              <a:t>2.1 mm</a:t>
-            </a:r>
-            <a:endParaRPr lang="en-US" sz="3000" dirty="0"/>
-          </a:p>
-        </p:txBody>
-      </p:sp>
-      <p:sp>
-        <p:nvSpPr>
-          <p:cNvPr id="9" name="Text 7"/>
-          <p:cNvSpPr/>
-          <p:nvPr/>
-        </p:nvSpPr>
-        <p:spPr>
-          <a:xfrm>
-            <a:off x="3429000" y="2606040"/>
-            <a:ext cx="2331720" cy="457200"/>
-          </a:xfrm>
-          <a:prstGeom prst="rect">
-            <a:avLst/>
-          </a:prstGeom>
-          <a:noFill/>
-          <a:ln/>
-        </p:spPr>
-        <p:txBody>
-          <a:bodyPr wrap="square" lIns="0" tIns="0" rIns="0" bIns="0" rtlCol="0" anchor="ctr"/>
-          <a:lstStyle/>
-          <a:p>
-            <a:pPr algn="ctr" indent="0" marL="0">
-              <a:buNone/>
-            </a:pPr>
-            <a:r>
-              <a:rPr lang="en-US" sz="1250" dirty="0">
-                <a:solidFill>
-                  <a:srgbClr val="836A68"/>
-                </a:solidFill>
-                <a:latin typeface="Calibri" pitchFamily="34" charset="0"/>
-                <a:ea typeface="Calibri" pitchFamily="34" charset="-122"/>
-                <a:cs typeface="Calibri" pitchFamily="34" charset="-120"/>
-              </a:rPr>
-              <a:t>depth (z) median</a:t>
-            </a:r>
-            <a:endParaRPr lang="en-US" sz="1250" dirty="0"/>
-          </a:p>
-          <a:p>
-            <a:pPr algn="ctr" indent="0" marL="0">
-              <a:buNone/>
-            </a:pPr>
-            <a:r>
-              <a:rPr lang="en-US" sz="1250" dirty="0">
-                <a:solidFill>
-                  <a:srgbClr val="836A68"/>
-                </a:solidFill>
-                <a:latin typeface="Calibri" pitchFamily="34" charset="0"/>
-                <a:ea typeface="Calibri" pitchFamily="34" charset="-122"/>
-                <a:cs typeface="Calibri" pitchFamily="34" charset="-120"/>
-              </a:rPr>
-              <a:t>vs 16.3 mm chance</a:t>
-            </a:r>
-            <a:endParaRPr lang="en-US" sz="1250" dirty="0"/>
-          </a:p>
-        </p:txBody>
-      </p:sp>
-      <p:sp>
-        <p:nvSpPr>
-          <p:cNvPr id="10" name="Shape 8"/>
-          <p:cNvSpPr/>
-          <p:nvPr/>
-        </p:nvSpPr>
-        <p:spPr>
-          <a:xfrm>
-            <a:off x="6035040" y="1737360"/>
-            <a:ext cx="2514600" cy="1417320"/>
-          </a:xfrm>
-          <a:prstGeom prst="roundRect">
-            <a:avLst>
-              <a:gd name="adj" fmla="val 5806"/>
-            </a:avLst>
-          </a:prstGeom>
-          <a:solidFill>
-            <a:srgbClr val="FBF4F2"/>
-          </a:solidFill>
-          <a:ln w="12700">
-            <a:solidFill>
-              <a:srgbClr val="E7D6D1"/>
-            </a:solidFill>
-            <a:prstDash val="solid"/>
-          </a:ln>
-          <a:effectLst>
-            <a:outerShdw sx="100000" sy="100000" kx="0" ky="0" algn="bl" rotWithShape="0" blurRad="88900" dist="38100" dir="5400000">
-              <a:srgbClr val="7A5C5E">
-                <a:alpha val="18000"/>
-              </a:srgbClr>
-            </a:outerShdw>
-          </a:effectLst>
-        </p:spPr>
-      </p:sp>
-      <p:sp>
-        <p:nvSpPr>
-          <p:cNvPr id="11" name="Text 9"/>
-          <p:cNvSpPr/>
-          <p:nvPr/>
-        </p:nvSpPr>
-        <p:spPr>
-          <a:xfrm>
-            <a:off x="6035040" y="1901952"/>
-            <a:ext cx="2514600" cy="640080"/>
-          </a:xfrm>
-          <a:prstGeom prst="rect">
-            <a:avLst/>
-          </a:prstGeom>
-          <a:noFill/>
-          <a:ln/>
-        </p:spPr>
-        <p:txBody>
-          <a:bodyPr wrap="square" lIns="0" tIns="0" rIns="0" bIns="0" rtlCol="0" anchor="ctr"/>
-          <a:lstStyle/>
-          <a:p>
-            <a:pPr algn="ctr" indent="0" marL="0">
-              <a:buNone/>
-            </a:pPr>
-            <a:r>
-              <a:rPr lang="en-US" sz="3000" b="1" dirty="0">
-                <a:solidFill>
-                  <a:srgbClr val="8E1010"/>
-                </a:solidFill>
-                <a:latin typeface="Cambria" pitchFamily="34" charset="0"/>
-                <a:ea typeface="Cambria" pitchFamily="34" charset="-122"/>
-                <a:cs typeface="Cambria" pitchFamily="34" charset="-120"/>
-              </a:rPr>
-              <a:t>93 %</a:t>
-            </a:r>
-            <a:endParaRPr lang="en-US" sz="3000" dirty="0"/>
-          </a:p>
-        </p:txBody>
-      </p:sp>
-      <p:sp>
-        <p:nvSpPr>
-          <p:cNvPr id="12" name="Text 10"/>
-          <p:cNvSpPr/>
-          <p:nvPr/>
-        </p:nvSpPr>
-        <p:spPr>
-          <a:xfrm>
-            <a:off x="6126480" y="2606040"/>
-            <a:ext cx="2331720" cy="457200"/>
-          </a:xfrm>
-          <a:prstGeom prst="rect">
-            <a:avLst/>
-          </a:prstGeom>
-          <a:noFill/>
-          <a:ln/>
-        </p:spPr>
-        <p:txBody>
-          <a:bodyPr wrap="square" lIns="0" tIns="0" rIns="0" bIns="0" rtlCol="0" anchor="ctr"/>
-          <a:lstStyle/>
-          <a:p>
-            <a:pPr algn="ctr" indent="0" marL="0">
-              <a:buNone/>
-            </a:pPr>
-            <a:r>
-              <a:rPr lang="en-US" sz="1250" dirty="0">
-                <a:solidFill>
-                  <a:srgbClr val="836A68"/>
-                </a:solidFill>
-                <a:latin typeface="Calibri" pitchFamily="34" charset="0"/>
-                <a:ea typeface="Calibri" pitchFamily="34" charset="-122"/>
-                <a:cs typeface="Calibri" pitchFamily="34" charset="-120"/>
-              </a:rPr>
-              <a:t>of positions within</a:t>
-            </a:r>
-            <a:endParaRPr lang="en-US" sz="1250" dirty="0"/>
-          </a:p>
-          <a:p>
-            <a:pPr algn="ctr" indent="0" marL="0">
-              <a:buNone/>
-            </a:pPr>
-            <a:r>
-              <a:rPr lang="en-US" sz="1250" dirty="0">
-                <a:solidFill>
-                  <a:srgbClr val="836A68"/>
-                </a:solidFill>
-                <a:latin typeface="Calibri" pitchFamily="34" charset="0"/>
-                <a:ea typeface="Calibri" pitchFamily="34" charset="-122"/>
-                <a:cs typeface="Calibri" pitchFamily="34" charset="-120"/>
-              </a:rPr>
-              <a:t>10 mm laterally</a:t>
-            </a:r>
-            <a:endParaRPr lang="en-US" sz="1250" dirty="0"/>
-          </a:p>
-        </p:txBody>
-      </p:sp>
-      <p:sp>
-        <p:nvSpPr>
-          <p:cNvPr id="13" name="Shape 11"/>
-          <p:cNvSpPr/>
-          <p:nvPr/>
-        </p:nvSpPr>
-        <p:spPr>
-          <a:xfrm>
-            <a:off x="8732520" y="1737360"/>
-            <a:ext cx="2514600" cy="1417320"/>
-          </a:xfrm>
-          <a:prstGeom prst="roundRect">
-            <a:avLst>
-              <a:gd name="adj" fmla="val 5806"/>
-            </a:avLst>
-          </a:prstGeom>
-          <a:solidFill>
-            <a:srgbClr val="FBF4F2"/>
-          </a:solidFill>
-          <a:ln w="12700">
-            <a:solidFill>
-              <a:srgbClr val="E7D6D1"/>
-            </a:solidFill>
-            <a:prstDash val="solid"/>
-          </a:ln>
-          <a:effectLst>
-            <a:outerShdw sx="100000" sy="100000" kx="0" ky="0" algn="bl" rotWithShape="0" blurRad="88900" dist="38100" dir="5400000">
-              <a:srgbClr val="7A5C5E">
-                <a:alpha val="18000"/>
-              </a:srgbClr>
-            </a:outerShdw>
-          </a:effectLst>
-        </p:spPr>
-      </p:sp>
-      <p:sp>
-        <p:nvSpPr>
-          <p:cNvPr id="14" name="Text 12"/>
-          <p:cNvSpPr/>
-          <p:nvPr/>
-        </p:nvSpPr>
-        <p:spPr>
-          <a:xfrm>
-            <a:off x="8732520" y="1901952"/>
-            <a:ext cx="2514600" cy="640080"/>
-          </a:xfrm>
-          <a:prstGeom prst="rect">
-            <a:avLst/>
-          </a:prstGeom>
-          <a:noFill/>
-          <a:ln/>
-        </p:spPr>
-        <p:txBody>
-          <a:bodyPr wrap="square" lIns="0" tIns="0" rIns="0" bIns="0" rtlCol="0" anchor="ctr"/>
-          <a:lstStyle/>
-          <a:p>
-            <a:pPr algn="ctr" indent="0" marL="0">
-              <a:buNone/>
-            </a:pPr>
-            <a:r>
-              <a:rPr lang="en-US" sz="3000" b="1" dirty="0">
-                <a:solidFill>
-                  <a:srgbClr val="C8890B"/>
-                </a:solidFill>
-                <a:latin typeface="Cambria" pitchFamily="34" charset="0"/>
-                <a:ea typeface="Cambria" pitchFamily="34" charset="-122"/>
-                <a:cs typeface="Cambria" pitchFamily="34" charset="-120"/>
-              </a:rPr>
-              <a:t>3.6 / 2.1</a:t>
-            </a:r>
-            <a:endParaRPr lang="en-US" sz="3000" dirty="0"/>
-          </a:p>
-        </p:txBody>
-      </p:sp>
-      <p:sp>
-        <p:nvSpPr>
-          <p:cNvPr id="15" name="Text 13"/>
-          <p:cNvSpPr/>
-          <p:nvPr/>
-        </p:nvSpPr>
-        <p:spPr>
-          <a:xfrm>
-            <a:off x="8823960" y="2606040"/>
-            <a:ext cx="2331720" cy="457200"/>
-          </a:xfrm>
-          <a:prstGeom prst="rect">
-            <a:avLst/>
-          </a:prstGeom>
-          <a:noFill/>
-          <a:ln/>
-        </p:spPr>
-        <p:txBody>
-          <a:bodyPr wrap="square" lIns="0" tIns="0" rIns="0" bIns="0" rtlCol="0" anchor="ctr"/>
-          <a:lstStyle/>
-          <a:p>
-            <a:pPr algn="ctr" indent="0" marL="0">
-              <a:buNone/>
-            </a:pPr>
-            <a:r>
-              <a:rPr lang="en-US" sz="1250" dirty="0">
-                <a:solidFill>
-                  <a:srgbClr val="836A68"/>
-                </a:solidFill>
-                <a:latin typeface="Calibri" pitchFamily="34" charset="0"/>
-                <a:ea typeface="Calibri" pitchFamily="34" charset="-122"/>
-                <a:cs typeface="Calibri" pitchFamily="34" charset="-120"/>
-              </a:rPr>
-              <a:t>beet (dielectric)</a:t>
-            </a:r>
-            <a:endParaRPr lang="en-US" sz="1250" dirty="0"/>
-          </a:p>
-          <a:p>
-            <a:pPr algn="ctr" indent="0" marL="0">
-              <a:buNone/>
-            </a:pPr>
-            <a:r>
-              <a:rPr lang="en-US" sz="1250" dirty="0">
-                <a:solidFill>
-                  <a:srgbClr val="836A68"/>
-                </a:solidFill>
-                <a:latin typeface="Calibri" pitchFamily="34" charset="0"/>
-                <a:ea typeface="Calibri" pitchFamily="34" charset="-122"/>
-                <a:cs typeface="Calibri" pitchFamily="34" charset="-120"/>
-              </a:rPr>
-              <a:t>xy / z, same as metal</a:t>
-            </a:r>
-            <a:endParaRPr lang="en-US" sz="1250" dirty="0"/>
-          </a:p>
-        </p:txBody>
-      </p:sp>
-      <p:sp>
-        <p:nvSpPr>
-          <p:cNvPr id="16" name="Shape 14"/>
-          <p:cNvSpPr/>
-          <p:nvPr/>
-        </p:nvSpPr>
-        <p:spPr>
-          <a:xfrm>
-            <a:off x="640080" y="3429000"/>
-            <a:ext cx="10607040" cy="2697480"/>
-          </a:xfrm>
-          <a:prstGeom prst="roundRect">
-            <a:avLst>
-              <a:gd name="adj" fmla="val 3051"/>
-            </a:avLst>
-          </a:prstGeom>
-          <a:solidFill>
-            <a:srgbClr val="FBF4F2"/>
-          </a:solidFill>
-          <a:ln w="12700">
-            <a:solidFill>
-              <a:srgbClr val="E7D6D1"/>
-            </a:solidFill>
-            <a:prstDash val="solid"/>
-          </a:ln>
-          <a:effectLst>
-            <a:outerShdw sx="100000" sy="100000" kx="0" ky="0" algn="bl" rotWithShape="0" blurRad="88900" dist="38100" dir="5400000">
-              <a:srgbClr val="7A5C5E">
-                <a:alpha val="18000"/>
-              </a:srgbClr>
-            </a:outerShdw>
-          </a:effectLst>
-        </p:spPr>
-      </p:sp>
-      <p:sp>
-        <p:nvSpPr>
-          <p:cNvPr id="17" name="Text 15"/>
-          <p:cNvSpPr/>
-          <p:nvPr/>
-        </p:nvSpPr>
-        <p:spPr>
-          <a:xfrm>
-            <a:off x="914400" y="3611880"/>
-            <a:ext cx="9144000" cy="365760"/>
-          </a:xfrm>
-          <a:prstGeom prst="rect">
-            <a:avLst/>
-          </a:prstGeom>
-          <a:noFill/>
-          <a:ln/>
-        </p:spPr>
-        <p:txBody>
-          <a:bodyPr wrap="square" lIns="0" tIns="0" rIns="0" bIns="0" rtlCol="0" anchor="ctr"/>
-          <a:lstStyle/>
-          <a:p>
-            <a:pPr indent="0" marL="0">
-              <a:buNone/>
-            </a:pPr>
-            <a:r>
-              <a:rPr lang="en-US" sz="1700" b="1" dirty="0">
-                <a:solidFill>
-                  <a:srgbClr val="BE0000"/>
-                </a:solidFill>
-                <a:latin typeface="Cambria" pitchFamily="34" charset="0"/>
-                <a:ea typeface="Cambria" pitchFamily="34" charset="-122"/>
-                <a:cs typeface="Cambria" pitchFamily="34" charset="-120"/>
-              </a:rPr>
-              <a:t>What this establishes</a:t>
-            </a:r>
-            <a:endParaRPr lang="en-US" sz="1700" dirty="0"/>
-          </a:p>
-        </p:txBody>
-      </p:sp>
-      <p:sp>
-        <p:nvSpPr>
-          <p:cNvPr id="18" name="Text 16"/>
-          <p:cNvSpPr/>
-          <p:nvPr/>
-        </p:nvSpPr>
-        <p:spPr>
-          <a:xfrm>
-            <a:off x="914400" y="4114800"/>
-            <a:ext cx="10332720" cy="1920240"/>
+              <a:t>The threshold</a:t>
+            </a:r>
+            <a:endParaRPr lang="en-US" sz="1600" dirty="0"/>
+          </a:p>
+        </p:txBody>
+      </p:sp>
+      <p:sp>
+        <p:nvSpPr>
+          <p:cNvPr id="7" name="Text 4"/>
+          <p:cNvSpPr/>
+          <p:nvPr/>
+        </p:nvSpPr>
+        <p:spPr>
+          <a:xfrm>
+            <a:off x="8092440" y="2286000"/>
+            <a:ext cx="3383280" cy="3657600"/>
           </a:xfrm>
           <a:prstGeom prst="rect">
             <a:avLst/>
@@ -6063,7 +6079,7 @@
               <a:buChar char="•"/>
             </a:pPr>
             <a:r>
-              <a:rPr lang="en-US" sz="1350" dirty="0">
+              <a:rPr lang="en-US" sz="1200" dirty="0">
                 <a:solidFill>
                   <a:srgbClr val="2A1618"/>
                 </a:solidFill>
@@ -6071,9 +6087,9 @@
                 <a:ea typeface="Calibri" pitchFamily="34" charset="-122"/>
                 <a:cs typeface="Calibri" pitchFamily="34" charset="-120"/>
               </a:rPr>
-              <a:t>Depth is NOT the weak axis. With fine depth sampling and full-band frequency, z resolves to ~2 mm, better than the lateral k-NN floor.</a:t>
-            </a:r>
-            <a:endParaRPr lang="en-US" sz="1350" dirty="0"/>
+              <a:t>1 depth plane (82 positions): 33 mm, about chance. The conv net cannot train.</a:t>
+            </a:r>
+            <a:endParaRPr lang="en-US" sz="1200" dirty="0"/>
           </a:p>
           <a:p>
             <a:pPr marL="342900" indent="-342900">
@@ -6084,7 +6100,7 @@
               <a:buChar char="•"/>
             </a:pPr>
             <a:r>
-              <a:rPr lang="en-US" sz="1350" dirty="0">
+              <a:rPr lang="en-US" sz="1200" dirty="0">
                 <a:solidFill>
                   <a:srgbClr val="2A1618"/>
                 </a:solidFill>
@@ -6092,9 +6108,9 @@
                 <a:ea typeface="Calibri" pitchFamily="34" charset="-122"/>
                 <a:cs typeface="Calibri" pitchFamily="34" charset="-120"/>
               </a:rPr>
-              <a:t>A dielectric (beet) tumor localizes identically to metal (3.6 / 2.1 mm). In the noiseless sim the ~19 percent weaker contrast costs nothing.</a:t>
-            </a:r>
-            <a:endParaRPr lang="en-US" sz="1350" dirty="0"/>
+              <a:t>3 planes (245): 11 mm. 5 planes (410): 4.8 mm.</a:t>
+            </a:r>
+            <a:endParaRPr lang="en-US" sz="1200" dirty="0"/>
           </a:p>
           <a:p>
             <a:pPr marL="342900" indent="-342900">
@@ -6105,7 +6121,7 @@
               <a:buChar char="•"/>
             </a:pPr>
             <a:r>
-              <a:rPr lang="en-US" sz="1350" dirty="0">
+              <a:rPr lang="en-US" sz="1200" dirty="0">
                 <a:solidFill>
                   <a:srgbClr val="2A1618"/>
                 </a:solidFill>
@@ -6113,9 +6129,51 @@
                 <a:ea typeface="Calibri" pitchFamily="34" charset="-122"/>
                 <a:cs typeface="Calibri" pitchFamily="34" charset="-120"/>
               </a:rPr>
-              <a:t>Chance is 36 mm laterally / 16 mm in depth, so the model is about 10x better than guessing the centre on both axes.</a:t>
-            </a:r>
-            <a:endParaRPr lang="en-US" sz="1350" dirty="0"/>
+              <a:t>Plateau ~3.8 mm from 7 planes (about 570) on.</a:t>
+            </a:r>
+            <a:endParaRPr lang="en-US" sz="1200" dirty="0"/>
+          </a:p>
+          <a:p>
+            <a:pPr marL="342900" indent="-342900">
+              <a:spcAft>
+                <a:spcPts val="800"/>
+              </a:spcAft>
+              <a:buSzPct val="100000"/>
+              <a:buChar char="•"/>
+            </a:pPr>
+            <a:r>
+              <a:rPr lang="en-US" sz="1200" dirty="0">
+                <a:solidFill>
+                  <a:srgbClr val="2A1618"/>
+                </a:solidFill>
+                <a:latin typeface="Calibri" pitchFamily="34" charset="0"/>
+                <a:ea typeface="Calibri" pitchFamily="34" charset="-122"/>
+                <a:cs typeface="Calibri" pitchFamily="34" charset="-120"/>
+              </a:rPr>
+              <a:t>So it needs ~400 to 500 DISTINCT positions to localize; below ~250 it is poor.</a:t>
+            </a:r>
+            <a:endParaRPr lang="en-US" sz="1200" dirty="0"/>
+          </a:p>
+          <a:p>
+            <a:pPr marL="342900" indent="-342900">
+              <a:spcAft>
+                <a:spcPts val="800"/>
+              </a:spcAft>
+              <a:buSzPct val="100000"/>
+              <a:buChar char="•"/>
+            </a:pPr>
+            <a:r>
+              <a:rPr lang="en-US" sz="1200" dirty="0">
+                <a:solidFill>
+                  <a:srgbClr val="2A1618"/>
+                </a:solidFill>
+                <a:latin typeface="Calibri" pitchFamily="34" charset="0"/>
+                <a:ea typeface="Calibri" pitchFamily="34" charset="-122"/>
+                <a:cs typeface="Calibri" pitchFamily="34" charset="-120"/>
+              </a:rPr>
+              <a:t>Distinct positions matter, not raw sample count (see Part 3).</a:t>
+            </a:r>
+            <a:endParaRPr lang="en-US" sz="1200" dirty="0"/>
           </a:p>
         </p:txBody>
       </p:sp>
@@ -6184,7 +6242,7 @@
                 <a:ea typeface="Cambria" pitchFamily="34" charset="-122"/>
                 <a:cs typeface="Cambria" pitchFamily="34" charset="-120"/>
               </a:rPr>
-              <a:t>Predicting an unseen depth plane</a:t>
+              <a:t>3D localization result (8-fold)</a:t>
             </a:r>
             <a:endParaRPr lang="en-US" sz="2900" dirty="0"/>
           </a:p>
@@ -6223,50 +6281,26 @@
                 <a:ea typeface="Calibri" pitchFamily="34" charset="-122"/>
                 <a:cs typeface="Calibri" pitchFamily="34" charset="-120"/>
               </a:rPr>
-              <a:t>Leave one whole depth out; interior depths interpolate, only the outer edge depths fail</a:t>
+              <a:t>Every position predicted from a model that never saw it, lateral and depth separately</a:t>
             </a:r>
             <a:endParaRPr lang="en-US" sz="1400" dirty="0"/>
           </a:p>
         </p:txBody>
       </p:sp>
-      <p:pic>
-        <p:nvPicPr>
-          <p:cNvPr id="4" name="Image 0" descr="sim_depth_lopo.png">    </p:cNvPr>
-          <p:cNvPicPr>
-            <a:picLocks noChangeAspect="1"/>
-          </p:cNvPicPr>
-          <p:nvPr/>
-        </p:nvPicPr>
-        <p:blipFill>
-          <a:blip r:embed="rId1"/>
-          <a:stretch>
-            <a:fillRect/>
-          </a:stretch>
-        </p:blipFill>
-        <p:spPr>
-          <a:xfrm>
-            <a:off x="365760" y="1600200"/>
-            <a:ext cx="8595360" cy="3566160"/>
-          </a:xfrm>
-          <a:prstGeom prst="rect">
-            <a:avLst/>
-          </a:prstGeom>
-        </p:spPr>
-      </p:pic>
-      <p:sp>
-        <p:nvSpPr>
-          <p:cNvPr id="5" name="Shape 2"/>
-          <p:cNvSpPr/>
-          <p:nvPr/>
-        </p:nvSpPr>
-        <p:spPr>
-          <a:xfrm>
-            <a:off x="9098280" y="1600200"/>
-            <a:ext cx="2651760" cy="3566160"/>
+      <p:sp>
+        <p:nvSpPr>
+          <p:cNvPr id="4" name="Shape 2"/>
+          <p:cNvSpPr/>
+          <p:nvPr/>
+        </p:nvSpPr>
+        <p:spPr>
+          <a:xfrm>
+            <a:off x="640080" y="1737360"/>
+            <a:ext cx="2514600" cy="1417320"/>
           </a:xfrm>
           <a:prstGeom prst="roundRect">
             <a:avLst>
-              <a:gd name="adj" fmla="val 3103"/>
+              <a:gd name="adj" fmla="val 5806"/>
             </a:avLst>
           </a:prstGeom>
           <a:solidFill>
@@ -6289,30 +6323,30 @@
       </p:sp>
       <p:sp>
         <p:nvSpPr>
-          <p:cNvPr id="6" name="Text 3"/>
-          <p:cNvSpPr/>
-          <p:nvPr/>
-        </p:nvSpPr>
-        <p:spPr>
-          <a:xfrm>
-            <a:off x="9281160" y="1737360"/>
-            <a:ext cx="2377440" cy="548640"/>
-          </a:xfrm>
-          <a:prstGeom prst="rect">
-            <a:avLst/>
-          </a:prstGeom>
-          <a:noFill/>
-          <a:ln/>
-        </p:spPr>
-        <p:txBody>
-          <a:bodyPr wrap="square" lIns="0" tIns="0" rIns="0" bIns="0" rtlCol="0" anchor="ctr"/>
-          <a:lstStyle/>
-          <a:p>
-            <a:pPr indent="0" marL="0">
-              <a:buNone/>
-            </a:pPr>
-            <a:r>
-              <a:rPr lang="en-US" sz="1400" b="1" dirty="0">
+          <p:cNvPr id="5" name="Text 3"/>
+          <p:cNvSpPr/>
+          <p:nvPr/>
+        </p:nvSpPr>
+        <p:spPr>
+          <a:xfrm>
+            <a:off x="640080" y="1901952"/>
+            <a:ext cx="2514600" cy="640080"/>
+          </a:xfrm>
+          <a:prstGeom prst="rect">
+            <a:avLst/>
+          </a:prstGeom>
+          <a:noFill/>
+          <a:ln/>
+        </p:spPr>
+        <p:txBody>
+          <a:bodyPr wrap="square" lIns="0" tIns="0" rIns="0" bIns="0" rtlCol="0" anchor="ctr"/>
+          <a:lstStyle/>
+          <a:p>
+            <a:pPr algn="ctr" indent="0" marL="0">
+              <a:buNone/>
+            </a:pPr>
+            <a:r>
+              <a:rPr lang="en-US" sz="3000" b="1" dirty="0">
                 <a:solidFill>
                   <a:srgbClr val="BE0000"/>
                 </a:solidFill>
@@ -6320,22 +6354,538 @@
                 <a:ea typeface="Cambria" pitchFamily="34" charset="-122"/>
                 <a:cs typeface="Cambria" pitchFamily="34" charset="-120"/>
               </a:rPr>
-              <a:t>Range-bound, not model-bound</a:t>
-            </a:r>
-            <a:endParaRPr lang="en-US" sz="1400" dirty="0"/>
-          </a:p>
-        </p:txBody>
-      </p:sp>
-      <p:sp>
-        <p:nvSpPr>
-          <p:cNvPr id="7" name="Text 4"/>
-          <p:cNvSpPr/>
-          <p:nvPr/>
-        </p:nvSpPr>
-        <p:spPr>
-          <a:xfrm>
-            <a:off x="9281160" y="2377440"/>
-            <a:ext cx="2377440" cy="2743200"/>
+              <a:t>3.9 mm</a:t>
+            </a:r>
+            <a:endParaRPr lang="en-US" sz="3000" dirty="0"/>
+          </a:p>
+        </p:txBody>
+      </p:sp>
+      <p:sp>
+        <p:nvSpPr>
+          <p:cNvPr id="6" name="Text 4"/>
+          <p:cNvSpPr/>
+          <p:nvPr/>
+        </p:nvSpPr>
+        <p:spPr>
+          <a:xfrm>
+            <a:off x="731520" y="2606040"/>
+            <a:ext cx="2331720" cy="457200"/>
+          </a:xfrm>
+          <a:prstGeom prst="rect">
+            <a:avLst/>
+          </a:prstGeom>
+          <a:noFill/>
+          <a:ln/>
+        </p:spPr>
+        <p:txBody>
+          <a:bodyPr wrap="square" lIns="0" tIns="0" rIns="0" bIns="0" rtlCol="0" anchor="ctr"/>
+          <a:lstStyle/>
+          <a:p>
+            <a:pPr algn="ctr" indent="0" marL="0">
+              <a:buNone/>
+            </a:pPr>
+            <a:r>
+              <a:rPr lang="en-US" sz="1250" dirty="0">
+                <a:solidFill>
+                  <a:srgbClr val="836A68"/>
+                </a:solidFill>
+                <a:latin typeface="Calibri" pitchFamily="34" charset="0"/>
+                <a:ea typeface="Calibri" pitchFamily="34" charset="-122"/>
+                <a:cs typeface="Calibri" pitchFamily="34" charset="-120"/>
+              </a:rPr>
+              <a:t>lateral (xy) median</a:t>
+            </a:r>
+            <a:endParaRPr lang="en-US" sz="1250" dirty="0"/>
+          </a:p>
+          <a:p>
+            <a:pPr algn="ctr" indent="0" marL="0">
+              <a:buNone/>
+            </a:pPr>
+            <a:r>
+              <a:rPr lang="en-US" sz="1250" dirty="0">
+                <a:solidFill>
+                  <a:srgbClr val="836A68"/>
+                </a:solidFill>
+                <a:latin typeface="Calibri" pitchFamily="34" charset="0"/>
+                <a:ea typeface="Calibri" pitchFamily="34" charset="-122"/>
+                <a:cs typeface="Calibri" pitchFamily="34" charset="-120"/>
+              </a:rPr>
+              <a:t>vs 36.5 mm chance</a:t>
+            </a:r>
+            <a:endParaRPr lang="en-US" sz="1250" dirty="0"/>
+          </a:p>
+        </p:txBody>
+      </p:sp>
+      <p:sp>
+        <p:nvSpPr>
+          <p:cNvPr id="7" name="Shape 5"/>
+          <p:cNvSpPr/>
+          <p:nvPr/>
+        </p:nvSpPr>
+        <p:spPr>
+          <a:xfrm>
+            <a:off x="3337560" y="1737360"/>
+            <a:ext cx="2514600" cy="1417320"/>
+          </a:xfrm>
+          <a:prstGeom prst="roundRect">
+            <a:avLst>
+              <a:gd name="adj" fmla="val 5806"/>
+            </a:avLst>
+          </a:prstGeom>
+          <a:solidFill>
+            <a:srgbClr val="FBF4F2"/>
+          </a:solidFill>
+          <a:ln w="12700">
+            <a:solidFill>
+              <a:srgbClr val="E7D6D1"/>
+            </a:solidFill>
+            <a:prstDash val="solid"/>
+          </a:ln>
+          <a:effectLst>
+            <a:outerShdw sx="100000" sy="100000" kx="0" ky="0" algn="bl" rotWithShape="0" blurRad="88900" dist="38100" dir="5400000">
+              <a:srgbClr val="7A5C5E">
+                <a:alpha val="18000"/>
+              </a:srgbClr>
+            </a:outerShdw>
+          </a:effectLst>
+        </p:spPr>
+      </p:sp>
+      <p:sp>
+        <p:nvSpPr>
+          <p:cNvPr id="8" name="Text 6"/>
+          <p:cNvSpPr/>
+          <p:nvPr/>
+        </p:nvSpPr>
+        <p:spPr>
+          <a:xfrm>
+            <a:off x="3337560" y="1901952"/>
+            <a:ext cx="2514600" cy="640080"/>
+          </a:xfrm>
+          <a:prstGeom prst="rect">
+            <a:avLst/>
+          </a:prstGeom>
+          <a:noFill/>
+          <a:ln/>
+        </p:spPr>
+        <p:txBody>
+          <a:bodyPr wrap="square" lIns="0" tIns="0" rIns="0" bIns="0" rtlCol="0" anchor="ctr"/>
+          <a:lstStyle/>
+          <a:p>
+            <a:pPr algn="ctr" indent="0" marL="0">
+              <a:buNone/>
+            </a:pPr>
+            <a:r>
+              <a:rPr lang="en-US" sz="3000" b="1" dirty="0">
+                <a:solidFill>
+                  <a:srgbClr val="C0564A"/>
+                </a:solidFill>
+                <a:latin typeface="Cambria" pitchFamily="34" charset="0"/>
+                <a:ea typeface="Cambria" pitchFamily="34" charset="-122"/>
+                <a:cs typeface="Cambria" pitchFamily="34" charset="-120"/>
+              </a:rPr>
+              <a:t>2.1 mm</a:t>
+            </a:r>
+            <a:endParaRPr lang="en-US" sz="3000" dirty="0"/>
+          </a:p>
+        </p:txBody>
+      </p:sp>
+      <p:sp>
+        <p:nvSpPr>
+          <p:cNvPr id="9" name="Text 7"/>
+          <p:cNvSpPr/>
+          <p:nvPr/>
+        </p:nvSpPr>
+        <p:spPr>
+          <a:xfrm>
+            <a:off x="3429000" y="2606040"/>
+            <a:ext cx="2331720" cy="457200"/>
+          </a:xfrm>
+          <a:prstGeom prst="rect">
+            <a:avLst/>
+          </a:prstGeom>
+          <a:noFill/>
+          <a:ln/>
+        </p:spPr>
+        <p:txBody>
+          <a:bodyPr wrap="square" lIns="0" tIns="0" rIns="0" bIns="0" rtlCol="0" anchor="ctr"/>
+          <a:lstStyle/>
+          <a:p>
+            <a:pPr algn="ctr" indent="0" marL="0">
+              <a:buNone/>
+            </a:pPr>
+            <a:r>
+              <a:rPr lang="en-US" sz="1250" dirty="0">
+                <a:solidFill>
+                  <a:srgbClr val="836A68"/>
+                </a:solidFill>
+                <a:latin typeface="Calibri" pitchFamily="34" charset="0"/>
+                <a:ea typeface="Calibri" pitchFamily="34" charset="-122"/>
+                <a:cs typeface="Calibri" pitchFamily="34" charset="-120"/>
+              </a:rPr>
+              <a:t>depth (z) median</a:t>
+            </a:r>
+            <a:endParaRPr lang="en-US" sz="1250" dirty="0"/>
+          </a:p>
+          <a:p>
+            <a:pPr algn="ctr" indent="0" marL="0">
+              <a:buNone/>
+            </a:pPr>
+            <a:r>
+              <a:rPr lang="en-US" sz="1250" dirty="0">
+                <a:solidFill>
+                  <a:srgbClr val="836A68"/>
+                </a:solidFill>
+                <a:latin typeface="Calibri" pitchFamily="34" charset="0"/>
+                <a:ea typeface="Calibri" pitchFamily="34" charset="-122"/>
+                <a:cs typeface="Calibri" pitchFamily="34" charset="-120"/>
+              </a:rPr>
+              <a:t>vs 16.3 mm chance</a:t>
+            </a:r>
+            <a:endParaRPr lang="en-US" sz="1250" dirty="0"/>
+          </a:p>
+        </p:txBody>
+      </p:sp>
+      <p:sp>
+        <p:nvSpPr>
+          <p:cNvPr id="10" name="Shape 8"/>
+          <p:cNvSpPr/>
+          <p:nvPr/>
+        </p:nvSpPr>
+        <p:spPr>
+          <a:xfrm>
+            <a:off x="6035040" y="1737360"/>
+            <a:ext cx="2514600" cy="1417320"/>
+          </a:xfrm>
+          <a:prstGeom prst="roundRect">
+            <a:avLst>
+              <a:gd name="adj" fmla="val 5806"/>
+            </a:avLst>
+          </a:prstGeom>
+          <a:solidFill>
+            <a:srgbClr val="FBF4F2"/>
+          </a:solidFill>
+          <a:ln w="12700">
+            <a:solidFill>
+              <a:srgbClr val="E7D6D1"/>
+            </a:solidFill>
+            <a:prstDash val="solid"/>
+          </a:ln>
+          <a:effectLst>
+            <a:outerShdw sx="100000" sy="100000" kx="0" ky="0" algn="bl" rotWithShape="0" blurRad="88900" dist="38100" dir="5400000">
+              <a:srgbClr val="7A5C5E">
+                <a:alpha val="18000"/>
+              </a:srgbClr>
+            </a:outerShdw>
+          </a:effectLst>
+        </p:spPr>
+      </p:sp>
+      <p:sp>
+        <p:nvSpPr>
+          <p:cNvPr id="11" name="Text 9"/>
+          <p:cNvSpPr/>
+          <p:nvPr/>
+        </p:nvSpPr>
+        <p:spPr>
+          <a:xfrm>
+            <a:off x="6035040" y="1901952"/>
+            <a:ext cx="2514600" cy="640080"/>
+          </a:xfrm>
+          <a:prstGeom prst="rect">
+            <a:avLst/>
+          </a:prstGeom>
+          <a:noFill/>
+          <a:ln/>
+        </p:spPr>
+        <p:txBody>
+          <a:bodyPr wrap="square" lIns="0" tIns="0" rIns="0" bIns="0" rtlCol="0" anchor="ctr"/>
+          <a:lstStyle/>
+          <a:p>
+            <a:pPr algn="ctr" indent="0" marL="0">
+              <a:buNone/>
+            </a:pPr>
+            <a:r>
+              <a:rPr lang="en-US" sz="3000" b="1" dirty="0">
+                <a:solidFill>
+                  <a:srgbClr val="8E1010"/>
+                </a:solidFill>
+                <a:latin typeface="Cambria" pitchFamily="34" charset="0"/>
+                <a:ea typeface="Cambria" pitchFamily="34" charset="-122"/>
+                <a:cs typeface="Cambria" pitchFamily="34" charset="-120"/>
+              </a:rPr>
+              <a:t>93 %</a:t>
+            </a:r>
+            <a:endParaRPr lang="en-US" sz="3000" dirty="0"/>
+          </a:p>
+        </p:txBody>
+      </p:sp>
+      <p:sp>
+        <p:nvSpPr>
+          <p:cNvPr id="12" name="Text 10"/>
+          <p:cNvSpPr/>
+          <p:nvPr/>
+        </p:nvSpPr>
+        <p:spPr>
+          <a:xfrm>
+            <a:off x="6126480" y="2606040"/>
+            <a:ext cx="2331720" cy="457200"/>
+          </a:xfrm>
+          <a:prstGeom prst="rect">
+            <a:avLst/>
+          </a:prstGeom>
+          <a:noFill/>
+          <a:ln/>
+        </p:spPr>
+        <p:txBody>
+          <a:bodyPr wrap="square" lIns="0" tIns="0" rIns="0" bIns="0" rtlCol="0" anchor="ctr"/>
+          <a:lstStyle/>
+          <a:p>
+            <a:pPr algn="ctr" indent="0" marL="0">
+              <a:buNone/>
+            </a:pPr>
+            <a:r>
+              <a:rPr lang="en-US" sz="1250" dirty="0">
+                <a:solidFill>
+                  <a:srgbClr val="836A68"/>
+                </a:solidFill>
+                <a:latin typeface="Calibri" pitchFamily="34" charset="0"/>
+                <a:ea typeface="Calibri" pitchFamily="34" charset="-122"/>
+                <a:cs typeface="Calibri" pitchFamily="34" charset="-120"/>
+              </a:rPr>
+              <a:t>of positions within</a:t>
+            </a:r>
+            <a:endParaRPr lang="en-US" sz="1250" dirty="0"/>
+          </a:p>
+          <a:p>
+            <a:pPr algn="ctr" indent="0" marL="0">
+              <a:buNone/>
+            </a:pPr>
+            <a:r>
+              <a:rPr lang="en-US" sz="1250" dirty="0">
+                <a:solidFill>
+                  <a:srgbClr val="836A68"/>
+                </a:solidFill>
+                <a:latin typeface="Calibri" pitchFamily="34" charset="0"/>
+                <a:ea typeface="Calibri" pitchFamily="34" charset="-122"/>
+                <a:cs typeface="Calibri" pitchFamily="34" charset="-120"/>
+              </a:rPr>
+              <a:t>10 mm laterally</a:t>
+            </a:r>
+            <a:endParaRPr lang="en-US" sz="1250" dirty="0"/>
+          </a:p>
+        </p:txBody>
+      </p:sp>
+      <p:sp>
+        <p:nvSpPr>
+          <p:cNvPr id="13" name="Shape 11"/>
+          <p:cNvSpPr/>
+          <p:nvPr/>
+        </p:nvSpPr>
+        <p:spPr>
+          <a:xfrm>
+            <a:off x="8732520" y="1737360"/>
+            <a:ext cx="2514600" cy="1417320"/>
+          </a:xfrm>
+          <a:prstGeom prst="roundRect">
+            <a:avLst>
+              <a:gd name="adj" fmla="val 5806"/>
+            </a:avLst>
+          </a:prstGeom>
+          <a:solidFill>
+            <a:srgbClr val="FBF4F2"/>
+          </a:solidFill>
+          <a:ln w="12700">
+            <a:solidFill>
+              <a:srgbClr val="E7D6D1"/>
+            </a:solidFill>
+            <a:prstDash val="solid"/>
+          </a:ln>
+          <a:effectLst>
+            <a:outerShdw sx="100000" sy="100000" kx="0" ky="0" algn="bl" rotWithShape="0" blurRad="88900" dist="38100" dir="5400000">
+              <a:srgbClr val="7A5C5E">
+                <a:alpha val="18000"/>
+              </a:srgbClr>
+            </a:outerShdw>
+          </a:effectLst>
+        </p:spPr>
+      </p:sp>
+      <p:sp>
+        <p:nvSpPr>
+          <p:cNvPr id="14" name="Text 12"/>
+          <p:cNvSpPr/>
+          <p:nvPr/>
+        </p:nvSpPr>
+        <p:spPr>
+          <a:xfrm>
+            <a:off x="8732520" y="1901952"/>
+            <a:ext cx="2514600" cy="640080"/>
+          </a:xfrm>
+          <a:prstGeom prst="rect">
+            <a:avLst/>
+          </a:prstGeom>
+          <a:noFill/>
+          <a:ln/>
+        </p:spPr>
+        <p:txBody>
+          <a:bodyPr wrap="square" lIns="0" tIns="0" rIns="0" bIns="0" rtlCol="0" anchor="ctr"/>
+          <a:lstStyle/>
+          <a:p>
+            <a:pPr algn="ctr" indent="0" marL="0">
+              <a:buNone/>
+            </a:pPr>
+            <a:r>
+              <a:rPr lang="en-US" sz="3000" b="1" dirty="0">
+                <a:solidFill>
+                  <a:srgbClr val="C8890B"/>
+                </a:solidFill>
+                <a:latin typeface="Cambria" pitchFamily="34" charset="0"/>
+                <a:ea typeface="Cambria" pitchFamily="34" charset="-122"/>
+                <a:cs typeface="Cambria" pitchFamily="34" charset="-120"/>
+              </a:rPr>
+              <a:t>3.6 / 2.1</a:t>
+            </a:r>
+            <a:endParaRPr lang="en-US" sz="3000" dirty="0"/>
+          </a:p>
+        </p:txBody>
+      </p:sp>
+      <p:sp>
+        <p:nvSpPr>
+          <p:cNvPr id="15" name="Text 13"/>
+          <p:cNvSpPr/>
+          <p:nvPr/>
+        </p:nvSpPr>
+        <p:spPr>
+          <a:xfrm>
+            <a:off x="8823960" y="2606040"/>
+            <a:ext cx="2331720" cy="457200"/>
+          </a:xfrm>
+          <a:prstGeom prst="rect">
+            <a:avLst/>
+          </a:prstGeom>
+          <a:noFill/>
+          <a:ln/>
+        </p:spPr>
+        <p:txBody>
+          <a:bodyPr wrap="square" lIns="0" tIns="0" rIns="0" bIns="0" rtlCol="0" anchor="ctr"/>
+          <a:lstStyle/>
+          <a:p>
+            <a:pPr algn="ctr" indent="0" marL="0">
+              <a:buNone/>
+            </a:pPr>
+            <a:r>
+              <a:rPr lang="en-US" sz="1250" dirty="0">
+                <a:solidFill>
+                  <a:srgbClr val="836A68"/>
+                </a:solidFill>
+                <a:latin typeface="Calibri" pitchFamily="34" charset="0"/>
+                <a:ea typeface="Calibri" pitchFamily="34" charset="-122"/>
+                <a:cs typeface="Calibri" pitchFamily="34" charset="-120"/>
+              </a:rPr>
+              <a:t>beet (dielectric)</a:t>
+            </a:r>
+            <a:endParaRPr lang="en-US" sz="1250" dirty="0"/>
+          </a:p>
+          <a:p>
+            <a:pPr algn="ctr" indent="0" marL="0">
+              <a:buNone/>
+            </a:pPr>
+            <a:r>
+              <a:rPr lang="en-US" sz="1250" dirty="0">
+                <a:solidFill>
+                  <a:srgbClr val="836A68"/>
+                </a:solidFill>
+                <a:latin typeface="Calibri" pitchFamily="34" charset="0"/>
+                <a:ea typeface="Calibri" pitchFamily="34" charset="-122"/>
+                <a:cs typeface="Calibri" pitchFamily="34" charset="-120"/>
+              </a:rPr>
+              <a:t>xy / z, same as metal</a:t>
+            </a:r>
+            <a:endParaRPr lang="en-US" sz="1250" dirty="0"/>
+          </a:p>
+        </p:txBody>
+      </p:sp>
+      <p:sp>
+        <p:nvSpPr>
+          <p:cNvPr id="16" name="Shape 14"/>
+          <p:cNvSpPr/>
+          <p:nvPr/>
+        </p:nvSpPr>
+        <p:spPr>
+          <a:xfrm>
+            <a:off x="640080" y="3429000"/>
+            <a:ext cx="10607040" cy="2697480"/>
+          </a:xfrm>
+          <a:prstGeom prst="roundRect">
+            <a:avLst>
+              <a:gd name="adj" fmla="val 3051"/>
+            </a:avLst>
+          </a:prstGeom>
+          <a:solidFill>
+            <a:srgbClr val="FBF4F2"/>
+          </a:solidFill>
+          <a:ln w="12700">
+            <a:solidFill>
+              <a:srgbClr val="E7D6D1"/>
+            </a:solidFill>
+            <a:prstDash val="solid"/>
+          </a:ln>
+          <a:effectLst>
+            <a:outerShdw sx="100000" sy="100000" kx="0" ky="0" algn="bl" rotWithShape="0" blurRad="88900" dist="38100" dir="5400000">
+              <a:srgbClr val="7A5C5E">
+                <a:alpha val="18000"/>
+              </a:srgbClr>
+            </a:outerShdw>
+          </a:effectLst>
+        </p:spPr>
+      </p:sp>
+      <p:sp>
+        <p:nvSpPr>
+          <p:cNvPr id="17" name="Text 15"/>
+          <p:cNvSpPr/>
+          <p:nvPr/>
+        </p:nvSpPr>
+        <p:spPr>
+          <a:xfrm>
+            <a:off x="914400" y="3611880"/>
+            <a:ext cx="9144000" cy="365760"/>
+          </a:xfrm>
+          <a:prstGeom prst="rect">
+            <a:avLst/>
+          </a:prstGeom>
+          <a:noFill/>
+          <a:ln/>
+        </p:spPr>
+        <p:txBody>
+          <a:bodyPr wrap="square" lIns="0" tIns="0" rIns="0" bIns="0" rtlCol="0" anchor="ctr"/>
+          <a:lstStyle/>
+          <a:p>
+            <a:pPr indent="0" marL="0">
+              <a:buNone/>
+            </a:pPr>
+            <a:r>
+              <a:rPr lang="en-US" sz="1700" b="1" dirty="0">
+                <a:solidFill>
+                  <a:srgbClr val="BE0000"/>
+                </a:solidFill>
+                <a:latin typeface="Cambria" pitchFamily="34" charset="0"/>
+                <a:ea typeface="Cambria" pitchFamily="34" charset="-122"/>
+                <a:cs typeface="Cambria" pitchFamily="34" charset="-120"/>
+              </a:rPr>
+              <a:t>What this establishes</a:t>
+            </a:r>
+            <a:endParaRPr lang="en-US" sz="1700" dirty="0"/>
+          </a:p>
+        </p:txBody>
+      </p:sp>
+      <p:sp>
+        <p:nvSpPr>
+          <p:cNvPr id="18" name="Text 16"/>
+          <p:cNvSpPr/>
+          <p:nvPr/>
+        </p:nvSpPr>
+        <p:spPr>
+          <a:xfrm>
+            <a:off x="914400" y="4114800"/>
+            <a:ext cx="10332720" cy="1920240"/>
           </a:xfrm>
           <a:prstGeom prst="rect">
             <a:avLst/>
@@ -6355,7 +6905,7 @@
               <a:buChar char="•"/>
             </a:pPr>
             <a:r>
-              <a:rPr lang="en-US" sz="1150" dirty="0">
+              <a:rPr lang="en-US" sz="1350" dirty="0">
                 <a:solidFill>
                   <a:srgbClr val="2A1618"/>
                 </a:solidFill>
@@ -6363,9 +6913,9 @@
                 <a:ea typeface="Calibri" pitchFamily="34" charset="-122"/>
                 <a:cs typeface="Calibri" pitchFamily="34" charset="-120"/>
               </a:rPr>
-              <a:t>Interior unseen depths: ~1 to 3 mm, a continuous learned depth map.</a:t>
-            </a:r>
-            <a:endParaRPr lang="en-US" sz="1150" dirty="0"/>
+              <a:t>Depth is NOT the weak axis. With fine depth sampling and full-band frequency, z resolves to ~2 mm, better than the lateral k-NN floor.</a:t>
+            </a:r>
+            <a:endParaRPr lang="en-US" sz="1350" dirty="0"/>
           </a:p>
           <a:p>
             <a:pPr marL="342900" indent="-342900">
@@ -6376,7 +6926,7 @@
               <a:buChar char="•"/>
             </a:pPr>
             <a:r>
-              <a:rPr lang="en-US" sz="1150" dirty="0">
+              <a:rPr lang="en-US" sz="1350" dirty="0">
                 <a:solidFill>
                   <a:srgbClr val="2A1618"/>
                 </a:solidFill>
@@ -6384,9 +6934,9 @@
                 <a:ea typeface="Calibri" pitchFamily="34" charset="-122"/>
                 <a:cs typeface="Calibri" pitchFamily="34" charset="-120"/>
               </a:rPr>
-              <a:t>Only the two outer edge depths (-15 / +45) blow up, pure extrapolation.</a:t>
-            </a:r>
-            <a:endParaRPr lang="en-US" sz="1150" dirty="0"/>
+              <a:t>A dielectric (beet) tumor localizes identically to metal (3.6 / 2.1 mm). In the noiseless sim the ~19 percent weaker contrast costs nothing.</a:t>
+            </a:r>
+            <a:endParaRPr lang="en-US" sz="1350" dirty="0"/>
           </a:p>
           <a:p>
             <a:pPr marL="342900" indent="-342900">
@@ -6397,7 +6947,7 @@
               <a:buChar char="•"/>
             </a:pPr>
             <a:r>
-              <a:rPr lang="en-US" sz="1150" dirty="0">
+              <a:rPr lang="en-US" sz="1350" dirty="0">
                 <a:solidFill>
                   <a:srgbClr val="2A1618"/>
                 </a:solidFill>
@@ -6405,46 +6955,7 @@
                 <a:ea typeface="Calibri" pitchFamily="34" charset="-122"/>
                 <a:cs typeface="Calibri" pitchFamily="34" charset="-120"/>
               </a:rPr>
-              <a:t>Extending the sweep turned the OLD outer edges into good interior points.</a:t>
-            </a:r>
-            <a:endParaRPr lang="en-US" sz="1150" dirty="0"/>
-          </a:p>
-        </p:txBody>
-      </p:sp>
-      <p:sp>
-        <p:nvSpPr>
-          <p:cNvPr id="8" name="Text 5"/>
-          <p:cNvSpPr/>
-          <p:nvPr/>
-        </p:nvSpPr>
-        <p:spPr>
-          <a:xfrm>
-            <a:off x="548640" y="6172200"/>
-            <a:ext cx="11091672" cy="457200"/>
-          </a:xfrm>
-          <a:prstGeom prst="rect">
-            <a:avLst/>
-          </a:prstGeom>
-          <a:noFill/>
-          <a:ln/>
-        </p:spPr>
-        <p:txBody>
-          <a:bodyPr wrap="square" lIns="0" tIns="0" rIns="0" bIns="0" rtlCol="0" anchor="ctr"/>
-          <a:lstStyle/>
-          <a:p>
-            <a:pPr algn="ctr" indent="0" marL="0">
-              <a:buNone/>
-            </a:pPr>
-            <a:r>
-              <a:rPr lang="en-US" sz="1350" i="1" dirty="0">
-                <a:solidFill>
-                  <a:srgbClr val="836A68"/>
-                </a:solidFill>
-                <a:latin typeface="Calibri" pitchFamily="34" charset="0"/>
-                <a:ea typeface="Calibri" pitchFamily="34" charset="-122"/>
-                <a:cs typeface="Calibri" pitchFamily="34" charset="-120"/>
-              </a:rPr>
-              <a:t>Usable depth is bounded by the sampling range, not the model. Sample wider and the good region grows.</a:t>
+              <a:t>Chance is 36 mm laterally / 16 mm in depth, so the model is about 10x better than guessing the centre on both axes.</a:t>
             </a:r>
             <a:endParaRPr lang="en-US" sz="1350" dirty="0"/>
           </a:p>
@@ -6515,7 +7026,7 @@
                 <a:ea typeface="Cambria" pitchFamily="34" charset="-122"/>
                 <a:cs typeface="Cambria" pitchFamily="34" charset="-120"/>
               </a:rPr>
-              <a:t>Predicted vs. actual, by depth</a:t>
+              <a:t>Predicting an unseen depth plane</a:t>
             </a:r>
             <a:endParaRPr lang="en-US" sz="2900" dirty="0"/>
           </a:p>
@@ -6554,26 +7065,50 @@
                 <a:ea typeface="Calibri" pitchFamily="34" charset="-122"/>
                 <a:cs typeface="Calibri" pitchFamily="34" charset="-120"/>
               </a:rPr>
-              <a:t>Arrows = lateral error, marker color = depth error, red ring = grid-edge position</a:t>
+              <a:t>Leave one whole depth out; interior depths interpolate, only the outer edge depths fail</a:t>
             </a:r>
             <a:endParaRPr lang="en-US" sz="1400" dirty="0"/>
           </a:p>
         </p:txBody>
       </p:sp>
-      <p:sp>
-        <p:nvSpPr>
-          <p:cNvPr id="4" name="Shape 2"/>
-          <p:cNvSpPr/>
-          <p:nvPr/>
-        </p:nvSpPr>
-        <p:spPr>
-          <a:xfrm>
-            <a:off x="310896" y="1581912"/>
-            <a:ext cx="3794760" cy="3977640"/>
+      <p:pic>
+        <p:nvPicPr>
+          <p:cNvPr id="4" name="Image 0" descr="sim_depth_lopo.png">    </p:cNvPr>
+          <p:cNvPicPr>
+            <a:picLocks noChangeAspect="1"/>
+          </p:cNvPicPr>
+          <p:nvPr/>
+        </p:nvPicPr>
+        <p:blipFill>
+          <a:blip r:embed="rId1"/>
+          <a:stretch>
+            <a:fillRect/>
+          </a:stretch>
+        </p:blipFill>
+        <p:spPr>
+          <a:xfrm>
+            <a:off x="365760" y="1600200"/>
+            <a:ext cx="8595360" cy="3566160"/>
+          </a:xfrm>
+          <a:prstGeom prst="rect">
+            <a:avLst/>
+          </a:prstGeom>
+        </p:spPr>
+      </p:pic>
+      <p:sp>
+        <p:nvSpPr>
+          <p:cNvPr id="5" name="Shape 2"/>
+          <p:cNvSpPr/>
+          <p:nvPr/>
+        </p:nvSpPr>
+        <p:spPr>
+          <a:xfrm>
+            <a:off x="9098280" y="1600200"/>
+            <a:ext cx="2651760" cy="3566160"/>
           </a:xfrm>
           <a:prstGeom prst="roundRect">
             <a:avLst>
-              <a:gd name="adj" fmla="val 2169"/>
+              <a:gd name="adj" fmla="val 3103"/>
             </a:avLst>
           </a:prstGeom>
           <a:solidFill>
@@ -6594,30 +7129,6 @@
           </a:effectLst>
         </p:spPr>
       </p:sp>
-      <p:pic>
-        <p:nvPicPr>
-          <p:cNvPr id="5" name="Image 0" descr="sim_depth_examples/sim_depthplot_zp15_n25.png">    </p:cNvPr>
-          <p:cNvPicPr>
-            <a:picLocks noChangeAspect="1"/>
-          </p:cNvPicPr>
-          <p:nvPr/>
-        </p:nvPicPr>
-        <p:blipFill>
-          <a:blip r:embed="rId1"/>
-          <a:stretch>
-            <a:fillRect/>
-          </a:stretch>
-        </p:blipFill>
-        <p:spPr>
-          <a:xfrm>
-            <a:off x="402336" y="1691640"/>
-            <a:ext cx="3611880" cy="3429000"/>
-          </a:xfrm>
-          <a:prstGeom prst="rect">
-            <a:avLst/>
-          </a:prstGeom>
-        </p:spPr>
-      </p:pic>
       <p:sp>
         <p:nvSpPr>
           <p:cNvPr id="6" name="Text 3"/>
@@ -6626,240 +7137,131 @@
         </p:nvSpPr>
         <p:spPr>
           <a:xfrm>
-            <a:off x="310896" y="5120640"/>
-            <a:ext cx="3794760" cy="329184"/>
-          </a:xfrm>
-          <a:prstGeom prst="rect">
-            <a:avLst/>
-          </a:prstGeom>
-          <a:noFill/>
-          <a:ln/>
-        </p:spPr>
-        <p:txBody>
-          <a:bodyPr wrap="square" lIns="0" tIns="0" rIns="0" bIns="0" rtlCol="0" anchor="ctr"/>
-          <a:lstStyle/>
-          <a:p>
-            <a:pPr algn="ctr" indent="0" marL="0">
-              <a:buNone/>
-            </a:pPr>
-            <a:r>
-              <a:rPr lang="en-US" sz="1300" b="1" dirty="0">
+            <a:off x="9281160" y="1737360"/>
+            <a:ext cx="2377440" cy="548640"/>
+          </a:xfrm>
+          <a:prstGeom prst="rect">
+            <a:avLst/>
+          </a:prstGeom>
+          <a:noFill/>
+          <a:ln/>
+        </p:spPr>
+        <p:txBody>
+          <a:bodyPr wrap="square" lIns="0" tIns="0" rIns="0" bIns="0" rtlCol="0" anchor="ctr"/>
+          <a:lstStyle/>
+          <a:p>
+            <a:pPr indent="0" marL="0">
+              <a:buNone/>
+            </a:pPr>
+            <a:r>
+              <a:rPr lang="en-US" sz="1400" b="1" dirty="0">
                 <a:solidFill>
                   <a:srgbClr val="BE0000"/>
+                </a:solidFill>
+                <a:latin typeface="Cambria" pitchFamily="34" charset="0"/>
+                <a:ea typeface="Cambria" pitchFamily="34" charset="-122"/>
+                <a:cs typeface="Cambria" pitchFamily="34" charset="-120"/>
+              </a:rPr>
+              <a:t>Range-bound, not model-bound</a:t>
+            </a:r>
+            <a:endParaRPr lang="en-US" sz="1400" dirty="0"/>
+          </a:p>
+        </p:txBody>
+      </p:sp>
+      <p:sp>
+        <p:nvSpPr>
+          <p:cNvPr id="7" name="Text 4"/>
+          <p:cNvSpPr/>
+          <p:nvPr/>
+        </p:nvSpPr>
+        <p:spPr>
+          <a:xfrm>
+            <a:off x="9281160" y="2377440"/>
+            <a:ext cx="2377440" cy="2743200"/>
+          </a:xfrm>
+          <a:prstGeom prst="rect">
+            <a:avLst/>
+          </a:prstGeom>
+          <a:noFill/>
+          <a:ln/>
+        </p:spPr>
+        <p:txBody>
+          <a:bodyPr wrap="square" lIns="0" tIns="0" rIns="0" bIns="0" rtlCol="0" anchor="t"/>
+          <a:lstStyle/>
+          <a:p>
+            <a:pPr marL="342900" indent="-342900">
+              <a:spcAft>
+                <a:spcPts val="800"/>
+              </a:spcAft>
+              <a:buSzPct val="100000"/>
+              <a:buChar char="•"/>
+            </a:pPr>
+            <a:r>
+              <a:rPr lang="en-US" sz="1150" dirty="0">
+                <a:solidFill>
+                  <a:srgbClr val="2A1618"/>
                 </a:solidFill>
                 <a:latin typeface="Calibri" pitchFamily="34" charset="0"/>
                 <a:ea typeface="Calibri" pitchFamily="34" charset="-122"/>
                 <a:cs typeface="Calibri" pitchFamily="34" charset="-120"/>
               </a:rPr>
-              <a:t>z = +15 mm  (peak signal)</a:t>
-            </a:r>
-            <a:endParaRPr lang="en-US" sz="1300" dirty="0"/>
-          </a:p>
-        </p:txBody>
-      </p:sp>
-      <p:sp>
-        <p:nvSpPr>
-          <p:cNvPr id="7" name="Shape 4"/>
-          <p:cNvSpPr/>
-          <p:nvPr/>
-        </p:nvSpPr>
-        <p:spPr>
-          <a:xfrm>
-            <a:off x="4197096" y="1581912"/>
-            <a:ext cx="3794760" cy="3977640"/>
-          </a:xfrm>
-          <a:prstGeom prst="roundRect">
-            <a:avLst>
-              <a:gd name="adj" fmla="val 2169"/>
-            </a:avLst>
-          </a:prstGeom>
-          <a:solidFill>
-            <a:srgbClr val="FBF4F2"/>
-          </a:solidFill>
-          <a:ln w="12700">
-            <a:solidFill>
-              <a:srgbClr val="E7D6D1"/>
-            </a:solidFill>
-            <a:prstDash val="solid"/>
-          </a:ln>
-          <a:effectLst>
-            <a:outerShdw sx="100000" sy="100000" kx="0" ky="0" algn="bl" rotWithShape="0" blurRad="88900" dist="38100" dir="5400000">
-              <a:srgbClr val="7A5C5E">
-                <a:alpha val="18000"/>
-              </a:srgbClr>
-            </a:outerShdw>
-          </a:effectLst>
-        </p:spPr>
-      </p:sp>
-      <p:pic>
-        <p:nvPicPr>
-          <p:cNvPr id="8" name="Image 1" descr="sim_depth_examples/sim_depthplot_zp30_n25.png">    </p:cNvPr>
-          <p:cNvPicPr>
-            <a:picLocks noChangeAspect="1"/>
-          </p:cNvPicPr>
-          <p:nvPr/>
-        </p:nvPicPr>
-        <p:blipFill>
-          <a:blip r:embed="rId2"/>
-          <a:stretch>
-            <a:fillRect/>
-          </a:stretch>
-        </p:blipFill>
-        <p:spPr>
-          <a:xfrm>
-            <a:off x="4288536" y="1691640"/>
-            <a:ext cx="3611880" cy="3429000"/>
-          </a:xfrm>
-          <a:prstGeom prst="rect">
-            <a:avLst/>
-          </a:prstGeom>
-        </p:spPr>
-      </p:pic>
-      <p:sp>
-        <p:nvSpPr>
-          <p:cNvPr id="9" name="Text 5"/>
-          <p:cNvSpPr/>
-          <p:nvPr/>
-        </p:nvSpPr>
-        <p:spPr>
-          <a:xfrm>
-            <a:off x="4197096" y="5120640"/>
-            <a:ext cx="3794760" cy="329184"/>
-          </a:xfrm>
-          <a:prstGeom prst="rect">
-            <a:avLst/>
-          </a:prstGeom>
-          <a:noFill/>
-          <a:ln/>
-        </p:spPr>
-        <p:txBody>
-          <a:bodyPr wrap="square" lIns="0" tIns="0" rIns="0" bIns="0" rtlCol="0" anchor="ctr"/>
-          <a:lstStyle/>
-          <a:p>
-            <a:pPr algn="ctr" indent="0" marL="0">
-              <a:buNone/>
-            </a:pPr>
-            <a:r>
-              <a:rPr lang="en-US" sz="1300" b="1" dirty="0">
-                <a:solidFill>
-                  <a:srgbClr val="BE0000"/>
+              <a:t>Interior unseen depths: ~1 to 3 mm, a continuous learned depth map.</a:t>
+            </a:r>
+            <a:endParaRPr lang="en-US" sz="1150" dirty="0"/>
+          </a:p>
+          <a:p>
+            <a:pPr marL="342900" indent="-342900">
+              <a:spcAft>
+                <a:spcPts val="800"/>
+              </a:spcAft>
+              <a:buSzPct val="100000"/>
+              <a:buChar char="•"/>
+            </a:pPr>
+            <a:r>
+              <a:rPr lang="en-US" sz="1150" dirty="0">
+                <a:solidFill>
+                  <a:srgbClr val="2A1618"/>
                 </a:solidFill>
                 <a:latin typeface="Calibri" pitchFamily="34" charset="0"/>
                 <a:ea typeface="Calibri" pitchFamily="34" charset="-122"/>
                 <a:cs typeface="Calibri" pitchFamily="34" charset="-120"/>
               </a:rPr>
-              <a:t>z = +30 mm  (interior)</a:t>
-            </a:r>
-            <a:endParaRPr lang="en-US" sz="1300" dirty="0"/>
-          </a:p>
-        </p:txBody>
-      </p:sp>
-      <p:sp>
-        <p:nvSpPr>
-          <p:cNvPr id="10" name="Shape 6"/>
-          <p:cNvSpPr/>
-          <p:nvPr/>
-        </p:nvSpPr>
-        <p:spPr>
-          <a:xfrm>
-            <a:off x="8083296" y="1581912"/>
-            <a:ext cx="3794760" cy="3977640"/>
-          </a:xfrm>
-          <a:prstGeom prst="roundRect">
-            <a:avLst>
-              <a:gd name="adj" fmla="val 2169"/>
-            </a:avLst>
-          </a:prstGeom>
-          <a:solidFill>
-            <a:srgbClr val="FBF4F2"/>
-          </a:solidFill>
-          <a:ln w="12700">
-            <a:solidFill>
-              <a:srgbClr val="E7D6D1"/>
-            </a:solidFill>
-            <a:prstDash val="solid"/>
-          </a:ln>
-          <a:effectLst>
-            <a:outerShdw sx="100000" sy="100000" kx="0" ky="0" algn="bl" rotWithShape="0" blurRad="88900" dist="38100" dir="5400000">
-              <a:srgbClr val="7A5C5E">
-                <a:alpha val="18000"/>
-              </a:srgbClr>
-            </a:outerShdw>
-          </a:effectLst>
-        </p:spPr>
-      </p:sp>
-      <p:pic>
-        <p:nvPicPr>
-          <p:cNvPr id="11" name="Image 2" descr="sim_depth_examples/sim_depthplot_zp45_n25.png">    </p:cNvPr>
-          <p:cNvPicPr>
-            <a:picLocks noChangeAspect="1"/>
-          </p:cNvPicPr>
-          <p:nvPr/>
-        </p:nvPicPr>
-        <p:blipFill>
-          <a:blip r:embed="rId3"/>
-          <a:stretch>
-            <a:fillRect/>
-          </a:stretch>
-        </p:blipFill>
-        <p:spPr>
-          <a:xfrm>
-            <a:off x="8174736" y="1691640"/>
-            <a:ext cx="3611880" cy="3429000"/>
-          </a:xfrm>
-          <a:prstGeom prst="rect">
-            <a:avLst/>
-          </a:prstGeom>
-        </p:spPr>
-      </p:pic>
-      <p:sp>
-        <p:nvSpPr>
-          <p:cNvPr id="12" name="Text 7"/>
-          <p:cNvSpPr/>
-          <p:nvPr/>
-        </p:nvSpPr>
-        <p:spPr>
-          <a:xfrm>
-            <a:off x="8083296" y="5120640"/>
-            <a:ext cx="3794760" cy="329184"/>
-          </a:xfrm>
-          <a:prstGeom prst="rect">
-            <a:avLst/>
-          </a:prstGeom>
-          <a:noFill/>
-          <a:ln/>
-        </p:spPr>
-        <p:txBody>
-          <a:bodyPr wrap="square" lIns="0" tIns="0" rIns="0" bIns="0" rtlCol="0" anchor="ctr"/>
-          <a:lstStyle/>
-          <a:p>
-            <a:pPr algn="ctr" indent="0" marL="0">
-              <a:buNone/>
-            </a:pPr>
-            <a:r>
-              <a:rPr lang="en-US" sz="1300" b="1" dirty="0">
-                <a:solidFill>
-                  <a:srgbClr val="BE0000"/>
+              <a:t>Only the two outer edge depths (-15 / +45) blow up, pure extrapolation.</a:t>
+            </a:r>
+            <a:endParaRPr lang="en-US" sz="1150" dirty="0"/>
+          </a:p>
+          <a:p>
+            <a:pPr marL="342900" indent="-342900">
+              <a:spcAft>
+                <a:spcPts val="800"/>
+              </a:spcAft>
+              <a:buSzPct val="100000"/>
+              <a:buChar char="•"/>
+            </a:pPr>
+            <a:r>
+              <a:rPr lang="en-US" sz="1150" dirty="0">
+                <a:solidFill>
+                  <a:srgbClr val="2A1618"/>
                 </a:solidFill>
                 <a:latin typeface="Calibri" pitchFamily="34" charset="0"/>
                 <a:ea typeface="Calibri" pitchFamily="34" charset="-122"/>
                 <a:cs typeface="Calibri" pitchFamily="34" charset="-120"/>
               </a:rPr>
-              <a:t>z = +45 mm  (outer edge)</a:t>
-            </a:r>
-            <a:endParaRPr lang="en-US" sz="1300" dirty="0"/>
-          </a:p>
-        </p:txBody>
-      </p:sp>
-      <p:sp>
-        <p:nvSpPr>
-          <p:cNvPr id="13" name="Text 8"/>
-          <p:cNvSpPr/>
-          <p:nvPr/>
-        </p:nvSpPr>
-        <p:spPr>
-          <a:xfrm>
-            <a:off x="548640" y="6126480"/>
+              <a:t>Extending the sweep turned the OLD outer edges into good interior points.</a:t>
+            </a:r>
+            <a:endParaRPr lang="en-US" sz="1150" dirty="0"/>
+          </a:p>
+        </p:txBody>
+      </p:sp>
+      <p:sp>
+        <p:nvSpPr>
+          <p:cNvPr id="8" name="Text 5"/>
+          <p:cNvSpPr/>
+          <p:nvPr/>
+        </p:nvSpPr>
+        <p:spPr>
+          <a:xfrm>
+            <a:off x="548640" y="6172200"/>
             <a:ext cx="11091672" cy="457200"/>
           </a:xfrm>
           <a:prstGeom prst="rect">
@@ -6876,7 +7278,7 @@
               <a:buNone/>
             </a:pPr>
             <a:r>
-              <a:rPr lang="en-US" sz="1300" i="1" dirty="0">
+              <a:rPr lang="en-US" sz="1350" i="1" dirty="0">
                 <a:solidFill>
                   <a:srgbClr val="836A68"/>
                 </a:solidFill>
@@ -6884,9 +7286,9 @@
                 <a:ea typeface="Calibri" pitchFamily="34" charset="-122"/>
                 <a:cs typeface="Calibri" pitchFamily="34" charset="-120"/>
               </a:rPr>
-              <a:t>Interior depths (z=+15/+30) predict tightly; the +45 mm outer edge shows the extrapolation blow-up in both lateral arrows and depth color.</a:t>
-            </a:r>
-            <a:endParaRPr lang="en-US" sz="1300" dirty="0"/>
+              <a:t>Usable depth is bounded by the sampling range, not the model. Sample wider and the good region grows.</a:t>
+            </a:r>
+            <a:endParaRPr lang="en-US" sz="1350" dirty="0"/>
           </a:p>
         </p:txBody>
       </p:sp>

--- a/regression_deck/Deck2_Simulated_Regression.pptx
+++ b/regression_deck/Deck2_Simulated_Regression.pptx
@@ -4730,7 +4730,7 @@
                 <a:ea typeface="Calibri" pitchFamily="34" charset="-122"/>
                 <a:cs typeface="Calibri" pitchFamily="34" charset="-120"/>
               </a:rPr>
-              <a:t>Falls off both ways; far depths carry the least signal, so localization degrades there. (Measured tumor sat at z = +40 mm.)</a:t>
+              <a:t>Falls off both ways; far depths carry the least signal, so localization degrades there. (The main measured data sits near the patch, ~5 to 20 mm.)</a:t>
             </a:r>
             <a:endParaRPr lang="en-US" sz="1200" dirty="0"/>
           </a:p>

--- a/regression_deck/Deck2_Simulated_Regression.pptx
+++ b/regression_deck/Deck2_Simulated_Regression.pptx
@@ -4184,7 +4184,7 @@
                 <a:ea typeface="Calibri" pitchFamily="34" charset="-122"/>
                 <a:cs typeface="Calibri" pitchFamily="34" charset="-120"/>
               </a:rPr>
-              <a:t>HFSS model of the antenna array, phantom and tumor</a:t>
+              <a:t>HFSS model of the phantom, oil, antennas and tumor</a:t>
             </a:r>
             <a:endParaRPr lang="en-US" sz="1400" dirty="0"/>
           </a:p>
@@ -4198,12 +4198,12 @@
         </p:nvSpPr>
         <p:spPr>
           <a:xfrm>
-            <a:off x="960120" y="1645920"/>
-            <a:ext cx="4937760" cy="4069080"/>
+            <a:off x="1143000" y="1691640"/>
+            <a:ext cx="4892040" cy="4526280"/>
           </a:xfrm>
           <a:prstGeom prst="roundRect">
             <a:avLst>
-              <a:gd name="adj" fmla="val 2022"/>
+              <a:gd name="adj" fmla="val 1818"/>
             </a:avLst>
           </a:prstGeom>
           <a:solidFill>
@@ -4226,7 +4226,7 @@
       </p:sp>
       <p:pic>
         <p:nvPicPr>
-          <p:cNvPr id="5" name="Image 0" descr="setup_photos/sim_model.png">    </p:cNvPr>
+          <p:cNvPr id="5" name="Image 0" descr="setup_photos/SimulatedImage01.png">    </p:cNvPr>
           <p:cNvPicPr>
             <a:picLocks noChangeAspect="1"/>
           </p:cNvPicPr>
@@ -4240,8 +4240,8 @@
         </p:blipFill>
         <p:spPr>
           <a:xfrm>
-            <a:off x="1051560" y="1737360"/>
-            <a:ext cx="4754880" cy="3566160"/>
+            <a:off x="1234440" y="1783080"/>
+            <a:ext cx="4709160" cy="4023360"/>
           </a:xfrm>
           <a:prstGeom prst="rect">
             <a:avLst/>
@@ -4256,8 +4256,8 @@
         </p:nvSpPr>
         <p:spPr>
           <a:xfrm>
-            <a:off x="960120" y="5321808"/>
-            <a:ext cx="4937760" cy="365760"/>
+            <a:off x="1143000" y="5824728"/>
+            <a:ext cx="4892040" cy="365760"/>
           </a:xfrm>
           <a:prstGeom prst="rect">
             <a:avLst/>
@@ -4281,7 +4281,7 @@
                 <a:ea typeface="Calibri" pitchFamily="34" charset="-122"/>
                 <a:cs typeface="Calibri" pitchFamily="34" charset="-120"/>
               </a:rPr>
-              <a:t>Full HFSS model</a:t>
+              <a:t>Full HFSS model (phantom, oil, tumor)</a:t>
             </a:r>
             <a:endParaRPr lang="en-US" sz="1300" dirty="0"/>
           </a:p>
@@ -4295,8 +4295,8 @@
         </p:nvSpPr>
         <p:spPr>
           <a:xfrm>
-            <a:off x="6263640" y="1645920"/>
-            <a:ext cx="4937760" cy="4069080"/>
+            <a:off x="6172200" y="1691640"/>
+            <a:ext cx="4892040" cy="4069080"/>
           </a:xfrm>
           <a:prstGeom prst="roundRect">
             <a:avLst>
@@ -4323,7 +4323,7 @@
       </p:sp>
       <p:pic>
         <p:nvPicPr>
-          <p:cNvPr id="8" name="Image 1" descr="setup_photos/sim_closeup.png">    </p:cNvPr>
+          <p:cNvPr id="8" name="Image 1" descr="setup_photos/SimulatedImage02.png">    </p:cNvPr>
           <p:cNvPicPr>
             <a:picLocks noChangeAspect="1"/>
           </p:cNvPicPr>
@@ -4337,8 +4337,8 @@
         </p:blipFill>
         <p:spPr>
           <a:xfrm>
-            <a:off x="6355080" y="1737360"/>
-            <a:ext cx="4754880" cy="3566160"/>
+            <a:off x="6263640" y="1783080"/>
+            <a:ext cx="4709160" cy="3566160"/>
           </a:xfrm>
           <a:prstGeom prst="rect">
             <a:avLst/>
@@ -4353,8 +4353,8 @@
         </p:nvSpPr>
         <p:spPr>
           <a:xfrm>
-            <a:off x="6263640" y="5321808"/>
-            <a:ext cx="4937760" cy="365760"/>
+            <a:off x="6172200" y="5367528"/>
+            <a:ext cx="4892040" cy="365760"/>
           </a:xfrm>
           <a:prstGeom prst="rect">
             <a:avLst/>
@@ -4378,48 +4378,9 @@
                 <a:ea typeface="Calibri" pitchFamily="34" charset="-122"/>
                 <a:cs typeface="Calibri" pitchFamily="34" charset="-120"/>
               </a:rPr>
-              <a:t>Antennas + tumor closeup</a:t>
+              <a:t>Antennas around the phantom bowl</a:t>
             </a:r>
             <a:endParaRPr lang="en-US" sz="1300" dirty="0"/>
-          </a:p>
-        </p:txBody>
-      </p:sp>
-      <p:sp>
-        <p:nvSpPr>
-          <p:cNvPr id="10" name="Text 6"/>
-          <p:cNvSpPr/>
-          <p:nvPr/>
-        </p:nvSpPr>
-        <p:spPr>
-          <a:xfrm>
-            <a:off x="548640" y="5532120"/>
-            <a:ext cx="11091672" cy="457200"/>
-          </a:xfrm>
-          <a:prstGeom prst="rect">
-            <a:avLst/>
-          </a:prstGeom>
-          <a:noFill/>
-          <a:ln/>
-        </p:spPr>
-        <p:txBody>
-          <a:bodyPr wrap="square" lIns="0" tIns="0" rIns="0" bIns="0" rtlCol="0" anchor="ctr"/>
-          <a:lstStyle/>
-          <a:p>
-            <a:pPr algn="ctr" indent="0" marL="0">
-              <a:buNone/>
-            </a:pPr>
-            <a:r>
-              <a:rPr lang="en-US" sz="1250" i="1" dirty="0">
-                <a:solidFill>
-                  <a:srgbClr val="836A68"/>
-                </a:solidFill>
-                <a:latin typeface="Calibri" pitchFamily="34" charset="0"/>
-                <a:ea typeface="Calibri" pitchFamily="34" charset="-122"/>
-                <a:cs typeface="Calibri" pitchFamily="34" charset="-120"/>
-              </a:rPr>
-              <a:t>Replace the placeholders in regression_deck/setup_photos/ (sim_model.*, sim_closeup.*) with real HFSS screenshots.</a:t>
-            </a:r>
-            <a:endParaRPr lang="en-US" sz="1250" dirty="0"/>
           </a:p>
         </p:txBody>
       </p:sp>

--- a/regression_deck/Deck2_Simulated_Regression.pptx
+++ b/regression_deck/Deck2_Simulated_Regression.pptx
@@ -3227,7 +3227,7 @@
                 <a:ea typeface="Calibri" pitchFamily="34" charset="-122"/>
                 <a:cs typeface="Calibri" pitchFamily="34" charset="-120"/>
               </a:rPr>
-              <a:t>Metal is about equal to dielectric in the noiseless sim:  </a:t>
+              <a:t>Metal and dielectric localize equivalently in the noiseless sim:  </a:t>
             </a:r>
             <a:pPr indent="0" marL="0">
               <a:buNone/>
@@ -3241,7 +3241,7 @@
                 <a:ea typeface="Calibri" pitchFamily="34" charset="-122"/>
                 <a:cs typeface="Calibri" pitchFamily="34" charset="-120"/>
               </a:rPr>
-              <a:t>a beet tumor localizes as well as metal, so realistic contrast is not the bottleneck here.</a:t>
+              <a:t>the realistic beet model produces enough differential signal for the CNN to localize as accurately as the metal target (3.6 vs 3.9 mm).</a:t>
             </a:r>
             <a:endParaRPr lang="en-US" sz="1400" dirty="0"/>
           </a:p>
@@ -4762,7 +4762,7 @@
                 <a:ea typeface="Cambria" pitchFamily="34" charset="-122"/>
                 <a:cs typeface="Cambria" pitchFamily="34" charset="-120"/>
               </a:rPr>
-              <a:t>The bench sees the same depth shape</a:t>
+              <a:t>Same pattern on measured data</a:t>
             </a:r>
             <a:endParaRPr lang="en-US" sz="2900" dirty="0"/>
           </a:p>
@@ -4801,7 +4801,7 @@
                 <a:ea typeface="Calibri" pitchFamily="34" charset="-122"/>
                 <a:cs typeface="Calibri" pitchFamily="34" charset="-120"/>
               </a:rPr>
-              <a:t>Measured tumor perturbation across 4 heights, independent of the simulation</a:t>
+              <a:t>Measured tumor perturbation across 4 tumor heights, independent of the simulation</a:t>
             </a:r>
             <a:endParaRPr lang="en-US" sz="1400" dirty="0"/>
           </a:p>
@@ -4898,7 +4898,7 @@
                 <a:ea typeface="Cambria" pitchFamily="34" charset="-122"/>
                 <a:cs typeface="Cambria" pitchFamily="34" charset="-120"/>
               </a:rPr>
-              <a:t>Same story on the bench</a:t>
+              <a:t>Measured, same trend</a:t>
             </a:r>
             <a:endParaRPr lang="en-US" sz="1600" dirty="0"/>
           </a:p>
@@ -4941,7 +4941,7 @@
                 <a:ea typeface="Calibri" pitchFamily="34" charset="-122"/>
                 <a:cs typeface="Calibri" pitchFamily="34" charset="-120"/>
               </a:rPr>
-              <a:t>4 measured tumor heights (July10), a full 51-position grid at each.</a:t>
+              <a:t>4 measured tumor heights, a full 51-position grid at each.</a:t>
             </a:r>
             <a:endParaRPr lang="en-US" sz="1200" dirty="0"/>
           </a:p>
@@ -4962,7 +4962,7 @@
                 <a:ea typeface="Calibri" pitchFamily="34" charset="-122"/>
                 <a:cs typeface="Calibri" pitchFamily="34" charset="-120"/>
               </a:rPr>
-              <a:t>Mean |dS| peaks at +15 mm, right at the radiating patch, exactly like the sim.</a:t>
+              <a:t>Mean |dS| peaks at +15 mm, at the radiating patch, consistent with the simulation.</a:t>
             </a:r>
             <a:endParaRPr lang="en-US" sz="1200" dirty="0"/>
           </a:p>
@@ -4983,7 +4983,7 @@
                 <a:ea typeface="Calibri" pitchFamily="34" charset="-122"/>
                 <a:cs typeface="Calibri" pitchFamily="34" charset="-120"/>
               </a:rPr>
-              <a:t>Falls off both ways; the bench and the simulation agree on where the signal lives.</a:t>
+              <a:t>The perturbation falls off with distance in both directions.</a:t>
             </a:r>
             <a:endParaRPr lang="en-US" sz="1200" dirty="0"/>
           </a:p>
@@ -5004,7 +5004,7 @@
                 <a:ea typeface="Calibri" pitchFamily="34" charset="-122"/>
                 <a:cs typeface="Calibri" pitchFamily="34" charset="-120"/>
               </a:rPr>
-              <a:t>Depths are port-relative; the +25 mm session was mislabeled '2.5 cm below' in the README.</a:t>
+              <a:t>Measurement and simulation agree on which depths carry the strongest signal.</a:t>
             </a:r>
             <a:endParaRPr lang="en-US" sz="1200" dirty="0"/>
           </a:p>
